--- a/parking/Парковка_Нахимова_20.pptx
+++ b/parking/Парковка_Нахимова_20.pptx
@@ -16,9 +16,10 @@
     <p:sldId id="264" r:id="rId10"/>
     <p:sldId id="265" r:id="rId11"/>
     <p:sldId id="266" r:id="rId12"/>
+    <p:sldId id="267" r:id="rId13"/>
   </p:sldIdLst>
   <p:notesMasterIdLst>
-    <p:notesMasterId r:id="rId13"/>
+    <p:notesMasterId r:id="rId14"/>
   </p:notesMasterIdLst>
   <p:sldSz cx="12192000" cy="6858000"/>
   <p:notesSz cx="6858000" cy="12192000"/>
@@ -712,6 +713,94 @@
             <a:fld id="{F7021451-1387-4CA6-816F-3879F97B5CBC}" type="slidenum">
               <a:rPr lang="en-US"/>
               <a:t>11</a:t>
+            </a:fld>
+            <a:endParaRPr lang="en-US"/>
+          </a:p>
+        </p:txBody>
+      </p:sp>
+    </p:spTree>
+    <p:extLst>
+      <p:ext uri="{BB962C8B-B14F-4D97-AF65-F5344CB8AC3E}">
+        <p14:creationId xmlns:p14="http://schemas.microsoft.com/office/powerpoint/2010/main" val="1024086991"/>
+      </p:ext>
+    </p:extLst>
+  </p:cSld>
+  <p:clrMapOvr>
+    <a:masterClrMapping/>
+  </p:clrMapOvr>
+</p:notes>
+</file>
+
+<file path=ppt/notesSlides/notesSlide12.xml><?xml version="1.0" encoding="utf-8"?>
+<p:notes xmlns:a="http://schemas.openxmlformats.org/drawingml/2006/main" xmlns:r="http://schemas.openxmlformats.org/officeDocument/2006/relationships" xmlns:p="http://schemas.openxmlformats.org/presentationml/2006/main">
+  <p:cSld>
+    <p:spTree>
+      <p:nvGrpSpPr>
+        <p:cNvPr id="1" name=""/>
+        <p:cNvGrpSpPr/>
+        <p:nvPr/>
+      </p:nvGrpSpPr>
+      <p:grpSpPr>
+        <a:xfrm>
+          <a:off x="0" y="0"/>
+          <a:ext cx="0" cy="0"/>
+          <a:chOff x="0" y="0"/>
+          <a:chExt cx="0" cy="0"/>
+        </a:xfrm>
+      </p:grpSpPr>
+      <p:sp>
+        <p:nvSpPr>
+          <p:cNvPr id="2" name="Slide Image Placeholder 1"/>
+          <p:cNvSpPr>
+            <a:spLocks noGrp="1" noRot="1" noChangeAspect="1"/>
+          </p:cNvSpPr>
+          <p:nvPr>
+            <p:ph type="sldImg"/>
+          </p:nvPr>
+        </p:nvSpPr>
+        <p:spPr/>
+      </p:sp>
+      <p:sp>
+        <p:nvSpPr>
+          <p:cNvPr id="3" name="Notes Placeholder 2"/>
+          <p:cNvSpPr>
+            <a:spLocks noGrp="1"/>
+          </p:cNvSpPr>
+          <p:nvPr>
+            <p:ph type="body" idx="1"/>
+          </p:nvPr>
+        </p:nvSpPr>
+        <p:spPr/>
+        <p:txBody>
+          <a:bodyPr/>
+          <a:lstStyle/>
+          <a:p>
+            <a:r>
+              <a:rPr lang="en-US" dirty="0"/>
+              <a:t/>
+            </a:r>
+            <a:endParaRPr lang="en-US" dirty="0"/>
+          </a:p>
+        </p:txBody>
+      </p:sp>
+      <p:sp>
+        <p:nvSpPr>
+          <p:cNvPr id="4" name="Slide Number Placeholder 3"/>
+          <p:cNvSpPr>
+            <a:spLocks noGrp="1"/>
+          </p:cNvSpPr>
+          <p:nvPr>
+            <p:ph type="sldNum" sz="quarter" idx="10"/>
+          </p:nvPr>
+        </p:nvSpPr>
+        <p:spPr/>
+        <p:txBody>
+          <a:bodyPr/>
+          <a:lstStyle/>
+          <a:p>
+            <a:fld id="{F7021451-1387-4CA6-816F-3879F97B5CBC}" type="slidenum">
+              <a:rPr lang="en-US"/>
+              <a:t>12</a:t>
             </a:fld>
             <a:endParaRPr lang="en-US"/>
           </a:p>
@@ -2696,7 +2785,7 @@
                 <a:ea typeface="Cambria" pitchFamily="34" charset="-122"/>
                 <a:cs typeface="Cambria" pitchFamily="34" charset="-120"/>
               </a:rPr>
-              <a:t>Сроки выполнения работ</a:t>
+              <a:t>Смета проекта</a:t>
             </a:r>
             <a:endParaRPr lang="en-US" sz="3400" dirty="0"/>
           </a:p>
@@ -2761,6 +2850,2249 @@
           </a:p>
         </p:txBody>
       </p:sp>
+      <p:graphicFrame>
+        <p:nvGraphicFramePr>
+          <p:cNvPr id="11" name="Table 0"/>
+          <p:cNvGraphicFramePr>
+            <a:graphicFrameLocks noGrp="1"/>
+          </p:cNvGraphicFramePr>
+          <p:nvPr>
+            <p:extLst>
+              <p:ext uri="{D42A27DB-BD31-4B8C-83A1-F6EECF244321}">
+                <p14:modId xmlns:p14="http://schemas.microsoft.com/office/powerpoint/2010/main" val="1579011935"/>
+              </p:ext>
+            </p:extLst>
+          </p:nvPr>
+        </p:nvGraphicFramePr>
+        <p:xfrm>
+          <a:off x="548640" y="1280160"/>
+          <a:ext cx="6766560" cy="914400"/>
+        </p:xfrm>
+        <a:graphic>
+          <a:graphicData uri="http://schemas.openxmlformats.org/drawingml/2006/table">
+            <a:tbl>
+              <a:tblPr/>
+              <a:tblGrid>
+                <a:gridCol w="5303520"/>
+                <a:gridCol w="1463040"/>
+              </a:tblGrid>
+              <a:tr h="374904">
+                <a:tc>
+                  <a:txBody>
+                    <a:bodyPr/>
+                    <a:lstStyle/>
+                    <a:p>
+                      <a:pPr indent="0" marL="0">
+                        <a:buNone/>
+                      </a:pPr>
+                      <a:r>
+                        <a:rPr lang="en-US" sz="1200" b="1" dirty="0">
+                          <a:solidFill>
+                            <a:srgbClr val="FFFFFF"/>
+                          </a:solidFill>
+                          <a:latin typeface="Calibri" pitchFamily="34" charset="0"/>
+                          <a:ea typeface="Calibri" pitchFamily="34" charset="-122"/>
+                          <a:cs typeface="Calibri" pitchFamily="34" charset="-120"/>
+                        </a:rPr>
+                        <a:t>Материалы и работы</a:t>
+                      </a:r>
+                      <a:endParaRPr lang="en-US" sz="1200" dirty="0">
+                        <a:latin typeface="Calibri" charset="0"/>
+                        <a:ea typeface="Calibri" charset="0"/>
+                        <a:cs typeface="Calibri" charset="0"/>
+                      </a:endParaRPr>
+                    </a:p>
+                  </a:txBody>
+                  <a:tcPr marL="91440" marR="91440" marT="45720" marB="45720" anchor="ctr">
+                    <a:lnL w="12700" cap="flat" cmpd="sng" algn="ctr">
+                      <a:solidFill>
+                        <a:srgbClr val="E5E7EB"/>
+                      </a:solidFill>
+                      <a:prstDash val="solid"/>
+                      <a:round/>
+                      <a:headEnd type="none" w="med" len="med"/>
+                      <a:tailEnd type="none" w="med" len="med"/>
+                    </a:lnL>
+                    <a:lnR w="12700" cap="flat" cmpd="sng" algn="ctr">
+                      <a:solidFill>
+                        <a:srgbClr val="E5E7EB"/>
+                      </a:solidFill>
+                      <a:prstDash val="solid"/>
+                      <a:round/>
+                      <a:headEnd type="none" w="med" len="med"/>
+                      <a:tailEnd type="none" w="med" len="med"/>
+                    </a:lnR>
+                    <a:lnT w="12700" cap="flat" cmpd="sng" algn="ctr">
+                      <a:solidFill>
+                        <a:srgbClr val="E5E7EB"/>
+                      </a:solidFill>
+                      <a:prstDash val="solid"/>
+                      <a:round/>
+                      <a:headEnd type="none" w="med" len="med"/>
+                      <a:tailEnd type="none" w="med" len="med"/>
+                    </a:lnT>
+                    <a:lnB w="12700" cap="flat" cmpd="sng" algn="ctr">
+                      <a:solidFill>
+                        <a:srgbClr val="E5E7EB"/>
+                      </a:solidFill>
+                      <a:prstDash val="solid"/>
+                      <a:round/>
+                      <a:headEnd type="none" w="med" len="med"/>
+                      <a:tailEnd type="none" w="med" len="med"/>
+                    </a:lnB>
+                    <a:solidFill>
+                      <a:srgbClr val="26282E"/>
+                    </a:solidFill>
+                  </a:tcPr>
+                </a:tc>
+                <a:tc>
+                  <a:txBody>
+                    <a:bodyPr/>
+                    <a:lstStyle/>
+                    <a:p>
+                      <a:pPr indent="0" marL="0">
+                        <a:buNone/>
+                      </a:pPr>
+                      <a:r>
+                        <a:rPr lang="en-US" sz="1200" b="1" dirty="0">
+                          <a:solidFill>
+                            <a:srgbClr val="FFFFFF"/>
+                          </a:solidFill>
+                          <a:latin typeface="Calibri" pitchFamily="34" charset="0"/>
+                          <a:ea typeface="Calibri" pitchFamily="34" charset="-122"/>
+                          <a:cs typeface="Calibri" pitchFamily="34" charset="-120"/>
+                        </a:rPr>
+                        <a:t>Сумма, ₽</a:t>
+                      </a:r>
+                      <a:endParaRPr lang="en-US" sz="1200" dirty="0">
+                        <a:latin typeface="Calibri" charset="0"/>
+                        <a:ea typeface="Calibri" charset="0"/>
+                        <a:cs typeface="Calibri" charset="0"/>
+                      </a:endParaRPr>
+                    </a:p>
+                  </a:txBody>
+                  <a:tcPr marL="91440" marR="91440" marT="45720" marB="45720" anchor="ctr">
+                    <a:lnL w="12700" cap="flat" cmpd="sng" algn="ctr">
+                      <a:solidFill>
+                        <a:srgbClr val="E5E7EB"/>
+                      </a:solidFill>
+                      <a:prstDash val="solid"/>
+                      <a:round/>
+                      <a:headEnd type="none" w="med" len="med"/>
+                      <a:tailEnd type="none" w="med" len="med"/>
+                    </a:lnL>
+                    <a:lnR w="12700" cap="flat" cmpd="sng" algn="ctr">
+                      <a:solidFill>
+                        <a:srgbClr val="E5E7EB"/>
+                      </a:solidFill>
+                      <a:prstDash val="solid"/>
+                      <a:round/>
+                      <a:headEnd type="none" w="med" len="med"/>
+                      <a:tailEnd type="none" w="med" len="med"/>
+                    </a:lnR>
+                    <a:lnT w="12700" cap="flat" cmpd="sng" algn="ctr">
+                      <a:solidFill>
+                        <a:srgbClr val="E5E7EB"/>
+                      </a:solidFill>
+                      <a:prstDash val="solid"/>
+                      <a:round/>
+                      <a:headEnd type="none" w="med" len="med"/>
+                      <a:tailEnd type="none" w="med" len="med"/>
+                    </a:lnT>
+                    <a:lnB w="12700" cap="flat" cmpd="sng" algn="ctr">
+                      <a:solidFill>
+                        <a:srgbClr val="E5E7EB"/>
+                      </a:solidFill>
+                      <a:prstDash val="solid"/>
+                      <a:round/>
+                      <a:headEnd type="none" w="med" len="med"/>
+                      <a:tailEnd type="none" w="med" len="med"/>
+                    </a:lnB>
+                    <a:solidFill>
+                      <a:srgbClr val="26282E"/>
+                    </a:solidFill>
+                  </a:tcPr>
+                </a:tc>
+              </a:tr>
+              <a:tr h="374904">
+                <a:tc>
+                  <a:txBody>
+                    <a:bodyPr/>
+                    <a:lstStyle/>
+                    <a:p>
+                      <a:pPr indent="0" marL="0">
+                        <a:buNone/>
+                      </a:pPr>
+                      <a:r>
+                        <a:rPr lang="en-US" sz="1200" dirty="0">
+                          <a:solidFill>
+                            <a:srgbClr val="1F2937"/>
+                          </a:solidFill>
+                          <a:latin typeface="Calibri" pitchFamily="34" charset="0"/>
+                          <a:ea typeface="Calibri" pitchFamily="34" charset="-122"/>
+                          <a:cs typeface="Calibri" pitchFamily="34" charset="-120"/>
+                        </a:rPr>
+                        <a:t>Демонтаж озеленения, корчевание 6 пней, срезка грунта 90 м³</a:t>
+                      </a:r>
+                      <a:endParaRPr lang="en-US" sz="1200" dirty="0">
+                        <a:latin typeface="Calibri" charset="0"/>
+                        <a:ea typeface="Calibri" charset="0"/>
+                        <a:cs typeface="Calibri" charset="0"/>
+                      </a:endParaRPr>
+                    </a:p>
+                  </a:txBody>
+                  <a:tcPr marL="91440" marR="91440" marT="45720" marB="45720" anchor="ctr">
+                    <a:lnL w="12700" cap="flat" cmpd="sng" algn="ctr">
+                      <a:solidFill>
+                        <a:srgbClr val="E5E7EB"/>
+                      </a:solidFill>
+                      <a:prstDash val="solid"/>
+                      <a:round/>
+                      <a:headEnd type="none" w="med" len="med"/>
+                      <a:tailEnd type="none" w="med" len="med"/>
+                    </a:lnL>
+                    <a:lnR w="12700" cap="flat" cmpd="sng" algn="ctr">
+                      <a:solidFill>
+                        <a:srgbClr val="E5E7EB"/>
+                      </a:solidFill>
+                      <a:prstDash val="solid"/>
+                      <a:round/>
+                      <a:headEnd type="none" w="med" len="med"/>
+                      <a:tailEnd type="none" w="med" len="med"/>
+                    </a:lnR>
+                    <a:lnT w="12700" cap="flat" cmpd="sng" algn="ctr">
+                      <a:solidFill>
+                        <a:srgbClr val="E5E7EB"/>
+                      </a:solidFill>
+                      <a:prstDash val="solid"/>
+                      <a:round/>
+                      <a:headEnd type="none" w="med" len="med"/>
+                      <a:tailEnd type="none" w="med" len="med"/>
+                    </a:lnT>
+                    <a:lnB w="12700" cap="flat" cmpd="sng" algn="ctr">
+                      <a:solidFill>
+                        <a:srgbClr val="E5E7EB"/>
+                      </a:solidFill>
+                      <a:prstDash val="solid"/>
+                      <a:round/>
+                      <a:headEnd type="none" w="med" len="med"/>
+                      <a:tailEnd type="none" w="med" len="med"/>
+                    </a:lnB>
+                  </a:tcPr>
+                </a:tc>
+                <a:tc>
+                  <a:txBody>
+                    <a:bodyPr/>
+                    <a:lstStyle/>
+                    <a:p>
+                      <a:pPr indent="0" marL="0">
+                        <a:buNone/>
+                      </a:pPr>
+                      <a:r>
+                        <a:rPr lang="en-US" sz="1200" dirty="0">
+                          <a:solidFill>
+                            <a:srgbClr val="1F2937"/>
+                          </a:solidFill>
+                          <a:latin typeface="Calibri" pitchFamily="34" charset="0"/>
+                          <a:ea typeface="Calibri" pitchFamily="34" charset="-122"/>
+                          <a:cs typeface="Calibri" pitchFamily="34" charset="-120"/>
+                        </a:rPr>
+                        <a:t>133 500</a:t>
+                      </a:r>
+                      <a:endParaRPr lang="en-US" sz="1200" dirty="0">
+                        <a:latin typeface="Calibri" charset="0"/>
+                        <a:ea typeface="Calibri" charset="0"/>
+                        <a:cs typeface="Calibri" charset="0"/>
+                      </a:endParaRPr>
+                    </a:p>
+                  </a:txBody>
+                  <a:tcPr marL="91440" marR="91440" marT="45720" marB="45720" anchor="ctr">
+                    <a:lnL w="12700" cap="flat" cmpd="sng" algn="ctr">
+                      <a:solidFill>
+                        <a:srgbClr val="E5E7EB"/>
+                      </a:solidFill>
+                      <a:prstDash val="solid"/>
+                      <a:round/>
+                      <a:headEnd type="none" w="med" len="med"/>
+                      <a:tailEnd type="none" w="med" len="med"/>
+                    </a:lnL>
+                    <a:lnR w="12700" cap="flat" cmpd="sng" algn="ctr">
+                      <a:solidFill>
+                        <a:srgbClr val="E5E7EB"/>
+                      </a:solidFill>
+                      <a:prstDash val="solid"/>
+                      <a:round/>
+                      <a:headEnd type="none" w="med" len="med"/>
+                      <a:tailEnd type="none" w="med" len="med"/>
+                    </a:lnR>
+                    <a:lnT w="12700" cap="flat" cmpd="sng" algn="ctr">
+                      <a:solidFill>
+                        <a:srgbClr val="E5E7EB"/>
+                      </a:solidFill>
+                      <a:prstDash val="solid"/>
+                      <a:round/>
+                      <a:headEnd type="none" w="med" len="med"/>
+                      <a:tailEnd type="none" w="med" len="med"/>
+                    </a:lnT>
+                    <a:lnB w="12700" cap="flat" cmpd="sng" algn="ctr">
+                      <a:solidFill>
+                        <a:srgbClr val="E5E7EB"/>
+                      </a:solidFill>
+                      <a:prstDash val="solid"/>
+                      <a:round/>
+                      <a:headEnd type="none" w="med" len="med"/>
+                      <a:tailEnd type="none" w="med" len="med"/>
+                    </a:lnB>
+                  </a:tcPr>
+                </a:tc>
+              </a:tr>
+              <a:tr h="374904">
+                <a:tc>
+                  <a:txBody>
+                    <a:bodyPr/>
+                    <a:lstStyle/>
+                    <a:p>
+                      <a:pPr indent="0" marL="0">
+                        <a:buNone/>
+                      </a:pPr>
+                      <a:r>
+                        <a:rPr lang="en-US" sz="1200" dirty="0">
+                          <a:solidFill>
+                            <a:srgbClr val="1F2937"/>
+                          </a:solidFill>
+                          <a:latin typeface="Calibri" pitchFamily="34" charset="0"/>
+                          <a:ea typeface="Calibri" pitchFamily="34" charset="-122"/>
+                          <a:cs typeface="Calibri" pitchFamily="34" charset="-120"/>
+                        </a:rPr>
+                        <a:t>Демонтаж бордюра и шлагбаума</a:t>
+                      </a:r>
+                      <a:endParaRPr lang="en-US" sz="1200" dirty="0">
+                        <a:latin typeface="Calibri" charset="0"/>
+                        <a:ea typeface="Calibri" charset="0"/>
+                        <a:cs typeface="Calibri" charset="0"/>
+                      </a:endParaRPr>
+                    </a:p>
+                  </a:txBody>
+                  <a:tcPr marL="91440" marR="91440" marT="45720" marB="45720" anchor="ctr">
+                    <a:lnL w="12700" cap="flat" cmpd="sng" algn="ctr">
+                      <a:solidFill>
+                        <a:srgbClr val="E5E7EB"/>
+                      </a:solidFill>
+                      <a:prstDash val="solid"/>
+                      <a:round/>
+                      <a:headEnd type="none" w="med" len="med"/>
+                      <a:tailEnd type="none" w="med" len="med"/>
+                    </a:lnL>
+                    <a:lnR w="12700" cap="flat" cmpd="sng" algn="ctr">
+                      <a:solidFill>
+                        <a:srgbClr val="E5E7EB"/>
+                      </a:solidFill>
+                      <a:prstDash val="solid"/>
+                      <a:round/>
+                      <a:headEnd type="none" w="med" len="med"/>
+                      <a:tailEnd type="none" w="med" len="med"/>
+                    </a:lnR>
+                    <a:lnT w="12700" cap="flat" cmpd="sng" algn="ctr">
+                      <a:solidFill>
+                        <a:srgbClr val="E5E7EB"/>
+                      </a:solidFill>
+                      <a:prstDash val="solid"/>
+                      <a:round/>
+                      <a:headEnd type="none" w="med" len="med"/>
+                      <a:tailEnd type="none" w="med" len="med"/>
+                    </a:lnT>
+                    <a:lnB w="12700" cap="flat" cmpd="sng" algn="ctr">
+                      <a:solidFill>
+                        <a:srgbClr val="E5E7EB"/>
+                      </a:solidFill>
+                      <a:prstDash val="solid"/>
+                      <a:round/>
+                      <a:headEnd type="none" w="med" len="med"/>
+                      <a:tailEnd type="none" w="med" len="med"/>
+                    </a:lnB>
+                  </a:tcPr>
+                </a:tc>
+                <a:tc>
+                  <a:txBody>
+                    <a:bodyPr/>
+                    <a:lstStyle/>
+                    <a:p>
+                      <a:pPr indent="0" marL="0">
+                        <a:buNone/>
+                      </a:pPr>
+                      <a:r>
+                        <a:rPr lang="en-US" sz="1200" dirty="0">
+                          <a:solidFill>
+                            <a:srgbClr val="1F2937"/>
+                          </a:solidFill>
+                          <a:latin typeface="Calibri" pitchFamily="34" charset="0"/>
+                          <a:ea typeface="Calibri" pitchFamily="34" charset="-122"/>
+                          <a:cs typeface="Calibri" pitchFamily="34" charset="-120"/>
+                        </a:rPr>
+                        <a:t>45 000</a:t>
+                      </a:r>
+                      <a:endParaRPr lang="en-US" sz="1200" dirty="0">
+                        <a:latin typeface="Calibri" charset="0"/>
+                        <a:ea typeface="Calibri" charset="0"/>
+                        <a:cs typeface="Calibri" charset="0"/>
+                      </a:endParaRPr>
+                    </a:p>
+                  </a:txBody>
+                  <a:tcPr marL="91440" marR="91440" marT="45720" marB="45720" anchor="ctr">
+                    <a:lnL w="12700" cap="flat" cmpd="sng" algn="ctr">
+                      <a:solidFill>
+                        <a:srgbClr val="E5E7EB"/>
+                      </a:solidFill>
+                      <a:prstDash val="solid"/>
+                      <a:round/>
+                      <a:headEnd type="none" w="med" len="med"/>
+                      <a:tailEnd type="none" w="med" len="med"/>
+                    </a:lnL>
+                    <a:lnR w="12700" cap="flat" cmpd="sng" algn="ctr">
+                      <a:solidFill>
+                        <a:srgbClr val="E5E7EB"/>
+                      </a:solidFill>
+                      <a:prstDash val="solid"/>
+                      <a:round/>
+                      <a:headEnd type="none" w="med" len="med"/>
+                      <a:tailEnd type="none" w="med" len="med"/>
+                    </a:lnR>
+                    <a:lnT w="12700" cap="flat" cmpd="sng" algn="ctr">
+                      <a:solidFill>
+                        <a:srgbClr val="E5E7EB"/>
+                      </a:solidFill>
+                      <a:prstDash val="solid"/>
+                      <a:round/>
+                      <a:headEnd type="none" w="med" len="med"/>
+                      <a:tailEnd type="none" w="med" len="med"/>
+                    </a:lnT>
+                    <a:lnB w="12700" cap="flat" cmpd="sng" algn="ctr">
+                      <a:solidFill>
+                        <a:srgbClr val="E5E7EB"/>
+                      </a:solidFill>
+                      <a:prstDash val="solid"/>
+                      <a:round/>
+                      <a:headEnd type="none" w="med" len="med"/>
+                      <a:tailEnd type="none" w="med" len="med"/>
+                    </a:lnB>
+                  </a:tcPr>
+                </a:tc>
+              </a:tr>
+              <a:tr h="374904">
+                <a:tc>
+                  <a:txBody>
+                    <a:bodyPr/>
+                    <a:lstStyle/>
+                    <a:p>
+                      <a:pPr indent="0" marL="0">
+                        <a:buNone/>
+                      </a:pPr>
+                      <a:r>
+                        <a:rPr lang="en-US" sz="1200" dirty="0">
+                          <a:solidFill>
+                            <a:srgbClr val="1F2937"/>
+                          </a:solidFill>
+                          <a:latin typeface="Calibri" pitchFamily="34" charset="0"/>
+                          <a:ea typeface="Calibri" pitchFamily="34" charset="-122"/>
+                          <a:cs typeface="Calibri" pitchFamily="34" charset="-120"/>
+                        </a:rPr>
+                        <a:t>Геотекстиль 450 м², песок 90 м³, щебень 113 м³</a:t>
+                      </a:r>
+                      <a:endParaRPr lang="en-US" sz="1200" dirty="0">
+                        <a:latin typeface="Calibri" charset="0"/>
+                        <a:ea typeface="Calibri" charset="0"/>
+                        <a:cs typeface="Calibri" charset="0"/>
+                      </a:endParaRPr>
+                    </a:p>
+                  </a:txBody>
+                  <a:tcPr marL="91440" marR="91440" marT="45720" marB="45720" anchor="ctr">
+                    <a:lnL w="12700" cap="flat" cmpd="sng" algn="ctr">
+                      <a:solidFill>
+                        <a:srgbClr val="E5E7EB"/>
+                      </a:solidFill>
+                      <a:prstDash val="solid"/>
+                      <a:round/>
+                      <a:headEnd type="none" w="med" len="med"/>
+                      <a:tailEnd type="none" w="med" len="med"/>
+                    </a:lnL>
+                    <a:lnR w="12700" cap="flat" cmpd="sng" algn="ctr">
+                      <a:solidFill>
+                        <a:srgbClr val="E5E7EB"/>
+                      </a:solidFill>
+                      <a:prstDash val="solid"/>
+                      <a:round/>
+                      <a:headEnd type="none" w="med" len="med"/>
+                      <a:tailEnd type="none" w="med" len="med"/>
+                    </a:lnR>
+                    <a:lnT w="12700" cap="flat" cmpd="sng" algn="ctr">
+                      <a:solidFill>
+                        <a:srgbClr val="E5E7EB"/>
+                      </a:solidFill>
+                      <a:prstDash val="solid"/>
+                      <a:round/>
+                      <a:headEnd type="none" w="med" len="med"/>
+                      <a:tailEnd type="none" w="med" len="med"/>
+                    </a:lnT>
+                    <a:lnB w="12700" cap="flat" cmpd="sng" algn="ctr">
+                      <a:solidFill>
+                        <a:srgbClr val="E5E7EB"/>
+                      </a:solidFill>
+                      <a:prstDash val="solid"/>
+                      <a:round/>
+                      <a:headEnd type="none" w="med" len="med"/>
+                      <a:tailEnd type="none" w="med" len="med"/>
+                    </a:lnB>
+                  </a:tcPr>
+                </a:tc>
+                <a:tc>
+                  <a:txBody>
+                    <a:bodyPr/>
+                    <a:lstStyle/>
+                    <a:p>
+                      <a:pPr indent="0" marL="0">
+                        <a:buNone/>
+                      </a:pPr>
+                      <a:r>
+                        <a:rPr lang="en-US" sz="1200" dirty="0">
+                          <a:solidFill>
+                            <a:srgbClr val="1F2937"/>
+                          </a:solidFill>
+                          <a:latin typeface="Calibri" pitchFamily="34" charset="0"/>
+                          <a:ea typeface="Calibri" pitchFamily="34" charset="-122"/>
+                          <a:cs typeface="Calibri" pitchFamily="34" charset="-120"/>
+                        </a:rPr>
+                        <a:t>459 000</a:t>
+                      </a:r>
+                      <a:endParaRPr lang="en-US" sz="1200" dirty="0">
+                        <a:latin typeface="Calibri" charset="0"/>
+                        <a:ea typeface="Calibri" charset="0"/>
+                        <a:cs typeface="Calibri" charset="0"/>
+                      </a:endParaRPr>
+                    </a:p>
+                  </a:txBody>
+                  <a:tcPr marL="91440" marR="91440" marT="45720" marB="45720" anchor="ctr">
+                    <a:lnL w="12700" cap="flat" cmpd="sng" algn="ctr">
+                      <a:solidFill>
+                        <a:srgbClr val="E5E7EB"/>
+                      </a:solidFill>
+                      <a:prstDash val="solid"/>
+                      <a:round/>
+                      <a:headEnd type="none" w="med" len="med"/>
+                      <a:tailEnd type="none" w="med" len="med"/>
+                    </a:lnL>
+                    <a:lnR w="12700" cap="flat" cmpd="sng" algn="ctr">
+                      <a:solidFill>
+                        <a:srgbClr val="E5E7EB"/>
+                      </a:solidFill>
+                      <a:prstDash val="solid"/>
+                      <a:round/>
+                      <a:headEnd type="none" w="med" len="med"/>
+                      <a:tailEnd type="none" w="med" len="med"/>
+                    </a:lnR>
+                    <a:lnT w="12700" cap="flat" cmpd="sng" algn="ctr">
+                      <a:solidFill>
+                        <a:srgbClr val="E5E7EB"/>
+                      </a:solidFill>
+                      <a:prstDash val="solid"/>
+                      <a:round/>
+                      <a:headEnd type="none" w="med" len="med"/>
+                      <a:tailEnd type="none" w="med" len="med"/>
+                    </a:lnT>
+                    <a:lnB w="12700" cap="flat" cmpd="sng" algn="ctr">
+                      <a:solidFill>
+                        <a:srgbClr val="E5E7EB"/>
+                      </a:solidFill>
+                      <a:prstDash val="solid"/>
+                      <a:round/>
+                      <a:headEnd type="none" w="med" len="med"/>
+                      <a:tailEnd type="none" w="med" len="med"/>
+                    </a:lnB>
+                  </a:tcPr>
+                </a:tc>
+              </a:tr>
+              <a:tr h="374904">
+                <a:tc>
+                  <a:txBody>
+                    <a:bodyPr/>
+                    <a:lstStyle/>
+                    <a:p>
+                      <a:pPr indent="0" marL="0">
+                        <a:buNone/>
+                      </a:pPr>
+                      <a:r>
+                        <a:rPr lang="en-US" sz="1200" dirty="0">
+                          <a:solidFill>
+                            <a:srgbClr val="1F2937"/>
+                          </a:solidFill>
+                          <a:latin typeface="Calibri" pitchFamily="34" charset="0"/>
+                          <a:ea typeface="Calibri" pitchFamily="34" charset="-122"/>
+                          <a:cs typeface="Calibri" pitchFamily="34" charset="-120"/>
+                        </a:rPr>
+                        <a:t>Асфальтобетон в 2 слоя, 450 м²</a:t>
+                      </a:r>
+                      <a:endParaRPr lang="en-US" sz="1200" dirty="0">
+                        <a:latin typeface="Calibri" charset="0"/>
+                        <a:ea typeface="Calibri" charset="0"/>
+                        <a:cs typeface="Calibri" charset="0"/>
+                      </a:endParaRPr>
+                    </a:p>
+                  </a:txBody>
+                  <a:tcPr marL="91440" marR="91440" marT="45720" marB="45720" anchor="ctr">
+                    <a:lnL w="12700" cap="flat" cmpd="sng" algn="ctr">
+                      <a:solidFill>
+                        <a:srgbClr val="E5E7EB"/>
+                      </a:solidFill>
+                      <a:prstDash val="solid"/>
+                      <a:round/>
+                      <a:headEnd type="none" w="med" len="med"/>
+                      <a:tailEnd type="none" w="med" len="med"/>
+                    </a:lnL>
+                    <a:lnR w="12700" cap="flat" cmpd="sng" algn="ctr">
+                      <a:solidFill>
+                        <a:srgbClr val="E5E7EB"/>
+                      </a:solidFill>
+                      <a:prstDash val="solid"/>
+                      <a:round/>
+                      <a:headEnd type="none" w="med" len="med"/>
+                      <a:tailEnd type="none" w="med" len="med"/>
+                    </a:lnR>
+                    <a:lnT w="12700" cap="flat" cmpd="sng" algn="ctr">
+                      <a:solidFill>
+                        <a:srgbClr val="E5E7EB"/>
+                      </a:solidFill>
+                      <a:prstDash val="solid"/>
+                      <a:round/>
+                      <a:headEnd type="none" w="med" len="med"/>
+                      <a:tailEnd type="none" w="med" len="med"/>
+                    </a:lnT>
+                    <a:lnB w="12700" cap="flat" cmpd="sng" algn="ctr">
+                      <a:solidFill>
+                        <a:srgbClr val="E5E7EB"/>
+                      </a:solidFill>
+                      <a:prstDash val="solid"/>
+                      <a:round/>
+                      <a:headEnd type="none" w="med" len="med"/>
+                      <a:tailEnd type="none" w="med" len="med"/>
+                    </a:lnB>
+                  </a:tcPr>
+                </a:tc>
+                <a:tc>
+                  <a:txBody>
+                    <a:bodyPr/>
+                    <a:lstStyle/>
+                    <a:p>
+                      <a:pPr indent="0" marL="0">
+                        <a:buNone/>
+                      </a:pPr>
+                      <a:r>
+                        <a:rPr lang="en-US" sz="1200" dirty="0">
+                          <a:solidFill>
+                            <a:srgbClr val="1F2937"/>
+                          </a:solidFill>
+                          <a:latin typeface="Calibri" pitchFamily="34" charset="0"/>
+                          <a:ea typeface="Calibri" pitchFamily="34" charset="-122"/>
+                          <a:cs typeface="Calibri" pitchFamily="34" charset="-120"/>
+                        </a:rPr>
+                        <a:t>562 500</a:t>
+                      </a:r>
+                      <a:endParaRPr lang="en-US" sz="1200" dirty="0">
+                        <a:latin typeface="Calibri" charset="0"/>
+                        <a:ea typeface="Calibri" charset="0"/>
+                        <a:cs typeface="Calibri" charset="0"/>
+                      </a:endParaRPr>
+                    </a:p>
+                  </a:txBody>
+                  <a:tcPr marL="91440" marR="91440" marT="45720" marB="45720" anchor="ctr">
+                    <a:lnL w="12700" cap="flat" cmpd="sng" algn="ctr">
+                      <a:solidFill>
+                        <a:srgbClr val="E5E7EB"/>
+                      </a:solidFill>
+                      <a:prstDash val="solid"/>
+                      <a:round/>
+                      <a:headEnd type="none" w="med" len="med"/>
+                      <a:tailEnd type="none" w="med" len="med"/>
+                    </a:lnL>
+                    <a:lnR w="12700" cap="flat" cmpd="sng" algn="ctr">
+                      <a:solidFill>
+                        <a:srgbClr val="E5E7EB"/>
+                      </a:solidFill>
+                      <a:prstDash val="solid"/>
+                      <a:round/>
+                      <a:headEnd type="none" w="med" len="med"/>
+                      <a:tailEnd type="none" w="med" len="med"/>
+                    </a:lnR>
+                    <a:lnT w="12700" cap="flat" cmpd="sng" algn="ctr">
+                      <a:solidFill>
+                        <a:srgbClr val="E5E7EB"/>
+                      </a:solidFill>
+                      <a:prstDash val="solid"/>
+                      <a:round/>
+                      <a:headEnd type="none" w="med" len="med"/>
+                      <a:tailEnd type="none" w="med" len="med"/>
+                    </a:lnT>
+                    <a:lnB w="12700" cap="flat" cmpd="sng" algn="ctr">
+                      <a:solidFill>
+                        <a:srgbClr val="E5E7EB"/>
+                      </a:solidFill>
+                      <a:prstDash val="solid"/>
+                      <a:round/>
+                      <a:headEnd type="none" w="med" len="med"/>
+                      <a:tailEnd type="none" w="med" len="med"/>
+                    </a:lnB>
+                  </a:tcPr>
+                </a:tc>
+              </a:tr>
+              <a:tr h="374904">
+                <a:tc>
+                  <a:txBody>
+                    <a:bodyPr/>
+                    <a:lstStyle/>
+                    <a:p>
+                      <a:pPr indent="0" marL="0">
+                        <a:buNone/>
+                      </a:pPr>
+                      <a:r>
+                        <a:rPr lang="en-US" sz="1200" dirty="0">
+                          <a:solidFill>
+                            <a:srgbClr val="1F2937"/>
+                          </a:solidFill>
+                          <a:latin typeface="Calibri" pitchFamily="34" charset="0"/>
+                          <a:ea typeface="Calibri" pitchFamily="34" charset="-122"/>
+                          <a:cs typeface="Calibri" pitchFamily="34" charset="-120"/>
+                        </a:rPr>
+                        <a:t>Бордюр БР 100.30.15 с установкой, 140 м</a:t>
+                      </a:r>
+                      <a:endParaRPr lang="en-US" sz="1200" dirty="0">
+                        <a:latin typeface="Calibri" charset="0"/>
+                        <a:ea typeface="Calibri" charset="0"/>
+                        <a:cs typeface="Calibri" charset="0"/>
+                      </a:endParaRPr>
+                    </a:p>
+                  </a:txBody>
+                  <a:tcPr marL="91440" marR="91440" marT="45720" marB="45720" anchor="ctr">
+                    <a:lnL w="12700" cap="flat" cmpd="sng" algn="ctr">
+                      <a:solidFill>
+                        <a:srgbClr val="E5E7EB"/>
+                      </a:solidFill>
+                      <a:prstDash val="solid"/>
+                      <a:round/>
+                      <a:headEnd type="none" w="med" len="med"/>
+                      <a:tailEnd type="none" w="med" len="med"/>
+                    </a:lnL>
+                    <a:lnR w="12700" cap="flat" cmpd="sng" algn="ctr">
+                      <a:solidFill>
+                        <a:srgbClr val="E5E7EB"/>
+                      </a:solidFill>
+                      <a:prstDash val="solid"/>
+                      <a:round/>
+                      <a:headEnd type="none" w="med" len="med"/>
+                      <a:tailEnd type="none" w="med" len="med"/>
+                    </a:lnR>
+                    <a:lnT w="12700" cap="flat" cmpd="sng" algn="ctr">
+                      <a:solidFill>
+                        <a:srgbClr val="E5E7EB"/>
+                      </a:solidFill>
+                      <a:prstDash val="solid"/>
+                      <a:round/>
+                      <a:headEnd type="none" w="med" len="med"/>
+                      <a:tailEnd type="none" w="med" len="med"/>
+                    </a:lnT>
+                    <a:lnB w="12700" cap="flat" cmpd="sng" algn="ctr">
+                      <a:solidFill>
+                        <a:srgbClr val="E5E7EB"/>
+                      </a:solidFill>
+                      <a:prstDash val="solid"/>
+                      <a:round/>
+                      <a:headEnd type="none" w="med" len="med"/>
+                      <a:tailEnd type="none" w="med" len="med"/>
+                    </a:lnB>
+                  </a:tcPr>
+                </a:tc>
+                <a:tc>
+                  <a:txBody>
+                    <a:bodyPr/>
+                    <a:lstStyle/>
+                    <a:p>
+                      <a:pPr indent="0" marL="0">
+                        <a:buNone/>
+                      </a:pPr>
+                      <a:r>
+                        <a:rPr lang="en-US" sz="1200" dirty="0">
+                          <a:solidFill>
+                            <a:srgbClr val="1F2937"/>
+                          </a:solidFill>
+                          <a:latin typeface="Calibri" pitchFamily="34" charset="0"/>
+                          <a:ea typeface="Calibri" pitchFamily="34" charset="-122"/>
+                          <a:cs typeface="Calibri" pitchFamily="34" charset="-120"/>
+                        </a:rPr>
+                        <a:t>182 000</a:t>
+                      </a:r>
+                      <a:endParaRPr lang="en-US" sz="1200" dirty="0">
+                        <a:latin typeface="Calibri" charset="0"/>
+                        <a:ea typeface="Calibri" charset="0"/>
+                        <a:cs typeface="Calibri" charset="0"/>
+                      </a:endParaRPr>
+                    </a:p>
+                  </a:txBody>
+                  <a:tcPr marL="91440" marR="91440" marT="45720" marB="45720" anchor="ctr">
+                    <a:lnL w="12700" cap="flat" cmpd="sng" algn="ctr">
+                      <a:solidFill>
+                        <a:srgbClr val="E5E7EB"/>
+                      </a:solidFill>
+                      <a:prstDash val="solid"/>
+                      <a:round/>
+                      <a:headEnd type="none" w="med" len="med"/>
+                      <a:tailEnd type="none" w="med" len="med"/>
+                    </a:lnL>
+                    <a:lnR w="12700" cap="flat" cmpd="sng" algn="ctr">
+                      <a:solidFill>
+                        <a:srgbClr val="E5E7EB"/>
+                      </a:solidFill>
+                      <a:prstDash val="solid"/>
+                      <a:round/>
+                      <a:headEnd type="none" w="med" len="med"/>
+                      <a:tailEnd type="none" w="med" len="med"/>
+                    </a:lnR>
+                    <a:lnT w="12700" cap="flat" cmpd="sng" algn="ctr">
+                      <a:solidFill>
+                        <a:srgbClr val="E5E7EB"/>
+                      </a:solidFill>
+                      <a:prstDash val="solid"/>
+                      <a:round/>
+                      <a:headEnd type="none" w="med" len="med"/>
+                      <a:tailEnd type="none" w="med" len="med"/>
+                    </a:lnT>
+                    <a:lnB w="12700" cap="flat" cmpd="sng" algn="ctr">
+                      <a:solidFill>
+                        <a:srgbClr val="E5E7EB"/>
+                      </a:solidFill>
+                      <a:prstDash val="solid"/>
+                      <a:round/>
+                      <a:headEnd type="none" w="med" len="med"/>
+                      <a:tailEnd type="none" w="med" len="med"/>
+                    </a:lnB>
+                  </a:tcPr>
+                </a:tc>
+              </a:tr>
+              <a:tr h="374904">
+                <a:tc>
+                  <a:txBody>
+                    <a:bodyPr/>
+                    <a:lstStyle/>
+                    <a:p>
+                      <a:pPr indent="0" marL="0">
+                        <a:buNone/>
+                      </a:pPr>
+                      <a:r>
+                        <a:rPr lang="en-US" sz="1200" dirty="0">
+                          <a:solidFill>
+                            <a:srgbClr val="1F2937"/>
+                          </a:solidFill>
+                          <a:latin typeface="Calibri" pitchFamily="34" charset="0"/>
+                          <a:ea typeface="Calibri" pitchFamily="34" charset="-122"/>
+                          <a:cs typeface="Calibri" pitchFamily="34" charset="-120"/>
+                        </a:rPr>
+                        <a:t>Водоотвод: лотки 30 м + дождеприёмник</a:t>
+                      </a:r>
+                      <a:endParaRPr lang="en-US" sz="1200" dirty="0">
+                        <a:latin typeface="Calibri" charset="0"/>
+                        <a:ea typeface="Calibri" charset="0"/>
+                        <a:cs typeface="Calibri" charset="0"/>
+                      </a:endParaRPr>
+                    </a:p>
+                  </a:txBody>
+                  <a:tcPr marL="91440" marR="91440" marT="45720" marB="45720" anchor="ctr">
+                    <a:lnL w="12700" cap="flat" cmpd="sng" algn="ctr">
+                      <a:solidFill>
+                        <a:srgbClr val="E5E7EB"/>
+                      </a:solidFill>
+                      <a:prstDash val="solid"/>
+                      <a:round/>
+                      <a:headEnd type="none" w="med" len="med"/>
+                      <a:tailEnd type="none" w="med" len="med"/>
+                    </a:lnL>
+                    <a:lnR w="12700" cap="flat" cmpd="sng" algn="ctr">
+                      <a:solidFill>
+                        <a:srgbClr val="E5E7EB"/>
+                      </a:solidFill>
+                      <a:prstDash val="solid"/>
+                      <a:round/>
+                      <a:headEnd type="none" w="med" len="med"/>
+                      <a:tailEnd type="none" w="med" len="med"/>
+                    </a:lnR>
+                    <a:lnT w="12700" cap="flat" cmpd="sng" algn="ctr">
+                      <a:solidFill>
+                        <a:srgbClr val="E5E7EB"/>
+                      </a:solidFill>
+                      <a:prstDash val="solid"/>
+                      <a:round/>
+                      <a:headEnd type="none" w="med" len="med"/>
+                      <a:tailEnd type="none" w="med" len="med"/>
+                    </a:lnT>
+                    <a:lnB w="12700" cap="flat" cmpd="sng" algn="ctr">
+                      <a:solidFill>
+                        <a:srgbClr val="E5E7EB"/>
+                      </a:solidFill>
+                      <a:prstDash val="solid"/>
+                      <a:round/>
+                      <a:headEnd type="none" w="med" len="med"/>
+                      <a:tailEnd type="none" w="med" len="med"/>
+                    </a:lnB>
+                  </a:tcPr>
+                </a:tc>
+                <a:tc>
+                  <a:txBody>
+                    <a:bodyPr/>
+                    <a:lstStyle/>
+                    <a:p>
+                      <a:pPr indent="0" marL="0">
+                        <a:buNone/>
+                      </a:pPr>
+                      <a:r>
+                        <a:rPr lang="en-US" sz="1200" dirty="0">
+                          <a:solidFill>
+                            <a:srgbClr val="1F2937"/>
+                          </a:solidFill>
+                          <a:latin typeface="Calibri" pitchFamily="34" charset="0"/>
+                          <a:ea typeface="Calibri" pitchFamily="34" charset="-122"/>
+                          <a:cs typeface="Calibri" pitchFamily="34" charset="-120"/>
+                        </a:rPr>
+                        <a:t>105 000</a:t>
+                      </a:r>
+                      <a:endParaRPr lang="en-US" sz="1200" dirty="0">
+                        <a:latin typeface="Calibri" charset="0"/>
+                        <a:ea typeface="Calibri" charset="0"/>
+                        <a:cs typeface="Calibri" charset="0"/>
+                      </a:endParaRPr>
+                    </a:p>
+                  </a:txBody>
+                  <a:tcPr marL="91440" marR="91440" marT="45720" marB="45720" anchor="ctr">
+                    <a:lnL w="12700" cap="flat" cmpd="sng" algn="ctr">
+                      <a:solidFill>
+                        <a:srgbClr val="E5E7EB"/>
+                      </a:solidFill>
+                      <a:prstDash val="solid"/>
+                      <a:round/>
+                      <a:headEnd type="none" w="med" len="med"/>
+                      <a:tailEnd type="none" w="med" len="med"/>
+                    </a:lnL>
+                    <a:lnR w="12700" cap="flat" cmpd="sng" algn="ctr">
+                      <a:solidFill>
+                        <a:srgbClr val="E5E7EB"/>
+                      </a:solidFill>
+                      <a:prstDash val="solid"/>
+                      <a:round/>
+                      <a:headEnd type="none" w="med" len="med"/>
+                      <a:tailEnd type="none" w="med" len="med"/>
+                    </a:lnR>
+                    <a:lnT w="12700" cap="flat" cmpd="sng" algn="ctr">
+                      <a:solidFill>
+                        <a:srgbClr val="E5E7EB"/>
+                      </a:solidFill>
+                      <a:prstDash val="solid"/>
+                      <a:round/>
+                      <a:headEnd type="none" w="med" len="med"/>
+                      <a:tailEnd type="none" w="med" len="med"/>
+                    </a:lnT>
+                    <a:lnB w="12700" cap="flat" cmpd="sng" algn="ctr">
+                      <a:solidFill>
+                        <a:srgbClr val="E5E7EB"/>
+                      </a:solidFill>
+                      <a:prstDash val="solid"/>
+                      <a:round/>
+                      <a:headEnd type="none" w="med" len="med"/>
+                      <a:tailEnd type="none" w="med" len="med"/>
+                    </a:lnB>
+                  </a:tcPr>
+                </a:tc>
+              </a:tr>
+              <a:tr h="374904">
+                <a:tc>
+                  <a:txBody>
+                    <a:bodyPr/>
+                    <a:lstStyle/>
+                    <a:p>
+                      <a:pPr indent="0" marL="0">
+                        <a:buNone/>
+                      </a:pPr>
+                      <a:r>
+                        <a:rPr lang="en-US" sz="1200" dirty="0">
+                          <a:solidFill>
+                            <a:srgbClr val="1F2937"/>
+                          </a:solidFill>
+                          <a:latin typeface="Calibri" pitchFamily="34" charset="0"/>
+                          <a:ea typeface="Calibri" pitchFamily="34" charset="-122"/>
+                          <a:cs typeface="Calibri" pitchFamily="34" charset="-120"/>
+                        </a:rPr>
+                        <a:t>Шлагбаум автомат. с GSM-модулем + монтаж</a:t>
+                      </a:r>
+                      <a:endParaRPr lang="en-US" sz="1200" dirty="0">
+                        <a:latin typeface="Calibri" charset="0"/>
+                        <a:ea typeface="Calibri" charset="0"/>
+                        <a:cs typeface="Calibri" charset="0"/>
+                      </a:endParaRPr>
+                    </a:p>
+                  </a:txBody>
+                  <a:tcPr marL="91440" marR="91440" marT="45720" marB="45720" anchor="ctr">
+                    <a:lnL w="12700" cap="flat" cmpd="sng" algn="ctr">
+                      <a:solidFill>
+                        <a:srgbClr val="E5E7EB"/>
+                      </a:solidFill>
+                      <a:prstDash val="solid"/>
+                      <a:round/>
+                      <a:headEnd type="none" w="med" len="med"/>
+                      <a:tailEnd type="none" w="med" len="med"/>
+                    </a:lnL>
+                    <a:lnR w="12700" cap="flat" cmpd="sng" algn="ctr">
+                      <a:solidFill>
+                        <a:srgbClr val="E5E7EB"/>
+                      </a:solidFill>
+                      <a:prstDash val="solid"/>
+                      <a:round/>
+                      <a:headEnd type="none" w="med" len="med"/>
+                      <a:tailEnd type="none" w="med" len="med"/>
+                    </a:lnR>
+                    <a:lnT w="12700" cap="flat" cmpd="sng" algn="ctr">
+                      <a:solidFill>
+                        <a:srgbClr val="E5E7EB"/>
+                      </a:solidFill>
+                      <a:prstDash val="solid"/>
+                      <a:round/>
+                      <a:headEnd type="none" w="med" len="med"/>
+                      <a:tailEnd type="none" w="med" len="med"/>
+                    </a:lnT>
+                    <a:lnB w="12700" cap="flat" cmpd="sng" algn="ctr">
+                      <a:solidFill>
+                        <a:srgbClr val="E5E7EB"/>
+                      </a:solidFill>
+                      <a:prstDash val="solid"/>
+                      <a:round/>
+                      <a:headEnd type="none" w="med" len="med"/>
+                      <a:tailEnd type="none" w="med" len="med"/>
+                    </a:lnB>
+                  </a:tcPr>
+                </a:tc>
+                <a:tc>
+                  <a:txBody>
+                    <a:bodyPr/>
+                    <a:lstStyle/>
+                    <a:p>
+                      <a:pPr indent="0" marL="0">
+                        <a:buNone/>
+                      </a:pPr>
+                      <a:r>
+                        <a:rPr lang="en-US" sz="1200" dirty="0">
+                          <a:solidFill>
+                            <a:srgbClr val="1F2937"/>
+                          </a:solidFill>
+                          <a:latin typeface="Calibri" pitchFamily="34" charset="0"/>
+                          <a:ea typeface="Calibri" pitchFamily="34" charset="-122"/>
+                          <a:cs typeface="Calibri" pitchFamily="34" charset="-120"/>
+                        </a:rPr>
+                        <a:t>245 000</a:t>
+                      </a:r>
+                      <a:endParaRPr lang="en-US" sz="1200" dirty="0">
+                        <a:latin typeface="Calibri" charset="0"/>
+                        <a:ea typeface="Calibri" charset="0"/>
+                        <a:cs typeface="Calibri" charset="0"/>
+                      </a:endParaRPr>
+                    </a:p>
+                  </a:txBody>
+                  <a:tcPr marL="91440" marR="91440" marT="45720" marB="45720" anchor="ctr">
+                    <a:lnL w="12700" cap="flat" cmpd="sng" algn="ctr">
+                      <a:solidFill>
+                        <a:srgbClr val="E5E7EB"/>
+                      </a:solidFill>
+                      <a:prstDash val="solid"/>
+                      <a:round/>
+                      <a:headEnd type="none" w="med" len="med"/>
+                      <a:tailEnd type="none" w="med" len="med"/>
+                    </a:lnL>
+                    <a:lnR w="12700" cap="flat" cmpd="sng" algn="ctr">
+                      <a:solidFill>
+                        <a:srgbClr val="E5E7EB"/>
+                      </a:solidFill>
+                      <a:prstDash val="solid"/>
+                      <a:round/>
+                      <a:headEnd type="none" w="med" len="med"/>
+                      <a:tailEnd type="none" w="med" len="med"/>
+                    </a:lnR>
+                    <a:lnT w="12700" cap="flat" cmpd="sng" algn="ctr">
+                      <a:solidFill>
+                        <a:srgbClr val="E5E7EB"/>
+                      </a:solidFill>
+                      <a:prstDash val="solid"/>
+                      <a:round/>
+                      <a:headEnd type="none" w="med" len="med"/>
+                      <a:tailEnd type="none" w="med" len="med"/>
+                    </a:lnT>
+                    <a:lnB w="12700" cap="flat" cmpd="sng" algn="ctr">
+                      <a:solidFill>
+                        <a:srgbClr val="E5E7EB"/>
+                      </a:solidFill>
+                      <a:prstDash val="solid"/>
+                      <a:round/>
+                      <a:headEnd type="none" w="med" len="med"/>
+                      <a:tailEnd type="none" w="med" len="med"/>
+                    </a:lnB>
+                  </a:tcPr>
+                </a:tc>
+              </a:tr>
+              <a:tr h="374904">
+                <a:tc>
+                  <a:txBody>
+                    <a:bodyPr/>
+                    <a:lstStyle/>
+                    <a:p>
+                      <a:pPr indent="0" marL="0">
+                        <a:buNone/>
+                      </a:pPr>
+                      <a:r>
+                        <a:rPr lang="en-US" sz="1200" dirty="0">
+                          <a:solidFill>
+                            <a:srgbClr val="1F2937"/>
+                          </a:solidFill>
+                          <a:latin typeface="Calibri" pitchFamily="34" charset="0"/>
+                          <a:ea typeface="Calibri" pitchFamily="34" charset="-122"/>
+                          <a:cs typeface="Calibri" pitchFamily="34" charset="-120"/>
+                        </a:rPr>
+                        <a:t>Освещение: 2 опоры LED с кабелем</a:t>
+                      </a:r>
+                      <a:endParaRPr lang="en-US" sz="1200" dirty="0">
+                        <a:latin typeface="Calibri" charset="0"/>
+                        <a:ea typeface="Calibri" charset="0"/>
+                        <a:cs typeface="Calibri" charset="0"/>
+                      </a:endParaRPr>
+                    </a:p>
+                  </a:txBody>
+                  <a:tcPr marL="91440" marR="91440" marT="45720" marB="45720" anchor="ctr">
+                    <a:lnL w="12700" cap="flat" cmpd="sng" algn="ctr">
+                      <a:solidFill>
+                        <a:srgbClr val="E5E7EB"/>
+                      </a:solidFill>
+                      <a:prstDash val="solid"/>
+                      <a:round/>
+                      <a:headEnd type="none" w="med" len="med"/>
+                      <a:tailEnd type="none" w="med" len="med"/>
+                    </a:lnL>
+                    <a:lnR w="12700" cap="flat" cmpd="sng" algn="ctr">
+                      <a:solidFill>
+                        <a:srgbClr val="E5E7EB"/>
+                      </a:solidFill>
+                      <a:prstDash val="solid"/>
+                      <a:round/>
+                      <a:headEnd type="none" w="med" len="med"/>
+                      <a:tailEnd type="none" w="med" len="med"/>
+                    </a:lnR>
+                    <a:lnT w="12700" cap="flat" cmpd="sng" algn="ctr">
+                      <a:solidFill>
+                        <a:srgbClr val="E5E7EB"/>
+                      </a:solidFill>
+                      <a:prstDash val="solid"/>
+                      <a:round/>
+                      <a:headEnd type="none" w="med" len="med"/>
+                      <a:tailEnd type="none" w="med" len="med"/>
+                    </a:lnT>
+                    <a:lnB w="12700" cap="flat" cmpd="sng" algn="ctr">
+                      <a:solidFill>
+                        <a:srgbClr val="E5E7EB"/>
+                      </a:solidFill>
+                      <a:prstDash val="solid"/>
+                      <a:round/>
+                      <a:headEnd type="none" w="med" len="med"/>
+                      <a:tailEnd type="none" w="med" len="med"/>
+                    </a:lnB>
+                  </a:tcPr>
+                </a:tc>
+                <a:tc>
+                  <a:txBody>
+                    <a:bodyPr/>
+                    <a:lstStyle/>
+                    <a:p>
+                      <a:pPr indent="0" marL="0">
+                        <a:buNone/>
+                      </a:pPr>
+                      <a:r>
+                        <a:rPr lang="en-US" sz="1200" dirty="0">
+                          <a:solidFill>
+                            <a:srgbClr val="1F2937"/>
+                          </a:solidFill>
+                          <a:latin typeface="Calibri" pitchFamily="34" charset="0"/>
+                          <a:ea typeface="Calibri" pitchFamily="34" charset="-122"/>
+                          <a:cs typeface="Calibri" pitchFamily="34" charset="-120"/>
+                        </a:rPr>
+                        <a:t>110 000</a:t>
+                      </a:r>
+                      <a:endParaRPr lang="en-US" sz="1200" dirty="0">
+                        <a:latin typeface="Calibri" charset="0"/>
+                        <a:ea typeface="Calibri" charset="0"/>
+                        <a:cs typeface="Calibri" charset="0"/>
+                      </a:endParaRPr>
+                    </a:p>
+                  </a:txBody>
+                  <a:tcPr marL="91440" marR="91440" marT="45720" marB="45720" anchor="ctr">
+                    <a:lnL w="12700" cap="flat" cmpd="sng" algn="ctr">
+                      <a:solidFill>
+                        <a:srgbClr val="E5E7EB"/>
+                      </a:solidFill>
+                      <a:prstDash val="solid"/>
+                      <a:round/>
+                      <a:headEnd type="none" w="med" len="med"/>
+                      <a:tailEnd type="none" w="med" len="med"/>
+                    </a:lnL>
+                    <a:lnR w="12700" cap="flat" cmpd="sng" algn="ctr">
+                      <a:solidFill>
+                        <a:srgbClr val="E5E7EB"/>
+                      </a:solidFill>
+                      <a:prstDash val="solid"/>
+                      <a:round/>
+                      <a:headEnd type="none" w="med" len="med"/>
+                      <a:tailEnd type="none" w="med" len="med"/>
+                    </a:lnR>
+                    <a:lnT w="12700" cap="flat" cmpd="sng" algn="ctr">
+                      <a:solidFill>
+                        <a:srgbClr val="E5E7EB"/>
+                      </a:solidFill>
+                      <a:prstDash val="solid"/>
+                      <a:round/>
+                      <a:headEnd type="none" w="med" len="med"/>
+                      <a:tailEnd type="none" w="med" len="med"/>
+                    </a:lnT>
+                    <a:lnB w="12700" cap="flat" cmpd="sng" algn="ctr">
+                      <a:solidFill>
+                        <a:srgbClr val="E5E7EB"/>
+                      </a:solidFill>
+                      <a:prstDash val="solid"/>
+                      <a:round/>
+                      <a:headEnd type="none" w="med" len="med"/>
+                      <a:tailEnd type="none" w="med" len="med"/>
+                    </a:lnB>
+                  </a:tcPr>
+                </a:tc>
+              </a:tr>
+              <a:tr h="374904">
+                <a:tc>
+                  <a:txBody>
+                    <a:bodyPr/>
+                    <a:lstStyle/>
+                    <a:p>
+                      <a:pPr indent="0" marL="0">
+                        <a:buNone/>
+                      </a:pPr>
+                      <a:r>
+                        <a:rPr lang="en-US" sz="1200" dirty="0">
+                          <a:solidFill>
+                            <a:srgbClr val="1F2937"/>
+                          </a:solidFill>
+                          <a:latin typeface="Calibri" pitchFamily="34" charset="0"/>
+                          <a:ea typeface="Calibri" pitchFamily="34" charset="-122"/>
+                          <a:cs typeface="Calibri" pitchFamily="34" charset="-120"/>
+                        </a:rPr>
+                        <a:t>Разметка (термопластик) + 2 знака</a:t>
+                      </a:r>
+                      <a:endParaRPr lang="en-US" sz="1200" dirty="0">
+                        <a:latin typeface="Calibri" charset="0"/>
+                        <a:ea typeface="Calibri" charset="0"/>
+                        <a:cs typeface="Calibri" charset="0"/>
+                      </a:endParaRPr>
+                    </a:p>
+                  </a:txBody>
+                  <a:tcPr marL="91440" marR="91440" marT="45720" marB="45720" anchor="ctr">
+                    <a:lnL w="12700" cap="flat" cmpd="sng" algn="ctr">
+                      <a:solidFill>
+                        <a:srgbClr val="E5E7EB"/>
+                      </a:solidFill>
+                      <a:prstDash val="solid"/>
+                      <a:round/>
+                      <a:headEnd type="none" w="med" len="med"/>
+                      <a:tailEnd type="none" w="med" len="med"/>
+                    </a:lnL>
+                    <a:lnR w="12700" cap="flat" cmpd="sng" algn="ctr">
+                      <a:solidFill>
+                        <a:srgbClr val="E5E7EB"/>
+                      </a:solidFill>
+                      <a:prstDash val="solid"/>
+                      <a:round/>
+                      <a:headEnd type="none" w="med" len="med"/>
+                      <a:tailEnd type="none" w="med" len="med"/>
+                    </a:lnR>
+                    <a:lnT w="12700" cap="flat" cmpd="sng" algn="ctr">
+                      <a:solidFill>
+                        <a:srgbClr val="E5E7EB"/>
+                      </a:solidFill>
+                      <a:prstDash val="solid"/>
+                      <a:round/>
+                      <a:headEnd type="none" w="med" len="med"/>
+                      <a:tailEnd type="none" w="med" len="med"/>
+                    </a:lnT>
+                    <a:lnB w="12700" cap="flat" cmpd="sng" algn="ctr">
+                      <a:solidFill>
+                        <a:srgbClr val="E5E7EB"/>
+                      </a:solidFill>
+                      <a:prstDash val="solid"/>
+                      <a:round/>
+                      <a:headEnd type="none" w="med" len="med"/>
+                      <a:tailEnd type="none" w="med" len="med"/>
+                    </a:lnB>
+                  </a:tcPr>
+                </a:tc>
+                <a:tc>
+                  <a:txBody>
+                    <a:bodyPr/>
+                    <a:lstStyle/>
+                    <a:p>
+                      <a:pPr indent="0" marL="0">
+                        <a:buNone/>
+                      </a:pPr>
+                      <a:r>
+                        <a:rPr lang="en-US" sz="1200" dirty="0">
+                          <a:solidFill>
+                            <a:srgbClr val="1F2937"/>
+                          </a:solidFill>
+                          <a:latin typeface="Calibri" pitchFamily="34" charset="0"/>
+                          <a:ea typeface="Calibri" pitchFamily="34" charset="-122"/>
+                          <a:cs typeface="Calibri" pitchFamily="34" charset="-120"/>
+                        </a:rPr>
+                        <a:t>51 600</a:t>
+                      </a:r>
+                      <a:endParaRPr lang="en-US" sz="1200" dirty="0">
+                        <a:latin typeface="Calibri" charset="0"/>
+                        <a:ea typeface="Calibri" charset="0"/>
+                        <a:cs typeface="Calibri" charset="0"/>
+                      </a:endParaRPr>
+                    </a:p>
+                  </a:txBody>
+                  <a:tcPr marL="91440" marR="91440" marT="45720" marB="45720" anchor="ctr">
+                    <a:lnL w="12700" cap="flat" cmpd="sng" algn="ctr">
+                      <a:solidFill>
+                        <a:srgbClr val="E5E7EB"/>
+                      </a:solidFill>
+                      <a:prstDash val="solid"/>
+                      <a:round/>
+                      <a:headEnd type="none" w="med" len="med"/>
+                      <a:tailEnd type="none" w="med" len="med"/>
+                    </a:lnL>
+                    <a:lnR w="12700" cap="flat" cmpd="sng" algn="ctr">
+                      <a:solidFill>
+                        <a:srgbClr val="E5E7EB"/>
+                      </a:solidFill>
+                      <a:prstDash val="solid"/>
+                      <a:round/>
+                      <a:headEnd type="none" w="med" len="med"/>
+                      <a:tailEnd type="none" w="med" len="med"/>
+                    </a:lnR>
+                    <a:lnT w="12700" cap="flat" cmpd="sng" algn="ctr">
+                      <a:solidFill>
+                        <a:srgbClr val="E5E7EB"/>
+                      </a:solidFill>
+                      <a:prstDash val="solid"/>
+                      <a:round/>
+                      <a:headEnd type="none" w="med" len="med"/>
+                      <a:tailEnd type="none" w="med" len="med"/>
+                    </a:lnT>
+                    <a:lnB w="12700" cap="flat" cmpd="sng" algn="ctr">
+                      <a:solidFill>
+                        <a:srgbClr val="E5E7EB"/>
+                      </a:solidFill>
+                      <a:prstDash val="solid"/>
+                      <a:round/>
+                      <a:headEnd type="none" w="med" len="med"/>
+                      <a:tailEnd type="none" w="med" len="med"/>
+                    </a:lnB>
+                  </a:tcPr>
+                </a:tc>
+              </a:tr>
+              <a:tr h="374904">
+                <a:tc>
+                  <a:txBody>
+                    <a:bodyPr/>
+                    <a:lstStyle/>
+                    <a:p>
+                      <a:pPr indent="0" marL="0">
+                        <a:buNone/>
+                      </a:pPr>
+                      <a:r>
+                        <a:rPr lang="en-US" sz="1200" dirty="0">
+                          <a:solidFill>
+                            <a:srgbClr val="1F2937"/>
+                          </a:solidFill>
+                          <a:latin typeface="Calibri" pitchFamily="34" charset="0"/>
+                          <a:ea typeface="Calibri" pitchFamily="34" charset="-122"/>
+                          <a:cs typeface="Calibri" pitchFamily="34" charset="-120"/>
+                        </a:rPr>
+                        <a:t>Компенсационное озеленение (15 кустов, кашпо)</a:t>
+                      </a:r>
+                      <a:endParaRPr lang="en-US" sz="1200" dirty="0">
+                        <a:latin typeface="Calibri" charset="0"/>
+                        <a:ea typeface="Calibri" charset="0"/>
+                        <a:cs typeface="Calibri" charset="0"/>
+                      </a:endParaRPr>
+                    </a:p>
+                  </a:txBody>
+                  <a:tcPr marL="91440" marR="91440" marT="45720" marB="45720" anchor="ctr">
+                    <a:lnL w="12700" cap="flat" cmpd="sng" algn="ctr">
+                      <a:solidFill>
+                        <a:srgbClr val="E5E7EB"/>
+                      </a:solidFill>
+                      <a:prstDash val="solid"/>
+                      <a:round/>
+                      <a:headEnd type="none" w="med" len="med"/>
+                      <a:tailEnd type="none" w="med" len="med"/>
+                    </a:lnL>
+                    <a:lnR w="12700" cap="flat" cmpd="sng" algn="ctr">
+                      <a:solidFill>
+                        <a:srgbClr val="E5E7EB"/>
+                      </a:solidFill>
+                      <a:prstDash val="solid"/>
+                      <a:round/>
+                      <a:headEnd type="none" w="med" len="med"/>
+                      <a:tailEnd type="none" w="med" len="med"/>
+                    </a:lnR>
+                    <a:lnT w="12700" cap="flat" cmpd="sng" algn="ctr">
+                      <a:solidFill>
+                        <a:srgbClr val="E5E7EB"/>
+                      </a:solidFill>
+                      <a:prstDash val="solid"/>
+                      <a:round/>
+                      <a:headEnd type="none" w="med" len="med"/>
+                      <a:tailEnd type="none" w="med" len="med"/>
+                    </a:lnT>
+                    <a:lnB w="12700" cap="flat" cmpd="sng" algn="ctr">
+                      <a:solidFill>
+                        <a:srgbClr val="E5E7EB"/>
+                      </a:solidFill>
+                      <a:prstDash val="solid"/>
+                      <a:round/>
+                      <a:headEnd type="none" w="med" len="med"/>
+                      <a:tailEnd type="none" w="med" len="med"/>
+                    </a:lnB>
+                  </a:tcPr>
+                </a:tc>
+                <a:tc>
+                  <a:txBody>
+                    <a:bodyPr/>
+                    <a:lstStyle/>
+                    <a:p>
+                      <a:pPr indent="0" marL="0">
+                        <a:buNone/>
+                      </a:pPr>
+                      <a:r>
+                        <a:rPr lang="en-US" sz="1200" dirty="0">
+                          <a:solidFill>
+                            <a:srgbClr val="1F2937"/>
+                          </a:solidFill>
+                          <a:latin typeface="Calibri" pitchFamily="34" charset="0"/>
+                          <a:ea typeface="Calibri" pitchFamily="34" charset="-122"/>
+                          <a:cs typeface="Calibri" pitchFamily="34" charset="-120"/>
+                        </a:rPr>
+                        <a:t>40 000</a:t>
+                      </a:r>
+                      <a:endParaRPr lang="en-US" sz="1200" dirty="0">
+                        <a:latin typeface="Calibri" charset="0"/>
+                        <a:ea typeface="Calibri" charset="0"/>
+                        <a:cs typeface="Calibri" charset="0"/>
+                      </a:endParaRPr>
+                    </a:p>
+                  </a:txBody>
+                  <a:tcPr marL="91440" marR="91440" marT="45720" marB="45720" anchor="ctr">
+                    <a:lnL w="12700" cap="flat" cmpd="sng" algn="ctr">
+                      <a:solidFill>
+                        <a:srgbClr val="E5E7EB"/>
+                      </a:solidFill>
+                      <a:prstDash val="solid"/>
+                      <a:round/>
+                      <a:headEnd type="none" w="med" len="med"/>
+                      <a:tailEnd type="none" w="med" len="med"/>
+                    </a:lnL>
+                    <a:lnR w="12700" cap="flat" cmpd="sng" algn="ctr">
+                      <a:solidFill>
+                        <a:srgbClr val="E5E7EB"/>
+                      </a:solidFill>
+                      <a:prstDash val="solid"/>
+                      <a:round/>
+                      <a:headEnd type="none" w="med" len="med"/>
+                      <a:tailEnd type="none" w="med" len="med"/>
+                    </a:lnR>
+                    <a:lnT w="12700" cap="flat" cmpd="sng" algn="ctr">
+                      <a:solidFill>
+                        <a:srgbClr val="E5E7EB"/>
+                      </a:solidFill>
+                      <a:prstDash val="solid"/>
+                      <a:round/>
+                      <a:headEnd type="none" w="med" len="med"/>
+                      <a:tailEnd type="none" w="med" len="med"/>
+                    </a:lnT>
+                    <a:lnB w="12700" cap="flat" cmpd="sng" algn="ctr">
+                      <a:solidFill>
+                        <a:srgbClr val="E5E7EB"/>
+                      </a:solidFill>
+                      <a:prstDash val="solid"/>
+                      <a:round/>
+                      <a:headEnd type="none" w="med" len="med"/>
+                      <a:tailEnd type="none" w="med" len="med"/>
+                    </a:lnB>
+                  </a:tcPr>
+                </a:tc>
+              </a:tr>
+              <a:tr h="374904">
+                <a:tc>
+                  <a:txBody>
+                    <a:bodyPr/>
+                    <a:lstStyle/>
+                    <a:p>
+                      <a:pPr indent="0" marL="0">
+                        <a:buNone/>
+                      </a:pPr>
+                      <a:r>
+                        <a:rPr lang="en-US" sz="1200" dirty="0">
+                          <a:solidFill>
+                            <a:srgbClr val="1F2937"/>
+                          </a:solidFill>
+                          <a:latin typeface="Calibri" pitchFamily="34" charset="0"/>
+                          <a:ea typeface="Calibri" pitchFamily="34" charset="-122"/>
+                          <a:cs typeface="Calibri" pitchFamily="34" charset="-120"/>
+                        </a:rPr>
+                        <a:t>Проект и согласования</a:t>
+                      </a:r>
+                      <a:endParaRPr lang="en-US" sz="1200" dirty="0">
+                        <a:latin typeface="Calibri" charset="0"/>
+                        <a:ea typeface="Calibri" charset="0"/>
+                        <a:cs typeface="Calibri" charset="0"/>
+                      </a:endParaRPr>
+                    </a:p>
+                  </a:txBody>
+                  <a:tcPr marL="91440" marR="91440" marT="45720" marB="45720" anchor="ctr">
+                    <a:lnL w="12700" cap="flat" cmpd="sng" algn="ctr">
+                      <a:solidFill>
+                        <a:srgbClr val="E5E7EB"/>
+                      </a:solidFill>
+                      <a:prstDash val="solid"/>
+                      <a:round/>
+                      <a:headEnd type="none" w="med" len="med"/>
+                      <a:tailEnd type="none" w="med" len="med"/>
+                    </a:lnL>
+                    <a:lnR w="12700" cap="flat" cmpd="sng" algn="ctr">
+                      <a:solidFill>
+                        <a:srgbClr val="E5E7EB"/>
+                      </a:solidFill>
+                      <a:prstDash val="solid"/>
+                      <a:round/>
+                      <a:headEnd type="none" w="med" len="med"/>
+                      <a:tailEnd type="none" w="med" len="med"/>
+                    </a:lnR>
+                    <a:lnT w="12700" cap="flat" cmpd="sng" algn="ctr">
+                      <a:solidFill>
+                        <a:srgbClr val="E5E7EB"/>
+                      </a:solidFill>
+                      <a:prstDash val="solid"/>
+                      <a:round/>
+                      <a:headEnd type="none" w="med" len="med"/>
+                      <a:tailEnd type="none" w="med" len="med"/>
+                    </a:lnT>
+                    <a:lnB w="12700" cap="flat" cmpd="sng" algn="ctr">
+                      <a:solidFill>
+                        <a:srgbClr val="E5E7EB"/>
+                      </a:solidFill>
+                      <a:prstDash val="solid"/>
+                      <a:round/>
+                      <a:headEnd type="none" w="med" len="med"/>
+                      <a:tailEnd type="none" w="med" len="med"/>
+                    </a:lnB>
+                  </a:tcPr>
+                </a:tc>
+                <a:tc>
+                  <a:txBody>
+                    <a:bodyPr/>
+                    <a:lstStyle/>
+                    <a:p>
+                      <a:pPr indent="0" marL="0">
+                        <a:buNone/>
+                      </a:pPr>
+                      <a:r>
+                        <a:rPr lang="en-US" sz="1200" dirty="0">
+                          <a:solidFill>
+                            <a:srgbClr val="1F2937"/>
+                          </a:solidFill>
+                          <a:latin typeface="Calibri" pitchFamily="34" charset="0"/>
+                          <a:ea typeface="Calibri" pitchFamily="34" charset="-122"/>
+                          <a:cs typeface="Calibri" pitchFamily="34" charset="-120"/>
+                        </a:rPr>
+                        <a:t>70 000</a:t>
+                      </a:r>
+                      <a:endParaRPr lang="en-US" sz="1200" dirty="0">
+                        <a:latin typeface="Calibri" charset="0"/>
+                        <a:ea typeface="Calibri" charset="0"/>
+                        <a:cs typeface="Calibri" charset="0"/>
+                      </a:endParaRPr>
+                    </a:p>
+                  </a:txBody>
+                  <a:tcPr marL="91440" marR="91440" marT="45720" marB="45720" anchor="ctr">
+                    <a:lnL w="12700" cap="flat" cmpd="sng" algn="ctr">
+                      <a:solidFill>
+                        <a:srgbClr val="E5E7EB"/>
+                      </a:solidFill>
+                      <a:prstDash val="solid"/>
+                      <a:round/>
+                      <a:headEnd type="none" w="med" len="med"/>
+                      <a:tailEnd type="none" w="med" len="med"/>
+                    </a:lnL>
+                    <a:lnR w="12700" cap="flat" cmpd="sng" algn="ctr">
+                      <a:solidFill>
+                        <a:srgbClr val="E5E7EB"/>
+                      </a:solidFill>
+                      <a:prstDash val="solid"/>
+                      <a:round/>
+                      <a:headEnd type="none" w="med" len="med"/>
+                      <a:tailEnd type="none" w="med" len="med"/>
+                    </a:lnR>
+                    <a:lnT w="12700" cap="flat" cmpd="sng" algn="ctr">
+                      <a:solidFill>
+                        <a:srgbClr val="E5E7EB"/>
+                      </a:solidFill>
+                      <a:prstDash val="solid"/>
+                      <a:round/>
+                      <a:headEnd type="none" w="med" len="med"/>
+                      <a:tailEnd type="none" w="med" len="med"/>
+                    </a:lnT>
+                    <a:lnB w="12700" cap="flat" cmpd="sng" algn="ctr">
+                      <a:solidFill>
+                        <a:srgbClr val="E5E7EB"/>
+                      </a:solidFill>
+                      <a:prstDash val="solid"/>
+                      <a:round/>
+                      <a:headEnd type="none" w="med" len="med"/>
+                      <a:tailEnd type="none" w="med" len="med"/>
+                    </a:lnB>
+                  </a:tcPr>
+                </a:tc>
+              </a:tr>
+            </a:tbl>
+          </a:graphicData>
+        </a:graphic>
+      </p:graphicFrame>
+      <p:sp>
+        <p:nvSpPr>
+          <p:cNvPr id="6" name="Text 3"/>
+          <p:cNvSpPr txBox="1"/>
+          <p:nvPr/>
+        </p:nvSpPr>
+        <p:spPr>
+          <a:xfrm>
+            <a:off x="7772400" y="1325880"/>
+            <a:ext cx="2286000" cy="457200"/>
+          </a:xfrm>
+          <a:prstGeom prst="rect">
+            <a:avLst/>
+          </a:prstGeom>
+          <a:noFill/>
+          <a:ln/>
+        </p:spPr>
+        <p:txBody>
+          <a:bodyPr wrap="square" lIns="0" tIns="0" rIns="0" bIns="0" rtlCol="0" anchor="ctr"/>
+          <a:lstStyle/>
+          <a:p>
+            <a:pPr indent="0" marL="0">
+              <a:buNone/>
+            </a:pPr>
+            <a:r>
+              <a:rPr lang="en-US" sz="1400" dirty="0">
+                <a:solidFill>
+                  <a:srgbClr val="1F2937"/>
+                </a:solidFill>
+                <a:latin typeface="Calibri" pitchFamily="34" charset="0"/>
+                <a:ea typeface="Calibri" pitchFamily="34" charset="-122"/>
+                <a:cs typeface="Calibri" pitchFamily="34" charset="-120"/>
+              </a:rPr>
+              <a:t>Материалы и работы</a:t>
+            </a:r>
+            <a:endParaRPr lang="en-US" sz="1400" dirty="0"/>
+          </a:p>
+        </p:txBody>
+      </p:sp>
+      <p:sp>
+        <p:nvSpPr>
+          <p:cNvPr id="7" name="Text 4"/>
+          <p:cNvSpPr txBox="1"/>
+          <p:nvPr/>
+        </p:nvSpPr>
+        <p:spPr>
+          <a:xfrm>
+            <a:off x="9966960" y="1325880"/>
+            <a:ext cx="1645920" cy="457200"/>
+          </a:xfrm>
+          <a:prstGeom prst="rect">
+            <a:avLst/>
+          </a:prstGeom>
+          <a:noFill/>
+          <a:ln/>
+        </p:spPr>
+        <p:txBody>
+          <a:bodyPr wrap="square" lIns="0" tIns="0" rIns="0" bIns="0" rtlCol="0" anchor="ctr"/>
+          <a:lstStyle/>
+          <a:p>
+            <a:pPr algn="r" indent="0" marL="0">
+              <a:buNone/>
+            </a:pPr>
+            <a:r>
+              <a:rPr lang="en-US" sz="1400" b="1" dirty="0">
+                <a:solidFill>
+                  <a:srgbClr val="1F2937"/>
+                </a:solidFill>
+                <a:latin typeface="Calibri" pitchFamily="34" charset="0"/>
+                <a:ea typeface="Calibri" pitchFamily="34" charset="-122"/>
+                <a:cs typeface="Calibri" pitchFamily="34" charset="-120"/>
+              </a:rPr>
+              <a:t>2 003 600 ₽</a:t>
+            </a:r>
+            <a:endParaRPr lang="en-US" sz="1400" dirty="0"/>
+          </a:p>
+        </p:txBody>
+      </p:sp>
+      <p:sp>
+        <p:nvSpPr>
+          <p:cNvPr id="8" name="Text 5"/>
+          <p:cNvSpPr txBox="1"/>
+          <p:nvPr/>
+        </p:nvSpPr>
+        <p:spPr>
+          <a:xfrm>
+            <a:off x="7772400" y="1874520"/>
+            <a:ext cx="2286000" cy="457200"/>
+          </a:xfrm>
+          <a:prstGeom prst="rect">
+            <a:avLst/>
+          </a:prstGeom>
+          <a:noFill/>
+          <a:ln/>
+        </p:spPr>
+        <p:txBody>
+          <a:bodyPr wrap="square" lIns="0" tIns="0" rIns="0" bIns="0" rtlCol="0" anchor="ctr"/>
+          <a:lstStyle/>
+          <a:p>
+            <a:pPr indent="0" marL="0">
+              <a:buNone/>
+            </a:pPr>
+            <a:r>
+              <a:rPr lang="en-US" sz="1400" dirty="0">
+                <a:solidFill>
+                  <a:srgbClr val="1F2937"/>
+                </a:solidFill>
+                <a:latin typeface="Calibri" pitchFamily="34" charset="0"/>
+                <a:ea typeface="Calibri" pitchFamily="34" charset="-122"/>
+                <a:cs typeface="Calibri" pitchFamily="34" charset="-120"/>
+              </a:rPr>
+              <a:t>Техника</a:t>
+            </a:r>
+            <a:endParaRPr lang="en-US" sz="1400" dirty="0"/>
+          </a:p>
+        </p:txBody>
+      </p:sp>
+      <p:sp>
+        <p:nvSpPr>
+          <p:cNvPr id="9" name="Text 6"/>
+          <p:cNvSpPr txBox="1"/>
+          <p:nvPr/>
+        </p:nvSpPr>
+        <p:spPr>
+          <a:xfrm>
+            <a:off x="9966960" y="1874520"/>
+            <a:ext cx="1645920" cy="457200"/>
+          </a:xfrm>
+          <a:prstGeom prst="rect">
+            <a:avLst/>
+          </a:prstGeom>
+          <a:noFill/>
+          <a:ln/>
+        </p:spPr>
+        <p:txBody>
+          <a:bodyPr wrap="square" lIns="0" tIns="0" rIns="0" bIns="0" rtlCol="0" anchor="ctr"/>
+          <a:lstStyle/>
+          <a:p>
+            <a:pPr algn="r" indent="0" marL="0">
+              <a:buNone/>
+            </a:pPr>
+            <a:r>
+              <a:rPr lang="en-US" sz="1400" b="1" dirty="0">
+                <a:solidFill>
+                  <a:srgbClr val="1F2937"/>
+                </a:solidFill>
+                <a:latin typeface="Calibri" pitchFamily="34" charset="0"/>
+                <a:ea typeface="Calibri" pitchFamily="34" charset="-122"/>
+                <a:cs typeface="Calibri" pitchFamily="34" charset="-120"/>
+              </a:rPr>
+              <a:t>299 600 ₽</a:t>
+            </a:r>
+            <a:endParaRPr lang="en-US" sz="1400" dirty="0"/>
+          </a:p>
+        </p:txBody>
+      </p:sp>
+      <p:sp>
+        <p:nvSpPr>
+          <p:cNvPr id="10" name="Text 7"/>
+          <p:cNvSpPr txBox="1"/>
+          <p:nvPr/>
+        </p:nvSpPr>
+        <p:spPr>
+          <a:xfrm>
+            <a:off x="7772400" y="2423160"/>
+            <a:ext cx="2286000" cy="457200"/>
+          </a:xfrm>
+          <a:prstGeom prst="rect">
+            <a:avLst/>
+          </a:prstGeom>
+          <a:noFill/>
+          <a:ln/>
+        </p:spPr>
+        <p:txBody>
+          <a:bodyPr wrap="square" lIns="0" tIns="0" rIns="0" bIns="0" rtlCol="0" anchor="ctr"/>
+          <a:lstStyle/>
+          <a:p>
+            <a:pPr indent="0" marL="0">
+              <a:buNone/>
+            </a:pPr>
+            <a:r>
+              <a:rPr lang="en-US" sz="1400" dirty="0">
+                <a:solidFill>
+                  <a:srgbClr val="1F2937"/>
+                </a:solidFill>
+                <a:latin typeface="Calibri" pitchFamily="34" charset="0"/>
+                <a:ea typeface="Calibri" pitchFamily="34" charset="-122"/>
+                <a:cs typeface="Calibri" pitchFamily="34" charset="-120"/>
+              </a:rPr>
+              <a:t>Зарплата с взносами</a:t>
+            </a:r>
+            <a:endParaRPr lang="en-US" sz="1400" dirty="0"/>
+          </a:p>
+        </p:txBody>
+      </p:sp>
+      <p:sp>
+        <p:nvSpPr>
+          <p:cNvPr id="11" name="Text 8"/>
+          <p:cNvSpPr txBox="1"/>
+          <p:nvPr/>
+        </p:nvSpPr>
+        <p:spPr>
+          <a:xfrm>
+            <a:off x="9966960" y="2423160"/>
+            <a:ext cx="1645920" cy="457200"/>
+          </a:xfrm>
+          <a:prstGeom prst="rect">
+            <a:avLst/>
+          </a:prstGeom>
+          <a:noFill/>
+          <a:ln/>
+        </p:spPr>
+        <p:txBody>
+          <a:bodyPr wrap="square" lIns="0" tIns="0" rIns="0" bIns="0" rtlCol="0" anchor="ctr"/>
+          <a:lstStyle/>
+          <a:p>
+            <a:pPr algn="r" indent="0" marL="0">
+              <a:buNone/>
+            </a:pPr>
+            <a:r>
+              <a:rPr lang="en-US" sz="1400" b="1" dirty="0">
+                <a:solidFill>
+                  <a:srgbClr val="1F2937"/>
+                </a:solidFill>
+                <a:latin typeface="Calibri" pitchFamily="34" charset="0"/>
+                <a:ea typeface="Calibri" pitchFamily="34" charset="-122"/>
+                <a:cs typeface="Calibri" pitchFamily="34" charset="-120"/>
+              </a:rPr>
+              <a:t>624 650 ₽</a:t>
+            </a:r>
+            <a:endParaRPr lang="en-US" sz="1400" dirty="0"/>
+          </a:p>
+        </p:txBody>
+      </p:sp>
+      <p:sp>
+        <p:nvSpPr>
+          <p:cNvPr id="12" name="Text 9"/>
+          <p:cNvSpPr txBox="1"/>
+          <p:nvPr/>
+        </p:nvSpPr>
+        <p:spPr>
+          <a:xfrm>
+            <a:off x="7772400" y="2971800"/>
+            <a:ext cx="2286000" cy="457200"/>
+          </a:xfrm>
+          <a:prstGeom prst="rect">
+            <a:avLst/>
+          </a:prstGeom>
+          <a:noFill/>
+          <a:ln/>
+        </p:spPr>
+        <p:txBody>
+          <a:bodyPr wrap="square" lIns="0" tIns="0" rIns="0" bIns="0" rtlCol="0" anchor="ctr"/>
+          <a:lstStyle/>
+          <a:p>
+            <a:pPr indent="0" marL="0">
+              <a:buNone/>
+            </a:pPr>
+            <a:r>
+              <a:rPr lang="en-US" sz="1400" dirty="0">
+                <a:solidFill>
+                  <a:srgbClr val="1F2937"/>
+                </a:solidFill>
+                <a:latin typeface="Calibri" pitchFamily="34" charset="0"/>
+                <a:ea typeface="Calibri" pitchFamily="34" charset="-122"/>
+                <a:cs typeface="Calibri" pitchFamily="34" charset="-120"/>
+              </a:rPr>
+              <a:t>Непредвиденные 5 %</a:t>
+            </a:r>
+            <a:endParaRPr lang="en-US" sz="1400" dirty="0"/>
+          </a:p>
+        </p:txBody>
+      </p:sp>
+      <p:sp>
+        <p:nvSpPr>
+          <p:cNvPr id="13" name="Text 10"/>
+          <p:cNvSpPr txBox="1"/>
+          <p:nvPr/>
+        </p:nvSpPr>
+        <p:spPr>
+          <a:xfrm>
+            <a:off x="9966960" y="2971800"/>
+            <a:ext cx="1645920" cy="457200"/>
+          </a:xfrm>
+          <a:prstGeom prst="rect">
+            <a:avLst/>
+          </a:prstGeom>
+          <a:noFill/>
+          <a:ln/>
+        </p:spPr>
+        <p:txBody>
+          <a:bodyPr wrap="square" lIns="0" tIns="0" rIns="0" bIns="0" rtlCol="0" anchor="ctr"/>
+          <a:lstStyle/>
+          <a:p>
+            <a:pPr algn="r" indent="0" marL="0">
+              <a:buNone/>
+            </a:pPr>
+            <a:r>
+              <a:rPr lang="en-US" sz="1400" b="1" dirty="0">
+                <a:solidFill>
+                  <a:srgbClr val="1F2937"/>
+                </a:solidFill>
+                <a:latin typeface="Calibri" pitchFamily="34" charset="0"/>
+                <a:ea typeface="Calibri" pitchFamily="34" charset="-122"/>
+                <a:cs typeface="Calibri" pitchFamily="34" charset="-120"/>
+              </a:rPr>
+              <a:t>146 393 ₽</a:t>
+            </a:r>
+            <a:endParaRPr lang="en-US" sz="1400" dirty="0"/>
+          </a:p>
+        </p:txBody>
+      </p:sp>
+      <p:sp>
+        <p:nvSpPr>
+          <p:cNvPr id="14" name="Shape 11"/>
+          <p:cNvSpPr/>
+          <p:nvPr/>
+        </p:nvSpPr>
+        <p:spPr>
+          <a:xfrm>
+            <a:off x="7772400" y="3703320"/>
+            <a:ext cx="3840480" cy="1371600"/>
+          </a:xfrm>
+          <a:prstGeom prst="roundRect">
+            <a:avLst>
+              <a:gd name="adj" fmla="val 8000"/>
+            </a:avLst>
+          </a:prstGeom>
+          <a:solidFill>
+            <a:srgbClr val="26282E"/>
+          </a:solidFill>
+          <a:ln/>
+        </p:spPr>
+      </p:sp>
+      <p:sp>
+        <p:nvSpPr>
+          <p:cNvPr id="15" name="Text 12"/>
+          <p:cNvSpPr txBox="1"/>
+          <p:nvPr/>
+        </p:nvSpPr>
+        <p:spPr>
+          <a:xfrm>
+            <a:off x="8001000" y="3794760"/>
+            <a:ext cx="3474720" cy="365760"/>
+          </a:xfrm>
+          <a:prstGeom prst="rect">
+            <a:avLst/>
+          </a:prstGeom>
+          <a:noFill/>
+          <a:ln/>
+        </p:spPr>
+        <p:txBody>
+          <a:bodyPr wrap="square" lIns="0" tIns="0" rIns="0" bIns="0" rtlCol="0" anchor="ctr"/>
+          <a:lstStyle/>
+          <a:p>
+            <a:pPr indent="0" marL="0">
+              <a:buNone/>
+            </a:pPr>
+            <a:r>
+              <a:rPr lang="en-US" sz="1300" b="1" dirty="0">
+                <a:solidFill>
+                  <a:srgbClr val="FFFFFF"/>
+                </a:solidFill>
+                <a:latin typeface="Calibri" pitchFamily="34" charset="0"/>
+                <a:ea typeface="Calibri" pitchFamily="34" charset="-122"/>
+                <a:cs typeface="Calibri" pitchFamily="34" charset="-120"/>
+              </a:rPr>
+              <a:t>ИТОГО ПО СМЕТЕ</a:t>
+            </a:r>
+            <a:endParaRPr lang="en-US" sz="1300" dirty="0"/>
+          </a:p>
+        </p:txBody>
+      </p:sp>
+      <p:sp>
+        <p:nvSpPr>
+          <p:cNvPr id="16" name="Text 13"/>
+          <p:cNvSpPr txBox="1"/>
+          <p:nvPr/>
+        </p:nvSpPr>
+        <p:spPr>
+          <a:xfrm>
+            <a:off x="8001000" y="4160520"/>
+            <a:ext cx="3474720" cy="731520"/>
+          </a:xfrm>
+          <a:prstGeom prst="rect">
+            <a:avLst/>
+          </a:prstGeom>
+          <a:noFill/>
+          <a:ln/>
+        </p:spPr>
+        <p:txBody>
+          <a:bodyPr wrap="square" lIns="0" tIns="0" rIns="0" bIns="0" rtlCol="0" anchor="ctr"/>
+          <a:lstStyle/>
+          <a:p>
+            <a:pPr indent="0" marL="0">
+              <a:buNone/>
+            </a:pPr>
+            <a:r>
+              <a:rPr lang="en-US" sz="3000" b="1" dirty="0">
+                <a:solidFill>
+                  <a:srgbClr val="F2C200"/>
+                </a:solidFill>
+                <a:latin typeface="Cambria" pitchFamily="34" charset="0"/>
+                <a:ea typeface="Cambria" pitchFamily="34" charset="-122"/>
+                <a:cs typeface="Cambria" pitchFamily="34" charset="-120"/>
+              </a:rPr>
+              <a:t>3 074 243 ₽</a:t>
+            </a:r>
+            <a:endParaRPr lang="en-US" sz="3000" dirty="0"/>
+          </a:p>
+        </p:txBody>
+      </p:sp>
+      <p:sp>
+        <p:nvSpPr>
+          <p:cNvPr id="17" name="Text 14"/>
+          <p:cNvSpPr txBox="1"/>
+          <p:nvPr/>
+        </p:nvSpPr>
+        <p:spPr>
+          <a:xfrm>
+            <a:off x="7772400" y="5257800"/>
+            <a:ext cx="3840480" cy="1097280"/>
+          </a:xfrm>
+          <a:prstGeom prst="rect">
+            <a:avLst/>
+          </a:prstGeom>
+          <a:noFill/>
+          <a:ln/>
+        </p:spPr>
+        <p:txBody>
+          <a:bodyPr wrap="square" lIns="0" tIns="0" rIns="0" bIns="0" rtlCol="0" anchor="t"/>
+          <a:lstStyle/>
+          <a:p>
+            <a:pPr indent="0" marL="0">
+              <a:buNone/>
+            </a:pPr>
+            <a:r>
+              <a:rPr lang="en-US" sz="1200" b="1" dirty="0">
+                <a:solidFill>
+                  <a:srgbClr val="1F2937"/>
+                </a:solidFill>
+                <a:latin typeface="Calibri" pitchFamily="34" charset="0"/>
+                <a:ea typeface="Calibri" pitchFamily="34" charset="-122"/>
+                <a:cs typeface="Calibri" pitchFamily="34" charset="-120"/>
+              </a:rPr>
+              <a:t>≈ 21 349 ₽</a:t>
+            </a:r>
+            <a:pPr indent="0" marL="0">
+              <a:buNone/>
+            </a:pPr>
+            <a:r>
+              <a:rPr lang="en-US" sz="1200" dirty="0">
+                <a:solidFill>
+                  <a:srgbClr val="1F2937"/>
+                </a:solidFill>
+                <a:latin typeface="Calibri" pitchFamily="34" charset="0"/>
+                <a:ea typeface="Calibri" pitchFamily="34" charset="-122"/>
+                <a:cs typeface="Calibri" pitchFamily="34" charset="-120"/>
+              </a:rPr>
+              <a:t> с квартиры (144 кв.) или </a:t>
+            </a:r>
+            <a:pPr indent="0" marL="0">
+              <a:buNone/>
+            </a:pPr>
+            <a:r>
+              <a:rPr lang="en-US" sz="1200" b="1" dirty="0">
+                <a:solidFill>
+                  <a:srgbClr val="1F2937"/>
+                </a:solidFill>
+                <a:latin typeface="Calibri" pitchFamily="34" charset="0"/>
+                <a:ea typeface="Calibri" pitchFamily="34" charset="-122"/>
+                <a:cs typeface="Calibri" pitchFamily="34" charset="-120"/>
+              </a:rPr>
+              <a:t>≈ 153 712 ₽</a:t>
+            </a:r>
+            <a:pPr indent="0" marL="0">
+              <a:buNone/>
+            </a:pPr>
+            <a:r>
+              <a:rPr lang="en-US" sz="1200" dirty="0">
+                <a:solidFill>
+                  <a:srgbClr val="1F2937"/>
+                </a:solidFill>
+                <a:latin typeface="Calibri" pitchFamily="34" charset="0"/>
+                <a:ea typeface="Calibri" pitchFamily="34" charset="-122"/>
+                <a:cs typeface="Calibri" pitchFamily="34" charset="-120"/>
+              </a:rPr>
+              <a:t> за одно новое место. Источник — фонд текущего ремонта / целевой сбор по решению ОСС.</a:t>
+            </a:r>
+            <a:endParaRPr lang="en-US" sz="1200" dirty="0"/>
+          </a:p>
+        </p:txBody>
+      </p:sp>
+    </p:spTree>
+  </p:cSld>
+  <p:clrMapOvr>
+    <a:masterClrMapping/>
+  </p:clrMapOvr>
+</p:sld>
+</file>
+
+<file path=ppt/slides/slide11.xml><?xml version="1.0" encoding="utf-8"?>
+<p:sld xmlns:a="http://schemas.openxmlformats.org/drawingml/2006/main" xmlns:r="http://schemas.openxmlformats.org/officeDocument/2006/relationships" xmlns:p="http://schemas.openxmlformats.org/presentationml/2006/main">
+  <p:cSld name="Slide 11">
+    <p:bg>
+      <p:bgPr>
+        <a:solidFill>
+          <a:srgbClr val="FFFFFF"/>
+        </a:solidFill>
+      </p:bgPr>
+    </p:bg>
+    <p:spTree>
+      <p:nvGrpSpPr>
+        <p:cNvPr id="1" name=""/>
+        <p:cNvGrpSpPr/>
+        <p:nvPr/>
+      </p:nvGrpSpPr>
+      <p:grpSpPr>
+        <a:xfrm>
+          <a:off x="0" y="0"/>
+          <a:ext cx="0" cy="0"/>
+          <a:chOff x="0" y="0"/>
+          <a:chExt cx="0" cy="0"/>
+        </a:xfrm>
+      </p:grpSpPr>
+      <p:sp>
+        <p:nvSpPr>
+          <p:cNvPr id="2" name="Text 0"/>
+          <p:cNvSpPr txBox="1"/>
+          <p:nvPr/>
+        </p:nvSpPr>
+        <p:spPr>
+          <a:xfrm>
+            <a:off x="548640" y="320040"/>
+            <a:ext cx="10241280" cy="731520"/>
+          </a:xfrm>
+          <a:prstGeom prst="rect">
+            <a:avLst/>
+          </a:prstGeom>
+          <a:noFill/>
+          <a:ln/>
+        </p:spPr>
+        <p:txBody>
+          <a:bodyPr wrap="square" lIns="0" tIns="0" rIns="0" bIns="0" rtlCol="0" anchor="ctr"/>
+          <a:lstStyle/>
+          <a:p>
+            <a:pPr indent="0" marL="0">
+              <a:buNone/>
+            </a:pPr>
+            <a:r>
+              <a:rPr lang="en-US" sz="3400" b="1" dirty="0">
+                <a:solidFill>
+                  <a:srgbClr val="1F2937"/>
+                </a:solidFill>
+                <a:latin typeface="Cambria" pitchFamily="34" charset="0"/>
+                <a:ea typeface="Cambria" pitchFamily="34" charset="-122"/>
+                <a:cs typeface="Cambria" pitchFamily="34" charset="-120"/>
+              </a:rPr>
+              <a:t>Сроки выполнения работ</a:t>
+            </a:r>
+            <a:endParaRPr lang="en-US" sz="3400" dirty="0"/>
+          </a:p>
+        </p:txBody>
+      </p:sp>
+      <p:sp>
+        <p:nvSpPr>
+          <p:cNvPr id="3" name="Shape 1"/>
+          <p:cNvSpPr/>
+          <p:nvPr/>
+        </p:nvSpPr>
+        <p:spPr>
+          <a:xfrm>
+            <a:off x="11155680" y="365760"/>
+            <a:ext cx="594360" cy="594360"/>
+          </a:xfrm>
+          <a:prstGeom prst="ellipse">
+            <a:avLst/>
+          </a:prstGeom>
+          <a:solidFill>
+            <a:srgbClr val="F2C200"/>
+          </a:solidFill>
+          <a:ln/>
+        </p:spPr>
+      </p:sp>
+      <p:sp>
+        <p:nvSpPr>
+          <p:cNvPr id="4" name="Text 2"/>
+          <p:cNvSpPr txBox="1"/>
+          <p:nvPr/>
+        </p:nvSpPr>
+        <p:spPr>
+          <a:xfrm>
+            <a:off x="11155680" y="365760"/>
+            <a:ext cx="594360" cy="594360"/>
+          </a:xfrm>
+          <a:prstGeom prst="rect">
+            <a:avLst/>
+          </a:prstGeom>
+          <a:noFill/>
+          <a:ln/>
+        </p:spPr>
+        <p:txBody>
+          <a:bodyPr wrap="square" lIns="0" tIns="0" rIns="0" bIns="0" rtlCol="0" anchor="ctr"/>
+          <a:lstStyle/>
+          <a:p>
+            <a:pPr algn="ctr" indent="0" marL="0">
+              <a:buNone/>
+            </a:pPr>
+            <a:r>
+              <a:rPr lang="en-US" sz="1600" b="1" dirty="0">
+                <a:solidFill>
+                  <a:srgbClr val="26282E"/>
+                </a:solidFill>
+                <a:latin typeface="Calibri" pitchFamily="34" charset="0"/>
+                <a:ea typeface="Calibri" pitchFamily="34" charset="-122"/>
+                <a:cs typeface="Calibri" pitchFamily="34" charset="-120"/>
+              </a:rPr>
+              <a:t>11</a:t>
+            </a:r>
+            <a:endParaRPr lang="en-US" sz="1600" dirty="0"/>
+          </a:p>
+        </p:txBody>
+      </p:sp>
       <p:sp>
         <p:nvSpPr>
           <p:cNvPr id="5" name="Text 3"/>
@@ -3793,9 +6125,9 @@
 </p:sld>
 </file>
 
-<file path=ppt/slides/slide11.xml><?xml version="1.0" encoding="utf-8"?>
+<file path=ppt/slides/slide12.xml><?xml version="1.0" encoding="utf-8"?>
 <p:sld xmlns:a="http://schemas.openxmlformats.org/drawingml/2006/main" xmlns:r="http://schemas.openxmlformats.org/officeDocument/2006/relationships" xmlns:p="http://schemas.openxmlformats.org/presentationml/2006/main">
-  <p:cSld name="Slide 11">
+  <p:cSld name="Slide 12">
     <p:bg>
       <p:bgPr>
         <a:solidFill>
@@ -8166,7 +10498,7 @@
                 <a:ea typeface="Cambria" pitchFamily="34" charset="-122"/>
                 <a:cs typeface="Cambria" pitchFamily="34" charset="-120"/>
               </a:rPr>
-              <a:t>Актуальность и понятие благоустройства</a:t>
+              <a:t>Объект на Яндекс Картах</a:t>
             </a:r>
             <a:endParaRPr lang="en-US" sz="3400" dirty="0"/>
           </a:p>
@@ -8226,6 +10558,301 @@
                 <a:cs typeface="Calibri" pitchFamily="34" charset="-120"/>
               </a:rPr>
               <a:t>4</a:t>
+            </a:r>
+            <a:endParaRPr lang="en-US" sz="1600" dirty="0"/>
+          </a:p>
+        </p:txBody>
+      </p:sp>
+      <p:pic>
+        <p:nvPicPr>
+          <p:cNvPr id="5" name="Image 0" descr="/home/user/mirigrushek/parking/img/sat.jpg">    </p:cNvPr>
+          <p:cNvPicPr>
+            <a:picLocks noChangeAspect="1"/>
+          </p:cNvPicPr>
+          <p:nvPr/>
+        </p:nvPicPr>
+        <p:blipFill>
+          <a:blip r:embed="rId1"/>
+          <a:stretch>
+            <a:fillRect/>
+          </a:stretch>
+        </p:blipFill>
+        <p:spPr>
+          <a:xfrm>
+            <a:off x="548640" y="1371600"/>
+            <a:ext cx="4754880" cy="3291840"/>
+          </a:xfrm>
+          <a:prstGeom prst="rect">
+            <a:avLst/>
+          </a:prstGeom>
+        </p:spPr>
+      </p:pic>
+      <p:pic>
+        <p:nvPicPr>
+          <p:cNvPr id="6" name="Image 1" descr="/home/user/mirigrushek/parking/img/pano.jpg">    </p:cNvPr>
+          <p:cNvPicPr>
+            <a:picLocks noChangeAspect="1"/>
+          </p:cNvPicPr>
+          <p:nvPr/>
+        </p:nvPicPr>
+        <p:blipFill>
+          <a:blip r:embed="rId2"/>
+          <a:stretch>
+            <a:fillRect/>
+          </a:stretch>
+        </p:blipFill>
+        <p:spPr>
+          <a:xfrm>
+            <a:off x="5577840" y="1371600"/>
+            <a:ext cx="5852160" cy="3300984"/>
+          </a:xfrm>
+          <a:prstGeom prst="rect">
+            <a:avLst/>
+          </a:prstGeom>
+        </p:spPr>
+      </p:pic>
+      <p:sp>
+        <p:nvSpPr>
+          <p:cNvPr id="7" name="Text 3"/>
+          <p:cNvSpPr txBox="1"/>
+          <p:nvPr/>
+        </p:nvSpPr>
+        <p:spPr>
+          <a:xfrm>
+            <a:off x="548640" y="4754880"/>
+            <a:ext cx="4754880" cy="365760"/>
+          </a:xfrm>
+          <a:prstGeom prst="rect">
+            <a:avLst/>
+          </a:prstGeom>
+          <a:noFill/>
+          <a:ln/>
+        </p:spPr>
+        <p:txBody>
+          <a:bodyPr wrap="square" lIns="0" tIns="0" rIns="0" bIns="0" rtlCol="0" anchor="ctr"/>
+          <a:lstStyle/>
+          <a:p>
+            <a:pPr indent="0" marL="0">
+              <a:buNone/>
+            </a:pPr>
+            <a:r>
+              <a:rPr lang="en-US" sz="1400" b="1" dirty="0">
+                <a:solidFill>
+                  <a:srgbClr val="1F2937"/>
+                </a:solidFill>
+                <a:latin typeface="Calibri" pitchFamily="34" charset="0"/>
+                <a:ea typeface="Calibri" pitchFamily="34" charset="-122"/>
+                <a:cs typeface="Calibri" pitchFamily="34" charset="-120"/>
+              </a:rPr>
+              <a:t>Спутниковый снимок</a:t>
+            </a:r>
+            <a:endParaRPr lang="en-US" sz="1400" dirty="0"/>
+          </a:p>
+        </p:txBody>
+      </p:sp>
+      <p:sp>
+        <p:nvSpPr>
+          <p:cNvPr id="8" name="Text 4"/>
+          <p:cNvSpPr txBox="1"/>
+          <p:nvPr/>
+        </p:nvSpPr>
+        <p:spPr>
+          <a:xfrm>
+            <a:off x="5577840" y="4754880"/>
+            <a:ext cx="5852160" cy="365760"/>
+          </a:xfrm>
+          <a:prstGeom prst="rect">
+            <a:avLst/>
+          </a:prstGeom>
+          <a:noFill/>
+          <a:ln/>
+        </p:spPr>
+        <p:txBody>
+          <a:bodyPr wrap="square" lIns="0" tIns="0" rIns="0" bIns="0" rtlCol="0" anchor="ctr"/>
+          <a:lstStyle/>
+          <a:p>
+            <a:pPr indent="0" marL="0">
+              <a:buNone/>
+            </a:pPr>
+            <a:r>
+              <a:rPr lang="en-US" sz="1400" b="1" dirty="0">
+                <a:solidFill>
+                  <a:srgbClr val="1F2937"/>
+                </a:solidFill>
+                <a:latin typeface="Calibri" pitchFamily="34" charset="0"/>
+                <a:ea typeface="Calibri" pitchFamily="34" charset="-122"/>
+                <a:cs typeface="Calibri" pitchFamily="34" charset="-120"/>
+              </a:rPr>
+              <a:t>Панорама с ул. Нахимова</a:t>
+            </a:r>
+            <a:endParaRPr lang="en-US" sz="1400" dirty="0"/>
+          </a:p>
+        </p:txBody>
+      </p:sp>
+      <p:sp>
+        <p:nvSpPr>
+          <p:cNvPr id="9" name="Text 5"/>
+          <p:cNvSpPr txBox="1"/>
+          <p:nvPr/>
+        </p:nvSpPr>
+        <p:spPr>
+          <a:xfrm>
+            <a:off x="548640" y="5943600"/>
+            <a:ext cx="11064240" cy="365760"/>
+          </a:xfrm>
+          <a:prstGeom prst="rect">
+            <a:avLst/>
+          </a:prstGeom>
+          <a:noFill/>
+          <a:ln/>
+        </p:spPr>
+        <p:txBody>
+          <a:bodyPr wrap="square" lIns="0" tIns="0" rIns="0" bIns="0" rtlCol="0" anchor="ctr"/>
+          <a:lstStyle/>
+          <a:p>
+            <a:pPr indent="0" marL="0">
+              <a:buNone/>
+            </a:pPr>
+            <a:r>
+              <a:rPr lang="en-US" sz="1200" dirty="0">
+                <a:solidFill>
+                  <a:srgbClr val="6B7280"/>
+                </a:solidFill>
+                <a:latin typeface="Calibri" pitchFamily="34" charset="0"/>
+                <a:ea typeface="Calibri" pitchFamily="34" charset="-122"/>
+                <a:cs typeface="Calibri" pitchFamily="34" charset="-120"/>
+              </a:rPr>
+              <a:t>Источник: Яндекс Карты (yandex.ru/maps), Санкт-Петербург, ул. Нахимова, д. 20</a:t>
+            </a:r>
+            <a:endParaRPr lang="en-US" sz="1200" dirty="0"/>
+          </a:p>
+        </p:txBody>
+      </p:sp>
+    </p:spTree>
+  </p:cSld>
+  <p:clrMapOvr>
+    <a:masterClrMapping/>
+  </p:clrMapOvr>
+</p:sld>
+</file>
+
+<file path=ppt/slides/slide5.xml><?xml version="1.0" encoding="utf-8"?>
+<p:sld xmlns:a="http://schemas.openxmlformats.org/drawingml/2006/main" xmlns:r="http://schemas.openxmlformats.org/officeDocument/2006/relationships" xmlns:p="http://schemas.openxmlformats.org/presentationml/2006/main">
+  <p:cSld name="Slide 5">
+    <p:bg>
+      <p:bgPr>
+        <a:solidFill>
+          <a:srgbClr val="FFFFFF"/>
+        </a:solidFill>
+      </p:bgPr>
+    </p:bg>
+    <p:spTree>
+      <p:nvGrpSpPr>
+        <p:cNvPr id="1" name=""/>
+        <p:cNvGrpSpPr/>
+        <p:nvPr/>
+      </p:nvGrpSpPr>
+      <p:grpSpPr>
+        <a:xfrm>
+          <a:off x="0" y="0"/>
+          <a:ext cx="0" cy="0"/>
+          <a:chOff x="0" y="0"/>
+          <a:chExt cx="0" cy="0"/>
+        </a:xfrm>
+      </p:grpSpPr>
+      <p:sp>
+        <p:nvSpPr>
+          <p:cNvPr id="2" name="Text 0"/>
+          <p:cNvSpPr txBox="1"/>
+          <p:nvPr/>
+        </p:nvSpPr>
+        <p:spPr>
+          <a:xfrm>
+            <a:off x="548640" y="320040"/>
+            <a:ext cx="10241280" cy="731520"/>
+          </a:xfrm>
+          <a:prstGeom prst="rect">
+            <a:avLst/>
+          </a:prstGeom>
+          <a:noFill/>
+          <a:ln/>
+        </p:spPr>
+        <p:txBody>
+          <a:bodyPr wrap="square" lIns="0" tIns="0" rIns="0" bIns="0" rtlCol="0" anchor="ctr"/>
+          <a:lstStyle/>
+          <a:p>
+            <a:pPr indent="0" marL="0">
+              <a:buNone/>
+            </a:pPr>
+            <a:r>
+              <a:rPr lang="en-US" sz="3400" b="1" dirty="0">
+                <a:solidFill>
+                  <a:srgbClr val="1F2937"/>
+                </a:solidFill>
+                <a:latin typeface="Cambria" pitchFamily="34" charset="0"/>
+                <a:ea typeface="Cambria" pitchFamily="34" charset="-122"/>
+                <a:cs typeface="Cambria" pitchFamily="34" charset="-120"/>
+              </a:rPr>
+              <a:t>Актуальность и понятие благоустройства</a:t>
+            </a:r>
+            <a:endParaRPr lang="en-US" sz="3400" dirty="0"/>
+          </a:p>
+        </p:txBody>
+      </p:sp>
+      <p:sp>
+        <p:nvSpPr>
+          <p:cNvPr id="3" name="Shape 1"/>
+          <p:cNvSpPr/>
+          <p:nvPr/>
+        </p:nvSpPr>
+        <p:spPr>
+          <a:xfrm>
+            <a:off x="11155680" y="365760"/>
+            <a:ext cx="594360" cy="594360"/>
+          </a:xfrm>
+          <a:prstGeom prst="ellipse">
+            <a:avLst/>
+          </a:prstGeom>
+          <a:solidFill>
+            <a:srgbClr val="F2C200"/>
+          </a:solidFill>
+          <a:ln/>
+        </p:spPr>
+      </p:sp>
+      <p:sp>
+        <p:nvSpPr>
+          <p:cNvPr id="4" name="Text 2"/>
+          <p:cNvSpPr txBox="1"/>
+          <p:nvPr/>
+        </p:nvSpPr>
+        <p:spPr>
+          <a:xfrm>
+            <a:off x="11155680" y="365760"/>
+            <a:ext cx="594360" cy="594360"/>
+          </a:xfrm>
+          <a:prstGeom prst="rect">
+            <a:avLst/>
+          </a:prstGeom>
+          <a:noFill/>
+          <a:ln/>
+        </p:spPr>
+        <p:txBody>
+          <a:bodyPr wrap="square" lIns="0" tIns="0" rIns="0" bIns="0" rtlCol="0" anchor="ctr"/>
+          <a:lstStyle/>
+          <a:p>
+            <a:pPr algn="ctr" indent="0" marL="0">
+              <a:buNone/>
+            </a:pPr>
+            <a:r>
+              <a:rPr lang="en-US" sz="1600" b="1" dirty="0">
+                <a:solidFill>
+                  <a:srgbClr val="26282E"/>
+                </a:solidFill>
+                <a:latin typeface="Calibri" pitchFamily="34" charset="0"/>
+                <a:ea typeface="Calibri" pitchFamily="34" charset="-122"/>
+                <a:cs typeface="Calibri" pitchFamily="34" charset="-120"/>
+              </a:rPr>
+              <a:t>5</a:t>
             </a:r>
             <a:endParaRPr lang="en-US" sz="1600" dirty="0"/>
           </a:p>
@@ -8717,9 +11344,9 @@
 </p:sld>
 </file>
 
-<file path=ppt/slides/slide5.xml><?xml version="1.0" encoding="utf-8"?>
+<file path=ppt/slides/slide6.xml><?xml version="1.0" encoding="utf-8"?>
 <p:sld xmlns:a="http://schemas.openxmlformats.org/drawingml/2006/main" xmlns:r="http://schemas.openxmlformats.org/officeDocument/2006/relationships" xmlns:p="http://schemas.openxmlformats.org/presentationml/2006/main">
-  <p:cSld name="Slide 5">
+  <p:cSld name="Slide 6">
     <p:bg>
       <p:bgPr>
         <a:solidFill>
@@ -8833,7 +11460,7 @@
                 <a:ea typeface="Calibri" pitchFamily="34" charset="-122"/>
                 <a:cs typeface="Calibri" pitchFamily="34" charset="-120"/>
               </a:rPr>
-              <a:t>5</a:t>
+              <a:t>6</a:t>
             </a:r>
             <a:endParaRPr lang="en-US" sz="1600" dirty="0"/>
           </a:p>
@@ -9717,9 +12344,9 @@
 </p:sld>
 </file>
 
-<file path=ppt/slides/slide6.xml><?xml version="1.0" encoding="utf-8"?>
+<file path=ppt/slides/slide7.xml><?xml version="1.0" encoding="utf-8"?>
 <p:sld xmlns:a="http://schemas.openxmlformats.org/drawingml/2006/main" xmlns:r="http://schemas.openxmlformats.org/officeDocument/2006/relationships" xmlns:p="http://schemas.openxmlformats.org/presentationml/2006/main">
-  <p:cSld name="Slide 6">
+  <p:cSld name="Slide 7">
     <p:bg>
       <p:bgPr>
         <a:solidFill>
@@ -9833,7 +12460,7 @@
                 <a:ea typeface="Calibri" pitchFamily="34" charset="-122"/>
                 <a:cs typeface="Calibri" pitchFamily="34" charset="-120"/>
               </a:rPr>
-              <a:t>6</a:t>
+              <a:t>7</a:t>
             </a:r>
             <a:endParaRPr lang="en-US" sz="1600" dirty="0"/>
           </a:p>
@@ -13121,9 +15748,9 @@
 </p:sld>
 </file>
 
-<file path=ppt/slides/slide7.xml><?xml version="1.0" encoding="utf-8"?>
+<file path=ppt/slides/slide8.xml><?xml version="1.0" encoding="utf-8"?>
 <p:sld xmlns:a="http://schemas.openxmlformats.org/drawingml/2006/main" xmlns:r="http://schemas.openxmlformats.org/officeDocument/2006/relationships" xmlns:p="http://schemas.openxmlformats.org/presentationml/2006/main">
-  <p:cSld name="Slide 7">
+  <p:cSld name="Slide 8">
     <p:bg>
       <p:bgPr>
         <a:solidFill>
@@ -13237,7 +15864,7 @@
                 <a:ea typeface="Calibri" pitchFamily="34" charset="-122"/>
                 <a:cs typeface="Calibri" pitchFamily="34" charset="-120"/>
               </a:rPr>
-              <a:t>7</a:t>
+              <a:t>8</a:t>
             </a:r>
             <a:endParaRPr lang="en-US" sz="1600" dirty="0"/>
           </a:p>
@@ -13245,7 +15872,7 @@
       </p:sp>
       <p:graphicFrame>
         <p:nvGraphicFramePr>
-          <p:cNvPr id="8" name="Table 0"/>
+          <p:cNvPr id="9" name="Table 0"/>
           <p:cNvGraphicFramePr>
             <a:graphicFrameLocks noGrp="1"/>
           </p:cNvGraphicFramePr>
@@ -15868,9 +18495,9 @@
 </p:sld>
 </file>
 
-<file path=ppt/slides/slide8.xml><?xml version="1.0" encoding="utf-8"?>
+<file path=ppt/slides/slide9.xml><?xml version="1.0" encoding="utf-8"?>
 <p:sld xmlns:a="http://schemas.openxmlformats.org/drawingml/2006/main" xmlns:r="http://schemas.openxmlformats.org/officeDocument/2006/relationships" xmlns:p="http://schemas.openxmlformats.org/presentationml/2006/main">
-  <p:cSld name="Slide 8">
+  <p:cSld name="Slide 9">
     <p:bg>
       <p:bgPr>
         <a:solidFill>
@@ -15984,7 +18611,7 @@
                 <a:ea typeface="Calibri" pitchFamily="34" charset="-122"/>
                 <a:cs typeface="Calibri" pitchFamily="34" charset="-120"/>
               </a:rPr>
-              <a:t>8</a:t>
+              <a:t>9</a:t>
             </a:r>
             <a:endParaRPr lang="en-US" sz="1600" dirty="0"/>
           </a:p>
@@ -15992,7 +18619,7 @@
       </p:sp>
       <p:graphicFrame>
         <p:nvGraphicFramePr>
-          <p:cNvPr id="9" name="Table 0"/>
+          <p:cNvPr id="10" name="Table 0"/>
           <p:cNvGraphicFramePr>
             <a:graphicFrameLocks noGrp="1"/>
           </p:cNvGraphicFramePr>
@@ -18550,2249 +21177,6 @@
               <a:t>Бригада: 9 человек, пик — 7 человек на объекте одновременно.</a:t>
             </a:r>
             <a:endParaRPr lang="en-US" sz="1400" dirty="0"/>
-          </a:p>
-        </p:txBody>
-      </p:sp>
-    </p:spTree>
-  </p:cSld>
-  <p:clrMapOvr>
-    <a:masterClrMapping/>
-  </p:clrMapOvr>
-</p:sld>
-</file>
-
-<file path=ppt/slides/slide9.xml><?xml version="1.0" encoding="utf-8"?>
-<p:sld xmlns:a="http://schemas.openxmlformats.org/drawingml/2006/main" xmlns:r="http://schemas.openxmlformats.org/officeDocument/2006/relationships" xmlns:p="http://schemas.openxmlformats.org/presentationml/2006/main">
-  <p:cSld name="Slide 9">
-    <p:bg>
-      <p:bgPr>
-        <a:solidFill>
-          <a:srgbClr val="FFFFFF"/>
-        </a:solidFill>
-      </p:bgPr>
-    </p:bg>
-    <p:spTree>
-      <p:nvGrpSpPr>
-        <p:cNvPr id="1" name=""/>
-        <p:cNvGrpSpPr/>
-        <p:nvPr/>
-      </p:nvGrpSpPr>
-      <p:grpSpPr>
-        <a:xfrm>
-          <a:off x="0" y="0"/>
-          <a:ext cx="0" cy="0"/>
-          <a:chOff x="0" y="0"/>
-          <a:chExt cx="0" cy="0"/>
-        </a:xfrm>
-      </p:grpSpPr>
-      <p:sp>
-        <p:nvSpPr>
-          <p:cNvPr id="2" name="Text 0"/>
-          <p:cNvSpPr txBox="1"/>
-          <p:nvPr/>
-        </p:nvSpPr>
-        <p:spPr>
-          <a:xfrm>
-            <a:off x="548640" y="320040"/>
-            <a:ext cx="10241280" cy="731520"/>
-          </a:xfrm>
-          <a:prstGeom prst="rect">
-            <a:avLst/>
-          </a:prstGeom>
-          <a:noFill/>
-          <a:ln/>
-        </p:spPr>
-        <p:txBody>
-          <a:bodyPr wrap="square" lIns="0" tIns="0" rIns="0" bIns="0" rtlCol="0" anchor="ctr"/>
-          <a:lstStyle/>
-          <a:p>
-            <a:pPr indent="0" marL="0">
-              <a:buNone/>
-            </a:pPr>
-            <a:r>
-              <a:rPr lang="en-US" sz="3400" b="1" dirty="0">
-                <a:solidFill>
-                  <a:srgbClr val="1F2937"/>
-                </a:solidFill>
-                <a:latin typeface="Cambria" pitchFamily="34" charset="0"/>
-                <a:ea typeface="Cambria" pitchFamily="34" charset="-122"/>
-                <a:cs typeface="Cambria" pitchFamily="34" charset="-120"/>
-              </a:rPr>
-              <a:t>Смета проекта</a:t>
-            </a:r>
-            <a:endParaRPr lang="en-US" sz="3400" dirty="0"/>
-          </a:p>
-        </p:txBody>
-      </p:sp>
-      <p:sp>
-        <p:nvSpPr>
-          <p:cNvPr id="3" name="Shape 1"/>
-          <p:cNvSpPr/>
-          <p:nvPr/>
-        </p:nvSpPr>
-        <p:spPr>
-          <a:xfrm>
-            <a:off x="11155680" y="365760"/>
-            <a:ext cx="594360" cy="594360"/>
-          </a:xfrm>
-          <a:prstGeom prst="ellipse">
-            <a:avLst/>
-          </a:prstGeom>
-          <a:solidFill>
-            <a:srgbClr val="F2C200"/>
-          </a:solidFill>
-          <a:ln/>
-        </p:spPr>
-      </p:sp>
-      <p:sp>
-        <p:nvSpPr>
-          <p:cNvPr id="4" name="Text 2"/>
-          <p:cNvSpPr txBox="1"/>
-          <p:nvPr/>
-        </p:nvSpPr>
-        <p:spPr>
-          <a:xfrm>
-            <a:off x="11155680" y="365760"/>
-            <a:ext cx="594360" cy="594360"/>
-          </a:xfrm>
-          <a:prstGeom prst="rect">
-            <a:avLst/>
-          </a:prstGeom>
-          <a:noFill/>
-          <a:ln/>
-        </p:spPr>
-        <p:txBody>
-          <a:bodyPr wrap="square" lIns="0" tIns="0" rIns="0" bIns="0" rtlCol="0" anchor="ctr"/>
-          <a:lstStyle/>
-          <a:p>
-            <a:pPr algn="ctr" indent="0" marL="0">
-              <a:buNone/>
-            </a:pPr>
-            <a:r>
-              <a:rPr lang="en-US" sz="1600" b="1" dirty="0">
-                <a:solidFill>
-                  <a:srgbClr val="26282E"/>
-                </a:solidFill>
-                <a:latin typeface="Calibri" pitchFamily="34" charset="0"/>
-                <a:ea typeface="Calibri" pitchFamily="34" charset="-122"/>
-                <a:cs typeface="Calibri" pitchFamily="34" charset="-120"/>
-              </a:rPr>
-              <a:t>9</a:t>
-            </a:r>
-            <a:endParaRPr lang="en-US" sz="1600" dirty="0"/>
-          </a:p>
-        </p:txBody>
-      </p:sp>
-      <p:graphicFrame>
-        <p:nvGraphicFramePr>
-          <p:cNvPr id="10" name="Table 0"/>
-          <p:cNvGraphicFramePr>
-            <a:graphicFrameLocks noGrp="1"/>
-          </p:cNvGraphicFramePr>
-          <p:nvPr>
-            <p:extLst>
-              <p:ext uri="{D42A27DB-BD31-4B8C-83A1-F6EECF244321}">
-                <p14:modId xmlns:p14="http://schemas.microsoft.com/office/powerpoint/2010/main" val="1579011935"/>
-              </p:ext>
-            </p:extLst>
-          </p:nvPr>
-        </p:nvGraphicFramePr>
-        <p:xfrm>
-          <a:off x="548640" y="1280160"/>
-          <a:ext cx="6766560" cy="914400"/>
-        </p:xfrm>
-        <a:graphic>
-          <a:graphicData uri="http://schemas.openxmlformats.org/drawingml/2006/table">
-            <a:tbl>
-              <a:tblPr/>
-              <a:tblGrid>
-                <a:gridCol w="5303520"/>
-                <a:gridCol w="1463040"/>
-              </a:tblGrid>
-              <a:tr h="374904">
-                <a:tc>
-                  <a:txBody>
-                    <a:bodyPr/>
-                    <a:lstStyle/>
-                    <a:p>
-                      <a:pPr indent="0" marL="0">
-                        <a:buNone/>
-                      </a:pPr>
-                      <a:r>
-                        <a:rPr lang="en-US" sz="1200" b="1" dirty="0">
-                          <a:solidFill>
-                            <a:srgbClr val="FFFFFF"/>
-                          </a:solidFill>
-                          <a:latin typeface="Calibri" pitchFamily="34" charset="0"/>
-                          <a:ea typeface="Calibri" pitchFamily="34" charset="-122"/>
-                          <a:cs typeface="Calibri" pitchFamily="34" charset="-120"/>
-                        </a:rPr>
-                        <a:t>Материалы и работы</a:t>
-                      </a:r>
-                      <a:endParaRPr lang="en-US" sz="1200" dirty="0">
-                        <a:latin typeface="Calibri" charset="0"/>
-                        <a:ea typeface="Calibri" charset="0"/>
-                        <a:cs typeface="Calibri" charset="0"/>
-                      </a:endParaRPr>
-                    </a:p>
-                  </a:txBody>
-                  <a:tcPr marL="91440" marR="91440" marT="45720" marB="45720" anchor="ctr">
-                    <a:lnL w="12700" cap="flat" cmpd="sng" algn="ctr">
-                      <a:solidFill>
-                        <a:srgbClr val="E5E7EB"/>
-                      </a:solidFill>
-                      <a:prstDash val="solid"/>
-                      <a:round/>
-                      <a:headEnd type="none" w="med" len="med"/>
-                      <a:tailEnd type="none" w="med" len="med"/>
-                    </a:lnL>
-                    <a:lnR w="12700" cap="flat" cmpd="sng" algn="ctr">
-                      <a:solidFill>
-                        <a:srgbClr val="E5E7EB"/>
-                      </a:solidFill>
-                      <a:prstDash val="solid"/>
-                      <a:round/>
-                      <a:headEnd type="none" w="med" len="med"/>
-                      <a:tailEnd type="none" w="med" len="med"/>
-                    </a:lnR>
-                    <a:lnT w="12700" cap="flat" cmpd="sng" algn="ctr">
-                      <a:solidFill>
-                        <a:srgbClr val="E5E7EB"/>
-                      </a:solidFill>
-                      <a:prstDash val="solid"/>
-                      <a:round/>
-                      <a:headEnd type="none" w="med" len="med"/>
-                      <a:tailEnd type="none" w="med" len="med"/>
-                    </a:lnT>
-                    <a:lnB w="12700" cap="flat" cmpd="sng" algn="ctr">
-                      <a:solidFill>
-                        <a:srgbClr val="E5E7EB"/>
-                      </a:solidFill>
-                      <a:prstDash val="solid"/>
-                      <a:round/>
-                      <a:headEnd type="none" w="med" len="med"/>
-                      <a:tailEnd type="none" w="med" len="med"/>
-                    </a:lnB>
-                    <a:solidFill>
-                      <a:srgbClr val="26282E"/>
-                    </a:solidFill>
-                  </a:tcPr>
-                </a:tc>
-                <a:tc>
-                  <a:txBody>
-                    <a:bodyPr/>
-                    <a:lstStyle/>
-                    <a:p>
-                      <a:pPr indent="0" marL="0">
-                        <a:buNone/>
-                      </a:pPr>
-                      <a:r>
-                        <a:rPr lang="en-US" sz="1200" b="1" dirty="0">
-                          <a:solidFill>
-                            <a:srgbClr val="FFFFFF"/>
-                          </a:solidFill>
-                          <a:latin typeface="Calibri" pitchFamily="34" charset="0"/>
-                          <a:ea typeface="Calibri" pitchFamily="34" charset="-122"/>
-                          <a:cs typeface="Calibri" pitchFamily="34" charset="-120"/>
-                        </a:rPr>
-                        <a:t>Сумма, ₽</a:t>
-                      </a:r>
-                      <a:endParaRPr lang="en-US" sz="1200" dirty="0">
-                        <a:latin typeface="Calibri" charset="0"/>
-                        <a:ea typeface="Calibri" charset="0"/>
-                        <a:cs typeface="Calibri" charset="0"/>
-                      </a:endParaRPr>
-                    </a:p>
-                  </a:txBody>
-                  <a:tcPr marL="91440" marR="91440" marT="45720" marB="45720" anchor="ctr">
-                    <a:lnL w="12700" cap="flat" cmpd="sng" algn="ctr">
-                      <a:solidFill>
-                        <a:srgbClr val="E5E7EB"/>
-                      </a:solidFill>
-                      <a:prstDash val="solid"/>
-                      <a:round/>
-                      <a:headEnd type="none" w="med" len="med"/>
-                      <a:tailEnd type="none" w="med" len="med"/>
-                    </a:lnL>
-                    <a:lnR w="12700" cap="flat" cmpd="sng" algn="ctr">
-                      <a:solidFill>
-                        <a:srgbClr val="E5E7EB"/>
-                      </a:solidFill>
-                      <a:prstDash val="solid"/>
-                      <a:round/>
-                      <a:headEnd type="none" w="med" len="med"/>
-                      <a:tailEnd type="none" w="med" len="med"/>
-                    </a:lnR>
-                    <a:lnT w="12700" cap="flat" cmpd="sng" algn="ctr">
-                      <a:solidFill>
-                        <a:srgbClr val="E5E7EB"/>
-                      </a:solidFill>
-                      <a:prstDash val="solid"/>
-                      <a:round/>
-                      <a:headEnd type="none" w="med" len="med"/>
-                      <a:tailEnd type="none" w="med" len="med"/>
-                    </a:lnT>
-                    <a:lnB w="12700" cap="flat" cmpd="sng" algn="ctr">
-                      <a:solidFill>
-                        <a:srgbClr val="E5E7EB"/>
-                      </a:solidFill>
-                      <a:prstDash val="solid"/>
-                      <a:round/>
-                      <a:headEnd type="none" w="med" len="med"/>
-                      <a:tailEnd type="none" w="med" len="med"/>
-                    </a:lnB>
-                    <a:solidFill>
-                      <a:srgbClr val="26282E"/>
-                    </a:solidFill>
-                  </a:tcPr>
-                </a:tc>
-              </a:tr>
-              <a:tr h="374904">
-                <a:tc>
-                  <a:txBody>
-                    <a:bodyPr/>
-                    <a:lstStyle/>
-                    <a:p>
-                      <a:pPr indent="0" marL="0">
-                        <a:buNone/>
-                      </a:pPr>
-                      <a:r>
-                        <a:rPr lang="en-US" sz="1200" dirty="0">
-                          <a:solidFill>
-                            <a:srgbClr val="1F2937"/>
-                          </a:solidFill>
-                          <a:latin typeface="Calibri" pitchFamily="34" charset="0"/>
-                          <a:ea typeface="Calibri" pitchFamily="34" charset="-122"/>
-                          <a:cs typeface="Calibri" pitchFamily="34" charset="-120"/>
-                        </a:rPr>
-                        <a:t>Демонтаж озеленения, корчевание 6 пней, срезка грунта 90 м³</a:t>
-                      </a:r>
-                      <a:endParaRPr lang="en-US" sz="1200" dirty="0">
-                        <a:latin typeface="Calibri" charset="0"/>
-                        <a:ea typeface="Calibri" charset="0"/>
-                        <a:cs typeface="Calibri" charset="0"/>
-                      </a:endParaRPr>
-                    </a:p>
-                  </a:txBody>
-                  <a:tcPr marL="91440" marR="91440" marT="45720" marB="45720" anchor="ctr">
-                    <a:lnL w="12700" cap="flat" cmpd="sng" algn="ctr">
-                      <a:solidFill>
-                        <a:srgbClr val="E5E7EB"/>
-                      </a:solidFill>
-                      <a:prstDash val="solid"/>
-                      <a:round/>
-                      <a:headEnd type="none" w="med" len="med"/>
-                      <a:tailEnd type="none" w="med" len="med"/>
-                    </a:lnL>
-                    <a:lnR w="12700" cap="flat" cmpd="sng" algn="ctr">
-                      <a:solidFill>
-                        <a:srgbClr val="E5E7EB"/>
-                      </a:solidFill>
-                      <a:prstDash val="solid"/>
-                      <a:round/>
-                      <a:headEnd type="none" w="med" len="med"/>
-                      <a:tailEnd type="none" w="med" len="med"/>
-                    </a:lnR>
-                    <a:lnT w="12700" cap="flat" cmpd="sng" algn="ctr">
-                      <a:solidFill>
-                        <a:srgbClr val="E5E7EB"/>
-                      </a:solidFill>
-                      <a:prstDash val="solid"/>
-                      <a:round/>
-                      <a:headEnd type="none" w="med" len="med"/>
-                      <a:tailEnd type="none" w="med" len="med"/>
-                    </a:lnT>
-                    <a:lnB w="12700" cap="flat" cmpd="sng" algn="ctr">
-                      <a:solidFill>
-                        <a:srgbClr val="E5E7EB"/>
-                      </a:solidFill>
-                      <a:prstDash val="solid"/>
-                      <a:round/>
-                      <a:headEnd type="none" w="med" len="med"/>
-                      <a:tailEnd type="none" w="med" len="med"/>
-                    </a:lnB>
-                  </a:tcPr>
-                </a:tc>
-                <a:tc>
-                  <a:txBody>
-                    <a:bodyPr/>
-                    <a:lstStyle/>
-                    <a:p>
-                      <a:pPr indent="0" marL="0">
-                        <a:buNone/>
-                      </a:pPr>
-                      <a:r>
-                        <a:rPr lang="en-US" sz="1200" dirty="0">
-                          <a:solidFill>
-                            <a:srgbClr val="1F2937"/>
-                          </a:solidFill>
-                          <a:latin typeface="Calibri" pitchFamily="34" charset="0"/>
-                          <a:ea typeface="Calibri" pitchFamily="34" charset="-122"/>
-                          <a:cs typeface="Calibri" pitchFamily="34" charset="-120"/>
-                        </a:rPr>
-                        <a:t>133 500</a:t>
-                      </a:r>
-                      <a:endParaRPr lang="en-US" sz="1200" dirty="0">
-                        <a:latin typeface="Calibri" charset="0"/>
-                        <a:ea typeface="Calibri" charset="0"/>
-                        <a:cs typeface="Calibri" charset="0"/>
-                      </a:endParaRPr>
-                    </a:p>
-                  </a:txBody>
-                  <a:tcPr marL="91440" marR="91440" marT="45720" marB="45720" anchor="ctr">
-                    <a:lnL w="12700" cap="flat" cmpd="sng" algn="ctr">
-                      <a:solidFill>
-                        <a:srgbClr val="E5E7EB"/>
-                      </a:solidFill>
-                      <a:prstDash val="solid"/>
-                      <a:round/>
-                      <a:headEnd type="none" w="med" len="med"/>
-                      <a:tailEnd type="none" w="med" len="med"/>
-                    </a:lnL>
-                    <a:lnR w="12700" cap="flat" cmpd="sng" algn="ctr">
-                      <a:solidFill>
-                        <a:srgbClr val="E5E7EB"/>
-                      </a:solidFill>
-                      <a:prstDash val="solid"/>
-                      <a:round/>
-                      <a:headEnd type="none" w="med" len="med"/>
-                      <a:tailEnd type="none" w="med" len="med"/>
-                    </a:lnR>
-                    <a:lnT w="12700" cap="flat" cmpd="sng" algn="ctr">
-                      <a:solidFill>
-                        <a:srgbClr val="E5E7EB"/>
-                      </a:solidFill>
-                      <a:prstDash val="solid"/>
-                      <a:round/>
-                      <a:headEnd type="none" w="med" len="med"/>
-                      <a:tailEnd type="none" w="med" len="med"/>
-                    </a:lnT>
-                    <a:lnB w="12700" cap="flat" cmpd="sng" algn="ctr">
-                      <a:solidFill>
-                        <a:srgbClr val="E5E7EB"/>
-                      </a:solidFill>
-                      <a:prstDash val="solid"/>
-                      <a:round/>
-                      <a:headEnd type="none" w="med" len="med"/>
-                      <a:tailEnd type="none" w="med" len="med"/>
-                    </a:lnB>
-                  </a:tcPr>
-                </a:tc>
-              </a:tr>
-              <a:tr h="374904">
-                <a:tc>
-                  <a:txBody>
-                    <a:bodyPr/>
-                    <a:lstStyle/>
-                    <a:p>
-                      <a:pPr indent="0" marL="0">
-                        <a:buNone/>
-                      </a:pPr>
-                      <a:r>
-                        <a:rPr lang="en-US" sz="1200" dirty="0">
-                          <a:solidFill>
-                            <a:srgbClr val="1F2937"/>
-                          </a:solidFill>
-                          <a:latin typeface="Calibri" pitchFamily="34" charset="0"/>
-                          <a:ea typeface="Calibri" pitchFamily="34" charset="-122"/>
-                          <a:cs typeface="Calibri" pitchFamily="34" charset="-120"/>
-                        </a:rPr>
-                        <a:t>Демонтаж бордюра и шлагбаума</a:t>
-                      </a:r>
-                      <a:endParaRPr lang="en-US" sz="1200" dirty="0">
-                        <a:latin typeface="Calibri" charset="0"/>
-                        <a:ea typeface="Calibri" charset="0"/>
-                        <a:cs typeface="Calibri" charset="0"/>
-                      </a:endParaRPr>
-                    </a:p>
-                  </a:txBody>
-                  <a:tcPr marL="91440" marR="91440" marT="45720" marB="45720" anchor="ctr">
-                    <a:lnL w="12700" cap="flat" cmpd="sng" algn="ctr">
-                      <a:solidFill>
-                        <a:srgbClr val="E5E7EB"/>
-                      </a:solidFill>
-                      <a:prstDash val="solid"/>
-                      <a:round/>
-                      <a:headEnd type="none" w="med" len="med"/>
-                      <a:tailEnd type="none" w="med" len="med"/>
-                    </a:lnL>
-                    <a:lnR w="12700" cap="flat" cmpd="sng" algn="ctr">
-                      <a:solidFill>
-                        <a:srgbClr val="E5E7EB"/>
-                      </a:solidFill>
-                      <a:prstDash val="solid"/>
-                      <a:round/>
-                      <a:headEnd type="none" w="med" len="med"/>
-                      <a:tailEnd type="none" w="med" len="med"/>
-                    </a:lnR>
-                    <a:lnT w="12700" cap="flat" cmpd="sng" algn="ctr">
-                      <a:solidFill>
-                        <a:srgbClr val="E5E7EB"/>
-                      </a:solidFill>
-                      <a:prstDash val="solid"/>
-                      <a:round/>
-                      <a:headEnd type="none" w="med" len="med"/>
-                      <a:tailEnd type="none" w="med" len="med"/>
-                    </a:lnT>
-                    <a:lnB w="12700" cap="flat" cmpd="sng" algn="ctr">
-                      <a:solidFill>
-                        <a:srgbClr val="E5E7EB"/>
-                      </a:solidFill>
-                      <a:prstDash val="solid"/>
-                      <a:round/>
-                      <a:headEnd type="none" w="med" len="med"/>
-                      <a:tailEnd type="none" w="med" len="med"/>
-                    </a:lnB>
-                  </a:tcPr>
-                </a:tc>
-                <a:tc>
-                  <a:txBody>
-                    <a:bodyPr/>
-                    <a:lstStyle/>
-                    <a:p>
-                      <a:pPr indent="0" marL="0">
-                        <a:buNone/>
-                      </a:pPr>
-                      <a:r>
-                        <a:rPr lang="en-US" sz="1200" dirty="0">
-                          <a:solidFill>
-                            <a:srgbClr val="1F2937"/>
-                          </a:solidFill>
-                          <a:latin typeface="Calibri" pitchFamily="34" charset="0"/>
-                          <a:ea typeface="Calibri" pitchFamily="34" charset="-122"/>
-                          <a:cs typeface="Calibri" pitchFamily="34" charset="-120"/>
-                        </a:rPr>
-                        <a:t>45 000</a:t>
-                      </a:r>
-                      <a:endParaRPr lang="en-US" sz="1200" dirty="0">
-                        <a:latin typeface="Calibri" charset="0"/>
-                        <a:ea typeface="Calibri" charset="0"/>
-                        <a:cs typeface="Calibri" charset="0"/>
-                      </a:endParaRPr>
-                    </a:p>
-                  </a:txBody>
-                  <a:tcPr marL="91440" marR="91440" marT="45720" marB="45720" anchor="ctr">
-                    <a:lnL w="12700" cap="flat" cmpd="sng" algn="ctr">
-                      <a:solidFill>
-                        <a:srgbClr val="E5E7EB"/>
-                      </a:solidFill>
-                      <a:prstDash val="solid"/>
-                      <a:round/>
-                      <a:headEnd type="none" w="med" len="med"/>
-                      <a:tailEnd type="none" w="med" len="med"/>
-                    </a:lnL>
-                    <a:lnR w="12700" cap="flat" cmpd="sng" algn="ctr">
-                      <a:solidFill>
-                        <a:srgbClr val="E5E7EB"/>
-                      </a:solidFill>
-                      <a:prstDash val="solid"/>
-                      <a:round/>
-                      <a:headEnd type="none" w="med" len="med"/>
-                      <a:tailEnd type="none" w="med" len="med"/>
-                    </a:lnR>
-                    <a:lnT w="12700" cap="flat" cmpd="sng" algn="ctr">
-                      <a:solidFill>
-                        <a:srgbClr val="E5E7EB"/>
-                      </a:solidFill>
-                      <a:prstDash val="solid"/>
-                      <a:round/>
-                      <a:headEnd type="none" w="med" len="med"/>
-                      <a:tailEnd type="none" w="med" len="med"/>
-                    </a:lnT>
-                    <a:lnB w="12700" cap="flat" cmpd="sng" algn="ctr">
-                      <a:solidFill>
-                        <a:srgbClr val="E5E7EB"/>
-                      </a:solidFill>
-                      <a:prstDash val="solid"/>
-                      <a:round/>
-                      <a:headEnd type="none" w="med" len="med"/>
-                      <a:tailEnd type="none" w="med" len="med"/>
-                    </a:lnB>
-                  </a:tcPr>
-                </a:tc>
-              </a:tr>
-              <a:tr h="374904">
-                <a:tc>
-                  <a:txBody>
-                    <a:bodyPr/>
-                    <a:lstStyle/>
-                    <a:p>
-                      <a:pPr indent="0" marL="0">
-                        <a:buNone/>
-                      </a:pPr>
-                      <a:r>
-                        <a:rPr lang="en-US" sz="1200" dirty="0">
-                          <a:solidFill>
-                            <a:srgbClr val="1F2937"/>
-                          </a:solidFill>
-                          <a:latin typeface="Calibri" pitchFamily="34" charset="0"/>
-                          <a:ea typeface="Calibri" pitchFamily="34" charset="-122"/>
-                          <a:cs typeface="Calibri" pitchFamily="34" charset="-120"/>
-                        </a:rPr>
-                        <a:t>Геотекстиль 450 м², песок 90 м³, щебень 113 м³</a:t>
-                      </a:r>
-                      <a:endParaRPr lang="en-US" sz="1200" dirty="0">
-                        <a:latin typeface="Calibri" charset="0"/>
-                        <a:ea typeface="Calibri" charset="0"/>
-                        <a:cs typeface="Calibri" charset="0"/>
-                      </a:endParaRPr>
-                    </a:p>
-                  </a:txBody>
-                  <a:tcPr marL="91440" marR="91440" marT="45720" marB="45720" anchor="ctr">
-                    <a:lnL w="12700" cap="flat" cmpd="sng" algn="ctr">
-                      <a:solidFill>
-                        <a:srgbClr val="E5E7EB"/>
-                      </a:solidFill>
-                      <a:prstDash val="solid"/>
-                      <a:round/>
-                      <a:headEnd type="none" w="med" len="med"/>
-                      <a:tailEnd type="none" w="med" len="med"/>
-                    </a:lnL>
-                    <a:lnR w="12700" cap="flat" cmpd="sng" algn="ctr">
-                      <a:solidFill>
-                        <a:srgbClr val="E5E7EB"/>
-                      </a:solidFill>
-                      <a:prstDash val="solid"/>
-                      <a:round/>
-                      <a:headEnd type="none" w="med" len="med"/>
-                      <a:tailEnd type="none" w="med" len="med"/>
-                    </a:lnR>
-                    <a:lnT w="12700" cap="flat" cmpd="sng" algn="ctr">
-                      <a:solidFill>
-                        <a:srgbClr val="E5E7EB"/>
-                      </a:solidFill>
-                      <a:prstDash val="solid"/>
-                      <a:round/>
-                      <a:headEnd type="none" w="med" len="med"/>
-                      <a:tailEnd type="none" w="med" len="med"/>
-                    </a:lnT>
-                    <a:lnB w="12700" cap="flat" cmpd="sng" algn="ctr">
-                      <a:solidFill>
-                        <a:srgbClr val="E5E7EB"/>
-                      </a:solidFill>
-                      <a:prstDash val="solid"/>
-                      <a:round/>
-                      <a:headEnd type="none" w="med" len="med"/>
-                      <a:tailEnd type="none" w="med" len="med"/>
-                    </a:lnB>
-                  </a:tcPr>
-                </a:tc>
-                <a:tc>
-                  <a:txBody>
-                    <a:bodyPr/>
-                    <a:lstStyle/>
-                    <a:p>
-                      <a:pPr indent="0" marL="0">
-                        <a:buNone/>
-                      </a:pPr>
-                      <a:r>
-                        <a:rPr lang="en-US" sz="1200" dirty="0">
-                          <a:solidFill>
-                            <a:srgbClr val="1F2937"/>
-                          </a:solidFill>
-                          <a:latin typeface="Calibri" pitchFamily="34" charset="0"/>
-                          <a:ea typeface="Calibri" pitchFamily="34" charset="-122"/>
-                          <a:cs typeface="Calibri" pitchFamily="34" charset="-120"/>
-                        </a:rPr>
-                        <a:t>459 000</a:t>
-                      </a:r>
-                      <a:endParaRPr lang="en-US" sz="1200" dirty="0">
-                        <a:latin typeface="Calibri" charset="0"/>
-                        <a:ea typeface="Calibri" charset="0"/>
-                        <a:cs typeface="Calibri" charset="0"/>
-                      </a:endParaRPr>
-                    </a:p>
-                  </a:txBody>
-                  <a:tcPr marL="91440" marR="91440" marT="45720" marB="45720" anchor="ctr">
-                    <a:lnL w="12700" cap="flat" cmpd="sng" algn="ctr">
-                      <a:solidFill>
-                        <a:srgbClr val="E5E7EB"/>
-                      </a:solidFill>
-                      <a:prstDash val="solid"/>
-                      <a:round/>
-                      <a:headEnd type="none" w="med" len="med"/>
-                      <a:tailEnd type="none" w="med" len="med"/>
-                    </a:lnL>
-                    <a:lnR w="12700" cap="flat" cmpd="sng" algn="ctr">
-                      <a:solidFill>
-                        <a:srgbClr val="E5E7EB"/>
-                      </a:solidFill>
-                      <a:prstDash val="solid"/>
-                      <a:round/>
-                      <a:headEnd type="none" w="med" len="med"/>
-                      <a:tailEnd type="none" w="med" len="med"/>
-                    </a:lnR>
-                    <a:lnT w="12700" cap="flat" cmpd="sng" algn="ctr">
-                      <a:solidFill>
-                        <a:srgbClr val="E5E7EB"/>
-                      </a:solidFill>
-                      <a:prstDash val="solid"/>
-                      <a:round/>
-                      <a:headEnd type="none" w="med" len="med"/>
-                      <a:tailEnd type="none" w="med" len="med"/>
-                    </a:lnT>
-                    <a:lnB w="12700" cap="flat" cmpd="sng" algn="ctr">
-                      <a:solidFill>
-                        <a:srgbClr val="E5E7EB"/>
-                      </a:solidFill>
-                      <a:prstDash val="solid"/>
-                      <a:round/>
-                      <a:headEnd type="none" w="med" len="med"/>
-                      <a:tailEnd type="none" w="med" len="med"/>
-                    </a:lnB>
-                  </a:tcPr>
-                </a:tc>
-              </a:tr>
-              <a:tr h="374904">
-                <a:tc>
-                  <a:txBody>
-                    <a:bodyPr/>
-                    <a:lstStyle/>
-                    <a:p>
-                      <a:pPr indent="0" marL="0">
-                        <a:buNone/>
-                      </a:pPr>
-                      <a:r>
-                        <a:rPr lang="en-US" sz="1200" dirty="0">
-                          <a:solidFill>
-                            <a:srgbClr val="1F2937"/>
-                          </a:solidFill>
-                          <a:latin typeface="Calibri" pitchFamily="34" charset="0"/>
-                          <a:ea typeface="Calibri" pitchFamily="34" charset="-122"/>
-                          <a:cs typeface="Calibri" pitchFamily="34" charset="-120"/>
-                        </a:rPr>
-                        <a:t>Асфальтобетон в 2 слоя, 450 м²</a:t>
-                      </a:r>
-                      <a:endParaRPr lang="en-US" sz="1200" dirty="0">
-                        <a:latin typeface="Calibri" charset="0"/>
-                        <a:ea typeface="Calibri" charset="0"/>
-                        <a:cs typeface="Calibri" charset="0"/>
-                      </a:endParaRPr>
-                    </a:p>
-                  </a:txBody>
-                  <a:tcPr marL="91440" marR="91440" marT="45720" marB="45720" anchor="ctr">
-                    <a:lnL w="12700" cap="flat" cmpd="sng" algn="ctr">
-                      <a:solidFill>
-                        <a:srgbClr val="E5E7EB"/>
-                      </a:solidFill>
-                      <a:prstDash val="solid"/>
-                      <a:round/>
-                      <a:headEnd type="none" w="med" len="med"/>
-                      <a:tailEnd type="none" w="med" len="med"/>
-                    </a:lnL>
-                    <a:lnR w="12700" cap="flat" cmpd="sng" algn="ctr">
-                      <a:solidFill>
-                        <a:srgbClr val="E5E7EB"/>
-                      </a:solidFill>
-                      <a:prstDash val="solid"/>
-                      <a:round/>
-                      <a:headEnd type="none" w="med" len="med"/>
-                      <a:tailEnd type="none" w="med" len="med"/>
-                    </a:lnR>
-                    <a:lnT w="12700" cap="flat" cmpd="sng" algn="ctr">
-                      <a:solidFill>
-                        <a:srgbClr val="E5E7EB"/>
-                      </a:solidFill>
-                      <a:prstDash val="solid"/>
-                      <a:round/>
-                      <a:headEnd type="none" w="med" len="med"/>
-                      <a:tailEnd type="none" w="med" len="med"/>
-                    </a:lnT>
-                    <a:lnB w="12700" cap="flat" cmpd="sng" algn="ctr">
-                      <a:solidFill>
-                        <a:srgbClr val="E5E7EB"/>
-                      </a:solidFill>
-                      <a:prstDash val="solid"/>
-                      <a:round/>
-                      <a:headEnd type="none" w="med" len="med"/>
-                      <a:tailEnd type="none" w="med" len="med"/>
-                    </a:lnB>
-                  </a:tcPr>
-                </a:tc>
-                <a:tc>
-                  <a:txBody>
-                    <a:bodyPr/>
-                    <a:lstStyle/>
-                    <a:p>
-                      <a:pPr indent="0" marL="0">
-                        <a:buNone/>
-                      </a:pPr>
-                      <a:r>
-                        <a:rPr lang="en-US" sz="1200" dirty="0">
-                          <a:solidFill>
-                            <a:srgbClr val="1F2937"/>
-                          </a:solidFill>
-                          <a:latin typeface="Calibri" pitchFamily="34" charset="0"/>
-                          <a:ea typeface="Calibri" pitchFamily="34" charset="-122"/>
-                          <a:cs typeface="Calibri" pitchFamily="34" charset="-120"/>
-                        </a:rPr>
-                        <a:t>562 500</a:t>
-                      </a:r>
-                      <a:endParaRPr lang="en-US" sz="1200" dirty="0">
-                        <a:latin typeface="Calibri" charset="0"/>
-                        <a:ea typeface="Calibri" charset="0"/>
-                        <a:cs typeface="Calibri" charset="0"/>
-                      </a:endParaRPr>
-                    </a:p>
-                  </a:txBody>
-                  <a:tcPr marL="91440" marR="91440" marT="45720" marB="45720" anchor="ctr">
-                    <a:lnL w="12700" cap="flat" cmpd="sng" algn="ctr">
-                      <a:solidFill>
-                        <a:srgbClr val="E5E7EB"/>
-                      </a:solidFill>
-                      <a:prstDash val="solid"/>
-                      <a:round/>
-                      <a:headEnd type="none" w="med" len="med"/>
-                      <a:tailEnd type="none" w="med" len="med"/>
-                    </a:lnL>
-                    <a:lnR w="12700" cap="flat" cmpd="sng" algn="ctr">
-                      <a:solidFill>
-                        <a:srgbClr val="E5E7EB"/>
-                      </a:solidFill>
-                      <a:prstDash val="solid"/>
-                      <a:round/>
-                      <a:headEnd type="none" w="med" len="med"/>
-                      <a:tailEnd type="none" w="med" len="med"/>
-                    </a:lnR>
-                    <a:lnT w="12700" cap="flat" cmpd="sng" algn="ctr">
-                      <a:solidFill>
-                        <a:srgbClr val="E5E7EB"/>
-                      </a:solidFill>
-                      <a:prstDash val="solid"/>
-                      <a:round/>
-                      <a:headEnd type="none" w="med" len="med"/>
-                      <a:tailEnd type="none" w="med" len="med"/>
-                    </a:lnT>
-                    <a:lnB w="12700" cap="flat" cmpd="sng" algn="ctr">
-                      <a:solidFill>
-                        <a:srgbClr val="E5E7EB"/>
-                      </a:solidFill>
-                      <a:prstDash val="solid"/>
-                      <a:round/>
-                      <a:headEnd type="none" w="med" len="med"/>
-                      <a:tailEnd type="none" w="med" len="med"/>
-                    </a:lnB>
-                  </a:tcPr>
-                </a:tc>
-              </a:tr>
-              <a:tr h="374904">
-                <a:tc>
-                  <a:txBody>
-                    <a:bodyPr/>
-                    <a:lstStyle/>
-                    <a:p>
-                      <a:pPr indent="0" marL="0">
-                        <a:buNone/>
-                      </a:pPr>
-                      <a:r>
-                        <a:rPr lang="en-US" sz="1200" dirty="0">
-                          <a:solidFill>
-                            <a:srgbClr val="1F2937"/>
-                          </a:solidFill>
-                          <a:latin typeface="Calibri" pitchFamily="34" charset="0"/>
-                          <a:ea typeface="Calibri" pitchFamily="34" charset="-122"/>
-                          <a:cs typeface="Calibri" pitchFamily="34" charset="-120"/>
-                        </a:rPr>
-                        <a:t>Бордюр БР 100.30.15 с установкой, 140 м</a:t>
-                      </a:r>
-                      <a:endParaRPr lang="en-US" sz="1200" dirty="0">
-                        <a:latin typeface="Calibri" charset="0"/>
-                        <a:ea typeface="Calibri" charset="0"/>
-                        <a:cs typeface="Calibri" charset="0"/>
-                      </a:endParaRPr>
-                    </a:p>
-                  </a:txBody>
-                  <a:tcPr marL="91440" marR="91440" marT="45720" marB="45720" anchor="ctr">
-                    <a:lnL w="12700" cap="flat" cmpd="sng" algn="ctr">
-                      <a:solidFill>
-                        <a:srgbClr val="E5E7EB"/>
-                      </a:solidFill>
-                      <a:prstDash val="solid"/>
-                      <a:round/>
-                      <a:headEnd type="none" w="med" len="med"/>
-                      <a:tailEnd type="none" w="med" len="med"/>
-                    </a:lnL>
-                    <a:lnR w="12700" cap="flat" cmpd="sng" algn="ctr">
-                      <a:solidFill>
-                        <a:srgbClr val="E5E7EB"/>
-                      </a:solidFill>
-                      <a:prstDash val="solid"/>
-                      <a:round/>
-                      <a:headEnd type="none" w="med" len="med"/>
-                      <a:tailEnd type="none" w="med" len="med"/>
-                    </a:lnR>
-                    <a:lnT w="12700" cap="flat" cmpd="sng" algn="ctr">
-                      <a:solidFill>
-                        <a:srgbClr val="E5E7EB"/>
-                      </a:solidFill>
-                      <a:prstDash val="solid"/>
-                      <a:round/>
-                      <a:headEnd type="none" w="med" len="med"/>
-                      <a:tailEnd type="none" w="med" len="med"/>
-                    </a:lnT>
-                    <a:lnB w="12700" cap="flat" cmpd="sng" algn="ctr">
-                      <a:solidFill>
-                        <a:srgbClr val="E5E7EB"/>
-                      </a:solidFill>
-                      <a:prstDash val="solid"/>
-                      <a:round/>
-                      <a:headEnd type="none" w="med" len="med"/>
-                      <a:tailEnd type="none" w="med" len="med"/>
-                    </a:lnB>
-                  </a:tcPr>
-                </a:tc>
-                <a:tc>
-                  <a:txBody>
-                    <a:bodyPr/>
-                    <a:lstStyle/>
-                    <a:p>
-                      <a:pPr indent="0" marL="0">
-                        <a:buNone/>
-                      </a:pPr>
-                      <a:r>
-                        <a:rPr lang="en-US" sz="1200" dirty="0">
-                          <a:solidFill>
-                            <a:srgbClr val="1F2937"/>
-                          </a:solidFill>
-                          <a:latin typeface="Calibri" pitchFamily="34" charset="0"/>
-                          <a:ea typeface="Calibri" pitchFamily="34" charset="-122"/>
-                          <a:cs typeface="Calibri" pitchFamily="34" charset="-120"/>
-                        </a:rPr>
-                        <a:t>182 000</a:t>
-                      </a:r>
-                      <a:endParaRPr lang="en-US" sz="1200" dirty="0">
-                        <a:latin typeface="Calibri" charset="0"/>
-                        <a:ea typeface="Calibri" charset="0"/>
-                        <a:cs typeface="Calibri" charset="0"/>
-                      </a:endParaRPr>
-                    </a:p>
-                  </a:txBody>
-                  <a:tcPr marL="91440" marR="91440" marT="45720" marB="45720" anchor="ctr">
-                    <a:lnL w="12700" cap="flat" cmpd="sng" algn="ctr">
-                      <a:solidFill>
-                        <a:srgbClr val="E5E7EB"/>
-                      </a:solidFill>
-                      <a:prstDash val="solid"/>
-                      <a:round/>
-                      <a:headEnd type="none" w="med" len="med"/>
-                      <a:tailEnd type="none" w="med" len="med"/>
-                    </a:lnL>
-                    <a:lnR w="12700" cap="flat" cmpd="sng" algn="ctr">
-                      <a:solidFill>
-                        <a:srgbClr val="E5E7EB"/>
-                      </a:solidFill>
-                      <a:prstDash val="solid"/>
-                      <a:round/>
-                      <a:headEnd type="none" w="med" len="med"/>
-                      <a:tailEnd type="none" w="med" len="med"/>
-                    </a:lnR>
-                    <a:lnT w="12700" cap="flat" cmpd="sng" algn="ctr">
-                      <a:solidFill>
-                        <a:srgbClr val="E5E7EB"/>
-                      </a:solidFill>
-                      <a:prstDash val="solid"/>
-                      <a:round/>
-                      <a:headEnd type="none" w="med" len="med"/>
-                      <a:tailEnd type="none" w="med" len="med"/>
-                    </a:lnT>
-                    <a:lnB w="12700" cap="flat" cmpd="sng" algn="ctr">
-                      <a:solidFill>
-                        <a:srgbClr val="E5E7EB"/>
-                      </a:solidFill>
-                      <a:prstDash val="solid"/>
-                      <a:round/>
-                      <a:headEnd type="none" w="med" len="med"/>
-                      <a:tailEnd type="none" w="med" len="med"/>
-                    </a:lnB>
-                  </a:tcPr>
-                </a:tc>
-              </a:tr>
-              <a:tr h="374904">
-                <a:tc>
-                  <a:txBody>
-                    <a:bodyPr/>
-                    <a:lstStyle/>
-                    <a:p>
-                      <a:pPr indent="0" marL="0">
-                        <a:buNone/>
-                      </a:pPr>
-                      <a:r>
-                        <a:rPr lang="en-US" sz="1200" dirty="0">
-                          <a:solidFill>
-                            <a:srgbClr val="1F2937"/>
-                          </a:solidFill>
-                          <a:latin typeface="Calibri" pitchFamily="34" charset="0"/>
-                          <a:ea typeface="Calibri" pitchFamily="34" charset="-122"/>
-                          <a:cs typeface="Calibri" pitchFamily="34" charset="-120"/>
-                        </a:rPr>
-                        <a:t>Водоотвод: лотки 30 м + дождеприёмник</a:t>
-                      </a:r>
-                      <a:endParaRPr lang="en-US" sz="1200" dirty="0">
-                        <a:latin typeface="Calibri" charset="0"/>
-                        <a:ea typeface="Calibri" charset="0"/>
-                        <a:cs typeface="Calibri" charset="0"/>
-                      </a:endParaRPr>
-                    </a:p>
-                  </a:txBody>
-                  <a:tcPr marL="91440" marR="91440" marT="45720" marB="45720" anchor="ctr">
-                    <a:lnL w="12700" cap="flat" cmpd="sng" algn="ctr">
-                      <a:solidFill>
-                        <a:srgbClr val="E5E7EB"/>
-                      </a:solidFill>
-                      <a:prstDash val="solid"/>
-                      <a:round/>
-                      <a:headEnd type="none" w="med" len="med"/>
-                      <a:tailEnd type="none" w="med" len="med"/>
-                    </a:lnL>
-                    <a:lnR w="12700" cap="flat" cmpd="sng" algn="ctr">
-                      <a:solidFill>
-                        <a:srgbClr val="E5E7EB"/>
-                      </a:solidFill>
-                      <a:prstDash val="solid"/>
-                      <a:round/>
-                      <a:headEnd type="none" w="med" len="med"/>
-                      <a:tailEnd type="none" w="med" len="med"/>
-                    </a:lnR>
-                    <a:lnT w="12700" cap="flat" cmpd="sng" algn="ctr">
-                      <a:solidFill>
-                        <a:srgbClr val="E5E7EB"/>
-                      </a:solidFill>
-                      <a:prstDash val="solid"/>
-                      <a:round/>
-                      <a:headEnd type="none" w="med" len="med"/>
-                      <a:tailEnd type="none" w="med" len="med"/>
-                    </a:lnT>
-                    <a:lnB w="12700" cap="flat" cmpd="sng" algn="ctr">
-                      <a:solidFill>
-                        <a:srgbClr val="E5E7EB"/>
-                      </a:solidFill>
-                      <a:prstDash val="solid"/>
-                      <a:round/>
-                      <a:headEnd type="none" w="med" len="med"/>
-                      <a:tailEnd type="none" w="med" len="med"/>
-                    </a:lnB>
-                  </a:tcPr>
-                </a:tc>
-                <a:tc>
-                  <a:txBody>
-                    <a:bodyPr/>
-                    <a:lstStyle/>
-                    <a:p>
-                      <a:pPr indent="0" marL="0">
-                        <a:buNone/>
-                      </a:pPr>
-                      <a:r>
-                        <a:rPr lang="en-US" sz="1200" dirty="0">
-                          <a:solidFill>
-                            <a:srgbClr val="1F2937"/>
-                          </a:solidFill>
-                          <a:latin typeface="Calibri" pitchFamily="34" charset="0"/>
-                          <a:ea typeface="Calibri" pitchFamily="34" charset="-122"/>
-                          <a:cs typeface="Calibri" pitchFamily="34" charset="-120"/>
-                        </a:rPr>
-                        <a:t>105 000</a:t>
-                      </a:r>
-                      <a:endParaRPr lang="en-US" sz="1200" dirty="0">
-                        <a:latin typeface="Calibri" charset="0"/>
-                        <a:ea typeface="Calibri" charset="0"/>
-                        <a:cs typeface="Calibri" charset="0"/>
-                      </a:endParaRPr>
-                    </a:p>
-                  </a:txBody>
-                  <a:tcPr marL="91440" marR="91440" marT="45720" marB="45720" anchor="ctr">
-                    <a:lnL w="12700" cap="flat" cmpd="sng" algn="ctr">
-                      <a:solidFill>
-                        <a:srgbClr val="E5E7EB"/>
-                      </a:solidFill>
-                      <a:prstDash val="solid"/>
-                      <a:round/>
-                      <a:headEnd type="none" w="med" len="med"/>
-                      <a:tailEnd type="none" w="med" len="med"/>
-                    </a:lnL>
-                    <a:lnR w="12700" cap="flat" cmpd="sng" algn="ctr">
-                      <a:solidFill>
-                        <a:srgbClr val="E5E7EB"/>
-                      </a:solidFill>
-                      <a:prstDash val="solid"/>
-                      <a:round/>
-                      <a:headEnd type="none" w="med" len="med"/>
-                      <a:tailEnd type="none" w="med" len="med"/>
-                    </a:lnR>
-                    <a:lnT w="12700" cap="flat" cmpd="sng" algn="ctr">
-                      <a:solidFill>
-                        <a:srgbClr val="E5E7EB"/>
-                      </a:solidFill>
-                      <a:prstDash val="solid"/>
-                      <a:round/>
-                      <a:headEnd type="none" w="med" len="med"/>
-                      <a:tailEnd type="none" w="med" len="med"/>
-                    </a:lnT>
-                    <a:lnB w="12700" cap="flat" cmpd="sng" algn="ctr">
-                      <a:solidFill>
-                        <a:srgbClr val="E5E7EB"/>
-                      </a:solidFill>
-                      <a:prstDash val="solid"/>
-                      <a:round/>
-                      <a:headEnd type="none" w="med" len="med"/>
-                      <a:tailEnd type="none" w="med" len="med"/>
-                    </a:lnB>
-                  </a:tcPr>
-                </a:tc>
-              </a:tr>
-              <a:tr h="374904">
-                <a:tc>
-                  <a:txBody>
-                    <a:bodyPr/>
-                    <a:lstStyle/>
-                    <a:p>
-                      <a:pPr indent="0" marL="0">
-                        <a:buNone/>
-                      </a:pPr>
-                      <a:r>
-                        <a:rPr lang="en-US" sz="1200" dirty="0">
-                          <a:solidFill>
-                            <a:srgbClr val="1F2937"/>
-                          </a:solidFill>
-                          <a:latin typeface="Calibri" pitchFamily="34" charset="0"/>
-                          <a:ea typeface="Calibri" pitchFamily="34" charset="-122"/>
-                          <a:cs typeface="Calibri" pitchFamily="34" charset="-120"/>
-                        </a:rPr>
-                        <a:t>Шлагбаум автомат. с GSM-модулем + монтаж</a:t>
-                      </a:r>
-                      <a:endParaRPr lang="en-US" sz="1200" dirty="0">
-                        <a:latin typeface="Calibri" charset="0"/>
-                        <a:ea typeface="Calibri" charset="0"/>
-                        <a:cs typeface="Calibri" charset="0"/>
-                      </a:endParaRPr>
-                    </a:p>
-                  </a:txBody>
-                  <a:tcPr marL="91440" marR="91440" marT="45720" marB="45720" anchor="ctr">
-                    <a:lnL w="12700" cap="flat" cmpd="sng" algn="ctr">
-                      <a:solidFill>
-                        <a:srgbClr val="E5E7EB"/>
-                      </a:solidFill>
-                      <a:prstDash val="solid"/>
-                      <a:round/>
-                      <a:headEnd type="none" w="med" len="med"/>
-                      <a:tailEnd type="none" w="med" len="med"/>
-                    </a:lnL>
-                    <a:lnR w="12700" cap="flat" cmpd="sng" algn="ctr">
-                      <a:solidFill>
-                        <a:srgbClr val="E5E7EB"/>
-                      </a:solidFill>
-                      <a:prstDash val="solid"/>
-                      <a:round/>
-                      <a:headEnd type="none" w="med" len="med"/>
-                      <a:tailEnd type="none" w="med" len="med"/>
-                    </a:lnR>
-                    <a:lnT w="12700" cap="flat" cmpd="sng" algn="ctr">
-                      <a:solidFill>
-                        <a:srgbClr val="E5E7EB"/>
-                      </a:solidFill>
-                      <a:prstDash val="solid"/>
-                      <a:round/>
-                      <a:headEnd type="none" w="med" len="med"/>
-                      <a:tailEnd type="none" w="med" len="med"/>
-                    </a:lnT>
-                    <a:lnB w="12700" cap="flat" cmpd="sng" algn="ctr">
-                      <a:solidFill>
-                        <a:srgbClr val="E5E7EB"/>
-                      </a:solidFill>
-                      <a:prstDash val="solid"/>
-                      <a:round/>
-                      <a:headEnd type="none" w="med" len="med"/>
-                      <a:tailEnd type="none" w="med" len="med"/>
-                    </a:lnB>
-                  </a:tcPr>
-                </a:tc>
-                <a:tc>
-                  <a:txBody>
-                    <a:bodyPr/>
-                    <a:lstStyle/>
-                    <a:p>
-                      <a:pPr indent="0" marL="0">
-                        <a:buNone/>
-                      </a:pPr>
-                      <a:r>
-                        <a:rPr lang="en-US" sz="1200" dirty="0">
-                          <a:solidFill>
-                            <a:srgbClr val="1F2937"/>
-                          </a:solidFill>
-                          <a:latin typeface="Calibri" pitchFamily="34" charset="0"/>
-                          <a:ea typeface="Calibri" pitchFamily="34" charset="-122"/>
-                          <a:cs typeface="Calibri" pitchFamily="34" charset="-120"/>
-                        </a:rPr>
-                        <a:t>245 000</a:t>
-                      </a:r>
-                      <a:endParaRPr lang="en-US" sz="1200" dirty="0">
-                        <a:latin typeface="Calibri" charset="0"/>
-                        <a:ea typeface="Calibri" charset="0"/>
-                        <a:cs typeface="Calibri" charset="0"/>
-                      </a:endParaRPr>
-                    </a:p>
-                  </a:txBody>
-                  <a:tcPr marL="91440" marR="91440" marT="45720" marB="45720" anchor="ctr">
-                    <a:lnL w="12700" cap="flat" cmpd="sng" algn="ctr">
-                      <a:solidFill>
-                        <a:srgbClr val="E5E7EB"/>
-                      </a:solidFill>
-                      <a:prstDash val="solid"/>
-                      <a:round/>
-                      <a:headEnd type="none" w="med" len="med"/>
-                      <a:tailEnd type="none" w="med" len="med"/>
-                    </a:lnL>
-                    <a:lnR w="12700" cap="flat" cmpd="sng" algn="ctr">
-                      <a:solidFill>
-                        <a:srgbClr val="E5E7EB"/>
-                      </a:solidFill>
-                      <a:prstDash val="solid"/>
-                      <a:round/>
-                      <a:headEnd type="none" w="med" len="med"/>
-                      <a:tailEnd type="none" w="med" len="med"/>
-                    </a:lnR>
-                    <a:lnT w="12700" cap="flat" cmpd="sng" algn="ctr">
-                      <a:solidFill>
-                        <a:srgbClr val="E5E7EB"/>
-                      </a:solidFill>
-                      <a:prstDash val="solid"/>
-                      <a:round/>
-                      <a:headEnd type="none" w="med" len="med"/>
-                      <a:tailEnd type="none" w="med" len="med"/>
-                    </a:lnT>
-                    <a:lnB w="12700" cap="flat" cmpd="sng" algn="ctr">
-                      <a:solidFill>
-                        <a:srgbClr val="E5E7EB"/>
-                      </a:solidFill>
-                      <a:prstDash val="solid"/>
-                      <a:round/>
-                      <a:headEnd type="none" w="med" len="med"/>
-                      <a:tailEnd type="none" w="med" len="med"/>
-                    </a:lnB>
-                  </a:tcPr>
-                </a:tc>
-              </a:tr>
-              <a:tr h="374904">
-                <a:tc>
-                  <a:txBody>
-                    <a:bodyPr/>
-                    <a:lstStyle/>
-                    <a:p>
-                      <a:pPr indent="0" marL="0">
-                        <a:buNone/>
-                      </a:pPr>
-                      <a:r>
-                        <a:rPr lang="en-US" sz="1200" dirty="0">
-                          <a:solidFill>
-                            <a:srgbClr val="1F2937"/>
-                          </a:solidFill>
-                          <a:latin typeface="Calibri" pitchFamily="34" charset="0"/>
-                          <a:ea typeface="Calibri" pitchFamily="34" charset="-122"/>
-                          <a:cs typeface="Calibri" pitchFamily="34" charset="-120"/>
-                        </a:rPr>
-                        <a:t>Освещение: 2 опоры LED с кабелем</a:t>
-                      </a:r>
-                      <a:endParaRPr lang="en-US" sz="1200" dirty="0">
-                        <a:latin typeface="Calibri" charset="0"/>
-                        <a:ea typeface="Calibri" charset="0"/>
-                        <a:cs typeface="Calibri" charset="0"/>
-                      </a:endParaRPr>
-                    </a:p>
-                  </a:txBody>
-                  <a:tcPr marL="91440" marR="91440" marT="45720" marB="45720" anchor="ctr">
-                    <a:lnL w="12700" cap="flat" cmpd="sng" algn="ctr">
-                      <a:solidFill>
-                        <a:srgbClr val="E5E7EB"/>
-                      </a:solidFill>
-                      <a:prstDash val="solid"/>
-                      <a:round/>
-                      <a:headEnd type="none" w="med" len="med"/>
-                      <a:tailEnd type="none" w="med" len="med"/>
-                    </a:lnL>
-                    <a:lnR w="12700" cap="flat" cmpd="sng" algn="ctr">
-                      <a:solidFill>
-                        <a:srgbClr val="E5E7EB"/>
-                      </a:solidFill>
-                      <a:prstDash val="solid"/>
-                      <a:round/>
-                      <a:headEnd type="none" w="med" len="med"/>
-                      <a:tailEnd type="none" w="med" len="med"/>
-                    </a:lnR>
-                    <a:lnT w="12700" cap="flat" cmpd="sng" algn="ctr">
-                      <a:solidFill>
-                        <a:srgbClr val="E5E7EB"/>
-                      </a:solidFill>
-                      <a:prstDash val="solid"/>
-                      <a:round/>
-                      <a:headEnd type="none" w="med" len="med"/>
-                      <a:tailEnd type="none" w="med" len="med"/>
-                    </a:lnT>
-                    <a:lnB w="12700" cap="flat" cmpd="sng" algn="ctr">
-                      <a:solidFill>
-                        <a:srgbClr val="E5E7EB"/>
-                      </a:solidFill>
-                      <a:prstDash val="solid"/>
-                      <a:round/>
-                      <a:headEnd type="none" w="med" len="med"/>
-                      <a:tailEnd type="none" w="med" len="med"/>
-                    </a:lnB>
-                  </a:tcPr>
-                </a:tc>
-                <a:tc>
-                  <a:txBody>
-                    <a:bodyPr/>
-                    <a:lstStyle/>
-                    <a:p>
-                      <a:pPr indent="0" marL="0">
-                        <a:buNone/>
-                      </a:pPr>
-                      <a:r>
-                        <a:rPr lang="en-US" sz="1200" dirty="0">
-                          <a:solidFill>
-                            <a:srgbClr val="1F2937"/>
-                          </a:solidFill>
-                          <a:latin typeface="Calibri" pitchFamily="34" charset="0"/>
-                          <a:ea typeface="Calibri" pitchFamily="34" charset="-122"/>
-                          <a:cs typeface="Calibri" pitchFamily="34" charset="-120"/>
-                        </a:rPr>
-                        <a:t>110 000</a:t>
-                      </a:r>
-                      <a:endParaRPr lang="en-US" sz="1200" dirty="0">
-                        <a:latin typeface="Calibri" charset="0"/>
-                        <a:ea typeface="Calibri" charset="0"/>
-                        <a:cs typeface="Calibri" charset="0"/>
-                      </a:endParaRPr>
-                    </a:p>
-                  </a:txBody>
-                  <a:tcPr marL="91440" marR="91440" marT="45720" marB="45720" anchor="ctr">
-                    <a:lnL w="12700" cap="flat" cmpd="sng" algn="ctr">
-                      <a:solidFill>
-                        <a:srgbClr val="E5E7EB"/>
-                      </a:solidFill>
-                      <a:prstDash val="solid"/>
-                      <a:round/>
-                      <a:headEnd type="none" w="med" len="med"/>
-                      <a:tailEnd type="none" w="med" len="med"/>
-                    </a:lnL>
-                    <a:lnR w="12700" cap="flat" cmpd="sng" algn="ctr">
-                      <a:solidFill>
-                        <a:srgbClr val="E5E7EB"/>
-                      </a:solidFill>
-                      <a:prstDash val="solid"/>
-                      <a:round/>
-                      <a:headEnd type="none" w="med" len="med"/>
-                      <a:tailEnd type="none" w="med" len="med"/>
-                    </a:lnR>
-                    <a:lnT w="12700" cap="flat" cmpd="sng" algn="ctr">
-                      <a:solidFill>
-                        <a:srgbClr val="E5E7EB"/>
-                      </a:solidFill>
-                      <a:prstDash val="solid"/>
-                      <a:round/>
-                      <a:headEnd type="none" w="med" len="med"/>
-                      <a:tailEnd type="none" w="med" len="med"/>
-                    </a:lnT>
-                    <a:lnB w="12700" cap="flat" cmpd="sng" algn="ctr">
-                      <a:solidFill>
-                        <a:srgbClr val="E5E7EB"/>
-                      </a:solidFill>
-                      <a:prstDash val="solid"/>
-                      <a:round/>
-                      <a:headEnd type="none" w="med" len="med"/>
-                      <a:tailEnd type="none" w="med" len="med"/>
-                    </a:lnB>
-                  </a:tcPr>
-                </a:tc>
-              </a:tr>
-              <a:tr h="374904">
-                <a:tc>
-                  <a:txBody>
-                    <a:bodyPr/>
-                    <a:lstStyle/>
-                    <a:p>
-                      <a:pPr indent="0" marL="0">
-                        <a:buNone/>
-                      </a:pPr>
-                      <a:r>
-                        <a:rPr lang="en-US" sz="1200" dirty="0">
-                          <a:solidFill>
-                            <a:srgbClr val="1F2937"/>
-                          </a:solidFill>
-                          <a:latin typeface="Calibri" pitchFamily="34" charset="0"/>
-                          <a:ea typeface="Calibri" pitchFamily="34" charset="-122"/>
-                          <a:cs typeface="Calibri" pitchFamily="34" charset="-120"/>
-                        </a:rPr>
-                        <a:t>Разметка (термопластик) + 2 знака</a:t>
-                      </a:r>
-                      <a:endParaRPr lang="en-US" sz="1200" dirty="0">
-                        <a:latin typeface="Calibri" charset="0"/>
-                        <a:ea typeface="Calibri" charset="0"/>
-                        <a:cs typeface="Calibri" charset="0"/>
-                      </a:endParaRPr>
-                    </a:p>
-                  </a:txBody>
-                  <a:tcPr marL="91440" marR="91440" marT="45720" marB="45720" anchor="ctr">
-                    <a:lnL w="12700" cap="flat" cmpd="sng" algn="ctr">
-                      <a:solidFill>
-                        <a:srgbClr val="E5E7EB"/>
-                      </a:solidFill>
-                      <a:prstDash val="solid"/>
-                      <a:round/>
-                      <a:headEnd type="none" w="med" len="med"/>
-                      <a:tailEnd type="none" w="med" len="med"/>
-                    </a:lnL>
-                    <a:lnR w="12700" cap="flat" cmpd="sng" algn="ctr">
-                      <a:solidFill>
-                        <a:srgbClr val="E5E7EB"/>
-                      </a:solidFill>
-                      <a:prstDash val="solid"/>
-                      <a:round/>
-                      <a:headEnd type="none" w="med" len="med"/>
-                      <a:tailEnd type="none" w="med" len="med"/>
-                    </a:lnR>
-                    <a:lnT w="12700" cap="flat" cmpd="sng" algn="ctr">
-                      <a:solidFill>
-                        <a:srgbClr val="E5E7EB"/>
-                      </a:solidFill>
-                      <a:prstDash val="solid"/>
-                      <a:round/>
-                      <a:headEnd type="none" w="med" len="med"/>
-                      <a:tailEnd type="none" w="med" len="med"/>
-                    </a:lnT>
-                    <a:lnB w="12700" cap="flat" cmpd="sng" algn="ctr">
-                      <a:solidFill>
-                        <a:srgbClr val="E5E7EB"/>
-                      </a:solidFill>
-                      <a:prstDash val="solid"/>
-                      <a:round/>
-                      <a:headEnd type="none" w="med" len="med"/>
-                      <a:tailEnd type="none" w="med" len="med"/>
-                    </a:lnB>
-                  </a:tcPr>
-                </a:tc>
-                <a:tc>
-                  <a:txBody>
-                    <a:bodyPr/>
-                    <a:lstStyle/>
-                    <a:p>
-                      <a:pPr indent="0" marL="0">
-                        <a:buNone/>
-                      </a:pPr>
-                      <a:r>
-                        <a:rPr lang="en-US" sz="1200" dirty="0">
-                          <a:solidFill>
-                            <a:srgbClr val="1F2937"/>
-                          </a:solidFill>
-                          <a:latin typeface="Calibri" pitchFamily="34" charset="0"/>
-                          <a:ea typeface="Calibri" pitchFamily="34" charset="-122"/>
-                          <a:cs typeface="Calibri" pitchFamily="34" charset="-120"/>
-                        </a:rPr>
-                        <a:t>51 600</a:t>
-                      </a:r>
-                      <a:endParaRPr lang="en-US" sz="1200" dirty="0">
-                        <a:latin typeface="Calibri" charset="0"/>
-                        <a:ea typeface="Calibri" charset="0"/>
-                        <a:cs typeface="Calibri" charset="0"/>
-                      </a:endParaRPr>
-                    </a:p>
-                  </a:txBody>
-                  <a:tcPr marL="91440" marR="91440" marT="45720" marB="45720" anchor="ctr">
-                    <a:lnL w="12700" cap="flat" cmpd="sng" algn="ctr">
-                      <a:solidFill>
-                        <a:srgbClr val="E5E7EB"/>
-                      </a:solidFill>
-                      <a:prstDash val="solid"/>
-                      <a:round/>
-                      <a:headEnd type="none" w="med" len="med"/>
-                      <a:tailEnd type="none" w="med" len="med"/>
-                    </a:lnL>
-                    <a:lnR w="12700" cap="flat" cmpd="sng" algn="ctr">
-                      <a:solidFill>
-                        <a:srgbClr val="E5E7EB"/>
-                      </a:solidFill>
-                      <a:prstDash val="solid"/>
-                      <a:round/>
-                      <a:headEnd type="none" w="med" len="med"/>
-                      <a:tailEnd type="none" w="med" len="med"/>
-                    </a:lnR>
-                    <a:lnT w="12700" cap="flat" cmpd="sng" algn="ctr">
-                      <a:solidFill>
-                        <a:srgbClr val="E5E7EB"/>
-                      </a:solidFill>
-                      <a:prstDash val="solid"/>
-                      <a:round/>
-                      <a:headEnd type="none" w="med" len="med"/>
-                      <a:tailEnd type="none" w="med" len="med"/>
-                    </a:lnT>
-                    <a:lnB w="12700" cap="flat" cmpd="sng" algn="ctr">
-                      <a:solidFill>
-                        <a:srgbClr val="E5E7EB"/>
-                      </a:solidFill>
-                      <a:prstDash val="solid"/>
-                      <a:round/>
-                      <a:headEnd type="none" w="med" len="med"/>
-                      <a:tailEnd type="none" w="med" len="med"/>
-                    </a:lnB>
-                  </a:tcPr>
-                </a:tc>
-              </a:tr>
-              <a:tr h="374904">
-                <a:tc>
-                  <a:txBody>
-                    <a:bodyPr/>
-                    <a:lstStyle/>
-                    <a:p>
-                      <a:pPr indent="0" marL="0">
-                        <a:buNone/>
-                      </a:pPr>
-                      <a:r>
-                        <a:rPr lang="en-US" sz="1200" dirty="0">
-                          <a:solidFill>
-                            <a:srgbClr val="1F2937"/>
-                          </a:solidFill>
-                          <a:latin typeface="Calibri" pitchFamily="34" charset="0"/>
-                          <a:ea typeface="Calibri" pitchFamily="34" charset="-122"/>
-                          <a:cs typeface="Calibri" pitchFamily="34" charset="-120"/>
-                        </a:rPr>
-                        <a:t>Компенсационное озеленение (15 кустов, кашпо)</a:t>
-                      </a:r>
-                      <a:endParaRPr lang="en-US" sz="1200" dirty="0">
-                        <a:latin typeface="Calibri" charset="0"/>
-                        <a:ea typeface="Calibri" charset="0"/>
-                        <a:cs typeface="Calibri" charset="0"/>
-                      </a:endParaRPr>
-                    </a:p>
-                  </a:txBody>
-                  <a:tcPr marL="91440" marR="91440" marT="45720" marB="45720" anchor="ctr">
-                    <a:lnL w="12700" cap="flat" cmpd="sng" algn="ctr">
-                      <a:solidFill>
-                        <a:srgbClr val="E5E7EB"/>
-                      </a:solidFill>
-                      <a:prstDash val="solid"/>
-                      <a:round/>
-                      <a:headEnd type="none" w="med" len="med"/>
-                      <a:tailEnd type="none" w="med" len="med"/>
-                    </a:lnL>
-                    <a:lnR w="12700" cap="flat" cmpd="sng" algn="ctr">
-                      <a:solidFill>
-                        <a:srgbClr val="E5E7EB"/>
-                      </a:solidFill>
-                      <a:prstDash val="solid"/>
-                      <a:round/>
-                      <a:headEnd type="none" w="med" len="med"/>
-                      <a:tailEnd type="none" w="med" len="med"/>
-                    </a:lnR>
-                    <a:lnT w="12700" cap="flat" cmpd="sng" algn="ctr">
-                      <a:solidFill>
-                        <a:srgbClr val="E5E7EB"/>
-                      </a:solidFill>
-                      <a:prstDash val="solid"/>
-                      <a:round/>
-                      <a:headEnd type="none" w="med" len="med"/>
-                      <a:tailEnd type="none" w="med" len="med"/>
-                    </a:lnT>
-                    <a:lnB w="12700" cap="flat" cmpd="sng" algn="ctr">
-                      <a:solidFill>
-                        <a:srgbClr val="E5E7EB"/>
-                      </a:solidFill>
-                      <a:prstDash val="solid"/>
-                      <a:round/>
-                      <a:headEnd type="none" w="med" len="med"/>
-                      <a:tailEnd type="none" w="med" len="med"/>
-                    </a:lnB>
-                  </a:tcPr>
-                </a:tc>
-                <a:tc>
-                  <a:txBody>
-                    <a:bodyPr/>
-                    <a:lstStyle/>
-                    <a:p>
-                      <a:pPr indent="0" marL="0">
-                        <a:buNone/>
-                      </a:pPr>
-                      <a:r>
-                        <a:rPr lang="en-US" sz="1200" dirty="0">
-                          <a:solidFill>
-                            <a:srgbClr val="1F2937"/>
-                          </a:solidFill>
-                          <a:latin typeface="Calibri" pitchFamily="34" charset="0"/>
-                          <a:ea typeface="Calibri" pitchFamily="34" charset="-122"/>
-                          <a:cs typeface="Calibri" pitchFamily="34" charset="-120"/>
-                        </a:rPr>
-                        <a:t>40 000</a:t>
-                      </a:r>
-                      <a:endParaRPr lang="en-US" sz="1200" dirty="0">
-                        <a:latin typeface="Calibri" charset="0"/>
-                        <a:ea typeface="Calibri" charset="0"/>
-                        <a:cs typeface="Calibri" charset="0"/>
-                      </a:endParaRPr>
-                    </a:p>
-                  </a:txBody>
-                  <a:tcPr marL="91440" marR="91440" marT="45720" marB="45720" anchor="ctr">
-                    <a:lnL w="12700" cap="flat" cmpd="sng" algn="ctr">
-                      <a:solidFill>
-                        <a:srgbClr val="E5E7EB"/>
-                      </a:solidFill>
-                      <a:prstDash val="solid"/>
-                      <a:round/>
-                      <a:headEnd type="none" w="med" len="med"/>
-                      <a:tailEnd type="none" w="med" len="med"/>
-                    </a:lnL>
-                    <a:lnR w="12700" cap="flat" cmpd="sng" algn="ctr">
-                      <a:solidFill>
-                        <a:srgbClr val="E5E7EB"/>
-                      </a:solidFill>
-                      <a:prstDash val="solid"/>
-                      <a:round/>
-                      <a:headEnd type="none" w="med" len="med"/>
-                      <a:tailEnd type="none" w="med" len="med"/>
-                    </a:lnR>
-                    <a:lnT w="12700" cap="flat" cmpd="sng" algn="ctr">
-                      <a:solidFill>
-                        <a:srgbClr val="E5E7EB"/>
-                      </a:solidFill>
-                      <a:prstDash val="solid"/>
-                      <a:round/>
-                      <a:headEnd type="none" w="med" len="med"/>
-                      <a:tailEnd type="none" w="med" len="med"/>
-                    </a:lnT>
-                    <a:lnB w="12700" cap="flat" cmpd="sng" algn="ctr">
-                      <a:solidFill>
-                        <a:srgbClr val="E5E7EB"/>
-                      </a:solidFill>
-                      <a:prstDash val="solid"/>
-                      <a:round/>
-                      <a:headEnd type="none" w="med" len="med"/>
-                      <a:tailEnd type="none" w="med" len="med"/>
-                    </a:lnB>
-                  </a:tcPr>
-                </a:tc>
-              </a:tr>
-              <a:tr h="374904">
-                <a:tc>
-                  <a:txBody>
-                    <a:bodyPr/>
-                    <a:lstStyle/>
-                    <a:p>
-                      <a:pPr indent="0" marL="0">
-                        <a:buNone/>
-                      </a:pPr>
-                      <a:r>
-                        <a:rPr lang="en-US" sz="1200" dirty="0">
-                          <a:solidFill>
-                            <a:srgbClr val="1F2937"/>
-                          </a:solidFill>
-                          <a:latin typeface="Calibri" pitchFamily="34" charset="0"/>
-                          <a:ea typeface="Calibri" pitchFamily="34" charset="-122"/>
-                          <a:cs typeface="Calibri" pitchFamily="34" charset="-120"/>
-                        </a:rPr>
-                        <a:t>Проект и согласования</a:t>
-                      </a:r>
-                      <a:endParaRPr lang="en-US" sz="1200" dirty="0">
-                        <a:latin typeface="Calibri" charset="0"/>
-                        <a:ea typeface="Calibri" charset="0"/>
-                        <a:cs typeface="Calibri" charset="0"/>
-                      </a:endParaRPr>
-                    </a:p>
-                  </a:txBody>
-                  <a:tcPr marL="91440" marR="91440" marT="45720" marB="45720" anchor="ctr">
-                    <a:lnL w="12700" cap="flat" cmpd="sng" algn="ctr">
-                      <a:solidFill>
-                        <a:srgbClr val="E5E7EB"/>
-                      </a:solidFill>
-                      <a:prstDash val="solid"/>
-                      <a:round/>
-                      <a:headEnd type="none" w="med" len="med"/>
-                      <a:tailEnd type="none" w="med" len="med"/>
-                    </a:lnL>
-                    <a:lnR w="12700" cap="flat" cmpd="sng" algn="ctr">
-                      <a:solidFill>
-                        <a:srgbClr val="E5E7EB"/>
-                      </a:solidFill>
-                      <a:prstDash val="solid"/>
-                      <a:round/>
-                      <a:headEnd type="none" w="med" len="med"/>
-                      <a:tailEnd type="none" w="med" len="med"/>
-                    </a:lnR>
-                    <a:lnT w="12700" cap="flat" cmpd="sng" algn="ctr">
-                      <a:solidFill>
-                        <a:srgbClr val="E5E7EB"/>
-                      </a:solidFill>
-                      <a:prstDash val="solid"/>
-                      <a:round/>
-                      <a:headEnd type="none" w="med" len="med"/>
-                      <a:tailEnd type="none" w="med" len="med"/>
-                    </a:lnT>
-                    <a:lnB w="12700" cap="flat" cmpd="sng" algn="ctr">
-                      <a:solidFill>
-                        <a:srgbClr val="E5E7EB"/>
-                      </a:solidFill>
-                      <a:prstDash val="solid"/>
-                      <a:round/>
-                      <a:headEnd type="none" w="med" len="med"/>
-                      <a:tailEnd type="none" w="med" len="med"/>
-                    </a:lnB>
-                  </a:tcPr>
-                </a:tc>
-                <a:tc>
-                  <a:txBody>
-                    <a:bodyPr/>
-                    <a:lstStyle/>
-                    <a:p>
-                      <a:pPr indent="0" marL="0">
-                        <a:buNone/>
-                      </a:pPr>
-                      <a:r>
-                        <a:rPr lang="en-US" sz="1200" dirty="0">
-                          <a:solidFill>
-                            <a:srgbClr val="1F2937"/>
-                          </a:solidFill>
-                          <a:latin typeface="Calibri" pitchFamily="34" charset="0"/>
-                          <a:ea typeface="Calibri" pitchFamily="34" charset="-122"/>
-                          <a:cs typeface="Calibri" pitchFamily="34" charset="-120"/>
-                        </a:rPr>
-                        <a:t>70 000</a:t>
-                      </a:r>
-                      <a:endParaRPr lang="en-US" sz="1200" dirty="0">
-                        <a:latin typeface="Calibri" charset="0"/>
-                        <a:ea typeface="Calibri" charset="0"/>
-                        <a:cs typeface="Calibri" charset="0"/>
-                      </a:endParaRPr>
-                    </a:p>
-                  </a:txBody>
-                  <a:tcPr marL="91440" marR="91440" marT="45720" marB="45720" anchor="ctr">
-                    <a:lnL w="12700" cap="flat" cmpd="sng" algn="ctr">
-                      <a:solidFill>
-                        <a:srgbClr val="E5E7EB"/>
-                      </a:solidFill>
-                      <a:prstDash val="solid"/>
-                      <a:round/>
-                      <a:headEnd type="none" w="med" len="med"/>
-                      <a:tailEnd type="none" w="med" len="med"/>
-                    </a:lnL>
-                    <a:lnR w="12700" cap="flat" cmpd="sng" algn="ctr">
-                      <a:solidFill>
-                        <a:srgbClr val="E5E7EB"/>
-                      </a:solidFill>
-                      <a:prstDash val="solid"/>
-                      <a:round/>
-                      <a:headEnd type="none" w="med" len="med"/>
-                      <a:tailEnd type="none" w="med" len="med"/>
-                    </a:lnR>
-                    <a:lnT w="12700" cap="flat" cmpd="sng" algn="ctr">
-                      <a:solidFill>
-                        <a:srgbClr val="E5E7EB"/>
-                      </a:solidFill>
-                      <a:prstDash val="solid"/>
-                      <a:round/>
-                      <a:headEnd type="none" w="med" len="med"/>
-                      <a:tailEnd type="none" w="med" len="med"/>
-                    </a:lnT>
-                    <a:lnB w="12700" cap="flat" cmpd="sng" algn="ctr">
-                      <a:solidFill>
-                        <a:srgbClr val="E5E7EB"/>
-                      </a:solidFill>
-                      <a:prstDash val="solid"/>
-                      <a:round/>
-                      <a:headEnd type="none" w="med" len="med"/>
-                      <a:tailEnd type="none" w="med" len="med"/>
-                    </a:lnB>
-                  </a:tcPr>
-                </a:tc>
-              </a:tr>
-            </a:tbl>
-          </a:graphicData>
-        </a:graphic>
-      </p:graphicFrame>
-      <p:sp>
-        <p:nvSpPr>
-          <p:cNvPr id="6" name="Text 3"/>
-          <p:cNvSpPr txBox="1"/>
-          <p:nvPr/>
-        </p:nvSpPr>
-        <p:spPr>
-          <a:xfrm>
-            <a:off x="7772400" y="1325880"/>
-            <a:ext cx="2286000" cy="457200"/>
-          </a:xfrm>
-          <a:prstGeom prst="rect">
-            <a:avLst/>
-          </a:prstGeom>
-          <a:noFill/>
-          <a:ln/>
-        </p:spPr>
-        <p:txBody>
-          <a:bodyPr wrap="square" lIns="0" tIns="0" rIns="0" bIns="0" rtlCol="0" anchor="ctr"/>
-          <a:lstStyle/>
-          <a:p>
-            <a:pPr indent="0" marL="0">
-              <a:buNone/>
-            </a:pPr>
-            <a:r>
-              <a:rPr lang="en-US" sz="1400" dirty="0">
-                <a:solidFill>
-                  <a:srgbClr val="1F2937"/>
-                </a:solidFill>
-                <a:latin typeface="Calibri" pitchFamily="34" charset="0"/>
-                <a:ea typeface="Calibri" pitchFamily="34" charset="-122"/>
-                <a:cs typeface="Calibri" pitchFamily="34" charset="-120"/>
-              </a:rPr>
-              <a:t>Материалы и работы</a:t>
-            </a:r>
-            <a:endParaRPr lang="en-US" sz="1400" dirty="0"/>
-          </a:p>
-        </p:txBody>
-      </p:sp>
-      <p:sp>
-        <p:nvSpPr>
-          <p:cNvPr id="7" name="Text 4"/>
-          <p:cNvSpPr txBox="1"/>
-          <p:nvPr/>
-        </p:nvSpPr>
-        <p:spPr>
-          <a:xfrm>
-            <a:off x="9966960" y="1325880"/>
-            <a:ext cx="1645920" cy="457200"/>
-          </a:xfrm>
-          <a:prstGeom prst="rect">
-            <a:avLst/>
-          </a:prstGeom>
-          <a:noFill/>
-          <a:ln/>
-        </p:spPr>
-        <p:txBody>
-          <a:bodyPr wrap="square" lIns="0" tIns="0" rIns="0" bIns="0" rtlCol="0" anchor="ctr"/>
-          <a:lstStyle/>
-          <a:p>
-            <a:pPr algn="r" indent="0" marL="0">
-              <a:buNone/>
-            </a:pPr>
-            <a:r>
-              <a:rPr lang="en-US" sz="1400" b="1" dirty="0">
-                <a:solidFill>
-                  <a:srgbClr val="1F2937"/>
-                </a:solidFill>
-                <a:latin typeface="Calibri" pitchFamily="34" charset="0"/>
-                <a:ea typeface="Calibri" pitchFamily="34" charset="-122"/>
-                <a:cs typeface="Calibri" pitchFamily="34" charset="-120"/>
-              </a:rPr>
-              <a:t>2 003 600 ₽</a:t>
-            </a:r>
-            <a:endParaRPr lang="en-US" sz="1400" dirty="0"/>
-          </a:p>
-        </p:txBody>
-      </p:sp>
-      <p:sp>
-        <p:nvSpPr>
-          <p:cNvPr id="8" name="Text 5"/>
-          <p:cNvSpPr txBox="1"/>
-          <p:nvPr/>
-        </p:nvSpPr>
-        <p:spPr>
-          <a:xfrm>
-            <a:off x="7772400" y="1874520"/>
-            <a:ext cx="2286000" cy="457200"/>
-          </a:xfrm>
-          <a:prstGeom prst="rect">
-            <a:avLst/>
-          </a:prstGeom>
-          <a:noFill/>
-          <a:ln/>
-        </p:spPr>
-        <p:txBody>
-          <a:bodyPr wrap="square" lIns="0" tIns="0" rIns="0" bIns="0" rtlCol="0" anchor="ctr"/>
-          <a:lstStyle/>
-          <a:p>
-            <a:pPr indent="0" marL="0">
-              <a:buNone/>
-            </a:pPr>
-            <a:r>
-              <a:rPr lang="en-US" sz="1400" dirty="0">
-                <a:solidFill>
-                  <a:srgbClr val="1F2937"/>
-                </a:solidFill>
-                <a:latin typeface="Calibri" pitchFamily="34" charset="0"/>
-                <a:ea typeface="Calibri" pitchFamily="34" charset="-122"/>
-                <a:cs typeface="Calibri" pitchFamily="34" charset="-120"/>
-              </a:rPr>
-              <a:t>Техника</a:t>
-            </a:r>
-            <a:endParaRPr lang="en-US" sz="1400" dirty="0"/>
-          </a:p>
-        </p:txBody>
-      </p:sp>
-      <p:sp>
-        <p:nvSpPr>
-          <p:cNvPr id="9" name="Text 6"/>
-          <p:cNvSpPr txBox="1"/>
-          <p:nvPr/>
-        </p:nvSpPr>
-        <p:spPr>
-          <a:xfrm>
-            <a:off x="9966960" y="1874520"/>
-            <a:ext cx="1645920" cy="457200"/>
-          </a:xfrm>
-          <a:prstGeom prst="rect">
-            <a:avLst/>
-          </a:prstGeom>
-          <a:noFill/>
-          <a:ln/>
-        </p:spPr>
-        <p:txBody>
-          <a:bodyPr wrap="square" lIns="0" tIns="0" rIns="0" bIns="0" rtlCol="0" anchor="ctr"/>
-          <a:lstStyle/>
-          <a:p>
-            <a:pPr algn="r" indent="0" marL="0">
-              <a:buNone/>
-            </a:pPr>
-            <a:r>
-              <a:rPr lang="en-US" sz="1400" b="1" dirty="0">
-                <a:solidFill>
-                  <a:srgbClr val="1F2937"/>
-                </a:solidFill>
-                <a:latin typeface="Calibri" pitchFamily="34" charset="0"/>
-                <a:ea typeface="Calibri" pitchFamily="34" charset="-122"/>
-                <a:cs typeface="Calibri" pitchFamily="34" charset="-120"/>
-              </a:rPr>
-              <a:t>299 600 ₽</a:t>
-            </a:r>
-            <a:endParaRPr lang="en-US" sz="1400" dirty="0"/>
-          </a:p>
-        </p:txBody>
-      </p:sp>
-      <p:sp>
-        <p:nvSpPr>
-          <p:cNvPr id="10" name="Text 7"/>
-          <p:cNvSpPr txBox="1"/>
-          <p:nvPr/>
-        </p:nvSpPr>
-        <p:spPr>
-          <a:xfrm>
-            <a:off x="7772400" y="2423160"/>
-            <a:ext cx="2286000" cy="457200"/>
-          </a:xfrm>
-          <a:prstGeom prst="rect">
-            <a:avLst/>
-          </a:prstGeom>
-          <a:noFill/>
-          <a:ln/>
-        </p:spPr>
-        <p:txBody>
-          <a:bodyPr wrap="square" lIns="0" tIns="0" rIns="0" bIns="0" rtlCol="0" anchor="ctr"/>
-          <a:lstStyle/>
-          <a:p>
-            <a:pPr indent="0" marL="0">
-              <a:buNone/>
-            </a:pPr>
-            <a:r>
-              <a:rPr lang="en-US" sz="1400" dirty="0">
-                <a:solidFill>
-                  <a:srgbClr val="1F2937"/>
-                </a:solidFill>
-                <a:latin typeface="Calibri" pitchFamily="34" charset="0"/>
-                <a:ea typeface="Calibri" pitchFamily="34" charset="-122"/>
-                <a:cs typeface="Calibri" pitchFamily="34" charset="-120"/>
-              </a:rPr>
-              <a:t>Зарплата с взносами</a:t>
-            </a:r>
-            <a:endParaRPr lang="en-US" sz="1400" dirty="0"/>
-          </a:p>
-        </p:txBody>
-      </p:sp>
-      <p:sp>
-        <p:nvSpPr>
-          <p:cNvPr id="11" name="Text 8"/>
-          <p:cNvSpPr txBox="1"/>
-          <p:nvPr/>
-        </p:nvSpPr>
-        <p:spPr>
-          <a:xfrm>
-            <a:off x="9966960" y="2423160"/>
-            <a:ext cx="1645920" cy="457200"/>
-          </a:xfrm>
-          <a:prstGeom prst="rect">
-            <a:avLst/>
-          </a:prstGeom>
-          <a:noFill/>
-          <a:ln/>
-        </p:spPr>
-        <p:txBody>
-          <a:bodyPr wrap="square" lIns="0" tIns="0" rIns="0" bIns="0" rtlCol="0" anchor="ctr"/>
-          <a:lstStyle/>
-          <a:p>
-            <a:pPr algn="r" indent="0" marL="0">
-              <a:buNone/>
-            </a:pPr>
-            <a:r>
-              <a:rPr lang="en-US" sz="1400" b="1" dirty="0">
-                <a:solidFill>
-                  <a:srgbClr val="1F2937"/>
-                </a:solidFill>
-                <a:latin typeface="Calibri" pitchFamily="34" charset="0"/>
-                <a:ea typeface="Calibri" pitchFamily="34" charset="-122"/>
-                <a:cs typeface="Calibri" pitchFamily="34" charset="-120"/>
-              </a:rPr>
-              <a:t>624 650 ₽</a:t>
-            </a:r>
-            <a:endParaRPr lang="en-US" sz="1400" dirty="0"/>
-          </a:p>
-        </p:txBody>
-      </p:sp>
-      <p:sp>
-        <p:nvSpPr>
-          <p:cNvPr id="12" name="Text 9"/>
-          <p:cNvSpPr txBox="1"/>
-          <p:nvPr/>
-        </p:nvSpPr>
-        <p:spPr>
-          <a:xfrm>
-            <a:off x="7772400" y="2971800"/>
-            <a:ext cx="2286000" cy="457200"/>
-          </a:xfrm>
-          <a:prstGeom prst="rect">
-            <a:avLst/>
-          </a:prstGeom>
-          <a:noFill/>
-          <a:ln/>
-        </p:spPr>
-        <p:txBody>
-          <a:bodyPr wrap="square" lIns="0" tIns="0" rIns="0" bIns="0" rtlCol="0" anchor="ctr"/>
-          <a:lstStyle/>
-          <a:p>
-            <a:pPr indent="0" marL="0">
-              <a:buNone/>
-            </a:pPr>
-            <a:r>
-              <a:rPr lang="en-US" sz="1400" dirty="0">
-                <a:solidFill>
-                  <a:srgbClr val="1F2937"/>
-                </a:solidFill>
-                <a:latin typeface="Calibri" pitchFamily="34" charset="0"/>
-                <a:ea typeface="Calibri" pitchFamily="34" charset="-122"/>
-                <a:cs typeface="Calibri" pitchFamily="34" charset="-120"/>
-              </a:rPr>
-              <a:t>Непредвиденные 5 %</a:t>
-            </a:r>
-            <a:endParaRPr lang="en-US" sz="1400" dirty="0"/>
-          </a:p>
-        </p:txBody>
-      </p:sp>
-      <p:sp>
-        <p:nvSpPr>
-          <p:cNvPr id="13" name="Text 10"/>
-          <p:cNvSpPr txBox="1"/>
-          <p:nvPr/>
-        </p:nvSpPr>
-        <p:spPr>
-          <a:xfrm>
-            <a:off x="9966960" y="2971800"/>
-            <a:ext cx="1645920" cy="457200"/>
-          </a:xfrm>
-          <a:prstGeom prst="rect">
-            <a:avLst/>
-          </a:prstGeom>
-          <a:noFill/>
-          <a:ln/>
-        </p:spPr>
-        <p:txBody>
-          <a:bodyPr wrap="square" lIns="0" tIns="0" rIns="0" bIns="0" rtlCol="0" anchor="ctr"/>
-          <a:lstStyle/>
-          <a:p>
-            <a:pPr algn="r" indent="0" marL="0">
-              <a:buNone/>
-            </a:pPr>
-            <a:r>
-              <a:rPr lang="en-US" sz="1400" b="1" dirty="0">
-                <a:solidFill>
-                  <a:srgbClr val="1F2937"/>
-                </a:solidFill>
-                <a:latin typeface="Calibri" pitchFamily="34" charset="0"/>
-                <a:ea typeface="Calibri" pitchFamily="34" charset="-122"/>
-                <a:cs typeface="Calibri" pitchFamily="34" charset="-120"/>
-              </a:rPr>
-              <a:t>146 393 ₽</a:t>
-            </a:r>
-            <a:endParaRPr lang="en-US" sz="1400" dirty="0"/>
-          </a:p>
-        </p:txBody>
-      </p:sp>
-      <p:sp>
-        <p:nvSpPr>
-          <p:cNvPr id="14" name="Shape 11"/>
-          <p:cNvSpPr/>
-          <p:nvPr/>
-        </p:nvSpPr>
-        <p:spPr>
-          <a:xfrm>
-            <a:off x="7772400" y="3703320"/>
-            <a:ext cx="3840480" cy="1371600"/>
-          </a:xfrm>
-          <a:prstGeom prst="roundRect">
-            <a:avLst>
-              <a:gd name="adj" fmla="val 8000"/>
-            </a:avLst>
-          </a:prstGeom>
-          <a:solidFill>
-            <a:srgbClr val="26282E"/>
-          </a:solidFill>
-          <a:ln/>
-        </p:spPr>
-      </p:sp>
-      <p:sp>
-        <p:nvSpPr>
-          <p:cNvPr id="15" name="Text 12"/>
-          <p:cNvSpPr txBox="1"/>
-          <p:nvPr/>
-        </p:nvSpPr>
-        <p:spPr>
-          <a:xfrm>
-            <a:off x="8001000" y="3794760"/>
-            <a:ext cx="3474720" cy="365760"/>
-          </a:xfrm>
-          <a:prstGeom prst="rect">
-            <a:avLst/>
-          </a:prstGeom>
-          <a:noFill/>
-          <a:ln/>
-        </p:spPr>
-        <p:txBody>
-          <a:bodyPr wrap="square" lIns="0" tIns="0" rIns="0" bIns="0" rtlCol="0" anchor="ctr"/>
-          <a:lstStyle/>
-          <a:p>
-            <a:pPr indent="0" marL="0">
-              <a:buNone/>
-            </a:pPr>
-            <a:r>
-              <a:rPr lang="en-US" sz="1300" b="1" dirty="0">
-                <a:solidFill>
-                  <a:srgbClr val="FFFFFF"/>
-                </a:solidFill>
-                <a:latin typeface="Calibri" pitchFamily="34" charset="0"/>
-                <a:ea typeface="Calibri" pitchFamily="34" charset="-122"/>
-                <a:cs typeface="Calibri" pitchFamily="34" charset="-120"/>
-              </a:rPr>
-              <a:t>ИТОГО ПО СМЕТЕ</a:t>
-            </a:r>
-            <a:endParaRPr lang="en-US" sz="1300" dirty="0"/>
-          </a:p>
-        </p:txBody>
-      </p:sp>
-      <p:sp>
-        <p:nvSpPr>
-          <p:cNvPr id="16" name="Text 13"/>
-          <p:cNvSpPr txBox="1"/>
-          <p:nvPr/>
-        </p:nvSpPr>
-        <p:spPr>
-          <a:xfrm>
-            <a:off x="8001000" y="4160520"/>
-            <a:ext cx="3474720" cy="731520"/>
-          </a:xfrm>
-          <a:prstGeom prst="rect">
-            <a:avLst/>
-          </a:prstGeom>
-          <a:noFill/>
-          <a:ln/>
-        </p:spPr>
-        <p:txBody>
-          <a:bodyPr wrap="square" lIns="0" tIns="0" rIns="0" bIns="0" rtlCol="0" anchor="ctr"/>
-          <a:lstStyle/>
-          <a:p>
-            <a:pPr indent="0" marL="0">
-              <a:buNone/>
-            </a:pPr>
-            <a:r>
-              <a:rPr lang="en-US" sz="3000" b="1" dirty="0">
-                <a:solidFill>
-                  <a:srgbClr val="F2C200"/>
-                </a:solidFill>
-                <a:latin typeface="Cambria" pitchFamily="34" charset="0"/>
-                <a:ea typeface="Cambria" pitchFamily="34" charset="-122"/>
-                <a:cs typeface="Cambria" pitchFamily="34" charset="-120"/>
-              </a:rPr>
-              <a:t>3 074 243 ₽</a:t>
-            </a:r>
-            <a:endParaRPr lang="en-US" sz="3000" dirty="0"/>
-          </a:p>
-        </p:txBody>
-      </p:sp>
-      <p:sp>
-        <p:nvSpPr>
-          <p:cNvPr id="17" name="Text 14"/>
-          <p:cNvSpPr txBox="1"/>
-          <p:nvPr/>
-        </p:nvSpPr>
-        <p:spPr>
-          <a:xfrm>
-            <a:off x="7772400" y="5257800"/>
-            <a:ext cx="3840480" cy="1097280"/>
-          </a:xfrm>
-          <a:prstGeom prst="rect">
-            <a:avLst/>
-          </a:prstGeom>
-          <a:noFill/>
-          <a:ln/>
-        </p:spPr>
-        <p:txBody>
-          <a:bodyPr wrap="square" lIns="0" tIns="0" rIns="0" bIns="0" rtlCol="0" anchor="t"/>
-          <a:lstStyle/>
-          <a:p>
-            <a:pPr indent="0" marL="0">
-              <a:buNone/>
-            </a:pPr>
-            <a:r>
-              <a:rPr lang="en-US" sz="1200" b="1" dirty="0">
-                <a:solidFill>
-                  <a:srgbClr val="1F2937"/>
-                </a:solidFill>
-                <a:latin typeface="Calibri" pitchFamily="34" charset="0"/>
-                <a:ea typeface="Calibri" pitchFamily="34" charset="-122"/>
-                <a:cs typeface="Calibri" pitchFamily="34" charset="-120"/>
-              </a:rPr>
-              <a:t>≈ 21 349 ₽</a:t>
-            </a:r>
-            <a:pPr indent="0" marL="0">
-              <a:buNone/>
-            </a:pPr>
-            <a:r>
-              <a:rPr lang="en-US" sz="1200" dirty="0">
-                <a:solidFill>
-                  <a:srgbClr val="1F2937"/>
-                </a:solidFill>
-                <a:latin typeface="Calibri" pitchFamily="34" charset="0"/>
-                <a:ea typeface="Calibri" pitchFamily="34" charset="-122"/>
-                <a:cs typeface="Calibri" pitchFamily="34" charset="-120"/>
-              </a:rPr>
-              <a:t> с квартиры (144 кв.) или </a:t>
-            </a:r>
-            <a:pPr indent="0" marL="0">
-              <a:buNone/>
-            </a:pPr>
-            <a:r>
-              <a:rPr lang="en-US" sz="1200" b="1" dirty="0">
-                <a:solidFill>
-                  <a:srgbClr val="1F2937"/>
-                </a:solidFill>
-                <a:latin typeface="Calibri" pitchFamily="34" charset="0"/>
-                <a:ea typeface="Calibri" pitchFamily="34" charset="-122"/>
-                <a:cs typeface="Calibri" pitchFamily="34" charset="-120"/>
-              </a:rPr>
-              <a:t>≈ 153 712 ₽</a:t>
-            </a:r>
-            <a:pPr indent="0" marL="0">
-              <a:buNone/>
-            </a:pPr>
-            <a:r>
-              <a:rPr lang="en-US" sz="1200" dirty="0">
-                <a:solidFill>
-                  <a:srgbClr val="1F2937"/>
-                </a:solidFill>
-                <a:latin typeface="Calibri" pitchFamily="34" charset="0"/>
-                <a:ea typeface="Calibri" pitchFamily="34" charset="-122"/>
-                <a:cs typeface="Calibri" pitchFamily="34" charset="-120"/>
-              </a:rPr>
-              <a:t> за одно новое место. Источник — фонд текущего ремонта / целевой сбор по решению ОСС.</a:t>
-            </a:r>
-            <a:endParaRPr lang="en-US" sz="1200" dirty="0"/>
           </a:p>
         </p:txBody>
       </p:sp>

--- a/parking/Парковка_Нахимова_20.pptx
+++ b/parking/Парковка_Нахимова_20.pptx
@@ -20,9 +20,10 @@
     <p:sldId id="268" r:id="rId14"/>
     <p:sldId id="269" r:id="rId15"/>
     <p:sldId id="270" r:id="rId16"/>
+    <p:sldId id="271" r:id="rId17"/>
   </p:sldIdLst>
   <p:notesMasterIdLst>
-    <p:notesMasterId r:id="rId17"/>
+    <p:notesMasterId r:id="rId18"/>
   </p:notesMasterIdLst>
   <p:sldSz cx="12192000" cy="6858000"/>
   <p:notesSz cx="6858000" cy="12192000"/>
@@ -1068,6 +1069,94 @@
             <a:fld id="{F7021451-1387-4CA6-816F-3879F97B5CBC}" type="slidenum">
               <a:rPr lang="en-US"/>
               <a:t>15</a:t>
+            </a:fld>
+            <a:endParaRPr lang="en-US"/>
+          </a:p>
+        </p:txBody>
+      </p:sp>
+    </p:spTree>
+    <p:extLst>
+      <p:ext uri="{BB962C8B-B14F-4D97-AF65-F5344CB8AC3E}">
+        <p14:creationId xmlns:p14="http://schemas.microsoft.com/office/powerpoint/2010/main" val="1024086991"/>
+      </p:ext>
+    </p:extLst>
+  </p:cSld>
+  <p:clrMapOvr>
+    <a:masterClrMapping/>
+  </p:clrMapOvr>
+</p:notes>
+</file>
+
+<file path=ppt/notesSlides/notesSlide16.xml><?xml version="1.0" encoding="utf-8"?>
+<p:notes xmlns:a="http://schemas.openxmlformats.org/drawingml/2006/main" xmlns:r="http://schemas.openxmlformats.org/officeDocument/2006/relationships" xmlns:p="http://schemas.openxmlformats.org/presentationml/2006/main">
+  <p:cSld>
+    <p:spTree>
+      <p:nvGrpSpPr>
+        <p:cNvPr id="1" name=""/>
+        <p:cNvGrpSpPr/>
+        <p:nvPr/>
+      </p:nvGrpSpPr>
+      <p:grpSpPr>
+        <a:xfrm>
+          <a:off x="0" y="0"/>
+          <a:ext cx="0" cy="0"/>
+          <a:chOff x="0" y="0"/>
+          <a:chExt cx="0" cy="0"/>
+        </a:xfrm>
+      </p:grpSpPr>
+      <p:sp>
+        <p:nvSpPr>
+          <p:cNvPr id="2" name="Slide Image Placeholder 1"/>
+          <p:cNvSpPr>
+            <a:spLocks noGrp="1" noRot="1" noChangeAspect="1"/>
+          </p:cNvSpPr>
+          <p:nvPr>
+            <p:ph type="sldImg"/>
+          </p:nvPr>
+        </p:nvSpPr>
+        <p:spPr/>
+      </p:sp>
+      <p:sp>
+        <p:nvSpPr>
+          <p:cNvPr id="3" name="Notes Placeholder 2"/>
+          <p:cNvSpPr>
+            <a:spLocks noGrp="1"/>
+          </p:cNvSpPr>
+          <p:nvPr>
+            <p:ph type="body" idx="1"/>
+          </p:nvPr>
+        </p:nvSpPr>
+        <p:spPr/>
+        <p:txBody>
+          <a:bodyPr/>
+          <a:lstStyle/>
+          <a:p>
+            <a:r>
+              <a:rPr lang="en-US" dirty="0"/>
+              <a:t/>
+            </a:r>
+            <a:endParaRPr lang="en-US" dirty="0"/>
+          </a:p>
+        </p:txBody>
+      </p:sp>
+      <p:sp>
+        <p:nvSpPr>
+          <p:cNvPr id="4" name="Slide Number Placeholder 3"/>
+          <p:cNvSpPr>
+            <a:spLocks noGrp="1"/>
+          </p:cNvSpPr>
+          <p:nvPr>
+            <p:ph type="sldNum" sz="quarter" idx="10"/>
+          </p:nvPr>
+        </p:nvSpPr>
+        <p:spPr/>
+        <p:txBody>
+          <a:bodyPr/>
+          <a:lstStyle/>
+          <a:p>
+            <a:fld id="{F7021451-1387-4CA6-816F-3879F97B5CBC}" type="slidenum">
+              <a:rPr lang="en-US"/>
+              <a:t>16</a:t>
             </a:fld>
             <a:endParaRPr lang="en-US"/>
           </a:p>
@@ -2399,7 +2488,7 @@
                 <a:ea typeface="Cambria" pitchFamily="34" charset="-122"/>
                 <a:cs typeface="Cambria" pitchFamily="34" charset="-120"/>
               </a:rPr>
-              <a:t>Что нужно и что получится</a:t>
+              <a:t>3D-модель двора после работ</a:t>
             </a:r>
             <a:endParaRPr lang="en-US" sz="3400" dirty="0"/>
           </a:p>
@@ -2464,16 +2553,88 @@
           </a:p>
         </p:txBody>
       </p:sp>
-      <p:sp>
-        <p:nvSpPr>
-          <p:cNvPr id="5" name="Text 3"/>
+      <p:pic>
+        <p:nvPicPr>
+          <p:cNvPr id="5" name="Image 0" descr="/home/user/mirigrushek/parking/img/3d_east.png">    </p:cNvPr>
+          <p:cNvPicPr>
+            <a:picLocks noChangeAspect="1"/>
+          </p:cNvPicPr>
+          <p:nvPr/>
+        </p:nvPicPr>
+        <p:blipFill>
+          <a:blip r:embed="rId1"/>
+          <a:stretch>
+            <a:fillRect/>
+          </a:stretch>
+        </p:blipFill>
+        <p:spPr>
+          <a:xfrm>
+            <a:off x="548640" y="1234440"/>
+            <a:ext cx="6949440" cy="3913632"/>
+          </a:xfrm>
+          <a:prstGeom prst="rect">
+            <a:avLst/>
+          </a:prstGeom>
+        </p:spPr>
+      </p:pic>
+      <p:pic>
+        <p:nvPicPr>
+          <p:cNvPr id="6" name="Image 1" descr="/home/user/mirigrushek/parking/img/3d_top.png">    </p:cNvPr>
+          <p:cNvPicPr>
+            <a:picLocks noChangeAspect="1"/>
+          </p:cNvPicPr>
+          <p:nvPr/>
+        </p:nvPicPr>
+        <p:blipFill>
+          <a:blip r:embed="rId2"/>
+          <a:stretch>
+            <a:fillRect/>
+          </a:stretch>
+        </p:blipFill>
+        <p:spPr>
+          <a:xfrm>
+            <a:off x="7726680" y="1234440"/>
+            <a:ext cx="3886200" cy="2185416"/>
+          </a:xfrm>
+          <a:prstGeom prst="rect">
+            <a:avLst/>
+          </a:prstGeom>
+        </p:spPr>
+      </p:pic>
+      <p:pic>
+        <p:nvPicPr>
+          <p:cNvPr id="7" name="Image 2" descr="/home/user/mirigrushek/parking/img/3d_yard.png">    </p:cNvPr>
+          <p:cNvPicPr>
+            <a:picLocks noChangeAspect="1"/>
+          </p:cNvPicPr>
+          <p:nvPr/>
+        </p:nvPicPr>
+        <p:blipFill>
+          <a:blip r:embed="rId3"/>
+          <a:stretch>
+            <a:fillRect/>
+          </a:stretch>
+        </p:blipFill>
+        <p:spPr>
+          <a:xfrm>
+            <a:off x="7726680" y="3611880"/>
+            <a:ext cx="3886200" cy="2185416"/>
+          </a:xfrm>
+          <a:prstGeom prst="rect">
+            <a:avLst/>
+          </a:prstGeom>
+        </p:spPr>
+      </p:pic>
+      <p:sp>
+        <p:nvSpPr>
+          <p:cNvPr id="8" name="Text 3"/>
           <p:cNvSpPr txBox="1"/>
           <p:nvPr/>
         </p:nvSpPr>
         <p:spPr>
           <a:xfrm>
-            <a:off x="548640" y="1234440"/>
-            <a:ext cx="5303520" cy="365760"/>
+            <a:off x="548640" y="5212080"/>
+            <a:ext cx="6949440" cy="320040"/>
           </a:xfrm>
           <a:prstGeom prst="rect">
             <a:avLst/>
@@ -2486,1139 +2647,6 @@
           <a:lstStyle/>
           <a:p>
             <a:pPr indent="0" marL="0">
-              <a:buNone/>
-            </a:pPr>
-            <a:r>
-              <a:rPr lang="en-US" sz="1800" b="1" dirty="0">
-                <a:solidFill>
-                  <a:srgbClr val="6B7280"/>
-                </a:solidFill>
-                <a:latin typeface="Calibri" pitchFamily="34" charset="0"/>
-                <a:ea typeface="Calibri" pitchFamily="34" charset="-122"/>
-                <a:cs typeface="Calibri" pitchFamily="34" charset="-120"/>
-              </a:rPr>
-              <a:t>БЫЛО</a:t>
-            </a:r>
-            <a:endParaRPr lang="en-US" sz="1800" dirty="0"/>
-          </a:p>
-        </p:txBody>
-      </p:sp>
-      <p:pic>
-        <p:nvPicPr>
-          <p:cNvPr id="6" name="Image 0" descr="/home/user/mirigrushek/parking/img/yard_west.jpg">    </p:cNvPr>
-          <p:cNvPicPr>
-            <a:picLocks noChangeAspect="1"/>
-          </p:cNvPicPr>
-          <p:nvPr/>
-        </p:nvPicPr>
-        <p:blipFill>
-          <a:blip r:embed="rId1"/>
-          <a:srcRect l="0" r="0" t="0" b="0"/>
-          <a:stretch/>
-        </p:blipFill>
-        <p:spPr>
-          <a:xfrm>
-            <a:off x="548640" y="1645920"/>
-            <a:ext cx="5303520" cy="2103120"/>
-          </a:xfrm>
-          <a:prstGeom prst="rect">
-            <a:avLst/>
-          </a:prstGeom>
-        </p:spPr>
-      </p:pic>
-      <p:sp>
-        <p:nvSpPr>
-          <p:cNvPr id="7" name="Text 4"/>
-          <p:cNvSpPr txBox="1"/>
-          <p:nvPr/>
-        </p:nvSpPr>
-        <p:spPr>
-          <a:xfrm>
-            <a:off x="6309360" y="1234440"/>
-            <a:ext cx="5303520" cy="365760"/>
-          </a:xfrm>
-          <a:prstGeom prst="rect">
-            <a:avLst/>
-          </a:prstGeom>
-          <a:noFill/>
-          <a:ln/>
-        </p:spPr>
-        <p:txBody>
-          <a:bodyPr wrap="square" lIns="0" tIns="0" rIns="0" bIns="0" rtlCol="0" anchor="ctr"/>
-          <a:lstStyle/>
-          <a:p>
-            <a:pPr indent="0" marL="0">
-              <a:buNone/>
-            </a:pPr>
-            <a:r>
-              <a:rPr lang="en-US" sz="1800" b="1" dirty="0">
-                <a:solidFill>
-                  <a:srgbClr val="5B8C51"/>
-                </a:solidFill>
-                <a:latin typeface="Calibri" pitchFamily="34" charset="0"/>
-                <a:ea typeface="Calibri" pitchFamily="34" charset="-122"/>
-                <a:cs typeface="Calibri" pitchFamily="34" charset="-120"/>
-              </a:rPr>
-              <a:t>СТАНЕТ</a:t>
-            </a:r>
-            <a:endParaRPr lang="en-US" sz="1800" dirty="0"/>
-          </a:p>
-        </p:txBody>
-      </p:sp>
-      <p:sp>
-        <p:nvSpPr>
-          <p:cNvPr id="8" name="Shape 5"/>
-          <p:cNvSpPr/>
-          <p:nvPr/>
-        </p:nvSpPr>
-        <p:spPr>
-          <a:xfrm>
-            <a:off x="6309360" y="1645920"/>
-            <a:ext cx="5303520" cy="1737360"/>
-          </a:xfrm>
-          <a:prstGeom prst="rect">
-            <a:avLst/>
-          </a:prstGeom>
-          <a:solidFill>
-            <a:srgbClr val="3A3D44"/>
-          </a:solidFill>
-          <a:ln/>
-        </p:spPr>
-      </p:sp>
-      <p:sp>
-        <p:nvSpPr>
-          <p:cNvPr id="9" name="Shape 6"/>
-          <p:cNvSpPr/>
-          <p:nvPr/>
-        </p:nvSpPr>
-        <p:spPr>
-          <a:xfrm>
-            <a:off x="6309360" y="1645920"/>
-            <a:ext cx="0" cy="781812"/>
-          </a:xfrm>
-          <a:prstGeom prst="line">
-            <a:avLst/>
-          </a:prstGeom>
-          <a:noFill/>
-          <a:ln w="19050">
-            <a:solidFill>
-              <a:srgbClr val="FFFFFF"/>
-            </a:solidFill>
-            <a:prstDash val="solid"/>
-          </a:ln>
-        </p:spPr>
-      </p:sp>
-      <p:sp>
-        <p:nvSpPr>
-          <p:cNvPr id="10" name="Shape 7"/>
-          <p:cNvSpPr/>
-          <p:nvPr/>
-        </p:nvSpPr>
-        <p:spPr>
-          <a:xfrm>
-            <a:off x="6561909" y="1645920"/>
-            <a:ext cx="0" cy="781812"/>
-          </a:xfrm>
-          <a:prstGeom prst="line">
-            <a:avLst/>
-          </a:prstGeom>
-          <a:noFill/>
-          <a:ln w="19050">
-            <a:solidFill>
-              <a:srgbClr val="FFFFFF"/>
-            </a:solidFill>
-            <a:prstDash val="solid"/>
-          </a:ln>
-        </p:spPr>
-      </p:sp>
-      <p:sp>
-        <p:nvSpPr>
-          <p:cNvPr id="11" name="Shape 8"/>
-          <p:cNvSpPr/>
-          <p:nvPr/>
-        </p:nvSpPr>
-        <p:spPr>
-          <a:xfrm>
-            <a:off x="6814457" y="1645920"/>
-            <a:ext cx="0" cy="781812"/>
-          </a:xfrm>
-          <a:prstGeom prst="line">
-            <a:avLst/>
-          </a:prstGeom>
-          <a:noFill/>
-          <a:ln w="19050">
-            <a:solidFill>
-              <a:srgbClr val="FFFFFF"/>
-            </a:solidFill>
-            <a:prstDash val="solid"/>
-          </a:ln>
-        </p:spPr>
-      </p:sp>
-      <p:sp>
-        <p:nvSpPr>
-          <p:cNvPr id="12" name="Shape 9"/>
-          <p:cNvSpPr/>
-          <p:nvPr/>
-        </p:nvSpPr>
-        <p:spPr>
-          <a:xfrm>
-            <a:off x="7067006" y="1645920"/>
-            <a:ext cx="0" cy="781812"/>
-          </a:xfrm>
-          <a:prstGeom prst="line">
-            <a:avLst/>
-          </a:prstGeom>
-          <a:noFill/>
-          <a:ln w="19050">
-            <a:solidFill>
-              <a:srgbClr val="FFFFFF"/>
-            </a:solidFill>
-            <a:prstDash val="solid"/>
-          </a:ln>
-        </p:spPr>
-      </p:sp>
-      <p:sp>
-        <p:nvSpPr>
-          <p:cNvPr id="13" name="Shape 10"/>
-          <p:cNvSpPr/>
-          <p:nvPr/>
-        </p:nvSpPr>
-        <p:spPr>
-          <a:xfrm>
-            <a:off x="7319554" y="1645920"/>
-            <a:ext cx="0" cy="781812"/>
-          </a:xfrm>
-          <a:prstGeom prst="line">
-            <a:avLst/>
-          </a:prstGeom>
-          <a:noFill/>
-          <a:ln w="19050">
-            <a:solidFill>
-              <a:srgbClr val="FFFFFF"/>
-            </a:solidFill>
-            <a:prstDash val="solid"/>
-          </a:ln>
-        </p:spPr>
-      </p:sp>
-      <p:sp>
-        <p:nvSpPr>
-          <p:cNvPr id="14" name="Shape 11"/>
-          <p:cNvSpPr/>
-          <p:nvPr/>
-        </p:nvSpPr>
-        <p:spPr>
-          <a:xfrm>
-            <a:off x="7572103" y="1645920"/>
-            <a:ext cx="0" cy="781812"/>
-          </a:xfrm>
-          <a:prstGeom prst="line">
-            <a:avLst/>
-          </a:prstGeom>
-          <a:noFill/>
-          <a:ln w="19050">
-            <a:solidFill>
-              <a:srgbClr val="FFFFFF"/>
-            </a:solidFill>
-            <a:prstDash val="solid"/>
-          </a:ln>
-        </p:spPr>
-      </p:sp>
-      <p:sp>
-        <p:nvSpPr>
-          <p:cNvPr id="15" name="Shape 12"/>
-          <p:cNvSpPr/>
-          <p:nvPr/>
-        </p:nvSpPr>
-        <p:spPr>
-          <a:xfrm>
-            <a:off x="7824651" y="1645920"/>
-            <a:ext cx="0" cy="781812"/>
-          </a:xfrm>
-          <a:prstGeom prst="line">
-            <a:avLst/>
-          </a:prstGeom>
-          <a:noFill/>
-          <a:ln w="19050">
-            <a:solidFill>
-              <a:srgbClr val="FFFFFF"/>
-            </a:solidFill>
-            <a:prstDash val="solid"/>
-          </a:ln>
-        </p:spPr>
-      </p:sp>
-      <p:sp>
-        <p:nvSpPr>
-          <p:cNvPr id="16" name="Shape 13"/>
-          <p:cNvSpPr/>
-          <p:nvPr/>
-        </p:nvSpPr>
-        <p:spPr>
-          <a:xfrm>
-            <a:off x="8077200" y="1645920"/>
-            <a:ext cx="0" cy="781812"/>
-          </a:xfrm>
-          <a:prstGeom prst="line">
-            <a:avLst/>
-          </a:prstGeom>
-          <a:noFill/>
-          <a:ln w="19050">
-            <a:solidFill>
-              <a:srgbClr val="FFFFFF"/>
-            </a:solidFill>
-            <a:prstDash val="solid"/>
-          </a:ln>
-        </p:spPr>
-      </p:sp>
-      <p:sp>
-        <p:nvSpPr>
-          <p:cNvPr id="17" name="Shape 14"/>
-          <p:cNvSpPr/>
-          <p:nvPr/>
-        </p:nvSpPr>
-        <p:spPr>
-          <a:xfrm>
-            <a:off x="8329749" y="1645920"/>
-            <a:ext cx="0" cy="781812"/>
-          </a:xfrm>
-          <a:prstGeom prst="line">
-            <a:avLst/>
-          </a:prstGeom>
-          <a:noFill/>
-          <a:ln w="19050">
-            <a:solidFill>
-              <a:srgbClr val="FFFFFF"/>
-            </a:solidFill>
-            <a:prstDash val="solid"/>
-          </a:ln>
-        </p:spPr>
-      </p:sp>
-      <p:sp>
-        <p:nvSpPr>
-          <p:cNvPr id="18" name="Shape 15"/>
-          <p:cNvSpPr/>
-          <p:nvPr/>
-        </p:nvSpPr>
-        <p:spPr>
-          <a:xfrm>
-            <a:off x="8582297" y="1645920"/>
-            <a:ext cx="0" cy="781812"/>
-          </a:xfrm>
-          <a:prstGeom prst="line">
-            <a:avLst/>
-          </a:prstGeom>
-          <a:noFill/>
-          <a:ln w="19050">
-            <a:solidFill>
-              <a:srgbClr val="FFFFFF"/>
-            </a:solidFill>
-            <a:prstDash val="solid"/>
-          </a:ln>
-        </p:spPr>
-      </p:sp>
-      <p:sp>
-        <p:nvSpPr>
-          <p:cNvPr id="19" name="Shape 16"/>
-          <p:cNvSpPr/>
-          <p:nvPr/>
-        </p:nvSpPr>
-        <p:spPr>
-          <a:xfrm>
-            <a:off x="8834846" y="1645920"/>
-            <a:ext cx="0" cy="781812"/>
-          </a:xfrm>
-          <a:prstGeom prst="line">
-            <a:avLst/>
-          </a:prstGeom>
-          <a:noFill/>
-          <a:ln w="19050">
-            <a:solidFill>
-              <a:srgbClr val="FFFFFF"/>
-            </a:solidFill>
-            <a:prstDash val="solid"/>
-          </a:ln>
-        </p:spPr>
-      </p:sp>
-      <p:sp>
-        <p:nvSpPr>
-          <p:cNvPr id="20" name="Shape 17"/>
-          <p:cNvSpPr/>
-          <p:nvPr/>
-        </p:nvSpPr>
-        <p:spPr>
-          <a:xfrm>
-            <a:off x="9087394" y="1645920"/>
-            <a:ext cx="0" cy="781812"/>
-          </a:xfrm>
-          <a:prstGeom prst="line">
-            <a:avLst/>
-          </a:prstGeom>
-          <a:noFill/>
-          <a:ln w="19050">
-            <a:solidFill>
-              <a:srgbClr val="FFFFFF"/>
-            </a:solidFill>
-            <a:prstDash val="solid"/>
-          </a:ln>
-        </p:spPr>
-      </p:sp>
-      <p:sp>
-        <p:nvSpPr>
-          <p:cNvPr id="21" name="Shape 18"/>
-          <p:cNvSpPr/>
-          <p:nvPr/>
-        </p:nvSpPr>
-        <p:spPr>
-          <a:xfrm>
-            <a:off x="9339943" y="1645920"/>
-            <a:ext cx="0" cy="781812"/>
-          </a:xfrm>
-          <a:prstGeom prst="line">
-            <a:avLst/>
-          </a:prstGeom>
-          <a:noFill/>
-          <a:ln w="19050">
-            <a:solidFill>
-              <a:srgbClr val="FFFFFF"/>
-            </a:solidFill>
-            <a:prstDash val="solid"/>
-          </a:ln>
-        </p:spPr>
-      </p:sp>
-      <p:sp>
-        <p:nvSpPr>
-          <p:cNvPr id="22" name="Shape 19"/>
-          <p:cNvSpPr/>
-          <p:nvPr/>
-        </p:nvSpPr>
-        <p:spPr>
-          <a:xfrm>
-            <a:off x="9592491" y="1645920"/>
-            <a:ext cx="0" cy="781812"/>
-          </a:xfrm>
-          <a:prstGeom prst="line">
-            <a:avLst/>
-          </a:prstGeom>
-          <a:noFill/>
-          <a:ln w="19050">
-            <a:solidFill>
-              <a:srgbClr val="FFFFFF"/>
-            </a:solidFill>
-            <a:prstDash val="solid"/>
-          </a:ln>
-        </p:spPr>
-      </p:sp>
-      <p:sp>
-        <p:nvSpPr>
-          <p:cNvPr id="23" name="Shape 20"/>
-          <p:cNvSpPr/>
-          <p:nvPr/>
-        </p:nvSpPr>
-        <p:spPr>
-          <a:xfrm>
-            <a:off x="9845040" y="1645920"/>
-            <a:ext cx="0" cy="781812"/>
-          </a:xfrm>
-          <a:prstGeom prst="line">
-            <a:avLst/>
-          </a:prstGeom>
-          <a:noFill/>
-          <a:ln w="19050">
-            <a:solidFill>
-              <a:srgbClr val="FFFFFF"/>
-            </a:solidFill>
-            <a:prstDash val="solid"/>
-          </a:ln>
-        </p:spPr>
-      </p:sp>
-      <p:sp>
-        <p:nvSpPr>
-          <p:cNvPr id="24" name="Shape 21"/>
-          <p:cNvSpPr/>
-          <p:nvPr/>
-        </p:nvSpPr>
-        <p:spPr>
-          <a:xfrm>
-            <a:off x="10097589" y="1645920"/>
-            <a:ext cx="0" cy="781812"/>
-          </a:xfrm>
-          <a:prstGeom prst="line">
-            <a:avLst/>
-          </a:prstGeom>
-          <a:noFill/>
-          <a:ln w="19050">
-            <a:solidFill>
-              <a:srgbClr val="FFFFFF"/>
-            </a:solidFill>
-            <a:prstDash val="solid"/>
-          </a:ln>
-        </p:spPr>
-      </p:sp>
-      <p:sp>
-        <p:nvSpPr>
-          <p:cNvPr id="25" name="Shape 22"/>
-          <p:cNvSpPr/>
-          <p:nvPr/>
-        </p:nvSpPr>
-        <p:spPr>
-          <a:xfrm>
-            <a:off x="10350137" y="1645920"/>
-            <a:ext cx="0" cy="781812"/>
-          </a:xfrm>
-          <a:prstGeom prst="line">
-            <a:avLst/>
-          </a:prstGeom>
-          <a:noFill/>
-          <a:ln w="19050">
-            <a:solidFill>
-              <a:srgbClr val="FFFFFF"/>
-            </a:solidFill>
-            <a:prstDash val="solid"/>
-          </a:ln>
-        </p:spPr>
-      </p:sp>
-      <p:sp>
-        <p:nvSpPr>
-          <p:cNvPr id="26" name="Shape 23"/>
-          <p:cNvSpPr/>
-          <p:nvPr/>
-        </p:nvSpPr>
-        <p:spPr>
-          <a:xfrm>
-            <a:off x="10602686" y="1645920"/>
-            <a:ext cx="0" cy="781812"/>
-          </a:xfrm>
-          <a:prstGeom prst="line">
-            <a:avLst/>
-          </a:prstGeom>
-          <a:noFill/>
-          <a:ln w="19050">
-            <a:solidFill>
-              <a:srgbClr val="FFFFFF"/>
-            </a:solidFill>
-            <a:prstDash val="solid"/>
-          </a:ln>
-        </p:spPr>
-      </p:sp>
-      <p:sp>
-        <p:nvSpPr>
-          <p:cNvPr id="27" name="Shape 24"/>
-          <p:cNvSpPr/>
-          <p:nvPr/>
-        </p:nvSpPr>
-        <p:spPr>
-          <a:xfrm>
-            <a:off x="10855234" y="1645920"/>
-            <a:ext cx="0" cy="781812"/>
-          </a:xfrm>
-          <a:prstGeom prst="line">
-            <a:avLst/>
-          </a:prstGeom>
-          <a:noFill/>
-          <a:ln w="19050">
-            <a:solidFill>
-              <a:srgbClr val="FFFFFF"/>
-            </a:solidFill>
-            <a:prstDash val="solid"/>
-          </a:ln>
-        </p:spPr>
-      </p:sp>
-      <p:sp>
-        <p:nvSpPr>
-          <p:cNvPr id="28" name="Shape 25"/>
-          <p:cNvSpPr/>
-          <p:nvPr/>
-        </p:nvSpPr>
-        <p:spPr>
-          <a:xfrm>
-            <a:off x="11107783" y="1645920"/>
-            <a:ext cx="0" cy="781812"/>
-          </a:xfrm>
-          <a:prstGeom prst="line">
-            <a:avLst/>
-          </a:prstGeom>
-          <a:noFill/>
-          <a:ln w="19050">
-            <a:solidFill>
-              <a:srgbClr val="FFFFFF"/>
-            </a:solidFill>
-            <a:prstDash val="solid"/>
-          </a:ln>
-        </p:spPr>
-      </p:sp>
-      <p:sp>
-        <p:nvSpPr>
-          <p:cNvPr id="29" name="Shape 26"/>
-          <p:cNvSpPr/>
-          <p:nvPr/>
-        </p:nvSpPr>
-        <p:spPr>
-          <a:xfrm>
-            <a:off x="11360331" y="1645920"/>
-            <a:ext cx="0" cy="781812"/>
-          </a:xfrm>
-          <a:prstGeom prst="line">
-            <a:avLst/>
-          </a:prstGeom>
-          <a:noFill/>
-          <a:ln w="19050">
-            <a:solidFill>
-              <a:srgbClr val="FFFFFF"/>
-            </a:solidFill>
-            <a:prstDash val="solid"/>
-          </a:ln>
-        </p:spPr>
-      </p:sp>
-      <p:sp>
-        <p:nvSpPr>
-          <p:cNvPr id="30" name="Shape 27"/>
-          <p:cNvSpPr/>
-          <p:nvPr/>
-        </p:nvSpPr>
-        <p:spPr>
-          <a:xfrm>
-            <a:off x="11612880" y="1645920"/>
-            <a:ext cx="0" cy="781812"/>
-          </a:xfrm>
-          <a:prstGeom prst="line">
-            <a:avLst/>
-          </a:prstGeom>
-          <a:noFill/>
-          <a:ln w="19050">
-            <a:solidFill>
-              <a:srgbClr val="FFFFFF"/>
-            </a:solidFill>
-            <a:prstDash val="solid"/>
-          </a:ln>
-        </p:spPr>
-      </p:sp>
-      <p:sp>
-        <p:nvSpPr>
-          <p:cNvPr id="31" name="Shape 28"/>
-          <p:cNvSpPr/>
-          <p:nvPr/>
-        </p:nvSpPr>
-        <p:spPr>
-          <a:xfrm>
-            <a:off x="6309360" y="2601468"/>
-            <a:ext cx="0" cy="781812"/>
-          </a:xfrm>
-          <a:prstGeom prst="line">
-            <a:avLst/>
-          </a:prstGeom>
-          <a:noFill/>
-          <a:ln w="19050">
-            <a:solidFill>
-              <a:srgbClr val="FFFFFF"/>
-            </a:solidFill>
-            <a:prstDash val="solid"/>
-          </a:ln>
-        </p:spPr>
-      </p:sp>
-      <p:sp>
-        <p:nvSpPr>
-          <p:cNvPr id="32" name="Shape 29"/>
-          <p:cNvSpPr/>
-          <p:nvPr/>
-        </p:nvSpPr>
-        <p:spPr>
-          <a:xfrm>
-            <a:off x="6561909" y="2601468"/>
-            <a:ext cx="0" cy="781812"/>
-          </a:xfrm>
-          <a:prstGeom prst="line">
-            <a:avLst/>
-          </a:prstGeom>
-          <a:noFill/>
-          <a:ln w="19050">
-            <a:solidFill>
-              <a:srgbClr val="FFFFFF"/>
-            </a:solidFill>
-            <a:prstDash val="solid"/>
-          </a:ln>
-        </p:spPr>
-      </p:sp>
-      <p:sp>
-        <p:nvSpPr>
-          <p:cNvPr id="33" name="Shape 30"/>
-          <p:cNvSpPr/>
-          <p:nvPr/>
-        </p:nvSpPr>
-        <p:spPr>
-          <a:xfrm>
-            <a:off x="6814457" y="2601468"/>
-            <a:ext cx="0" cy="781812"/>
-          </a:xfrm>
-          <a:prstGeom prst="line">
-            <a:avLst/>
-          </a:prstGeom>
-          <a:noFill/>
-          <a:ln w="19050">
-            <a:solidFill>
-              <a:srgbClr val="FFFFFF"/>
-            </a:solidFill>
-            <a:prstDash val="solid"/>
-          </a:ln>
-        </p:spPr>
-      </p:sp>
-      <p:sp>
-        <p:nvSpPr>
-          <p:cNvPr id="34" name="Shape 31"/>
-          <p:cNvSpPr/>
-          <p:nvPr/>
-        </p:nvSpPr>
-        <p:spPr>
-          <a:xfrm>
-            <a:off x="7067006" y="2601468"/>
-            <a:ext cx="0" cy="781812"/>
-          </a:xfrm>
-          <a:prstGeom prst="line">
-            <a:avLst/>
-          </a:prstGeom>
-          <a:noFill/>
-          <a:ln w="19050">
-            <a:solidFill>
-              <a:srgbClr val="FFFFFF"/>
-            </a:solidFill>
-            <a:prstDash val="solid"/>
-          </a:ln>
-        </p:spPr>
-      </p:sp>
-      <p:sp>
-        <p:nvSpPr>
-          <p:cNvPr id="35" name="Shape 32"/>
-          <p:cNvSpPr/>
-          <p:nvPr/>
-        </p:nvSpPr>
-        <p:spPr>
-          <a:xfrm>
-            <a:off x="7319554" y="2601468"/>
-            <a:ext cx="0" cy="781812"/>
-          </a:xfrm>
-          <a:prstGeom prst="line">
-            <a:avLst/>
-          </a:prstGeom>
-          <a:noFill/>
-          <a:ln w="19050">
-            <a:solidFill>
-              <a:srgbClr val="FFFFFF"/>
-            </a:solidFill>
-            <a:prstDash val="solid"/>
-          </a:ln>
-        </p:spPr>
-      </p:sp>
-      <p:sp>
-        <p:nvSpPr>
-          <p:cNvPr id="36" name="Shape 33"/>
-          <p:cNvSpPr/>
-          <p:nvPr/>
-        </p:nvSpPr>
-        <p:spPr>
-          <a:xfrm>
-            <a:off x="7572103" y="2601468"/>
-            <a:ext cx="0" cy="781812"/>
-          </a:xfrm>
-          <a:prstGeom prst="line">
-            <a:avLst/>
-          </a:prstGeom>
-          <a:noFill/>
-          <a:ln w="19050">
-            <a:solidFill>
-              <a:srgbClr val="FFFFFF"/>
-            </a:solidFill>
-            <a:prstDash val="solid"/>
-          </a:ln>
-        </p:spPr>
-      </p:sp>
-      <p:sp>
-        <p:nvSpPr>
-          <p:cNvPr id="37" name="Shape 34"/>
-          <p:cNvSpPr/>
-          <p:nvPr/>
-        </p:nvSpPr>
-        <p:spPr>
-          <a:xfrm>
-            <a:off x="7824651" y="2601468"/>
-            <a:ext cx="0" cy="781812"/>
-          </a:xfrm>
-          <a:prstGeom prst="line">
-            <a:avLst/>
-          </a:prstGeom>
-          <a:noFill/>
-          <a:ln w="19050">
-            <a:solidFill>
-              <a:srgbClr val="FFFFFF"/>
-            </a:solidFill>
-            <a:prstDash val="solid"/>
-          </a:ln>
-        </p:spPr>
-      </p:sp>
-      <p:sp>
-        <p:nvSpPr>
-          <p:cNvPr id="38" name="Shape 35"/>
-          <p:cNvSpPr/>
-          <p:nvPr/>
-        </p:nvSpPr>
-        <p:spPr>
-          <a:xfrm>
-            <a:off x="8077200" y="2601468"/>
-            <a:ext cx="0" cy="781812"/>
-          </a:xfrm>
-          <a:prstGeom prst="line">
-            <a:avLst/>
-          </a:prstGeom>
-          <a:noFill/>
-          <a:ln w="19050">
-            <a:solidFill>
-              <a:srgbClr val="FFFFFF"/>
-            </a:solidFill>
-            <a:prstDash val="solid"/>
-          </a:ln>
-        </p:spPr>
-      </p:sp>
-      <p:sp>
-        <p:nvSpPr>
-          <p:cNvPr id="39" name="Shape 36"/>
-          <p:cNvSpPr/>
-          <p:nvPr/>
-        </p:nvSpPr>
-        <p:spPr>
-          <a:xfrm>
-            <a:off x="8329749" y="2601468"/>
-            <a:ext cx="0" cy="781812"/>
-          </a:xfrm>
-          <a:prstGeom prst="line">
-            <a:avLst/>
-          </a:prstGeom>
-          <a:noFill/>
-          <a:ln w="19050">
-            <a:solidFill>
-              <a:srgbClr val="FFFFFF"/>
-            </a:solidFill>
-            <a:prstDash val="solid"/>
-          </a:ln>
-        </p:spPr>
-      </p:sp>
-      <p:sp>
-        <p:nvSpPr>
-          <p:cNvPr id="40" name="Shape 37"/>
-          <p:cNvSpPr/>
-          <p:nvPr/>
-        </p:nvSpPr>
-        <p:spPr>
-          <a:xfrm>
-            <a:off x="8582297" y="2601468"/>
-            <a:ext cx="0" cy="781812"/>
-          </a:xfrm>
-          <a:prstGeom prst="line">
-            <a:avLst/>
-          </a:prstGeom>
-          <a:noFill/>
-          <a:ln w="19050">
-            <a:solidFill>
-              <a:srgbClr val="FFFFFF"/>
-            </a:solidFill>
-            <a:prstDash val="solid"/>
-          </a:ln>
-        </p:spPr>
-      </p:sp>
-      <p:sp>
-        <p:nvSpPr>
-          <p:cNvPr id="41" name="Shape 38"/>
-          <p:cNvSpPr/>
-          <p:nvPr/>
-        </p:nvSpPr>
-        <p:spPr>
-          <a:xfrm>
-            <a:off x="8834846" y="2601468"/>
-            <a:ext cx="0" cy="781812"/>
-          </a:xfrm>
-          <a:prstGeom prst="line">
-            <a:avLst/>
-          </a:prstGeom>
-          <a:noFill/>
-          <a:ln w="19050">
-            <a:solidFill>
-              <a:srgbClr val="FFFFFF"/>
-            </a:solidFill>
-            <a:prstDash val="solid"/>
-          </a:ln>
-        </p:spPr>
-      </p:sp>
-      <p:sp>
-        <p:nvSpPr>
-          <p:cNvPr id="42" name="Shape 39"/>
-          <p:cNvSpPr/>
-          <p:nvPr/>
-        </p:nvSpPr>
-        <p:spPr>
-          <a:xfrm>
-            <a:off x="9087394" y="2601468"/>
-            <a:ext cx="0" cy="781812"/>
-          </a:xfrm>
-          <a:prstGeom prst="line">
-            <a:avLst/>
-          </a:prstGeom>
-          <a:noFill/>
-          <a:ln w="19050">
-            <a:solidFill>
-              <a:srgbClr val="FFFFFF"/>
-            </a:solidFill>
-            <a:prstDash val="solid"/>
-          </a:ln>
-        </p:spPr>
-      </p:sp>
-      <p:sp>
-        <p:nvSpPr>
-          <p:cNvPr id="43" name="Shape 40"/>
-          <p:cNvSpPr/>
-          <p:nvPr/>
-        </p:nvSpPr>
-        <p:spPr>
-          <a:xfrm>
-            <a:off x="9339943" y="2601468"/>
-            <a:ext cx="0" cy="781812"/>
-          </a:xfrm>
-          <a:prstGeom prst="line">
-            <a:avLst/>
-          </a:prstGeom>
-          <a:noFill/>
-          <a:ln w="19050">
-            <a:solidFill>
-              <a:srgbClr val="FFFFFF"/>
-            </a:solidFill>
-            <a:prstDash val="solid"/>
-          </a:ln>
-        </p:spPr>
-      </p:sp>
-      <p:sp>
-        <p:nvSpPr>
-          <p:cNvPr id="44" name="Shape 41"/>
-          <p:cNvSpPr/>
-          <p:nvPr/>
-        </p:nvSpPr>
-        <p:spPr>
-          <a:xfrm>
-            <a:off x="9592491" y="2601468"/>
-            <a:ext cx="0" cy="781812"/>
-          </a:xfrm>
-          <a:prstGeom prst="line">
-            <a:avLst/>
-          </a:prstGeom>
-          <a:noFill/>
-          <a:ln w="19050">
-            <a:solidFill>
-              <a:srgbClr val="FFFFFF"/>
-            </a:solidFill>
-            <a:prstDash val="solid"/>
-          </a:ln>
-        </p:spPr>
-      </p:sp>
-      <p:sp>
-        <p:nvSpPr>
-          <p:cNvPr id="45" name="Shape 42"/>
-          <p:cNvSpPr/>
-          <p:nvPr/>
-        </p:nvSpPr>
-        <p:spPr>
-          <a:xfrm>
-            <a:off x="9845040" y="2601468"/>
-            <a:ext cx="0" cy="781812"/>
-          </a:xfrm>
-          <a:prstGeom prst="line">
-            <a:avLst/>
-          </a:prstGeom>
-          <a:noFill/>
-          <a:ln w="19050">
-            <a:solidFill>
-              <a:srgbClr val="FFFFFF"/>
-            </a:solidFill>
-            <a:prstDash val="solid"/>
-          </a:ln>
-        </p:spPr>
-      </p:sp>
-      <p:sp>
-        <p:nvSpPr>
-          <p:cNvPr id="46" name="Shape 43"/>
-          <p:cNvSpPr/>
-          <p:nvPr/>
-        </p:nvSpPr>
-        <p:spPr>
-          <a:xfrm>
-            <a:off x="10097589" y="2601468"/>
-            <a:ext cx="0" cy="781812"/>
-          </a:xfrm>
-          <a:prstGeom prst="line">
-            <a:avLst/>
-          </a:prstGeom>
-          <a:noFill/>
-          <a:ln w="19050">
-            <a:solidFill>
-              <a:srgbClr val="FFFFFF"/>
-            </a:solidFill>
-            <a:prstDash val="solid"/>
-          </a:ln>
-        </p:spPr>
-      </p:sp>
-      <p:sp>
-        <p:nvSpPr>
-          <p:cNvPr id="47" name="Shape 44"/>
-          <p:cNvSpPr/>
-          <p:nvPr/>
-        </p:nvSpPr>
-        <p:spPr>
-          <a:xfrm>
-            <a:off x="10350137" y="2601468"/>
-            <a:ext cx="0" cy="781812"/>
-          </a:xfrm>
-          <a:prstGeom prst="line">
-            <a:avLst/>
-          </a:prstGeom>
-          <a:noFill/>
-          <a:ln w="19050">
-            <a:solidFill>
-              <a:srgbClr val="FFFFFF"/>
-            </a:solidFill>
-            <a:prstDash val="solid"/>
-          </a:ln>
-        </p:spPr>
-      </p:sp>
-      <p:sp>
-        <p:nvSpPr>
-          <p:cNvPr id="48" name="Shape 45"/>
-          <p:cNvSpPr/>
-          <p:nvPr/>
-        </p:nvSpPr>
-        <p:spPr>
-          <a:xfrm>
-            <a:off x="10602686" y="2601468"/>
-            <a:ext cx="0" cy="781812"/>
-          </a:xfrm>
-          <a:prstGeom prst="line">
-            <a:avLst/>
-          </a:prstGeom>
-          <a:noFill/>
-          <a:ln w="19050">
-            <a:solidFill>
-              <a:srgbClr val="FFFFFF"/>
-            </a:solidFill>
-            <a:prstDash val="solid"/>
-          </a:ln>
-        </p:spPr>
-      </p:sp>
-      <p:sp>
-        <p:nvSpPr>
-          <p:cNvPr id="49" name="Shape 46"/>
-          <p:cNvSpPr/>
-          <p:nvPr/>
-        </p:nvSpPr>
-        <p:spPr>
-          <a:xfrm>
-            <a:off x="10855234" y="2601468"/>
-            <a:ext cx="0" cy="781812"/>
-          </a:xfrm>
-          <a:prstGeom prst="line">
-            <a:avLst/>
-          </a:prstGeom>
-          <a:noFill/>
-          <a:ln w="19050">
-            <a:solidFill>
-              <a:srgbClr val="FFFFFF"/>
-            </a:solidFill>
-            <a:prstDash val="solid"/>
-          </a:ln>
-        </p:spPr>
-      </p:sp>
-      <p:sp>
-        <p:nvSpPr>
-          <p:cNvPr id="50" name="Shape 47"/>
-          <p:cNvSpPr/>
-          <p:nvPr/>
-        </p:nvSpPr>
-        <p:spPr>
-          <a:xfrm>
-            <a:off x="11107783" y="2601468"/>
-            <a:ext cx="0" cy="781812"/>
-          </a:xfrm>
-          <a:prstGeom prst="line">
-            <a:avLst/>
-          </a:prstGeom>
-          <a:noFill/>
-          <a:ln w="19050">
-            <a:solidFill>
-              <a:srgbClr val="FFFFFF"/>
-            </a:solidFill>
-            <a:prstDash val="solid"/>
-          </a:ln>
-        </p:spPr>
-      </p:sp>
-      <p:sp>
-        <p:nvSpPr>
-          <p:cNvPr id="51" name="Shape 48"/>
-          <p:cNvSpPr/>
-          <p:nvPr/>
-        </p:nvSpPr>
-        <p:spPr>
-          <a:xfrm>
-            <a:off x="11360331" y="2601468"/>
-            <a:ext cx="0" cy="781812"/>
-          </a:xfrm>
-          <a:prstGeom prst="line">
-            <a:avLst/>
-          </a:prstGeom>
-          <a:noFill/>
-          <a:ln w="19050">
-            <a:solidFill>
-              <a:srgbClr val="FFFFFF"/>
-            </a:solidFill>
-            <a:prstDash val="solid"/>
-          </a:ln>
-        </p:spPr>
-      </p:sp>
-      <p:sp>
-        <p:nvSpPr>
-          <p:cNvPr id="52" name="Shape 49"/>
-          <p:cNvSpPr/>
-          <p:nvPr/>
-        </p:nvSpPr>
-        <p:spPr>
-          <a:xfrm>
-            <a:off x="11612880" y="2601468"/>
-            <a:ext cx="0" cy="781812"/>
-          </a:xfrm>
-          <a:prstGeom prst="line">
-            <a:avLst/>
-          </a:prstGeom>
-          <a:noFill/>
-          <a:ln w="19050">
-            <a:solidFill>
-              <a:srgbClr val="FFFFFF"/>
-            </a:solidFill>
-            <a:prstDash val="solid"/>
-          </a:ln>
-        </p:spPr>
-      </p:sp>
-      <p:sp>
-        <p:nvSpPr>
-          <p:cNvPr id="53" name="Text 50"/>
-          <p:cNvSpPr txBox="1"/>
-          <p:nvPr/>
-        </p:nvSpPr>
-        <p:spPr>
-          <a:xfrm>
-            <a:off x="6309360" y="3456432"/>
-            <a:ext cx="5303520" cy="320040"/>
-          </a:xfrm>
-          <a:prstGeom prst="rect">
-            <a:avLst/>
-          </a:prstGeom>
-          <a:noFill/>
-          <a:ln/>
-        </p:spPr>
-        <p:txBody>
-          <a:bodyPr wrap="square" lIns="0" tIns="0" rIns="0" bIns="0" rtlCol="0" anchor="ctr"/>
-          <a:lstStyle/>
-          <a:p>
-            <a:pPr algn="ctr" indent="0" marL="0">
               <a:buNone/>
             </a:pPr>
             <a:r>
@@ -3630,7 +2658,7 @@
                 <a:ea typeface="Calibri" pitchFamily="34" charset="-122"/>
                 <a:cs typeface="Calibri" pitchFamily="34" charset="-120"/>
               </a:rPr>
-              <a:t>21 новое место (в т.ч. 2 для МГН), проезд свободен</a:t>
+              <a:t>Вид с юго-востока: ряды у фасада, у газона и площадка 20к2</a:t>
             </a:r>
             <a:endParaRPr lang="en-US" sz="1200" dirty="0"/>
           </a:p>
@@ -3638,34 +2666,14 @@
       </p:sp>
       <p:sp>
         <p:nvSpPr>
-          <p:cNvPr id="54" name="Shape 51"/>
-          <p:cNvSpPr/>
-          <p:nvPr/>
-        </p:nvSpPr>
-        <p:spPr>
-          <a:xfrm>
-            <a:off x="6309360" y="1645920"/>
-            <a:ext cx="505097" cy="1737360"/>
-          </a:xfrm>
-          <a:prstGeom prst="rect">
-            <a:avLst/>
-          </a:prstGeom>
-          <a:solidFill>
-            <a:srgbClr val="2563EB"/>
-          </a:solidFill>
-          <a:ln/>
-        </p:spPr>
-      </p:sp>
-      <p:sp>
-        <p:nvSpPr>
-          <p:cNvPr id="55" name="Text 52"/>
+          <p:cNvPr id="9" name="Text 4"/>
           <p:cNvSpPr txBox="1"/>
           <p:nvPr/>
         </p:nvSpPr>
         <p:spPr>
           <a:xfrm>
-            <a:off x="548640" y="3977640"/>
-            <a:ext cx="5303520" cy="365760"/>
+            <a:off x="7726680" y="3429000"/>
+            <a:ext cx="3886200" cy="320040"/>
           </a:xfrm>
           <a:prstGeom prst="rect">
             <a:avLst/>
@@ -3681,30 +2689,30 @@
               <a:buNone/>
             </a:pPr>
             <a:r>
-              <a:rPr lang="en-US" sz="1600" b="1" dirty="0">
+              <a:rPr lang="en-US" sz="1200" dirty="0">
                 <a:solidFill>
-                  <a:srgbClr val="1F2937"/>
+                  <a:srgbClr val="6B7280"/>
                 </a:solidFill>
                 <a:latin typeface="Calibri" pitchFamily="34" charset="0"/>
                 <a:ea typeface="Calibri" pitchFamily="34" charset="-122"/>
                 <a:cs typeface="Calibri" pitchFamily="34" charset="-120"/>
               </a:rPr>
-              <a:t>Что нужно</a:t>
-            </a:r>
-            <a:endParaRPr lang="en-US" sz="1600" dirty="0"/>
+              <a:t>Вид сверху</a:t>
+            </a:r>
+            <a:endParaRPr lang="en-US" sz="1200" dirty="0"/>
           </a:p>
         </p:txBody>
       </p:sp>
       <p:sp>
         <p:nvSpPr>
-          <p:cNvPr id="56" name="Text 53"/>
+          <p:cNvPr id="10" name="Text 5"/>
           <p:cNvSpPr txBox="1"/>
           <p:nvPr/>
         </p:nvSpPr>
         <p:spPr>
           <a:xfrm>
-            <a:off x="548640" y="4389120"/>
-            <a:ext cx="5303520" cy="1920240"/>
+            <a:off x="7726680" y="5815584"/>
+            <a:ext cx="3886200" cy="320040"/>
           </a:xfrm>
           <a:prstGeom prst="rect">
             <a:avLst/>
@@ -3713,236 +2721,63 @@
           <a:ln/>
         </p:spPr>
         <p:txBody>
-          <a:bodyPr wrap="square" lIns="0" tIns="0" rIns="0" bIns="0" rtlCol="0" anchor="t"/>
+          <a:bodyPr wrap="square" lIns="0" tIns="0" rIns="0" bIns="0" rtlCol="0" anchor="ctr"/>
           <a:lstStyle/>
           <a:p>
-            <a:pPr marL="342900" indent="-342900">
-              <a:spcAft>
-                <a:spcPts val="600"/>
-              </a:spcAft>
-              <a:buSzPct val="100000"/>
-              <a:buChar char="•"/>
+            <a:pPr indent="0" marL="0">
+              <a:buNone/>
             </a:pPr>
             <a:r>
-              <a:rPr lang="en-US" sz="1400" dirty="0">
+              <a:rPr lang="en-US" sz="1200" dirty="0">
                 <a:solidFill>
-                  <a:srgbClr val="1F2937"/>
+                  <a:srgbClr val="6B7280"/>
                 </a:solidFill>
                 <a:latin typeface="Calibri" pitchFamily="34" charset="0"/>
                 <a:ea typeface="Calibri" pitchFamily="34" charset="-122"/>
                 <a:cs typeface="Calibri" pitchFamily="34" charset="-120"/>
               </a:rPr>
-              <a:t>Решение ОСС (≥ 2/3 голосов) и проект</a:t>
-            </a:r>
-            <a:endParaRPr lang="en-US" sz="1400" dirty="0"/>
-          </a:p>
-          <a:p>
-            <a:pPr marL="342900" indent="-342900">
-              <a:spcAft>
-                <a:spcPts val="600"/>
-              </a:spcAft>
-              <a:buSzPct val="100000"/>
-              <a:buChar char="•"/>
+              <a:t>Вид с юга</a:t>
+            </a:r>
+            <a:endParaRPr lang="en-US" sz="1200" dirty="0"/>
+          </a:p>
+        </p:txBody>
+      </p:sp>
+      <p:sp>
+        <p:nvSpPr>
+          <p:cNvPr id="11" name="Text 6"/>
+          <p:cNvSpPr txBox="1"/>
+          <p:nvPr/>
+        </p:nvSpPr>
+        <p:spPr>
+          <a:xfrm>
+            <a:off x="548640" y="6355080"/>
+            <a:ext cx="11064240" cy="320040"/>
+          </a:xfrm>
+          <a:prstGeom prst="rect">
+            <a:avLst/>
+          </a:prstGeom>
+          <a:noFill/>
+          <a:ln/>
+        </p:spPr>
+        <p:txBody>
+          <a:bodyPr wrap="square" lIns="0" tIns="0" rIns="0" bIns="0" rtlCol="0" anchor="ctr"/>
+          <a:lstStyle/>
+          <a:p>
+            <a:pPr indent="0" marL="0">
+              <a:buNone/>
             </a:pPr>
             <a:r>
-              <a:rPr lang="en-US" sz="1400" dirty="0">
+              <a:rPr lang="en-US" sz="1000" dirty="0">
                 <a:solidFill>
-                  <a:srgbClr val="1F2937"/>
+                  <a:srgbClr val="6B7280"/>
                 </a:solidFill>
                 <a:latin typeface="Calibri" pitchFamily="34" charset="0"/>
                 <a:ea typeface="Calibri" pitchFamily="34" charset="-122"/>
                 <a:cs typeface="Calibri" pitchFamily="34" charset="-120"/>
               </a:rPr>
-              <a:t>Геодезическая съёмка и согласования</a:t>
-            </a:r>
-            <a:endParaRPr lang="en-US" sz="1400" dirty="0"/>
-          </a:p>
-          <a:p>
-            <a:pPr marL="342900" indent="-342900">
-              <a:spcAft>
-                <a:spcPts val="600"/>
-              </a:spcAft>
-              <a:buSzPct val="100000"/>
-              <a:buChar char="•"/>
-            </a:pPr>
-            <a:r>
-              <a:rPr lang="en-US" sz="1400" dirty="0">
-                <a:solidFill>
-                  <a:srgbClr val="1F2937"/>
-                </a:solidFill>
-                <a:latin typeface="Calibri" pitchFamily="34" charset="0"/>
-                <a:ea typeface="Calibri" pitchFamily="34" charset="-122"/>
-                <a:cs typeface="Calibri" pitchFamily="34" charset="-120"/>
-              </a:rPr>
-              <a:t>Подрядчик, техника, материалы</a:t>
-            </a:r>
-            <a:endParaRPr lang="en-US" sz="1400" dirty="0"/>
-          </a:p>
-          <a:p>
-            <a:pPr marL="342900" indent="-342900">
-              <a:spcAft>
-                <a:spcPts val="600"/>
-              </a:spcAft>
-              <a:buSzPct val="100000"/>
-              <a:buChar char="•"/>
-            </a:pPr>
-            <a:r>
-              <a:rPr lang="en-US" sz="1400" dirty="0">
-                <a:solidFill>
-                  <a:srgbClr val="1F2937"/>
-                </a:solidFill>
-                <a:latin typeface="Calibri" pitchFamily="34" charset="0"/>
-                <a:ea typeface="Calibri" pitchFamily="34" charset="-122"/>
-                <a:cs typeface="Calibri" pitchFamily="34" charset="-120"/>
-              </a:rPr>
-              <a:t>≈ 7 недель (подготовка + работы)</a:t>
-            </a:r>
-            <a:endParaRPr lang="en-US" sz="1400" dirty="0"/>
-          </a:p>
-        </p:txBody>
-      </p:sp>
-      <p:sp>
-        <p:nvSpPr>
-          <p:cNvPr id="57" name="Text 54"/>
-          <p:cNvSpPr txBox="1"/>
-          <p:nvPr/>
-        </p:nvSpPr>
-        <p:spPr>
-          <a:xfrm>
-            <a:off x="6309360" y="3977640"/>
-            <a:ext cx="5303520" cy="365760"/>
-          </a:xfrm>
-          <a:prstGeom prst="rect">
-            <a:avLst/>
-          </a:prstGeom>
-          <a:noFill/>
-          <a:ln/>
-        </p:spPr>
-        <p:txBody>
-          <a:bodyPr wrap="square" lIns="0" tIns="0" rIns="0" bIns="0" rtlCol="0" anchor="ctr"/>
-          <a:lstStyle/>
-          <a:p>
-            <a:pPr indent="0" marL="0">
-              <a:buNone/>
-            </a:pPr>
-            <a:r>
-              <a:rPr lang="en-US" sz="1600" b="1" dirty="0">
-                <a:solidFill>
-                  <a:srgbClr val="1F2937"/>
-                </a:solidFill>
-                <a:latin typeface="Calibri" pitchFamily="34" charset="0"/>
-                <a:ea typeface="Calibri" pitchFamily="34" charset="-122"/>
-                <a:cs typeface="Calibri" pitchFamily="34" charset="-120"/>
-              </a:rPr>
-              <a:t>Что получится</a:t>
-            </a:r>
-            <a:endParaRPr lang="en-US" sz="1600" dirty="0"/>
-          </a:p>
-        </p:txBody>
-      </p:sp>
-      <p:sp>
-        <p:nvSpPr>
-          <p:cNvPr id="58" name="Text 55"/>
-          <p:cNvSpPr txBox="1"/>
-          <p:nvPr/>
-        </p:nvSpPr>
-        <p:spPr>
-          <a:xfrm>
-            <a:off x="6309360" y="4389120"/>
-            <a:ext cx="5303520" cy="1920240"/>
-          </a:xfrm>
-          <a:prstGeom prst="rect">
-            <a:avLst/>
-          </a:prstGeom>
-          <a:noFill/>
-          <a:ln/>
-        </p:spPr>
-        <p:txBody>
-          <a:bodyPr wrap="square" lIns="0" tIns="0" rIns="0" bIns="0" rtlCol="0" anchor="t"/>
-          <a:lstStyle/>
-          <a:p>
-            <a:pPr marL="342900" indent="-342900">
-              <a:spcAft>
-                <a:spcPts val="600"/>
-              </a:spcAft>
-              <a:buSzPct val="100000"/>
-              <a:buChar char="•"/>
-            </a:pPr>
-            <a:r>
-              <a:rPr lang="en-US" sz="1400" dirty="0">
-                <a:solidFill>
-                  <a:srgbClr val="1F2937"/>
-                </a:solidFill>
-                <a:latin typeface="Calibri" pitchFamily="34" charset="0"/>
-                <a:ea typeface="Calibri" pitchFamily="34" charset="-122"/>
-                <a:cs typeface="Calibri" pitchFamily="34" charset="-120"/>
-              </a:rPr>
-              <a:t>+21 организованное место</a:t>
-            </a:r>
-            <a:endParaRPr lang="en-US" sz="1400" dirty="0"/>
-          </a:p>
-          <a:p>
-            <a:pPr marL="342900" indent="-342900">
-              <a:spcAft>
-                <a:spcPts val="600"/>
-              </a:spcAft>
-              <a:buSzPct val="100000"/>
-              <a:buChar char="•"/>
-            </a:pPr>
-            <a:r>
-              <a:rPr lang="en-US" sz="1400" dirty="0">
-                <a:solidFill>
-                  <a:srgbClr val="1F2937"/>
-                </a:solidFill>
-                <a:latin typeface="Calibri" pitchFamily="34" charset="0"/>
-                <a:ea typeface="Calibri" pitchFamily="34" charset="-122"/>
-                <a:cs typeface="Calibri" pitchFamily="34" charset="-120"/>
-              </a:rPr>
-              <a:t>Свободный проезд для скорой и пожарной техники</a:t>
-            </a:r>
-            <a:endParaRPr lang="en-US" sz="1400" dirty="0"/>
-          </a:p>
-          <a:p>
-            <a:pPr marL="342900" indent="-342900">
-              <a:spcAft>
-                <a:spcPts val="600"/>
-              </a:spcAft>
-              <a:buSzPct val="100000"/>
-              <a:buChar char="•"/>
-            </a:pPr>
-            <a:r>
-              <a:rPr lang="en-US" sz="1400" dirty="0">
-                <a:solidFill>
-                  <a:srgbClr val="1F2937"/>
-                </a:solidFill>
-                <a:latin typeface="Calibri" pitchFamily="34" charset="0"/>
-                <a:ea typeface="Calibri" pitchFamily="34" charset="-122"/>
-                <a:cs typeface="Calibri" pitchFamily="34" charset="-120"/>
-              </a:rPr>
-              <a:t>Освещение, водоотвод, разметка</a:t>
-            </a:r>
-            <a:endParaRPr lang="en-US" sz="1400" dirty="0"/>
-          </a:p>
-          <a:p>
-            <a:pPr marL="342900" indent="-342900">
-              <a:spcAft>
-                <a:spcPts val="600"/>
-              </a:spcAft>
-              <a:buSzPct val="100000"/>
-              <a:buChar char="•"/>
-            </a:pPr>
-            <a:r>
-              <a:rPr lang="en-US" sz="1400" dirty="0">
-                <a:solidFill>
-                  <a:srgbClr val="1F2937"/>
-                </a:solidFill>
-                <a:latin typeface="Calibri" pitchFamily="34" charset="0"/>
-                <a:ea typeface="Calibri" pitchFamily="34" charset="-122"/>
-                <a:cs typeface="Calibri" pitchFamily="34" charset="-120"/>
-              </a:rPr>
-              <a:t>Компенсационное озеленение</a:t>
-            </a:r>
-            <a:endParaRPr lang="en-US" sz="1400" dirty="0"/>
+              <a:t>Модель: three.js, здания — упрощённые объёмы по контурам Яндекс Карт. Интерактивная версия — parking/3d_model.html.</a:t>
+            </a:r>
+            <a:endParaRPr lang="en-US" sz="1000" dirty="0"/>
           </a:p>
         </p:txBody>
       </p:sp>
@@ -4011,7 +2846,7 @@
                 <a:ea typeface="Cambria" pitchFamily="34" charset="-122"/>
                 <a:cs typeface="Cambria" pitchFamily="34" charset="-120"/>
               </a:rPr>
-              <a:t>Техника и механизмы</a:t>
+              <a:t>Что нужно и что получится</a:t>
             </a:r>
             <a:endParaRPr lang="en-US" sz="3400" dirty="0"/>
           </a:p>
@@ -4076,9 +2911,2332 @@
           </a:p>
         </p:txBody>
       </p:sp>
+      <p:sp>
+        <p:nvSpPr>
+          <p:cNvPr id="5" name="Text 3"/>
+          <p:cNvSpPr txBox="1"/>
+          <p:nvPr/>
+        </p:nvSpPr>
+        <p:spPr>
+          <a:xfrm>
+            <a:off x="548640" y="1234440"/>
+            <a:ext cx="5303520" cy="365760"/>
+          </a:xfrm>
+          <a:prstGeom prst="rect">
+            <a:avLst/>
+          </a:prstGeom>
+          <a:noFill/>
+          <a:ln/>
+        </p:spPr>
+        <p:txBody>
+          <a:bodyPr wrap="square" lIns="0" tIns="0" rIns="0" bIns="0" rtlCol="0" anchor="ctr"/>
+          <a:lstStyle/>
+          <a:p>
+            <a:pPr indent="0" marL="0">
+              <a:buNone/>
+            </a:pPr>
+            <a:r>
+              <a:rPr lang="en-US" sz="1800" b="1" dirty="0">
+                <a:solidFill>
+                  <a:srgbClr val="6B7280"/>
+                </a:solidFill>
+                <a:latin typeface="Calibri" pitchFamily="34" charset="0"/>
+                <a:ea typeface="Calibri" pitchFamily="34" charset="-122"/>
+                <a:cs typeface="Calibri" pitchFamily="34" charset="-120"/>
+              </a:rPr>
+              <a:t>БЫЛО</a:t>
+            </a:r>
+            <a:endParaRPr lang="en-US" sz="1800" dirty="0"/>
+          </a:p>
+        </p:txBody>
+      </p:sp>
+      <p:pic>
+        <p:nvPicPr>
+          <p:cNvPr id="6" name="Image 0" descr="/home/user/mirigrushek/parking/img/yard_west.jpg">    </p:cNvPr>
+          <p:cNvPicPr>
+            <a:picLocks noChangeAspect="1"/>
+          </p:cNvPicPr>
+          <p:nvPr/>
+        </p:nvPicPr>
+        <p:blipFill>
+          <a:blip r:embed="rId1"/>
+          <a:srcRect l="0" r="0" t="0" b="0"/>
+          <a:stretch/>
+        </p:blipFill>
+        <p:spPr>
+          <a:xfrm>
+            <a:off x="548640" y="1645920"/>
+            <a:ext cx="5303520" cy="2103120"/>
+          </a:xfrm>
+          <a:prstGeom prst="rect">
+            <a:avLst/>
+          </a:prstGeom>
+        </p:spPr>
+      </p:pic>
+      <p:sp>
+        <p:nvSpPr>
+          <p:cNvPr id="7" name="Text 4"/>
+          <p:cNvSpPr txBox="1"/>
+          <p:nvPr/>
+        </p:nvSpPr>
+        <p:spPr>
+          <a:xfrm>
+            <a:off x="6309360" y="1234440"/>
+            <a:ext cx="5303520" cy="365760"/>
+          </a:xfrm>
+          <a:prstGeom prst="rect">
+            <a:avLst/>
+          </a:prstGeom>
+          <a:noFill/>
+          <a:ln/>
+        </p:spPr>
+        <p:txBody>
+          <a:bodyPr wrap="square" lIns="0" tIns="0" rIns="0" bIns="0" rtlCol="0" anchor="ctr"/>
+          <a:lstStyle/>
+          <a:p>
+            <a:pPr indent="0" marL="0">
+              <a:buNone/>
+            </a:pPr>
+            <a:r>
+              <a:rPr lang="en-US" sz="1800" b="1" dirty="0">
+                <a:solidFill>
+                  <a:srgbClr val="5B8C51"/>
+                </a:solidFill>
+                <a:latin typeface="Calibri" pitchFamily="34" charset="0"/>
+                <a:ea typeface="Calibri" pitchFamily="34" charset="-122"/>
+                <a:cs typeface="Calibri" pitchFamily="34" charset="-120"/>
+              </a:rPr>
+              <a:t>СТАНЕТ</a:t>
+            </a:r>
+            <a:endParaRPr lang="en-US" sz="1800" dirty="0"/>
+          </a:p>
+        </p:txBody>
+      </p:sp>
+      <p:sp>
+        <p:nvSpPr>
+          <p:cNvPr id="8" name="Shape 5"/>
+          <p:cNvSpPr/>
+          <p:nvPr/>
+        </p:nvSpPr>
+        <p:spPr>
+          <a:xfrm>
+            <a:off x="6309360" y="1645920"/>
+            <a:ext cx="5303520" cy="1737360"/>
+          </a:xfrm>
+          <a:prstGeom prst="rect">
+            <a:avLst/>
+          </a:prstGeom>
+          <a:solidFill>
+            <a:srgbClr val="3A3D44"/>
+          </a:solidFill>
+          <a:ln/>
+        </p:spPr>
+      </p:sp>
+      <p:sp>
+        <p:nvSpPr>
+          <p:cNvPr id="9" name="Shape 6"/>
+          <p:cNvSpPr/>
+          <p:nvPr/>
+        </p:nvSpPr>
+        <p:spPr>
+          <a:xfrm>
+            <a:off x="6309360" y="1645920"/>
+            <a:ext cx="0" cy="781812"/>
+          </a:xfrm>
+          <a:prstGeom prst="line">
+            <a:avLst/>
+          </a:prstGeom>
+          <a:noFill/>
+          <a:ln w="19050">
+            <a:solidFill>
+              <a:srgbClr val="FFFFFF"/>
+            </a:solidFill>
+            <a:prstDash val="solid"/>
+          </a:ln>
+        </p:spPr>
+      </p:sp>
+      <p:sp>
+        <p:nvSpPr>
+          <p:cNvPr id="10" name="Shape 7"/>
+          <p:cNvSpPr/>
+          <p:nvPr/>
+        </p:nvSpPr>
+        <p:spPr>
+          <a:xfrm>
+            <a:off x="6456680" y="1645920"/>
+            <a:ext cx="0" cy="781812"/>
+          </a:xfrm>
+          <a:prstGeom prst="line">
+            <a:avLst/>
+          </a:prstGeom>
+          <a:noFill/>
+          <a:ln w="19050">
+            <a:solidFill>
+              <a:srgbClr val="FFFFFF"/>
+            </a:solidFill>
+            <a:prstDash val="solid"/>
+          </a:ln>
+        </p:spPr>
+      </p:sp>
+      <p:sp>
+        <p:nvSpPr>
+          <p:cNvPr id="11" name="Shape 8"/>
+          <p:cNvSpPr/>
+          <p:nvPr/>
+        </p:nvSpPr>
+        <p:spPr>
+          <a:xfrm>
+            <a:off x="6604000" y="1645920"/>
+            <a:ext cx="0" cy="781812"/>
+          </a:xfrm>
+          <a:prstGeom prst="line">
+            <a:avLst/>
+          </a:prstGeom>
+          <a:noFill/>
+          <a:ln w="19050">
+            <a:solidFill>
+              <a:srgbClr val="FFFFFF"/>
+            </a:solidFill>
+            <a:prstDash val="solid"/>
+          </a:ln>
+        </p:spPr>
+      </p:sp>
+      <p:sp>
+        <p:nvSpPr>
+          <p:cNvPr id="12" name="Shape 9"/>
+          <p:cNvSpPr/>
+          <p:nvPr/>
+        </p:nvSpPr>
+        <p:spPr>
+          <a:xfrm>
+            <a:off x="6751320" y="1645920"/>
+            <a:ext cx="0" cy="781812"/>
+          </a:xfrm>
+          <a:prstGeom prst="line">
+            <a:avLst/>
+          </a:prstGeom>
+          <a:noFill/>
+          <a:ln w="19050">
+            <a:solidFill>
+              <a:srgbClr val="FFFFFF"/>
+            </a:solidFill>
+            <a:prstDash val="solid"/>
+          </a:ln>
+        </p:spPr>
+      </p:sp>
+      <p:sp>
+        <p:nvSpPr>
+          <p:cNvPr id="13" name="Shape 10"/>
+          <p:cNvSpPr/>
+          <p:nvPr/>
+        </p:nvSpPr>
+        <p:spPr>
+          <a:xfrm>
+            <a:off x="6898640" y="1645920"/>
+            <a:ext cx="0" cy="781812"/>
+          </a:xfrm>
+          <a:prstGeom prst="line">
+            <a:avLst/>
+          </a:prstGeom>
+          <a:noFill/>
+          <a:ln w="19050">
+            <a:solidFill>
+              <a:srgbClr val="FFFFFF"/>
+            </a:solidFill>
+            <a:prstDash val="solid"/>
+          </a:ln>
+        </p:spPr>
+      </p:sp>
+      <p:sp>
+        <p:nvSpPr>
+          <p:cNvPr id="14" name="Shape 11"/>
+          <p:cNvSpPr/>
+          <p:nvPr/>
+        </p:nvSpPr>
+        <p:spPr>
+          <a:xfrm>
+            <a:off x="7045960" y="1645920"/>
+            <a:ext cx="0" cy="781812"/>
+          </a:xfrm>
+          <a:prstGeom prst="line">
+            <a:avLst/>
+          </a:prstGeom>
+          <a:noFill/>
+          <a:ln w="19050">
+            <a:solidFill>
+              <a:srgbClr val="FFFFFF"/>
+            </a:solidFill>
+            <a:prstDash val="solid"/>
+          </a:ln>
+        </p:spPr>
+      </p:sp>
+      <p:sp>
+        <p:nvSpPr>
+          <p:cNvPr id="15" name="Shape 12"/>
+          <p:cNvSpPr/>
+          <p:nvPr/>
+        </p:nvSpPr>
+        <p:spPr>
+          <a:xfrm>
+            <a:off x="7193280" y="1645920"/>
+            <a:ext cx="0" cy="781812"/>
+          </a:xfrm>
+          <a:prstGeom prst="line">
+            <a:avLst/>
+          </a:prstGeom>
+          <a:noFill/>
+          <a:ln w="19050">
+            <a:solidFill>
+              <a:srgbClr val="FFFFFF"/>
+            </a:solidFill>
+            <a:prstDash val="solid"/>
+          </a:ln>
+        </p:spPr>
+      </p:sp>
+      <p:sp>
+        <p:nvSpPr>
+          <p:cNvPr id="16" name="Shape 13"/>
+          <p:cNvSpPr/>
+          <p:nvPr/>
+        </p:nvSpPr>
+        <p:spPr>
+          <a:xfrm>
+            <a:off x="7340600" y="1645920"/>
+            <a:ext cx="0" cy="781812"/>
+          </a:xfrm>
+          <a:prstGeom prst="line">
+            <a:avLst/>
+          </a:prstGeom>
+          <a:noFill/>
+          <a:ln w="19050">
+            <a:solidFill>
+              <a:srgbClr val="FFFFFF"/>
+            </a:solidFill>
+            <a:prstDash val="solid"/>
+          </a:ln>
+        </p:spPr>
+      </p:sp>
+      <p:sp>
+        <p:nvSpPr>
+          <p:cNvPr id="17" name="Shape 14"/>
+          <p:cNvSpPr/>
+          <p:nvPr/>
+        </p:nvSpPr>
+        <p:spPr>
+          <a:xfrm>
+            <a:off x="7487920" y="1645920"/>
+            <a:ext cx="0" cy="781812"/>
+          </a:xfrm>
+          <a:prstGeom prst="line">
+            <a:avLst/>
+          </a:prstGeom>
+          <a:noFill/>
+          <a:ln w="19050">
+            <a:solidFill>
+              <a:srgbClr val="FFFFFF"/>
+            </a:solidFill>
+            <a:prstDash val="solid"/>
+          </a:ln>
+        </p:spPr>
+      </p:sp>
+      <p:sp>
+        <p:nvSpPr>
+          <p:cNvPr id="18" name="Shape 15"/>
+          <p:cNvSpPr/>
+          <p:nvPr/>
+        </p:nvSpPr>
+        <p:spPr>
+          <a:xfrm>
+            <a:off x="7635240" y="1645920"/>
+            <a:ext cx="0" cy="781812"/>
+          </a:xfrm>
+          <a:prstGeom prst="line">
+            <a:avLst/>
+          </a:prstGeom>
+          <a:noFill/>
+          <a:ln w="19050">
+            <a:solidFill>
+              <a:srgbClr val="FFFFFF"/>
+            </a:solidFill>
+            <a:prstDash val="solid"/>
+          </a:ln>
+        </p:spPr>
+      </p:sp>
+      <p:sp>
+        <p:nvSpPr>
+          <p:cNvPr id="19" name="Shape 16"/>
+          <p:cNvSpPr/>
+          <p:nvPr/>
+        </p:nvSpPr>
+        <p:spPr>
+          <a:xfrm>
+            <a:off x="7782560" y="1645920"/>
+            <a:ext cx="0" cy="781812"/>
+          </a:xfrm>
+          <a:prstGeom prst="line">
+            <a:avLst/>
+          </a:prstGeom>
+          <a:noFill/>
+          <a:ln w="19050">
+            <a:solidFill>
+              <a:srgbClr val="FFFFFF"/>
+            </a:solidFill>
+            <a:prstDash val="solid"/>
+          </a:ln>
+        </p:spPr>
+      </p:sp>
+      <p:sp>
+        <p:nvSpPr>
+          <p:cNvPr id="20" name="Shape 17"/>
+          <p:cNvSpPr/>
+          <p:nvPr/>
+        </p:nvSpPr>
+        <p:spPr>
+          <a:xfrm>
+            <a:off x="7929880" y="1645920"/>
+            <a:ext cx="0" cy="781812"/>
+          </a:xfrm>
+          <a:prstGeom prst="line">
+            <a:avLst/>
+          </a:prstGeom>
+          <a:noFill/>
+          <a:ln w="19050">
+            <a:solidFill>
+              <a:srgbClr val="FFFFFF"/>
+            </a:solidFill>
+            <a:prstDash val="solid"/>
+          </a:ln>
+        </p:spPr>
+      </p:sp>
+      <p:sp>
+        <p:nvSpPr>
+          <p:cNvPr id="21" name="Shape 18"/>
+          <p:cNvSpPr/>
+          <p:nvPr/>
+        </p:nvSpPr>
+        <p:spPr>
+          <a:xfrm>
+            <a:off x="8077200" y="1645920"/>
+            <a:ext cx="0" cy="781812"/>
+          </a:xfrm>
+          <a:prstGeom prst="line">
+            <a:avLst/>
+          </a:prstGeom>
+          <a:noFill/>
+          <a:ln w="19050">
+            <a:solidFill>
+              <a:srgbClr val="FFFFFF"/>
+            </a:solidFill>
+            <a:prstDash val="solid"/>
+          </a:ln>
+        </p:spPr>
+      </p:sp>
+      <p:sp>
+        <p:nvSpPr>
+          <p:cNvPr id="22" name="Shape 19"/>
+          <p:cNvSpPr/>
+          <p:nvPr/>
+        </p:nvSpPr>
+        <p:spPr>
+          <a:xfrm>
+            <a:off x="8224520" y="1645920"/>
+            <a:ext cx="0" cy="781812"/>
+          </a:xfrm>
+          <a:prstGeom prst="line">
+            <a:avLst/>
+          </a:prstGeom>
+          <a:noFill/>
+          <a:ln w="19050">
+            <a:solidFill>
+              <a:srgbClr val="FFFFFF"/>
+            </a:solidFill>
+            <a:prstDash val="solid"/>
+          </a:ln>
+        </p:spPr>
+      </p:sp>
+      <p:sp>
+        <p:nvSpPr>
+          <p:cNvPr id="23" name="Shape 20"/>
+          <p:cNvSpPr/>
+          <p:nvPr/>
+        </p:nvSpPr>
+        <p:spPr>
+          <a:xfrm>
+            <a:off x="8371840" y="1645920"/>
+            <a:ext cx="0" cy="781812"/>
+          </a:xfrm>
+          <a:prstGeom prst="line">
+            <a:avLst/>
+          </a:prstGeom>
+          <a:noFill/>
+          <a:ln w="19050">
+            <a:solidFill>
+              <a:srgbClr val="FFFFFF"/>
+            </a:solidFill>
+            <a:prstDash val="solid"/>
+          </a:ln>
+        </p:spPr>
+      </p:sp>
+      <p:sp>
+        <p:nvSpPr>
+          <p:cNvPr id="24" name="Shape 21"/>
+          <p:cNvSpPr/>
+          <p:nvPr/>
+        </p:nvSpPr>
+        <p:spPr>
+          <a:xfrm>
+            <a:off x="8519160" y="1645920"/>
+            <a:ext cx="0" cy="781812"/>
+          </a:xfrm>
+          <a:prstGeom prst="line">
+            <a:avLst/>
+          </a:prstGeom>
+          <a:noFill/>
+          <a:ln w="19050">
+            <a:solidFill>
+              <a:srgbClr val="FFFFFF"/>
+            </a:solidFill>
+            <a:prstDash val="solid"/>
+          </a:ln>
+        </p:spPr>
+      </p:sp>
+      <p:sp>
+        <p:nvSpPr>
+          <p:cNvPr id="25" name="Shape 22"/>
+          <p:cNvSpPr/>
+          <p:nvPr/>
+        </p:nvSpPr>
+        <p:spPr>
+          <a:xfrm>
+            <a:off x="8666480" y="1645920"/>
+            <a:ext cx="0" cy="781812"/>
+          </a:xfrm>
+          <a:prstGeom prst="line">
+            <a:avLst/>
+          </a:prstGeom>
+          <a:noFill/>
+          <a:ln w="19050">
+            <a:solidFill>
+              <a:srgbClr val="FFFFFF"/>
+            </a:solidFill>
+            <a:prstDash val="solid"/>
+          </a:ln>
+        </p:spPr>
+      </p:sp>
+      <p:sp>
+        <p:nvSpPr>
+          <p:cNvPr id="26" name="Shape 23"/>
+          <p:cNvSpPr/>
+          <p:nvPr/>
+        </p:nvSpPr>
+        <p:spPr>
+          <a:xfrm>
+            <a:off x="8813800" y="1645920"/>
+            <a:ext cx="0" cy="781812"/>
+          </a:xfrm>
+          <a:prstGeom prst="line">
+            <a:avLst/>
+          </a:prstGeom>
+          <a:noFill/>
+          <a:ln w="19050">
+            <a:solidFill>
+              <a:srgbClr val="FFFFFF"/>
+            </a:solidFill>
+            <a:prstDash val="solid"/>
+          </a:ln>
+        </p:spPr>
+      </p:sp>
+      <p:sp>
+        <p:nvSpPr>
+          <p:cNvPr id="27" name="Shape 24"/>
+          <p:cNvSpPr/>
+          <p:nvPr/>
+        </p:nvSpPr>
+        <p:spPr>
+          <a:xfrm>
+            <a:off x="8961120" y="1645920"/>
+            <a:ext cx="0" cy="781812"/>
+          </a:xfrm>
+          <a:prstGeom prst="line">
+            <a:avLst/>
+          </a:prstGeom>
+          <a:noFill/>
+          <a:ln w="19050">
+            <a:solidFill>
+              <a:srgbClr val="FFFFFF"/>
+            </a:solidFill>
+            <a:prstDash val="solid"/>
+          </a:ln>
+        </p:spPr>
+      </p:sp>
+      <p:sp>
+        <p:nvSpPr>
+          <p:cNvPr id="28" name="Shape 25"/>
+          <p:cNvSpPr/>
+          <p:nvPr/>
+        </p:nvSpPr>
+        <p:spPr>
+          <a:xfrm>
+            <a:off x="9108440" y="1645920"/>
+            <a:ext cx="0" cy="781812"/>
+          </a:xfrm>
+          <a:prstGeom prst="line">
+            <a:avLst/>
+          </a:prstGeom>
+          <a:noFill/>
+          <a:ln w="19050">
+            <a:solidFill>
+              <a:srgbClr val="FFFFFF"/>
+            </a:solidFill>
+            <a:prstDash val="solid"/>
+          </a:ln>
+        </p:spPr>
+      </p:sp>
+      <p:sp>
+        <p:nvSpPr>
+          <p:cNvPr id="29" name="Shape 26"/>
+          <p:cNvSpPr/>
+          <p:nvPr/>
+        </p:nvSpPr>
+        <p:spPr>
+          <a:xfrm>
+            <a:off x="9255760" y="1645920"/>
+            <a:ext cx="0" cy="781812"/>
+          </a:xfrm>
+          <a:prstGeom prst="line">
+            <a:avLst/>
+          </a:prstGeom>
+          <a:noFill/>
+          <a:ln w="19050">
+            <a:solidFill>
+              <a:srgbClr val="FFFFFF"/>
+            </a:solidFill>
+            <a:prstDash val="solid"/>
+          </a:ln>
+        </p:spPr>
+      </p:sp>
+      <p:sp>
+        <p:nvSpPr>
+          <p:cNvPr id="30" name="Shape 27"/>
+          <p:cNvSpPr/>
+          <p:nvPr/>
+        </p:nvSpPr>
+        <p:spPr>
+          <a:xfrm>
+            <a:off x="9403080" y="1645920"/>
+            <a:ext cx="0" cy="781812"/>
+          </a:xfrm>
+          <a:prstGeom prst="line">
+            <a:avLst/>
+          </a:prstGeom>
+          <a:noFill/>
+          <a:ln w="19050">
+            <a:solidFill>
+              <a:srgbClr val="FFFFFF"/>
+            </a:solidFill>
+            <a:prstDash val="solid"/>
+          </a:ln>
+        </p:spPr>
+      </p:sp>
+      <p:sp>
+        <p:nvSpPr>
+          <p:cNvPr id="31" name="Shape 28"/>
+          <p:cNvSpPr/>
+          <p:nvPr/>
+        </p:nvSpPr>
+        <p:spPr>
+          <a:xfrm>
+            <a:off x="9550400" y="1645920"/>
+            <a:ext cx="0" cy="781812"/>
+          </a:xfrm>
+          <a:prstGeom prst="line">
+            <a:avLst/>
+          </a:prstGeom>
+          <a:noFill/>
+          <a:ln w="19050">
+            <a:solidFill>
+              <a:srgbClr val="FFFFFF"/>
+            </a:solidFill>
+            <a:prstDash val="solid"/>
+          </a:ln>
+        </p:spPr>
+      </p:sp>
+      <p:sp>
+        <p:nvSpPr>
+          <p:cNvPr id="32" name="Shape 29"/>
+          <p:cNvSpPr/>
+          <p:nvPr/>
+        </p:nvSpPr>
+        <p:spPr>
+          <a:xfrm>
+            <a:off x="9697720" y="1645920"/>
+            <a:ext cx="0" cy="781812"/>
+          </a:xfrm>
+          <a:prstGeom prst="line">
+            <a:avLst/>
+          </a:prstGeom>
+          <a:noFill/>
+          <a:ln w="19050">
+            <a:solidFill>
+              <a:srgbClr val="FFFFFF"/>
+            </a:solidFill>
+            <a:prstDash val="solid"/>
+          </a:ln>
+        </p:spPr>
+      </p:sp>
+      <p:sp>
+        <p:nvSpPr>
+          <p:cNvPr id="33" name="Shape 30"/>
+          <p:cNvSpPr/>
+          <p:nvPr/>
+        </p:nvSpPr>
+        <p:spPr>
+          <a:xfrm>
+            <a:off x="9845040" y="1645920"/>
+            <a:ext cx="0" cy="781812"/>
+          </a:xfrm>
+          <a:prstGeom prst="line">
+            <a:avLst/>
+          </a:prstGeom>
+          <a:noFill/>
+          <a:ln w="19050">
+            <a:solidFill>
+              <a:srgbClr val="FFFFFF"/>
+            </a:solidFill>
+            <a:prstDash val="solid"/>
+          </a:ln>
+        </p:spPr>
+      </p:sp>
+      <p:sp>
+        <p:nvSpPr>
+          <p:cNvPr id="34" name="Shape 31"/>
+          <p:cNvSpPr/>
+          <p:nvPr/>
+        </p:nvSpPr>
+        <p:spPr>
+          <a:xfrm>
+            <a:off x="9992360" y="1645920"/>
+            <a:ext cx="0" cy="781812"/>
+          </a:xfrm>
+          <a:prstGeom prst="line">
+            <a:avLst/>
+          </a:prstGeom>
+          <a:noFill/>
+          <a:ln w="19050">
+            <a:solidFill>
+              <a:srgbClr val="FFFFFF"/>
+            </a:solidFill>
+            <a:prstDash val="solid"/>
+          </a:ln>
+        </p:spPr>
+      </p:sp>
+      <p:sp>
+        <p:nvSpPr>
+          <p:cNvPr id="35" name="Shape 32"/>
+          <p:cNvSpPr/>
+          <p:nvPr/>
+        </p:nvSpPr>
+        <p:spPr>
+          <a:xfrm>
+            <a:off x="10139680" y="1645920"/>
+            <a:ext cx="0" cy="781812"/>
+          </a:xfrm>
+          <a:prstGeom prst="line">
+            <a:avLst/>
+          </a:prstGeom>
+          <a:noFill/>
+          <a:ln w="19050">
+            <a:solidFill>
+              <a:srgbClr val="FFFFFF"/>
+            </a:solidFill>
+            <a:prstDash val="solid"/>
+          </a:ln>
+        </p:spPr>
+      </p:sp>
+      <p:sp>
+        <p:nvSpPr>
+          <p:cNvPr id="36" name="Shape 33"/>
+          <p:cNvSpPr/>
+          <p:nvPr/>
+        </p:nvSpPr>
+        <p:spPr>
+          <a:xfrm>
+            <a:off x="10287000" y="1645920"/>
+            <a:ext cx="0" cy="781812"/>
+          </a:xfrm>
+          <a:prstGeom prst="line">
+            <a:avLst/>
+          </a:prstGeom>
+          <a:noFill/>
+          <a:ln w="19050">
+            <a:solidFill>
+              <a:srgbClr val="FFFFFF"/>
+            </a:solidFill>
+            <a:prstDash val="solid"/>
+          </a:ln>
+        </p:spPr>
+      </p:sp>
+      <p:sp>
+        <p:nvSpPr>
+          <p:cNvPr id="37" name="Shape 34"/>
+          <p:cNvSpPr/>
+          <p:nvPr/>
+        </p:nvSpPr>
+        <p:spPr>
+          <a:xfrm>
+            <a:off x="10434320" y="1645920"/>
+            <a:ext cx="0" cy="781812"/>
+          </a:xfrm>
+          <a:prstGeom prst="line">
+            <a:avLst/>
+          </a:prstGeom>
+          <a:noFill/>
+          <a:ln w="19050">
+            <a:solidFill>
+              <a:srgbClr val="FFFFFF"/>
+            </a:solidFill>
+            <a:prstDash val="solid"/>
+          </a:ln>
+        </p:spPr>
+      </p:sp>
+      <p:sp>
+        <p:nvSpPr>
+          <p:cNvPr id="38" name="Shape 35"/>
+          <p:cNvSpPr/>
+          <p:nvPr/>
+        </p:nvSpPr>
+        <p:spPr>
+          <a:xfrm>
+            <a:off x="10581640" y="1645920"/>
+            <a:ext cx="0" cy="781812"/>
+          </a:xfrm>
+          <a:prstGeom prst="line">
+            <a:avLst/>
+          </a:prstGeom>
+          <a:noFill/>
+          <a:ln w="19050">
+            <a:solidFill>
+              <a:srgbClr val="FFFFFF"/>
+            </a:solidFill>
+            <a:prstDash val="solid"/>
+          </a:ln>
+        </p:spPr>
+      </p:sp>
+      <p:sp>
+        <p:nvSpPr>
+          <p:cNvPr id="39" name="Shape 36"/>
+          <p:cNvSpPr/>
+          <p:nvPr/>
+        </p:nvSpPr>
+        <p:spPr>
+          <a:xfrm>
+            <a:off x="10728960" y="1645920"/>
+            <a:ext cx="0" cy="781812"/>
+          </a:xfrm>
+          <a:prstGeom prst="line">
+            <a:avLst/>
+          </a:prstGeom>
+          <a:noFill/>
+          <a:ln w="19050">
+            <a:solidFill>
+              <a:srgbClr val="FFFFFF"/>
+            </a:solidFill>
+            <a:prstDash val="solid"/>
+          </a:ln>
+        </p:spPr>
+      </p:sp>
+      <p:sp>
+        <p:nvSpPr>
+          <p:cNvPr id="40" name="Shape 37"/>
+          <p:cNvSpPr/>
+          <p:nvPr/>
+        </p:nvSpPr>
+        <p:spPr>
+          <a:xfrm>
+            <a:off x="10876280" y="1645920"/>
+            <a:ext cx="0" cy="781812"/>
+          </a:xfrm>
+          <a:prstGeom prst="line">
+            <a:avLst/>
+          </a:prstGeom>
+          <a:noFill/>
+          <a:ln w="19050">
+            <a:solidFill>
+              <a:srgbClr val="FFFFFF"/>
+            </a:solidFill>
+            <a:prstDash val="solid"/>
+          </a:ln>
+        </p:spPr>
+      </p:sp>
+      <p:sp>
+        <p:nvSpPr>
+          <p:cNvPr id="41" name="Shape 38"/>
+          <p:cNvSpPr/>
+          <p:nvPr/>
+        </p:nvSpPr>
+        <p:spPr>
+          <a:xfrm>
+            <a:off x="11023600" y="1645920"/>
+            <a:ext cx="0" cy="781812"/>
+          </a:xfrm>
+          <a:prstGeom prst="line">
+            <a:avLst/>
+          </a:prstGeom>
+          <a:noFill/>
+          <a:ln w="19050">
+            <a:solidFill>
+              <a:srgbClr val="FFFFFF"/>
+            </a:solidFill>
+            <a:prstDash val="solid"/>
+          </a:ln>
+        </p:spPr>
+      </p:sp>
+      <p:sp>
+        <p:nvSpPr>
+          <p:cNvPr id="42" name="Shape 39"/>
+          <p:cNvSpPr/>
+          <p:nvPr/>
+        </p:nvSpPr>
+        <p:spPr>
+          <a:xfrm>
+            <a:off x="11170920" y="1645920"/>
+            <a:ext cx="0" cy="781812"/>
+          </a:xfrm>
+          <a:prstGeom prst="line">
+            <a:avLst/>
+          </a:prstGeom>
+          <a:noFill/>
+          <a:ln w="19050">
+            <a:solidFill>
+              <a:srgbClr val="FFFFFF"/>
+            </a:solidFill>
+            <a:prstDash val="solid"/>
+          </a:ln>
+        </p:spPr>
+      </p:sp>
+      <p:sp>
+        <p:nvSpPr>
+          <p:cNvPr id="43" name="Shape 40"/>
+          <p:cNvSpPr/>
+          <p:nvPr/>
+        </p:nvSpPr>
+        <p:spPr>
+          <a:xfrm>
+            <a:off x="11318240" y="1645920"/>
+            <a:ext cx="0" cy="781812"/>
+          </a:xfrm>
+          <a:prstGeom prst="line">
+            <a:avLst/>
+          </a:prstGeom>
+          <a:noFill/>
+          <a:ln w="19050">
+            <a:solidFill>
+              <a:srgbClr val="FFFFFF"/>
+            </a:solidFill>
+            <a:prstDash val="solid"/>
+          </a:ln>
+        </p:spPr>
+      </p:sp>
+      <p:sp>
+        <p:nvSpPr>
+          <p:cNvPr id="44" name="Shape 41"/>
+          <p:cNvSpPr/>
+          <p:nvPr/>
+        </p:nvSpPr>
+        <p:spPr>
+          <a:xfrm>
+            <a:off x="11465560" y="1645920"/>
+            <a:ext cx="0" cy="781812"/>
+          </a:xfrm>
+          <a:prstGeom prst="line">
+            <a:avLst/>
+          </a:prstGeom>
+          <a:noFill/>
+          <a:ln w="19050">
+            <a:solidFill>
+              <a:srgbClr val="FFFFFF"/>
+            </a:solidFill>
+            <a:prstDash val="solid"/>
+          </a:ln>
+        </p:spPr>
+      </p:sp>
+      <p:sp>
+        <p:nvSpPr>
+          <p:cNvPr id="45" name="Shape 42"/>
+          <p:cNvSpPr/>
+          <p:nvPr/>
+        </p:nvSpPr>
+        <p:spPr>
+          <a:xfrm>
+            <a:off x="11612880" y="1645920"/>
+            <a:ext cx="0" cy="781812"/>
+          </a:xfrm>
+          <a:prstGeom prst="line">
+            <a:avLst/>
+          </a:prstGeom>
+          <a:noFill/>
+          <a:ln w="19050">
+            <a:solidFill>
+              <a:srgbClr val="FFFFFF"/>
+            </a:solidFill>
+            <a:prstDash val="solid"/>
+          </a:ln>
+        </p:spPr>
+      </p:sp>
+      <p:sp>
+        <p:nvSpPr>
+          <p:cNvPr id="46" name="Shape 43"/>
+          <p:cNvSpPr/>
+          <p:nvPr/>
+        </p:nvSpPr>
+        <p:spPr>
+          <a:xfrm>
+            <a:off x="6309360" y="2601468"/>
+            <a:ext cx="0" cy="781812"/>
+          </a:xfrm>
+          <a:prstGeom prst="line">
+            <a:avLst/>
+          </a:prstGeom>
+          <a:noFill/>
+          <a:ln w="19050">
+            <a:solidFill>
+              <a:srgbClr val="FFFFFF"/>
+            </a:solidFill>
+            <a:prstDash val="solid"/>
+          </a:ln>
+        </p:spPr>
+      </p:sp>
+      <p:sp>
+        <p:nvSpPr>
+          <p:cNvPr id="47" name="Shape 44"/>
+          <p:cNvSpPr/>
+          <p:nvPr/>
+        </p:nvSpPr>
+        <p:spPr>
+          <a:xfrm>
+            <a:off x="6456680" y="2601468"/>
+            <a:ext cx="0" cy="781812"/>
+          </a:xfrm>
+          <a:prstGeom prst="line">
+            <a:avLst/>
+          </a:prstGeom>
+          <a:noFill/>
+          <a:ln w="19050">
+            <a:solidFill>
+              <a:srgbClr val="FFFFFF"/>
+            </a:solidFill>
+            <a:prstDash val="solid"/>
+          </a:ln>
+        </p:spPr>
+      </p:sp>
+      <p:sp>
+        <p:nvSpPr>
+          <p:cNvPr id="48" name="Shape 45"/>
+          <p:cNvSpPr/>
+          <p:nvPr/>
+        </p:nvSpPr>
+        <p:spPr>
+          <a:xfrm>
+            <a:off x="6604000" y="2601468"/>
+            <a:ext cx="0" cy="781812"/>
+          </a:xfrm>
+          <a:prstGeom prst="line">
+            <a:avLst/>
+          </a:prstGeom>
+          <a:noFill/>
+          <a:ln w="19050">
+            <a:solidFill>
+              <a:srgbClr val="FFFFFF"/>
+            </a:solidFill>
+            <a:prstDash val="solid"/>
+          </a:ln>
+        </p:spPr>
+      </p:sp>
+      <p:sp>
+        <p:nvSpPr>
+          <p:cNvPr id="49" name="Shape 46"/>
+          <p:cNvSpPr/>
+          <p:nvPr/>
+        </p:nvSpPr>
+        <p:spPr>
+          <a:xfrm>
+            <a:off x="6751320" y="2601468"/>
+            <a:ext cx="0" cy="781812"/>
+          </a:xfrm>
+          <a:prstGeom prst="line">
+            <a:avLst/>
+          </a:prstGeom>
+          <a:noFill/>
+          <a:ln w="19050">
+            <a:solidFill>
+              <a:srgbClr val="FFFFFF"/>
+            </a:solidFill>
+            <a:prstDash val="solid"/>
+          </a:ln>
+        </p:spPr>
+      </p:sp>
+      <p:sp>
+        <p:nvSpPr>
+          <p:cNvPr id="50" name="Shape 47"/>
+          <p:cNvSpPr/>
+          <p:nvPr/>
+        </p:nvSpPr>
+        <p:spPr>
+          <a:xfrm>
+            <a:off x="6898640" y="2601468"/>
+            <a:ext cx="0" cy="781812"/>
+          </a:xfrm>
+          <a:prstGeom prst="line">
+            <a:avLst/>
+          </a:prstGeom>
+          <a:noFill/>
+          <a:ln w="19050">
+            <a:solidFill>
+              <a:srgbClr val="FFFFFF"/>
+            </a:solidFill>
+            <a:prstDash val="solid"/>
+          </a:ln>
+        </p:spPr>
+      </p:sp>
+      <p:sp>
+        <p:nvSpPr>
+          <p:cNvPr id="51" name="Shape 48"/>
+          <p:cNvSpPr/>
+          <p:nvPr/>
+        </p:nvSpPr>
+        <p:spPr>
+          <a:xfrm>
+            <a:off x="7045960" y="2601468"/>
+            <a:ext cx="0" cy="781812"/>
+          </a:xfrm>
+          <a:prstGeom prst="line">
+            <a:avLst/>
+          </a:prstGeom>
+          <a:noFill/>
+          <a:ln w="19050">
+            <a:solidFill>
+              <a:srgbClr val="FFFFFF"/>
+            </a:solidFill>
+            <a:prstDash val="solid"/>
+          </a:ln>
+        </p:spPr>
+      </p:sp>
+      <p:sp>
+        <p:nvSpPr>
+          <p:cNvPr id="52" name="Shape 49"/>
+          <p:cNvSpPr/>
+          <p:nvPr/>
+        </p:nvSpPr>
+        <p:spPr>
+          <a:xfrm>
+            <a:off x="7193280" y="2601468"/>
+            <a:ext cx="0" cy="781812"/>
+          </a:xfrm>
+          <a:prstGeom prst="line">
+            <a:avLst/>
+          </a:prstGeom>
+          <a:noFill/>
+          <a:ln w="19050">
+            <a:solidFill>
+              <a:srgbClr val="FFFFFF"/>
+            </a:solidFill>
+            <a:prstDash val="solid"/>
+          </a:ln>
+        </p:spPr>
+      </p:sp>
+      <p:sp>
+        <p:nvSpPr>
+          <p:cNvPr id="53" name="Shape 50"/>
+          <p:cNvSpPr/>
+          <p:nvPr/>
+        </p:nvSpPr>
+        <p:spPr>
+          <a:xfrm>
+            <a:off x="7340600" y="2601468"/>
+            <a:ext cx="0" cy="781812"/>
+          </a:xfrm>
+          <a:prstGeom prst="line">
+            <a:avLst/>
+          </a:prstGeom>
+          <a:noFill/>
+          <a:ln w="19050">
+            <a:solidFill>
+              <a:srgbClr val="FFFFFF"/>
+            </a:solidFill>
+            <a:prstDash val="solid"/>
+          </a:ln>
+        </p:spPr>
+      </p:sp>
+      <p:sp>
+        <p:nvSpPr>
+          <p:cNvPr id="54" name="Shape 51"/>
+          <p:cNvSpPr/>
+          <p:nvPr/>
+        </p:nvSpPr>
+        <p:spPr>
+          <a:xfrm>
+            <a:off x="7487920" y="2601468"/>
+            <a:ext cx="0" cy="781812"/>
+          </a:xfrm>
+          <a:prstGeom prst="line">
+            <a:avLst/>
+          </a:prstGeom>
+          <a:noFill/>
+          <a:ln w="19050">
+            <a:solidFill>
+              <a:srgbClr val="FFFFFF"/>
+            </a:solidFill>
+            <a:prstDash val="solid"/>
+          </a:ln>
+        </p:spPr>
+      </p:sp>
+      <p:sp>
+        <p:nvSpPr>
+          <p:cNvPr id="55" name="Shape 52"/>
+          <p:cNvSpPr/>
+          <p:nvPr/>
+        </p:nvSpPr>
+        <p:spPr>
+          <a:xfrm>
+            <a:off x="7635240" y="2601468"/>
+            <a:ext cx="0" cy="781812"/>
+          </a:xfrm>
+          <a:prstGeom prst="line">
+            <a:avLst/>
+          </a:prstGeom>
+          <a:noFill/>
+          <a:ln w="19050">
+            <a:solidFill>
+              <a:srgbClr val="FFFFFF"/>
+            </a:solidFill>
+            <a:prstDash val="solid"/>
+          </a:ln>
+        </p:spPr>
+      </p:sp>
+      <p:sp>
+        <p:nvSpPr>
+          <p:cNvPr id="56" name="Shape 53"/>
+          <p:cNvSpPr/>
+          <p:nvPr/>
+        </p:nvSpPr>
+        <p:spPr>
+          <a:xfrm>
+            <a:off x="7782560" y="2601468"/>
+            <a:ext cx="0" cy="781812"/>
+          </a:xfrm>
+          <a:prstGeom prst="line">
+            <a:avLst/>
+          </a:prstGeom>
+          <a:noFill/>
+          <a:ln w="19050">
+            <a:solidFill>
+              <a:srgbClr val="FFFFFF"/>
+            </a:solidFill>
+            <a:prstDash val="solid"/>
+          </a:ln>
+        </p:spPr>
+      </p:sp>
+      <p:sp>
+        <p:nvSpPr>
+          <p:cNvPr id="57" name="Shape 54"/>
+          <p:cNvSpPr/>
+          <p:nvPr/>
+        </p:nvSpPr>
+        <p:spPr>
+          <a:xfrm>
+            <a:off x="7929880" y="2601468"/>
+            <a:ext cx="0" cy="781812"/>
+          </a:xfrm>
+          <a:prstGeom prst="line">
+            <a:avLst/>
+          </a:prstGeom>
+          <a:noFill/>
+          <a:ln w="19050">
+            <a:solidFill>
+              <a:srgbClr val="FFFFFF"/>
+            </a:solidFill>
+            <a:prstDash val="solid"/>
+          </a:ln>
+        </p:spPr>
+      </p:sp>
+      <p:sp>
+        <p:nvSpPr>
+          <p:cNvPr id="58" name="Shape 55"/>
+          <p:cNvSpPr/>
+          <p:nvPr/>
+        </p:nvSpPr>
+        <p:spPr>
+          <a:xfrm>
+            <a:off x="8077200" y="2601468"/>
+            <a:ext cx="0" cy="781812"/>
+          </a:xfrm>
+          <a:prstGeom prst="line">
+            <a:avLst/>
+          </a:prstGeom>
+          <a:noFill/>
+          <a:ln w="19050">
+            <a:solidFill>
+              <a:srgbClr val="FFFFFF"/>
+            </a:solidFill>
+            <a:prstDash val="solid"/>
+          </a:ln>
+        </p:spPr>
+      </p:sp>
+      <p:sp>
+        <p:nvSpPr>
+          <p:cNvPr id="59" name="Shape 56"/>
+          <p:cNvSpPr/>
+          <p:nvPr/>
+        </p:nvSpPr>
+        <p:spPr>
+          <a:xfrm>
+            <a:off x="8224520" y="2601468"/>
+            <a:ext cx="0" cy="781812"/>
+          </a:xfrm>
+          <a:prstGeom prst="line">
+            <a:avLst/>
+          </a:prstGeom>
+          <a:noFill/>
+          <a:ln w="19050">
+            <a:solidFill>
+              <a:srgbClr val="FFFFFF"/>
+            </a:solidFill>
+            <a:prstDash val="solid"/>
+          </a:ln>
+        </p:spPr>
+      </p:sp>
+      <p:sp>
+        <p:nvSpPr>
+          <p:cNvPr id="60" name="Shape 57"/>
+          <p:cNvSpPr/>
+          <p:nvPr/>
+        </p:nvSpPr>
+        <p:spPr>
+          <a:xfrm>
+            <a:off x="8371840" y="2601468"/>
+            <a:ext cx="0" cy="781812"/>
+          </a:xfrm>
+          <a:prstGeom prst="line">
+            <a:avLst/>
+          </a:prstGeom>
+          <a:noFill/>
+          <a:ln w="19050">
+            <a:solidFill>
+              <a:srgbClr val="FFFFFF"/>
+            </a:solidFill>
+            <a:prstDash val="solid"/>
+          </a:ln>
+        </p:spPr>
+      </p:sp>
+      <p:sp>
+        <p:nvSpPr>
+          <p:cNvPr id="61" name="Shape 58"/>
+          <p:cNvSpPr/>
+          <p:nvPr/>
+        </p:nvSpPr>
+        <p:spPr>
+          <a:xfrm>
+            <a:off x="8519160" y="2601468"/>
+            <a:ext cx="0" cy="781812"/>
+          </a:xfrm>
+          <a:prstGeom prst="line">
+            <a:avLst/>
+          </a:prstGeom>
+          <a:noFill/>
+          <a:ln w="19050">
+            <a:solidFill>
+              <a:srgbClr val="FFFFFF"/>
+            </a:solidFill>
+            <a:prstDash val="solid"/>
+          </a:ln>
+        </p:spPr>
+      </p:sp>
+      <p:sp>
+        <p:nvSpPr>
+          <p:cNvPr id="62" name="Shape 59"/>
+          <p:cNvSpPr/>
+          <p:nvPr/>
+        </p:nvSpPr>
+        <p:spPr>
+          <a:xfrm>
+            <a:off x="8666480" y="2601468"/>
+            <a:ext cx="0" cy="781812"/>
+          </a:xfrm>
+          <a:prstGeom prst="line">
+            <a:avLst/>
+          </a:prstGeom>
+          <a:noFill/>
+          <a:ln w="19050">
+            <a:solidFill>
+              <a:srgbClr val="FFFFFF"/>
+            </a:solidFill>
+            <a:prstDash val="solid"/>
+          </a:ln>
+        </p:spPr>
+      </p:sp>
+      <p:sp>
+        <p:nvSpPr>
+          <p:cNvPr id="63" name="Shape 60"/>
+          <p:cNvSpPr/>
+          <p:nvPr/>
+        </p:nvSpPr>
+        <p:spPr>
+          <a:xfrm>
+            <a:off x="8813800" y="2601468"/>
+            <a:ext cx="0" cy="781812"/>
+          </a:xfrm>
+          <a:prstGeom prst="line">
+            <a:avLst/>
+          </a:prstGeom>
+          <a:noFill/>
+          <a:ln w="19050">
+            <a:solidFill>
+              <a:srgbClr val="FFFFFF"/>
+            </a:solidFill>
+            <a:prstDash val="solid"/>
+          </a:ln>
+        </p:spPr>
+      </p:sp>
+      <p:sp>
+        <p:nvSpPr>
+          <p:cNvPr id="64" name="Shape 61"/>
+          <p:cNvSpPr/>
+          <p:nvPr/>
+        </p:nvSpPr>
+        <p:spPr>
+          <a:xfrm>
+            <a:off x="8961120" y="2601468"/>
+            <a:ext cx="0" cy="781812"/>
+          </a:xfrm>
+          <a:prstGeom prst="line">
+            <a:avLst/>
+          </a:prstGeom>
+          <a:noFill/>
+          <a:ln w="19050">
+            <a:solidFill>
+              <a:srgbClr val="FFFFFF"/>
+            </a:solidFill>
+            <a:prstDash val="solid"/>
+          </a:ln>
+        </p:spPr>
+      </p:sp>
+      <p:sp>
+        <p:nvSpPr>
+          <p:cNvPr id="65" name="Shape 62"/>
+          <p:cNvSpPr/>
+          <p:nvPr/>
+        </p:nvSpPr>
+        <p:spPr>
+          <a:xfrm>
+            <a:off x="9108440" y="2601468"/>
+            <a:ext cx="0" cy="781812"/>
+          </a:xfrm>
+          <a:prstGeom prst="line">
+            <a:avLst/>
+          </a:prstGeom>
+          <a:noFill/>
+          <a:ln w="19050">
+            <a:solidFill>
+              <a:srgbClr val="FFFFFF"/>
+            </a:solidFill>
+            <a:prstDash val="solid"/>
+          </a:ln>
+        </p:spPr>
+      </p:sp>
+      <p:sp>
+        <p:nvSpPr>
+          <p:cNvPr id="66" name="Shape 63"/>
+          <p:cNvSpPr/>
+          <p:nvPr/>
+        </p:nvSpPr>
+        <p:spPr>
+          <a:xfrm>
+            <a:off x="9255760" y="2601468"/>
+            <a:ext cx="0" cy="781812"/>
+          </a:xfrm>
+          <a:prstGeom prst="line">
+            <a:avLst/>
+          </a:prstGeom>
+          <a:noFill/>
+          <a:ln w="19050">
+            <a:solidFill>
+              <a:srgbClr val="FFFFFF"/>
+            </a:solidFill>
+            <a:prstDash val="solid"/>
+          </a:ln>
+        </p:spPr>
+      </p:sp>
+      <p:sp>
+        <p:nvSpPr>
+          <p:cNvPr id="67" name="Shape 64"/>
+          <p:cNvSpPr/>
+          <p:nvPr/>
+        </p:nvSpPr>
+        <p:spPr>
+          <a:xfrm>
+            <a:off x="9403080" y="2601468"/>
+            <a:ext cx="0" cy="781812"/>
+          </a:xfrm>
+          <a:prstGeom prst="line">
+            <a:avLst/>
+          </a:prstGeom>
+          <a:noFill/>
+          <a:ln w="19050">
+            <a:solidFill>
+              <a:srgbClr val="FFFFFF"/>
+            </a:solidFill>
+            <a:prstDash val="solid"/>
+          </a:ln>
+        </p:spPr>
+      </p:sp>
+      <p:sp>
+        <p:nvSpPr>
+          <p:cNvPr id="68" name="Shape 65"/>
+          <p:cNvSpPr/>
+          <p:nvPr/>
+        </p:nvSpPr>
+        <p:spPr>
+          <a:xfrm>
+            <a:off x="9550400" y="2601468"/>
+            <a:ext cx="0" cy="781812"/>
+          </a:xfrm>
+          <a:prstGeom prst="line">
+            <a:avLst/>
+          </a:prstGeom>
+          <a:noFill/>
+          <a:ln w="19050">
+            <a:solidFill>
+              <a:srgbClr val="FFFFFF"/>
+            </a:solidFill>
+            <a:prstDash val="solid"/>
+          </a:ln>
+        </p:spPr>
+      </p:sp>
+      <p:sp>
+        <p:nvSpPr>
+          <p:cNvPr id="69" name="Shape 66"/>
+          <p:cNvSpPr/>
+          <p:nvPr/>
+        </p:nvSpPr>
+        <p:spPr>
+          <a:xfrm>
+            <a:off x="9697720" y="2601468"/>
+            <a:ext cx="0" cy="781812"/>
+          </a:xfrm>
+          <a:prstGeom prst="line">
+            <a:avLst/>
+          </a:prstGeom>
+          <a:noFill/>
+          <a:ln w="19050">
+            <a:solidFill>
+              <a:srgbClr val="FFFFFF"/>
+            </a:solidFill>
+            <a:prstDash val="solid"/>
+          </a:ln>
+        </p:spPr>
+      </p:sp>
+      <p:sp>
+        <p:nvSpPr>
+          <p:cNvPr id="70" name="Shape 67"/>
+          <p:cNvSpPr/>
+          <p:nvPr/>
+        </p:nvSpPr>
+        <p:spPr>
+          <a:xfrm>
+            <a:off x="9845040" y="2601468"/>
+            <a:ext cx="0" cy="781812"/>
+          </a:xfrm>
+          <a:prstGeom prst="line">
+            <a:avLst/>
+          </a:prstGeom>
+          <a:noFill/>
+          <a:ln w="19050">
+            <a:solidFill>
+              <a:srgbClr val="FFFFFF"/>
+            </a:solidFill>
+            <a:prstDash val="solid"/>
+          </a:ln>
+        </p:spPr>
+      </p:sp>
+      <p:sp>
+        <p:nvSpPr>
+          <p:cNvPr id="71" name="Shape 68"/>
+          <p:cNvSpPr/>
+          <p:nvPr/>
+        </p:nvSpPr>
+        <p:spPr>
+          <a:xfrm>
+            <a:off x="9992360" y="2601468"/>
+            <a:ext cx="0" cy="781812"/>
+          </a:xfrm>
+          <a:prstGeom prst="line">
+            <a:avLst/>
+          </a:prstGeom>
+          <a:noFill/>
+          <a:ln w="19050">
+            <a:solidFill>
+              <a:srgbClr val="FFFFFF"/>
+            </a:solidFill>
+            <a:prstDash val="solid"/>
+          </a:ln>
+        </p:spPr>
+      </p:sp>
+      <p:sp>
+        <p:nvSpPr>
+          <p:cNvPr id="72" name="Shape 69"/>
+          <p:cNvSpPr/>
+          <p:nvPr/>
+        </p:nvSpPr>
+        <p:spPr>
+          <a:xfrm>
+            <a:off x="10139680" y="2601468"/>
+            <a:ext cx="0" cy="781812"/>
+          </a:xfrm>
+          <a:prstGeom prst="line">
+            <a:avLst/>
+          </a:prstGeom>
+          <a:noFill/>
+          <a:ln w="19050">
+            <a:solidFill>
+              <a:srgbClr val="FFFFFF"/>
+            </a:solidFill>
+            <a:prstDash val="solid"/>
+          </a:ln>
+        </p:spPr>
+      </p:sp>
+      <p:sp>
+        <p:nvSpPr>
+          <p:cNvPr id="73" name="Shape 70"/>
+          <p:cNvSpPr/>
+          <p:nvPr/>
+        </p:nvSpPr>
+        <p:spPr>
+          <a:xfrm>
+            <a:off x="10287000" y="2601468"/>
+            <a:ext cx="0" cy="781812"/>
+          </a:xfrm>
+          <a:prstGeom prst="line">
+            <a:avLst/>
+          </a:prstGeom>
+          <a:noFill/>
+          <a:ln w="19050">
+            <a:solidFill>
+              <a:srgbClr val="FFFFFF"/>
+            </a:solidFill>
+            <a:prstDash val="solid"/>
+          </a:ln>
+        </p:spPr>
+      </p:sp>
+      <p:sp>
+        <p:nvSpPr>
+          <p:cNvPr id="74" name="Shape 71"/>
+          <p:cNvSpPr/>
+          <p:nvPr/>
+        </p:nvSpPr>
+        <p:spPr>
+          <a:xfrm>
+            <a:off x="10434320" y="2601468"/>
+            <a:ext cx="0" cy="781812"/>
+          </a:xfrm>
+          <a:prstGeom prst="line">
+            <a:avLst/>
+          </a:prstGeom>
+          <a:noFill/>
+          <a:ln w="19050">
+            <a:solidFill>
+              <a:srgbClr val="FFFFFF"/>
+            </a:solidFill>
+            <a:prstDash val="solid"/>
+          </a:ln>
+        </p:spPr>
+      </p:sp>
+      <p:sp>
+        <p:nvSpPr>
+          <p:cNvPr id="75" name="Shape 72"/>
+          <p:cNvSpPr/>
+          <p:nvPr/>
+        </p:nvSpPr>
+        <p:spPr>
+          <a:xfrm>
+            <a:off x="10581640" y="2601468"/>
+            <a:ext cx="0" cy="781812"/>
+          </a:xfrm>
+          <a:prstGeom prst="line">
+            <a:avLst/>
+          </a:prstGeom>
+          <a:noFill/>
+          <a:ln w="19050">
+            <a:solidFill>
+              <a:srgbClr val="FFFFFF"/>
+            </a:solidFill>
+            <a:prstDash val="solid"/>
+          </a:ln>
+        </p:spPr>
+      </p:sp>
+      <p:sp>
+        <p:nvSpPr>
+          <p:cNvPr id="76" name="Shape 73"/>
+          <p:cNvSpPr/>
+          <p:nvPr/>
+        </p:nvSpPr>
+        <p:spPr>
+          <a:xfrm>
+            <a:off x="10728960" y="2601468"/>
+            <a:ext cx="0" cy="781812"/>
+          </a:xfrm>
+          <a:prstGeom prst="line">
+            <a:avLst/>
+          </a:prstGeom>
+          <a:noFill/>
+          <a:ln w="19050">
+            <a:solidFill>
+              <a:srgbClr val="FFFFFF"/>
+            </a:solidFill>
+            <a:prstDash val="solid"/>
+          </a:ln>
+        </p:spPr>
+      </p:sp>
+      <p:sp>
+        <p:nvSpPr>
+          <p:cNvPr id="77" name="Shape 74"/>
+          <p:cNvSpPr/>
+          <p:nvPr/>
+        </p:nvSpPr>
+        <p:spPr>
+          <a:xfrm>
+            <a:off x="10876280" y="2601468"/>
+            <a:ext cx="0" cy="781812"/>
+          </a:xfrm>
+          <a:prstGeom prst="line">
+            <a:avLst/>
+          </a:prstGeom>
+          <a:noFill/>
+          <a:ln w="19050">
+            <a:solidFill>
+              <a:srgbClr val="FFFFFF"/>
+            </a:solidFill>
+            <a:prstDash val="solid"/>
+          </a:ln>
+        </p:spPr>
+      </p:sp>
+      <p:sp>
+        <p:nvSpPr>
+          <p:cNvPr id="78" name="Shape 75"/>
+          <p:cNvSpPr/>
+          <p:nvPr/>
+        </p:nvSpPr>
+        <p:spPr>
+          <a:xfrm>
+            <a:off x="11023600" y="2601468"/>
+            <a:ext cx="0" cy="781812"/>
+          </a:xfrm>
+          <a:prstGeom prst="line">
+            <a:avLst/>
+          </a:prstGeom>
+          <a:noFill/>
+          <a:ln w="19050">
+            <a:solidFill>
+              <a:srgbClr val="FFFFFF"/>
+            </a:solidFill>
+            <a:prstDash val="solid"/>
+          </a:ln>
+        </p:spPr>
+      </p:sp>
+      <p:sp>
+        <p:nvSpPr>
+          <p:cNvPr id="79" name="Shape 76"/>
+          <p:cNvSpPr/>
+          <p:nvPr/>
+        </p:nvSpPr>
+        <p:spPr>
+          <a:xfrm>
+            <a:off x="11170920" y="2601468"/>
+            <a:ext cx="0" cy="781812"/>
+          </a:xfrm>
+          <a:prstGeom prst="line">
+            <a:avLst/>
+          </a:prstGeom>
+          <a:noFill/>
+          <a:ln w="19050">
+            <a:solidFill>
+              <a:srgbClr val="FFFFFF"/>
+            </a:solidFill>
+            <a:prstDash val="solid"/>
+          </a:ln>
+        </p:spPr>
+      </p:sp>
+      <p:sp>
+        <p:nvSpPr>
+          <p:cNvPr id="80" name="Shape 77"/>
+          <p:cNvSpPr/>
+          <p:nvPr/>
+        </p:nvSpPr>
+        <p:spPr>
+          <a:xfrm>
+            <a:off x="11318240" y="2601468"/>
+            <a:ext cx="0" cy="781812"/>
+          </a:xfrm>
+          <a:prstGeom prst="line">
+            <a:avLst/>
+          </a:prstGeom>
+          <a:noFill/>
+          <a:ln w="19050">
+            <a:solidFill>
+              <a:srgbClr val="FFFFFF"/>
+            </a:solidFill>
+            <a:prstDash val="solid"/>
+          </a:ln>
+        </p:spPr>
+      </p:sp>
+      <p:sp>
+        <p:nvSpPr>
+          <p:cNvPr id="81" name="Shape 78"/>
+          <p:cNvSpPr/>
+          <p:nvPr/>
+        </p:nvSpPr>
+        <p:spPr>
+          <a:xfrm>
+            <a:off x="11465560" y="2601468"/>
+            <a:ext cx="0" cy="781812"/>
+          </a:xfrm>
+          <a:prstGeom prst="line">
+            <a:avLst/>
+          </a:prstGeom>
+          <a:noFill/>
+          <a:ln w="19050">
+            <a:solidFill>
+              <a:srgbClr val="FFFFFF"/>
+            </a:solidFill>
+            <a:prstDash val="solid"/>
+          </a:ln>
+        </p:spPr>
+      </p:sp>
+      <p:sp>
+        <p:nvSpPr>
+          <p:cNvPr id="82" name="Shape 79"/>
+          <p:cNvSpPr/>
+          <p:nvPr/>
+        </p:nvSpPr>
+        <p:spPr>
+          <a:xfrm>
+            <a:off x="11612880" y="2601468"/>
+            <a:ext cx="0" cy="781812"/>
+          </a:xfrm>
+          <a:prstGeom prst="line">
+            <a:avLst/>
+          </a:prstGeom>
+          <a:noFill/>
+          <a:ln w="19050">
+            <a:solidFill>
+              <a:srgbClr val="FFFFFF"/>
+            </a:solidFill>
+            <a:prstDash val="solid"/>
+          </a:ln>
+        </p:spPr>
+      </p:sp>
+      <p:sp>
+        <p:nvSpPr>
+          <p:cNvPr id="83" name="Text 80"/>
+          <p:cNvSpPr txBox="1"/>
+          <p:nvPr/>
+        </p:nvSpPr>
+        <p:spPr>
+          <a:xfrm>
+            <a:off x="6309360" y="3456432"/>
+            <a:ext cx="5303520" cy="320040"/>
+          </a:xfrm>
+          <a:prstGeom prst="rect">
+            <a:avLst/>
+          </a:prstGeom>
+          <a:noFill/>
+          <a:ln/>
+        </p:spPr>
+        <p:txBody>
+          <a:bodyPr wrap="square" lIns="0" tIns="0" rIns="0" bIns="0" rtlCol="0" anchor="ctr"/>
+          <a:lstStyle/>
+          <a:p>
+            <a:pPr algn="ctr" indent="0" marL="0">
+              <a:buNone/>
+            </a:pPr>
+            <a:r>
+              <a:rPr lang="en-US" sz="1200" dirty="0">
+                <a:solidFill>
+                  <a:srgbClr val="6B7280"/>
+                </a:solidFill>
+                <a:latin typeface="Calibri" pitchFamily="34" charset="0"/>
+                <a:ea typeface="Calibri" pitchFamily="34" charset="-122"/>
+                <a:cs typeface="Calibri" pitchFamily="34" charset="-120"/>
+              </a:rPr>
+              <a:t>107 новых мест (в т.ч. 2 для МГН)</a:t>
+            </a:r>
+            <a:endParaRPr lang="en-US" sz="1200" dirty="0"/>
+          </a:p>
+        </p:txBody>
+      </p:sp>
+      <p:sp>
+        <p:nvSpPr>
+          <p:cNvPr id="84" name="Shape 81"/>
+          <p:cNvSpPr/>
+          <p:nvPr/>
+        </p:nvSpPr>
+        <p:spPr>
+          <a:xfrm>
+            <a:off x="6309360" y="1645920"/>
+            <a:ext cx="294640" cy="1737360"/>
+          </a:xfrm>
+          <a:prstGeom prst="rect">
+            <a:avLst/>
+          </a:prstGeom>
+          <a:solidFill>
+            <a:srgbClr val="2563EB"/>
+          </a:solidFill>
+          <a:ln/>
+        </p:spPr>
+      </p:sp>
+      <p:sp>
+        <p:nvSpPr>
+          <p:cNvPr id="85" name="Text 82"/>
+          <p:cNvSpPr txBox="1"/>
+          <p:nvPr/>
+        </p:nvSpPr>
+        <p:spPr>
+          <a:xfrm>
+            <a:off x="548640" y="3977640"/>
+            <a:ext cx="5303520" cy="365760"/>
+          </a:xfrm>
+          <a:prstGeom prst="rect">
+            <a:avLst/>
+          </a:prstGeom>
+          <a:noFill/>
+          <a:ln/>
+        </p:spPr>
+        <p:txBody>
+          <a:bodyPr wrap="square" lIns="0" tIns="0" rIns="0" bIns="0" rtlCol="0" anchor="ctr"/>
+          <a:lstStyle/>
+          <a:p>
+            <a:pPr indent="0" marL="0">
+              <a:buNone/>
+            </a:pPr>
+            <a:r>
+              <a:rPr lang="en-US" sz="1600" b="1" dirty="0">
+                <a:solidFill>
+                  <a:srgbClr val="1F2937"/>
+                </a:solidFill>
+                <a:latin typeface="Calibri" pitchFamily="34" charset="0"/>
+                <a:ea typeface="Calibri" pitchFamily="34" charset="-122"/>
+                <a:cs typeface="Calibri" pitchFamily="34" charset="-120"/>
+              </a:rPr>
+              <a:t>Что нужно</a:t>
+            </a:r>
+            <a:endParaRPr lang="en-US" sz="1600" dirty="0"/>
+          </a:p>
+        </p:txBody>
+      </p:sp>
+      <p:sp>
+        <p:nvSpPr>
+          <p:cNvPr id="86" name="Text 83"/>
+          <p:cNvSpPr txBox="1"/>
+          <p:nvPr/>
+        </p:nvSpPr>
+        <p:spPr>
+          <a:xfrm>
+            <a:off x="548640" y="4389120"/>
+            <a:ext cx="5303520" cy="1920240"/>
+          </a:xfrm>
+          <a:prstGeom prst="rect">
+            <a:avLst/>
+          </a:prstGeom>
+          <a:noFill/>
+          <a:ln/>
+        </p:spPr>
+        <p:txBody>
+          <a:bodyPr wrap="square" lIns="0" tIns="0" rIns="0" bIns="0" rtlCol="0" anchor="t"/>
+          <a:lstStyle/>
+          <a:p>
+            <a:pPr marL="342900" indent="-342900">
+              <a:spcAft>
+                <a:spcPts val="600"/>
+              </a:spcAft>
+              <a:buSzPct val="100000"/>
+              <a:buChar char="•"/>
+            </a:pPr>
+            <a:r>
+              <a:rPr lang="en-US" sz="1400" dirty="0">
+                <a:solidFill>
+                  <a:srgbClr val="1F2937"/>
+                </a:solidFill>
+                <a:latin typeface="Calibri" pitchFamily="34" charset="0"/>
+                <a:ea typeface="Calibri" pitchFamily="34" charset="-122"/>
+                <a:cs typeface="Calibri" pitchFamily="34" charset="-120"/>
+              </a:rPr>
+              <a:t>Решение ОСС (≥ 2/3 голосов) и проект</a:t>
+            </a:r>
+            <a:endParaRPr lang="en-US" sz="1400" dirty="0"/>
+          </a:p>
+          <a:p>
+            <a:pPr marL="342900" indent="-342900">
+              <a:spcAft>
+                <a:spcPts val="600"/>
+              </a:spcAft>
+              <a:buSzPct val="100000"/>
+              <a:buChar char="•"/>
+            </a:pPr>
+            <a:r>
+              <a:rPr lang="en-US" sz="1400" dirty="0">
+                <a:solidFill>
+                  <a:srgbClr val="1F2937"/>
+                </a:solidFill>
+                <a:latin typeface="Calibri" pitchFamily="34" charset="0"/>
+                <a:ea typeface="Calibri" pitchFamily="34" charset="-122"/>
+                <a:cs typeface="Calibri" pitchFamily="34" charset="-120"/>
+              </a:rPr>
+              <a:t>Геодезическая съёмка и согласования</a:t>
+            </a:r>
+            <a:endParaRPr lang="en-US" sz="1400" dirty="0"/>
+          </a:p>
+          <a:p>
+            <a:pPr marL="342900" indent="-342900">
+              <a:spcAft>
+                <a:spcPts val="600"/>
+              </a:spcAft>
+              <a:buSzPct val="100000"/>
+              <a:buChar char="•"/>
+            </a:pPr>
+            <a:r>
+              <a:rPr lang="en-US" sz="1400" dirty="0">
+                <a:solidFill>
+                  <a:srgbClr val="1F2937"/>
+                </a:solidFill>
+                <a:latin typeface="Calibri" pitchFamily="34" charset="0"/>
+                <a:ea typeface="Calibri" pitchFamily="34" charset="-122"/>
+                <a:cs typeface="Calibri" pitchFamily="34" charset="-120"/>
+              </a:rPr>
+              <a:t>Подрядчик, техника, материалы</a:t>
+            </a:r>
+            <a:endParaRPr lang="en-US" sz="1400" dirty="0"/>
+          </a:p>
+          <a:p>
+            <a:pPr marL="342900" indent="-342900">
+              <a:spcAft>
+                <a:spcPts val="600"/>
+              </a:spcAft>
+              <a:buSzPct val="100000"/>
+              <a:buChar char="•"/>
+            </a:pPr>
+            <a:r>
+              <a:rPr lang="en-US" sz="1400" dirty="0">
+                <a:solidFill>
+                  <a:srgbClr val="1F2937"/>
+                </a:solidFill>
+                <a:latin typeface="Calibri" pitchFamily="34" charset="0"/>
+                <a:ea typeface="Calibri" pitchFamily="34" charset="-122"/>
+                <a:cs typeface="Calibri" pitchFamily="34" charset="-120"/>
+              </a:rPr>
+              <a:t>≈ 9 недель (подготовка + работы)</a:t>
+            </a:r>
+            <a:endParaRPr lang="en-US" sz="1400" dirty="0"/>
+          </a:p>
+        </p:txBody>
+      </p:sp>
+      <p:sp>
+        <p:nvSpPr>
+          <p:cNvPr id="87" name="Text 84"/>
+          <p:cNvSpPr txBox="1"/>
+          <p:nvPr/>
+        </p:nvSpPr>
+        <p:spPr>
+          <a:xfrm>
+            <a:off x="6309360" y="3977640"/>
+            <a:ext cx="5303520" cy="365760"/>
+          </a:xfrm>
+          <a:prstGeom prst="rect">
+            <a:avLst/>
+          </a:prstGeom>
+          <a:noFill/>
+          <a:ln/>
+        </p:spPr>
+        <p:txBody>
+          <a:bodyPr wrap="square" lIns="0" tIns="0" rIns="0" bIns="0" rtlCol="0" anchor="ctr"/>
+          <a:lstStyle/>
+          <a:p>
+            <a:pPr indent="0" marL="0">
+              <a:buNone/>
+            </a:pPr>
+            <a:r>
+              <a:rPr lang="en-US" sz="1600" b="1" dirty="0">
+                <a:solidFill>
+                  <a:srgbClr val="1F2937"/>
+                </a:solidFill>
+                <a:latin typeface="Calibri" pitchFamily="34" charset="0"/>
+                <a:ea typeface="Calibri" pitchFamily="34" charset="-122"/>
+                <a:cs typeface="Calibri" pitchFamily="34" charset="-120"/>
+              </a:rPr>
+              <a:t>Что получится</a:t>
+            </a:r>
+            <a:endParaRPr lang="en-US" sz="1600" dirty="0"/>
+          </a:p>
+        </p:txBody>
+      </p:sp>
+      <p:sp>
+        <p:nvSpPr>
+          <p:cNvPr id="88" name="Text 85"/>
+          <p:cNvSpPr txBox="1"/>
+          <p:nvPr/>
+        </p:nvSpPr>
+        <p:spPr>
+          <a:xfrm>
+            <a:off x="6309360" y="4389120"/>
+            <a:ext cx="5303520" cy="1920240"/>
+          </a:xfrm>
+          <a:prstGeom prst="rect">
+            <a:avLst/>
+          </a:prstGeom>
+          <a:noFill/>
+          <a:ln/>
+        </p:spPr>
+        <p:txBody>
+          <a:bodyPr wrap="square" lIns="0" tIns="0" rIns="0" bIns="0" rtlCol="0" anchor="t"/>
+          <a:lstStyle/>
+          <a:p>
+            <a:pPr marL="342900" indent="-342900">
+              <a:spcAft>
+                <a:spcPts val="600"/>
+              </a:spcAft>
+              <a:buSzPct val="100000"/>
+              <a:buChar char="•"/>
+            </a:pPr>
+            <a:r>
+              <a:rPr lang="en-US" sz="1400" dirty="0">
+                <a:solidFill>
+                  <a:srgbClr val="1F2937"/>
+                </a:solidFill>
+                <a:latin typeface="Calibri" pitchFamily="34" charset="0"/>
+                <a:ea typeface="Calibri" pitchFamily="34" charset="-122"/>
+                <a:cs typeface="Calibri" pitchFamily="34" charset="-120"/>
+              </a:rPr>
+              <a:t>+107 новых мест в 4 зонах</a:t>
+            </a:r>
+            <a:endParaRPr lang="en-US" sz="1400" dirty="0"/>
+          </a:p>
+          <a:p>
+            <a:pPr marL="342900" indent="-342900">
+              <a:spcAft>
+                <a:spcPts val="600"/>
+              </a:spcAft>
+              <a:buSzPct val="100000"/>
+              <a:buChar char="•"/>
+            </a:pPr>
+            <a:r>
+              <a:rPr lang="en-US" sz="1400" dirty="0">
+                <a:solidFill>
+                  <a:srgbClr val="1F2937"/>
+                </a:solidFill>
+                <a:latin typeface="Calibri" pitchFamily="34" charset="0"/>
+                <a:ea typeface="Calibri" pitchFamily="34" charset="-122"/>
+                <a:cs typeface="Calibri" pitchFamily="34" charset="-120"/>
+              </a:rPr>
+              <a:t>Шлагбаум на восточном въезде</a:t>
+            </a:r>
+            <a:endParaRPr lang="en-US" sz="1400" dirty="0"/>
+          </a:p>
+          <a:p>
+            <a:pPr marL="342900" indent="-342900">
+              <a:spcAft>
+                <a:spcPts val="600"/>
+              </a:spcAft>
+              <a:buSzPct val="100000"/>
+              <a:buChar char="•"/>
+            </a:pPr>
+            <a:r>
+              <a:rPr lang="en-US" sz="1400" dirty="0">
+                <a:solidFill>
+                  <a:srgbClr val="1F2937"/>
+                </a:solidFill>
+                <a:latin typeface="Calibri" pitchFamily="34" charset="0"/>
+                <a:ea typeface="Calibri" pitchFamily="34" charset="-122"/>
+                <a:cs typeface="Calibri" pitchFamily="34" charset="-120"/>
+              </a:rPr>
+              <a:t>Свободный проезд для скорой и пожарной техники</a:t>
+            </a:r>
+            <a:endParaRPr lang="en-US" sz="1400" dirty="0"/>
+          </a:p>
+          <a:p>
+            <a:pPr marL="342900" indent="-342900">
+              <a:spcAft>
+                <a:spcPts val="600"/>
+              </a:spcAft>
+              <a:buSzPct val="100000"/>
+              <a:buChar char="•"/>
+            </a:pPr>
+            <a:r>
+              <a:rPr lang="en-US" sz="1400" dirty="0">
+                <a:solidFill>
+                  <a:srgbClr val="1F2937"/>
+                </a:solidFill>
+                <a:latin typeface="Calibri" pitchFamily="34" charset="0"/>
+                <a:ea typeface="Calibri" pitchFamily="34" charset="-122"/>
+                <a:cs typeface="Calibri" pitchFamily="34" charset="-120"/>
+              </a:rPr>
+              <a:t>Освещение, водоотвод, разметка</a:t>
+            </a:r>
+            <a:endParaRPr lang="en-US" sz="1400" dirty="0"/>
+          </a:p>
+          <a:p>
+            <a:pPr marL="342900" indent="-342900">
+              <a:spcAft>
+                <a:spcPts val="600"/>
+              </a:spcAft>
+              <a:buSzPct val="100000"/>
+              <a:buChar char="•"/>
+            </a:pPr>
+            <a:r>
+              <a:rPr lang="en-US" sz="1400" dirty="0">
+                <a:solidFill>
+                  <a:srgbClr val="1F2937"/>
+                </a:solidFill>
+                <a:latin typeface="Calibri" pitchFamily="34" charset="0"/>
+                <a:ea typeface="Calibri" pitchFamily="34" charset="-122"/>
+                <a:cs typeface="Calibri" pitchFamily="34" charset="-120"/>
+              </a:rPr>
+              <a:t>Компенсационное озеленение</a:t>
+            </a:r>
+            <a:endParaRPr lang="en-US" sz="1400" dirty="0"/>
+          </a:p>
+        </p:txBody>
+      </p:sp>
+    </p:spTree>
+  </p:cSld>
+  <p:clrMapOvr>
+    <a:masterClrMapping/>
+  </p:clrMapOvr>
+</p:sld>
+</file>
+
+<file path=ppt/slides/slide12.xml><?xml version="1.0" encoding="utf-8"?>
+<p:sld xmlns:a="http://schemas.openxmlformats.org/drawingml/2006/main" xmlns:r="http://schemas.openxmlformats.org/officeDocument/2006/relationships" xmlns:p="http://schemas.openxmlformats.org/presentationml/2006/main">
+  <p:cSld name="Slide 12">
+    <p:bg>
+      <p:bgPr>
+        <a:solidFill>
+          <a:srgbClr val="FFFFFF"/>
+        </a:solidFill>
+      </p:bgPr>
+    </p:bg>
+    <p:spTree>
+      <p:nvGrpSpPr>
+        <p:cNvPr id="1" name=""/>
+        <p:cNvGrpSpPr/>
+        <p:nvPr/>
+      </p:nvGrpSpPr>
+      <p:grpSpPr>
+        <a:xfrm>
+          <a:off x="0" y="0"/>
+          <a:ext cx="0" cy="0"/>
+          <a:chOff x="0" y="0"/>
+          <a:chExt cx="0" cy="0"/>
+        </a:xfrm>
+      </p:grpSpPr>
+      <p:sp>
+        <p:nvSpPr>
+          <p:cNvPr id="2" name="Text 0"/>
+          <p:cNvSpPr txBox="1"/>
+          <p:nvPr/>
+        </p:nvSpPr>
+        <p:spPr>
+          <a:xfrm>
+            <a:off x="548640" y="320040"/>
+            <a:ext cx="10241280" cy="731520"/>
+          </a:xfrm>
+          <a:prstGeom prst="rect">
+            <a:avLst/>
+          </a:prstGeom>
+          <a:noFill/>
+          <a:ln/>
+        </p:spPr>
+        <p:txBody>
+          <a:bodyPr wrap="square" lIns="0" tIns="0" rIns="0" bIns="0" rtlCol="0" anchor="ctr"/>
+          <a:lstStyle/>
+          <a:p>
+            <a:pPr indent="0" marL="0">
+              <a:buNone/>
+            </a:pPr>
+            <a:r>
+              <a:rPr lang="en-US" sz="3400" b="1" dirty="0">
+                <a:solidFill>
+                  <a:srgbClr val="1F2937"/>
+                </a:solidFill>
+                <a:latin typeface="Cambria" pitchFamily="34" charset="0"/>
+                <a:ea typeface="Cambria" pitchFamily="34" charset="-122"/>
+                <a:cs typeface="Cambria" pitchFamily="34" charset="-120"/>
+              </a:rPr>
+              <a:t>Техника и механизмы</a:t>
+            </a:r>
+            <a:endParaRPr lang="en-US" sz="3400" dirty="0"/>
+          </a:p>
+        </p:txBody>
+      </p:sp>
+      <p:sp>
+        <p:nvSpPr>
+          <p:cNvPr id="3" name="Shape 1"/>
+          <p:cNvSpPr/>
+          <p:nvPr/>
+        </p:nvSpPr>
+        <p:spPr>
+          <a:xfrm>
+            <a:off x="11155680" y="365760"/>
+            <a:ext cx="594360" cy="594360"/>
+          </a:xfrm>
+          <a:prstGeom prst="ellipse">
+            <a:avLst/>
+          </a:prstGeom>
+          <a:solidFill>
+            <a:srgbClr val="F2C200"/>
+          </a:solidFill>
+          <a:ln/>
+        </p:spPr>
+      </p:sp>
+      <p:sp>
+        <p:nvSpPr>
+          <p:cNvPr id="4" name="Text 2"/>
+          <p:cNvSpPr txBox="1"/>
+          <p:nvPr/>
+        </p:nvSpPr>
+        <p:spPr>
+          <a:xfrm>
+            <a:off x="11155680" y="365760"/>
+            <a:ext cx="594360" cy="594360"/>
+          </a:xfrm>
+          <a:prstGeom prst="rect">
+            <a:avLst/>
+          </a:prstGeom>
+          <a:noFill/>
+          <a:ln/>
+        </p:spPr>
+        <p:txBody>
+          <a:bodyPr wrap="square" lIns="0" tIns="0" rIns="0" bIns="0" rtlCol="0" anchor="ctr"/>
+          <a:lstStyle/>
+          <a:p>
+            <a:pPr algn="ctr" indent="0" marL="0">
+              <a:buNone/>
+            </a:pPr>
+            <a:r>
+              <a:rPr lang="en-US" sz="1600" b="1" dirty="0">
+                <a:solidFill>
+                  <a:srgbClr val="26282E"/>
+                </a:solidFill>
+                <a:latin typeface="Calibri" pitchFamily="34" charset="0"/>
+                <a:ea typeface="Calibri" pitchFamily="34" charset="-122"/>
+                <a:cs typeface="Calibri" pitchFamily="34" charset="-120"/>
+              </a:rPr>
+              <a:t>12</a:t>
+            </a:r>
+            <a:endParaRPr lang="en-US" sz="1600" dirty="0"/>
+          </a:p>
+        </p:txBody>
+      </p:sp>
       <p:graphicFrame>
         <p:nvGraphicFramePr>
-          <p:cNvPr id="12" name="Table 0"/>
+          <p:cNvPr id="13" name="Table 0"/>
           <p:cNvGraphicFramePr>
             <a:graphicFrameLocks noGrp="1"/>
           </p:cNvGraphicFramePr>
@@ -4595,7 +5753,7 @@
                           <a:ea typeface="Calibri" pitchFamily="34" charset="-122"/>
                           <a:cs typeface="Calibri" pitchFamily="34" charset="-120"/>
                         </a:rPr>
-                        <a:t>16</a:t>
+                        <a:t>64</a:t>
                       </a:r>
                       <a:endParaRPr lang="en-US" sz="1300" dirty="0">
                         <a:latin typeface="Calibri" charset="0"/>
@@ -4725,7 +5883,7 @@
                           <a:ea typeface="Calibri" pitchFamily="34" charset="-122"/>
                           <a:cs typeface="Calibri" pitchFamily="34" charset="-120"/>
                         </a:rPr>
-                        <a:t>51 200</a:t>
+                        <a:t>204 800</a:t>
                       </a:r>
                       <a:endParaRPr lang="en-US" sz="1300" dirty="0">
                         <a:latin typeface="Calibri" charset="0"/>
@@ -4792,7 +5950,7 @@
                           <a:ea typeface="Calibri" pitchFamily="34" charset="-122"/>
                           <a:cs typeface="Calibri" pitchFamily="34" charset="-120"/>
                         </a:rPr>
-                        <a:t>Самосвал КАМАЗ 65115 (вывоз грунта 172 м³)</a:t>
+                        <a:t>Самосвал КАМАЗ 65115 (вывоз грунта 871 м³)</a:t>
                       </a:r>
                       <a:endParaRPr lang="en-US" sz="1300" dirty="0">
                         <a:latin typeface="Calibri" charset="0"/>
@@ -4922,7 +6080,7 @@
                           <a:ea typeface="Calibri" pitchFamily="34" charset="-122"/>
                           <a:cs typeface="Calibri" pitchFamily="34" charset="-120"/>
                         </a:rPr>
-                        <a:t>18</a:t>
+                        <a:t>87</a:t>
                       </a:r>
                       <a:endParaRPr lang="en-US" sz="1300" dirty="0">
                         <a:latin typeface="Calibri" charset="0"/>
@@ -5052,7 +6210,7 @@
                           <a:ea typeface="Calibri" pitchFamily="34" charset="-122"/>
                           <a:cs typeface="Calibri" pitchFamily="34" charset="-120"/>
                         </a:rPr>
-                        <a:t>117 000</a:t>
+                        <a:t>565 500</a:t>
                       </a:r>
                       <a:endParaRPr lang="en-US" sz="1300" dirty="0">
                         <a:latin typeface="Calibri" charset="0"/>
@@ -5249,7 +6407,7 @@
                           <a:ea typeface="Calibri" pitchFamily="34" charset="-122"/>
                           <a:cs typeface="Calibri" pitchFamily="34" charset="-120"/>
                         </a:rPr>
-                        <a:t>12</a:t>
+                        <a:t>40</a:t>
                       </a:r>
                       <a:endParaRPr lang="en-US" sz="1300" dirty="0">
                         <a:latin typeface="Calibri" charset="0"/>
@@ -5379,7 +6537,7 @@
                           <a:ea typeface="Calibri" pitchFamily="34" charset="-122"/>
                           <a:cs typeface="Calibri" pitchFamily="34" charset="-120"/>
                         </a:rPr>
-                        <a:t>33 600</a:t>
+                        <a:t>112 000</a:t>
                       </a:r>
                       <a:endParaRPr lang="en-US" sz="1300" dirty="0">
                         <a:latin typeface="Calibri" charset="0"/>
@@ -5576,7 +6734,7 @@
                           <a:ea typeface="Calibri" pitchFamily="34" charset="-122"/>
                           <a:cs typeface="Calibri" pitchFamily="34" charset="-120"/>
                         </a:rPr>
-                        <a:t>6</a:t>
+                        <a:t>24</a:t>
                       </a:r>
                       <a:endParaRPr lang="en-US" sz="1300" dirty="0">
                         <a:latin typeface="Calibri" charset="0"/>
@@ -5706,7 +6864,7 @@
                           <a:ea typeface="Calibri" pitchFamily="34" charset="-122"/>
                           <a:cs typeface="Calibri" pitchFamily="34" charset="-120"/>
                         </a:rPr>
-                        <a:t>39 000</a:t>
+                        <a:t>156 000</a:t>
                       </a:r>
                       <a:endParaRPr lang="en-US" sz="1300" dirty="0">
                         <a:latin typeface="Calibri" charset="0"/>
@@ -5903,7 +7061,7 @@
                           <a:ea typeface="Calibri" pitchFamily="34" charset="-122"/>
                           <a:cs typeface="Calibri" pitchFamily="34" charset="-120"/>
                         </a:rPr>
-                        <a:t>8</a:t>
+                        <a:t>25</a:t>
                       </a:r>
                       <a:endParaRPr lang="en-US" sz="1300" dirty="0">
                         <a:latin typeface="Calibri" charset="0"/>
@@ -6033,7 +7191,7 @@
                           <a:ea typeface="Calibri" pitchFamily="34" charset="-122"/>
                           <a:cs typeface="Calibri" pitchFamily="34" charset="-120"/>
                         </a:rPr>
-                        <a:t>12 000</a:t>
+                        <a:t>37 500</a:t>
                       </a:r>
                       <a:endParaRPr lang="en-US" sz="1300" dirty="0">
                         <a:latin typeface="Calibri" charset="0"/>
@@ -6174,7 +7332,7 @@
                           <a:ea typeface="Calibri" pitchFamily="34" charset="-122"/>
                           <a:cs typeface="Calibri" pitchFamily="34" charset="-120"/>
                         </a:rPr>
-                        <a:t>252 800</a:t>
+                        <a:t>1 075 800</a:t>
                       </a:r>
                       <a:endParaRPr lang="en-US" sz="1300" dirty="0">
                         <a:latin typeface="Calibri" charset="0"/>
@@ -6282,7 +7440,7 @@
                 <a:ea typeface="Cambria" pitchFamily="34" charset="-122"/>
                 <a:cs typeface="Cambria" pitchFamily="34" charset="-120"/>
               </a:rPr>
-              <a:t>252 800 ₽</a:t>
+              <a:t>1 075 800 ₽</a:t>
             </a:r>
             <a:endParaRPr lang="en-US" sz="3000" dirty="0"/>
           </a:p>
@@ -6374,9 +7532,9 @@
 </p:sld>
 </file>
 
-<file path=ppt/slides/slide12.xml><?xml version="1.0" encoding="utf-8"?>
+<file path=ppt/slides/slide13.xml><?xml version="1.0" encoding="utf-8"?>
 <p:sld xmlns:a="http://schemas.openxmlformats.org/drawingml/2006/main" xmlns:r="http://schemas.openxmlformats.org/officeDocument/2006/relationships" xmlns:p="http://schemas.openxmlformats.org/presentationml/2006/main">
-  <p:cSld name="Slide 12">
+  <p:cSld name="Slide 13">
     <p:bg>
       <p:bgPr>
         <a:solidFill>
@@ -6490,7 +7648,7 @@
                 <a:ea typeface="Calibri" pitchFamily="34" charset="-122"/>
                 <a:cs typeface="Calibri" pitchFamily="34" charset="-120"/>
               </a:rPr>
-              <a:t>12</a:t>
+              <a:t>13</a:t>
             </a:r>
             <a:endParaRPr lang="en-US" sz="1600" dirty="0"/>
           </a:p>
@@ -6498,7 +7656,7 @@
       </p:sp>
       <p:graphicFrame>
         <p:nvGraphicFramePr>
-          <p:cNvPr id="13" name="Table 0"/>
+          <p:cNvPr id="14" name="Table 0"/>
           <p:cNvGraphicFramePr>
             <a:graphicFrameLocks noGrp="1"/>
           </p:cNvGraphicFramePr>
@@ -7015,7 +8173,7 @@
                           <a:ea typeface="Calibri" pitchFamily="34" charset="-122"/>
                           <a:cs typeface="Calibri" pitchFamily="34" charset="-120"/>
                         </a:rPr>
-                        <a:t>20</a:t>
+                        <a:t>35</a:t>
                       </a:r>
                       <a:endParaRPr lang="en-US" sz="1300" dirty="0">
                         <a:latin typeface="Calibri" charset="0"/>
@@ -7145,7 +8303,7 @@
                           <a:ea typeface="Calibri" pitchFamily="34" charset="-122"/>
                           <a:cs typeface="Calibri" pitchFamily="34" charset="-120"/>
                         </a:rPr>
-                        <a:t>90 000</a:t>
+                        <a:t>157 500</a:t>
                       </a:r>
                       <a:endParaRPr lang="en-US" sz="1300" dirty="0">
                         <a:latin typeface="Calibri" charset="0"/>
@@ -7277,7 +8435,7 @@
                           <a:ea typeface="Calibri" pitchFamily="34" charset="-122"/>
                           <a:cs typeface="Calibri" pitchFamily="34" charset="-120"/>
                         </a:rPr>
-                        <a:t>4</a:t>
+                        <a:t>6</a:t>
                       </a:r>
                       <a:endParaRPr lang="en-US" sz="1300" dirty="0">
                         <a:latin typeface="Calibri" charset="0"/>
@@ -7342,7 +8500,7 @@
                           <a:ea typeface="Calibri" pitchFamily="34" charset="-122"/>
                           <a:cs typeface="Calibri" pitchFamily="34" charset="-120"/>
                         </a:rPr>
-                        <a:t>15</a:t>
+                        <a:t>30</a:t>
                       </a:r>
                       <a:endParaRPr lang="en-US" sz="1300" dirty="0">
                         <a:latin typeface="Calibri" charset="0"/>
@@ -7472,7 +8630,7 @@
                           <a:ea typeface="Calibri" pitchFamily="34" charset="-122"/>
                           <a:cs typeface="Calibri" pitchFamily="34" charset="-120"/>
                         </a:rPr>
-                        <a:t>210 000</a:t>
+                        <a:t>630 000</a:t>
                       </a:r>
                       <a:endParaRPr lang="en-US" sz="1300" dirty="0">
                         <a:latin typeface="Calibri" charset="0"/>
@@ -7604,7 +8762,7 @@
                           <a:ea typeface="Calibri" pitchFamily="34" charset="-122"/>
                           <a:cs typeface="Calibri" pitchFamily="34" charset="-120"/>
                         </a:rPr>
-                        <a:t>2</a:t>
+                        <a:t>3</a:t>
                       </a:r>
                       <a:endParaRPr lang="en-US" sz="1300" dirty="0">
                         <a:latin typeface="Calibri" charset="0"/>
@@ -7669,7 +8827,7 @@
                           <a:ea typeface="Calibri" pitchFamily="34" charset="-122"/>
                           <a:cs typeface="Calibri" pitchFamily="34" charset="-120"/>
                         </a:rPr>
-                        <a:t>8</a:t>
+                        <a:t>20</a:t>
                       </a:r>
                       <a:endParaRPr lang="en-US" sz="1300" dirty="0">
                         <a:latin typeface="Calibri" charset="0"/>
@@ -7799,7 +8957,7 @@
                           <a:ea typeface="Calibri" pitchFamily="34" charset="-122"/>
                           <a:cs typeface="Calibri" pitchFamily="34" charset="-120"/>
                         </a:rPr>
-                        <a:t>44 800</a:t>
+                        <a:t>168 000</a:t>
                       </a:r>
                       <a:endParaRPr lang="en-US" sz="1300" dirty="0">
                         <a:latin typeface="Calibri" charset="0"/>
@@ -7996,7 +9154,7 @@
                           <a:ea typeface="Calibri" pitchFamily="34" charset="-122"/>
                           <a:cs typeface="Calibri" pitchFamily="34" charset="-120"/>
                         </a:rPr>
-                        <a:t>4</a:t>
+                        <a:t>8</a:t>
                       </a:r>
                       <a:endParaRPr lang="en-US" sz="1300" dirty="0">
                         <a:latin typeface="Calibri" charset="0"/>
@@ -8126,7 +9284,7 @@
                           <a:ea typeface="Calibri" pitchFamily="34" charset="-122"/>
                           <a:cs typeface="Calibri" pitchFamily="34" charset="-120"/>
                         </a:rPr>
-                        <a:t>16 000</a:t>
+                        <a:t>32 000</a:t>
                       </a:r>
                       <a:endParaRPr lang="en-US" sz="1300" dirty="0">
                         <a:latin typeface="Calibri" charset="0"/>
@@ -8267,7 +9425,7 @@
                           <a:ea typeface="Calibri" pitchFamily="34" charset="-122"/>
                           <a:cs typeface="Calibri" pitchFamily="34" charset="-120"/>
                         </a:rPr>
-                        <a:t>360 800</a:t>
+                        <a:t>987 500</a:t>
                       </a:r>
                       <a:endParaRPr lang="en-US" sz="1300" dirty="0">
                         <a:latin typeface="Calibri" charset="0"/>
@@ -8408,7 +9566,7 @@
                           <a:ea typeface="Calibri" pitchFamily="34" charset="-122"/>
                           <a:cs typeface="Calibri" pitchFamily="34" charset="-120"/>
                         </a:rPr>
-                        <a:t>108 240</a:t>
+                        <a:t>296 250</a:t>
                       </a:r>
                       <a:endParaRPr lang="en-US" sz="1300" dirty="0">
                         <a:latin typeface="Calibri" charset="0"/>
@@ -8552,7 +9710,7 @@
                           <a:ea typeface="Calibri" pitchFamily="34" charset="-122"/>
                           <a:cs typeface="Calibri" pitchFamily="34" charset="-120"/>
                         </a:rPr>
-                        <a:t>469 040</a:t>
+                        <a:t>1 283 750</a:t>
                       </a:r>
                       <a:endParaRPr lang="en-US" sz="1300" dirty="0">
                         <a:latin typeface="Calibri" charset="0"/>
@@ -8726,7 +9884,7 @@
                 <a:ea typeface="Calibri" pitchFamily="34" charset="-122"/>
                 <a:cs typeface="Calibri" pitchFamily="34" charset="-120"/>
               </a:rPr>
-              <a:t>Бригада: 8 человек.</a:t>
+              <a:t>Бригада: 11 человек.</a:t>
             </a:r>
             <a:endParaRPr lang="en-US" sz="1400" dirty="0"/>
           </a:p>
@@ -8779,9 +9937,9 @@
 </p:sld>
 </file>
 
-<file path=ppt/slides/slide13.xml><?xml version="1.0" encoding="utf-8"?>
+<file path=ppt/slides/slide14.xml><?xml version="1.0" encoding="utf-8"?>
 <p:sld xmlns:a="http://schemas.openxmlformats.org/drawingml/2006/main" xmlns:r="http://schemas.openxmlformats.org/officeDocument/2006/relationships" xmlns:p="http://schemas.openxmlformats.org/presentationml/2006/main">
-  <p:cSld name="Slide 13">
+  <p:cSld name="Slide 14">
     <p:bg>
       <p:bgPr>
         <a:solidFill>
@@ -8895,7 +10053,7 @@
                 <a:ea typeface="Calibri" pitchFamily="34" charset="-122"/>
                 <a:cs typeface="Calibri" pitchFamily="34" charset="-120"/>
               </a:rPr>
-              <a:t>13</a:t>
+              <a:t>14</a:t>
             </a:r>
             <a:endParaRPr lang="en-US" sz="1600" dirty="0"/>
           </a:p>
@@ -8903,7 +10061,7 @@
       </p:sp>
       <p:graphicFrame>
         <p:nvGraphicFramePr>
-          <p:cNvPr id="14" name="Table 0"/>
+          <p:cNvPr id="15" name="Table 0"/>
           <p:cNvGraphicFramePr>
             <a:graphicFrameLocks noGrp="1"/>
           </p:cNvGraphicFramePr>
@@ -8927,7 +10085,7 @@
                 <a:gridCol w="5303520"/>
                 <a:gridCol w="1463040"/>
               </a:tblGrid>
-              <a:tr h="411480">
+              <a:tr h="365760">
                 <a:tc>
                   <a:txBody>
                     <a:bodyPr/>
@@ -9065,7 +10223,7 @@
                   </a:tcPr>
                 </a:tc>
               </a:tr>
-              <a:tr h="411480">
+              <a:tr h="365760">
                 <a:tc>
                   <a:txBody>
                     <a:bodyPr/>
@@ -9083,7 +10241,7 @@
                           <a:ea typeface="Calibri" pitchFamily="34" charset="-122"/>
                           <a:cs typeface="Calibri" pitchFamily="34" charset="-120"/>
                         </a:rPr>
-                        <a:t>Демонтаж газона 265 м², выемка грунта 172 м³</a:t>
+                        <a:t>Демонтаж газона 1340 м², выемка грунта 871 м³</a:t>
                       </a:r>
                       <a:endParaRPr lang="en-US" sz="1200" dirty="0">
                         <a:latin typeface="Calibri" charset="0"/>
@@ -9148,7 +10306,7 @@
                           <a:ea typeface="Calibri" pitchFamily="34" charset="-122"/>
                           <a:cs typeface="Calibri" pitchFamily="34" charset="-120"/>
                         </a:rPr>
-                        <a:t>127 700</a:t>
+                        <a:t>646 550</a:t>
                       </a:r>
                       <a:endParaRPr lang="en-US" sz="1200" dirty="0">
                         <a:latin typeface="Calibri" charset="0"/>
@@ -9197,7 +10355,7 @@
                   </a:tcPr>
                 </a:tc>
               </a:tr>
-              <a:tr h="411480">
+              <a:tr h="365760">
                 <a:tc>
                   <a:txBody>
                     <a:bodyPr/>
@@ -9215,7 +10373,7 @@
                           <a:ea typeface="Calibri" pitchFamily="34" charset="-122"/>
                           <a:cs typeface="Calibri" pitchFamily="34" charset="-120"/>
                         </a:rPr>
-                        <a:t>Геотекстиль 265 м², песок 80 м³, щебень 66 м³</a:t>
+                        <a:t>Геотекстиль 1340 м², песок 402 м³, щебень 335 м³</a:t>
                       </a:r>
                       <a:endParaRPr lang="en-US" sz="1200" dirty="0">
                         <a:latin typeface="Calibri" charset="0"/>
@@ -9280,7 +10438,7 @@
                           <a:ea typeface="Calibri" pitchFamily="34" charset="-122"/>
                           <a:cs typeface="Calibri" pitchFamily="34" charset="-120"/>
                         </a:rPr>
-                        <a:t>307 450</a:t>
+                        <a:t>1 554 400</a:t>
                       </a:r>
                       <a:endParaRPr lang="en-US" sz="1200" dirty="0">
                         <a:latin typeface="Calibri" charset="0"/>
@@ -9329,7 +10487,7 @@
                   </a:tcPr>
                 </a:tc>
               </a:tr>
-              <a:tr h="411480">
+              <a:tr h="365760">
                 <a:tc>
                   <a:txBody>
                     <a:bodyPr/>
@@ -9347,7 +10505,7 @@
                           <a:ea typeface="Calibri" pitchFamily="34" charset="-122"/>
                           <a:cs typeface="Calibri" pitchFamily="34" charset="-120"/>
                         </a:rPr>
-                        <a:t>Асфальтобетон в 2 слоя, 265 м²</a:t>
+                        <a:t>Асфальтобетон в 2 слоя, 1340 м²</a:t>
                       </a:r>
                       <a:endParaRPr lang="en-US" sz="1200" dirty="0">
                         <a:latin typeface="Calibri" charset="0"/>
@@ -9412,7 +10570,7 @@
                           <a:ea typeface="Calibri" pitchFamily="34" charset="-122"/>
                           <a:cs typeface="Calibri" pitchFamily="34" charset="-120"/>
                         </a:rPr>
-                        <a:t>331 250</a:t>
+                        <a:t>1 675 000</a:t>
                       </a:r>
                       <a:endParaRPr lang="en-US" sz="1200" dirty="0">
                         <a:latin typeface="Calibri" charset="0"/>
@@ -9461,7 +10619,7 @@
                   </a:tcPr>
                 </a:tc>
               </a:tr>
-              <a:tr h="411480">
+              <a:tr h="365760">
                 <a:tc>
                   <a:txBody>
                     <a:bodyPr/>
@@ -9479,7 +10637,7 @@
                           <a:ea typeface="Calibri" pitchFamily="34" charset="-122"/>
                           <a:cs typeface="Calibri" pitchFamily="34" charset="-120"/>
                         </a:rPr>
-                        <a:t>Бордюр БР 100.30.15 с установкой, 64 м</a:t>
+                        <a:t>Бордюр БР 100.30.15 с установкой, 420 м</a:t>
                       </a:r>
                       <a:endParaRPr lang="en-US" sz="1200" dirty="0">
                         <a:latin typeface="Calibri" charset="0"/>
@@ -9544,7 +10702,7 @@
                           <a:ea typeface="Calibri" pitchFamily="34" charset="-122"/>
                           <a:cs typeface="Calibri" pitchFamily="34" charset="-120"/>
                         </a:rPr>
-                        <a:t>83 200</a:t>
+                        <a:t>546 000</a:t>
                       </a:r>
                       <a:endParaRPr lang="en-US" sz="1200" dirty="0">
                         <a:latin typeface="Calibri" charset="0"/>
@@ -9593,7 +10751,7 @@
                   </a:tcPr>
                 </a:tc>
               </a:tr>
-              <a:tr h="411480">
+              <a:tr h="365760">
                 <a:tc>
                   <a:txBody>
                     <a:bodyPr/>
@@ -9611,7 +10769,7 @@
                           <a:ea typeface="Calibri" pitchFamily="34" charset="-122"/>
                           <a:cs typeface="Calibri" pitchFamily="34" charset="-120"/>
                         </a:rPr>
-                        <a:t>Водоотвод: лотки 30 м + дождеприёмник</a:t>
+                        <a:t>Водоотвод: лотки 90 м + 3 дождеприёмника</a:t>
                       </a:r>
                       <a:endParaRPr lang="en-US" sz="1200" dirty="0">
                         <a:latin typeface="Calibri" charset="0"/>
@@ -9676,7 +10834,7 @@
                           <a:ea typeface="Calibri" pitchFamily="34" charset="-122"/>
                           <a:cs typeface="Calibri" pitchFamily="34" charset="-120"/>
                         </a:rPr>
-                        <a:t>105 000</a:t>
+                        <a:t>290 000</a:t>
                       </a:r>
                       <a:endParaRPr lang="en-US" sz="1200" dirty="0">
                         <a:latin typeface="Calibri" charset="0"/>
@@ -9725,7 +10883,7 @@
                   </a:tcPr>
                 </a:tc>
               </a:tr>
-              <a:tr h="411480">
+              <a:tr h="365760">
                 <a:tc>
                   <a:txBody>
                     <a:bodyPr/>
@@ -9743,7 +10901,7 @@
                           <a:ea typeface="Calibri" pitchFamily="34" charset="-122"/>
                           <a:cs typeface="Calibri" pitchFamily="34" charset="-120"/>
                         </a:rPr>
-                        <a:t>Освещение: 2 опоры LED с кабелем</a:t>
+                        <a:t>Освещение: 6 опор LED с кабелем</a:t>
                       </a:r>
                       <a:endParaRPr lang="en-US" sz="1200" dirty="0">
                         <a:latin typeface="Calibri" charset="0"/>
@@ -9808,7 +10966,7 @@
                           <a:ea typeface="Calibri" pitchFamily="34" charset="-122"/>
                           <a:cs typeface="Calibri" pitchFamily="34" charset="-120"/>
                         </a:rPr>
-                        <a:t>110 000</a:t>
+                        <a:t>330 000</a:t>
                       </a:r>
                       <a:endParaRPr lang="en-US" sz="1200" dirty="0">
                         <a:latin typeface="Calibri" charset="0"/>
@@ -9857,7 +11015,7 @@
                   </a:tcPr>
                 </a:tc>
               </a:tr>
-              <a:tr h="411480">
+              <a:tr h="365760">
                 <a:tc>
                   <a:txBody>
                     <a:bodyPr/>
@@ -9875,7 +11033,7 @@
                           <a:ea typeface="Calibri" pitchFamily="34" charset="-122"/>
                           <a:cs typeface="Calibri" pitchFamily="34" charset="-120"/>
                         </a:rPr>
-                        <a:t>Разметка (термопластик) + 2 знака МГН</a:t>
+                        <a:t>Разметка 107 мест (термопластик) + знаки МГН</a:t>
                       </a:r>
                       <a:endParaRPr lang="en-US" sz="1200" dirty="0">
                         <a:latin typeface="Calibri" charset="0"/>
@@ -9940,7 +11098,7 @@
                           <a:ea typeface="Calibri" pitchFamily="34" charset="-122"/>
                           <a:cs typeface="Calibri" pitchFamily="34" charset="-120"/>
                         </a:rPr>
-                        <a:t>42 000</a:t>
+                        <a:t>161 800</a:t>
                       </a:r>
                       <a:endParaRPr lang="en-US" sz="1200" dirty="0">
                         <a:latin typeface="Calibri" charset="0"/>
@@ -9989,7 +11147,139 @@
                   </a:tcPr>
                 </a:tc>
               </a:tr>
-              <a:tr h="411480">
+              <a:tr h="365760">
+                <a:tc>
+                  <a:txBody>
+                    <a:bodyPr/>
+                    <a:lstStyle/>
+                    <a:p>
+                      <a:pPr indent="0" marL="0">
+                        <a:buNone/>
+                      </a:pPr>
+                      <a:r>
+                        <a:rPr lang="en-US" sz="1200" dirty="0">
+                          <a:solidFill>
+                            <a:srgbClr val="1F2937"/>
+                          </a:solidFill>
+                          <a:latin typeface="Calibri" pitchFamily="34" charset="0"/>
+                          <a:ea typeface="Calibri" pitchFamily="34" charset="-122"/>
+                          <a:cs typeface="Calibri" pitchFamily="34" charset="-120"/>
+                        </a:rPr>
+                        <a:t>Шлагбаум автомат. с GSM на восточном въезде + монтаж</a:t>
+                      </a:r>
+                      <a:endParaRPr lang="en-US" sz="1200" dirty="0">
+                        <a:latin typeface="Calibri" charset="0"/>
+                        <a:ea typeface="Calibri" charset="0"/>
+                        <a:cs typeface="Calibri" charset="0"/>
+                      </a:endParaRPr>
+                    </a:p>
+                  </a:txBody>
+                  <a:tcPr marL="91440" marR="91440" marT="45720" marB="45720" anchor="ctr">
+                    <a:lnL w="12700" cap="flat" cmpd="sng" algn="ctr">
+                      <a:solidFill>
+                        <a:srgbClr val="E5E7EB"/>
+                      </a:solidFill>
+                      <a:prstDash val="solid"/>
+                      <a:round/>
+                      <a:headEnd type="none" w="med" len="med"/>
+                      <a:tailEnd type="none" w="med" len="med"/>
+                    </a:lnL>
+                    <a:lnR w="12700" cap="flat" cmpd="sng" algn="ctr">
+                      <a:solidFill>
+                        <a:srgbClr val="E5E7EB"/>
+                      </a:solidFill>
+                      <a:prstDash val="solid"/>
+                      <a:round/>
+                      <a:headEnd type="none" w="med" len="med"/>
+                      <a:tailEnd type="none" w="med" len="med"/>
+                    </a:lnR>
+                    <a:lnT w="12700" cap="flat" cmpd="sng" algn="ctr">
+                      <a:solidFill>
+                        <a:srgbClr val="E5E7EB"/>
+                      </a:solidFill>
+                      <a:prstDash val="solid"/>
+                      <a:round/>
+                      <a:headEnd type="none" w="med" len="med"/>
+                      <a:tailEnd type="none" w="med" len="med"/>
+                    </a:lnT>
+                    <a:lnB w="12700" cap="flat" cmpd="sng" algn="ctr">
+                      <a:solidFill>
+                        <a:srgbClr val="E5E7EB"/>
+                      </a:solidFill>
+                      <a:prstDash val="solid"/>
+                      <a:round/>
+                      <a:headEnd type="none" w="med" len="med"/>
+                      <a:tailEnd type="none" w="med" len="med"/>
+                    </a:lnB>
+                  </a:tcPr>
+                </a:tc>
+                <a:tc>
+                  <a:txBody>
+                    <a:bodyPr/>
+                    <a:lstStyle/>
+                    <a:p>
+                      <a:pPr indent="0" marL="0">
+                        <a:buNone/>
+                      </a:pPr>
+                      <a:r>
+                        <a:rPr lang="en-US" sz="1200" dirty="0">
+                          <a:solidFill>
+                            <a:srgbClr val="1F2937"/>
+                          </a:solidFill>
+                          <a:latin typeface="Calibri" pitchFamily="34" charset="0"/>
+                          <a:ea typeface="Calibri" pitchFamily="34" charset="-122"/>
+                          <a:cs typeface="Calibri" pitchFamily="34" charset="-120"/>
+                        </a:rPr>
+                        <a:t>245 000</a:t>
+                      </a:r>
+                      <a:endParaRPr lang="en-US" sz="1200" dirty="0">
+                        <a:latin typeface="Calibri" charset="0"/>
+                        <a:ea typeface="Calibri" charset="0"/>
+                        <a:cs typeface="Calibri" charset="0"/>
+                      </a:endParaRPr>
+                    </a:p>
+                  </a:txBody>
+                  <a:tcPr marL="91440" marR="91440" marT="45720" marB="45720" anchor="ctr">
+                    <a:lnL w="12700" cap="flat" cmpd="sng" algn="ctr">
+                      <a:solidFill>
+                        <a:srgbClr val="E5E7EB"/>
+                      </a:solidFill>
+                      <a:prstDash val="solid"/>
+                      <a:round/>
+                      <a:headEnd type="none" w="med" len="med"/>
+                      <a:tailEnd type="none" w="med" len="med"/>
+                    </a:lnL>
+                    <a:lnR w="12700" cap="flat" cmpd="sng" algn="ctr">
+                      <a:solidFill>
+                        <a:srgbClr val="E5E7EB"/>
+                      </a:solidFill>
+                      <a:prstDash val="solid"/>
+                      <a:round/>
+                      <a:headEnd type="none" w="med" len="med"/>
+                      <a:tailEnd type="none" w="med" len="med"/>
+                    </a:lnR>
+                    <a:lnT w="12700" cap="flat" cmpd="sng" algn="ctr">
+                      <a:solidFill>
+                        <a:srgbClr val="E5E7EB"/>
+                      </a:solidFill>
+                      <a:prstDash val="solid"/>
+                      <a:round/>
+                      <a:headEnd type="none" w="med" len="med"/>
+                      <a:tailEnd type="none" w="med" len="med"/>
+                    </a:lnT>
+                    <a:lnB w="12700" cap="flat" cmpd="sng" algn="ctr">
+                      <a:solidFill>
+                        <a:srgbClr val="E5E7EB"/>
+                      </a:solidFill>
+                      <a:prstDash val="solid"/>
+                      <a:round/>
+                      <a:headEnd type="none" w="med" len="med"/>
+                      <a:tailEnd type="none" w="med" len="med"/>
+                    </a:lnB>
+                  </a:tcPr>
+                </a:tc>
+              </a:tr>
+              <a:tr h="365760">
                 <a:tc>
                   <a:txBody>
                     <a:bodyPr/>
@@ -10121,7 +11411,7 @@
                   </a:tcPr>
                 </a:tc>
               </a:tr>
-              <a:tr h="411480">
+              <a:tr h="365760">
                 <a:tc>
                   <a:txBody>
                     <a:bodyPr/>
@@ -10329,7 +11619,7 @@
                 <a:ea typeface="Calibri" pitchFamily="34" charset="-122"/>
                 <a:cs typeface="Calibri" pitchFamily="34" charset="-120"/>
               </a:rPr>
-              <a:t>1 236 600 ₽</a:t>
+              <a:t>5 578 750 ₽</a:t>
             </a:r>
             <a:endParaRPr lang="en-US" sz="1400" dirty="0"/>
           </a:p>
@@ -10407,7 +11697,7 @@
                 <a:ea typeface="Calibri" pitchFamily="34" charset="-122"/>
                 <a:cs typeface="Calibri" pitchFamily="34" charset="-120"/>
               </a:rPr>
-              <a:t>252 800 ₽</a:t>
+              <a:t>1 075 800 ₽</a:t>
             </a:r>
             <a:endParaRPr lang="en-US" sz="1400" dirty="0"/>
           </a:p>
@@ -10485,7 +11775,7 @@
                 <a:ea typeface="Calibri" pitchFamily="34" charset="-122"/>
                 <a:cs typeface="Calibri" pitchFamily="34" charset="-120"/>
               </a:rPr>
-              <a:t>469 040 ₽</a:t>
+              <a:t>1 283 750 ₽</a:t>
             </a:r>
             <a:endParaRPr lang="en-US" sz="1400" dirty="0"/>
           </a:p>
@@ -10563,7 +11853,7 @@
                 <a:ea typeface="Calibri" pitchFamily="34" charset="-122"/>
                 <a:cs typeface="Calibri" pitchFamily="34" charset="-120"/>
               </a:rPr>
-              <a:t>97 922 ₽</a:t>
+              <a:t>396 915 ₽</a:t>
             </a:r>
             <a:endParaRPr lang="en-US" sz="1400" dirty="0"/>
           </a:p>
@@ -10663,7 +11953,7 @@
                 <a:ea typeface="Cambria" pitchFamily="34" charset="-122"/>
                 <a:cs typeface="Cambria" pitchFamily="34" charset="-120"/>
               </a:rPr>
-              <a:t>2 056 362 ₽</a:t>
+              <a:t>8 335 215 ₽</a:t>
             </a:r>
             <a:endParaRPr lang="en-US" sz="3000" dirty="0"/>
           </a:p>
@@ -10702,7 +11992,7 @@
                 <a:ea typeface="Calibri" pitchFamily="34" charset="-122"/>
                 <a:cs typeface="Calibri" pitchFamily="34" charset="-120"/>
               </a:rPr>
-              <a:t>≈ 5 141 ₽</a:t>
+              <a:t>≈ 20 838 ₽</a:t>
             </a:r>
             <a:pPr indent="0" marL="0">
               <a:buNone/>
@@ -10730,7 +12020,7 @@
                 <a:ea typeface="Calibri" pitchFamily="34" charset="-122"/>
                 <a:cs typeface="Calibri" pitchFamily="34" charset="-120"/>
               </a:rPr>
-              <a:t>≈ 97 922 ₽</a:t>
+              <a:t>≈ 77 899 ₽</a:t>
             </a:r>
             <a:pPr indent="0" marL="0">
               <a:buNone/>
@@ -10797,9 +12087,9 @@
 </p:sld>
 </file>
 
-<file path=ppt/slides/slide14.xml><?xml version="1.0" encoding="utf-8"?>
+<file path=ppt/slides/slide15.xml><?xml version="1.0" encoding="utf-8"?>
 <p:sld xmlns:a="http://schemas.openxmlformats.org/drawingml/2006/main" xmlns:r="http://schemas.openxmlformats.org/officeDocument/2006/relationships" xmlns:p="http://schemas.openxmlformats.org/presentationml/2006/main">
-  <p:cSld name="Slide 14">
+  <p:cSld name="Slide 15">
     <p:bg>
       <p:bgPr>
         <a:solidFill>
@@ -10913,7 +12203,7 @@
                 <a:ea typeface="Calibri" pitchFamily="34" charset="-122"/>
                 <a:cs typeface="Calibri" pitchFamily="34" charset="-120"/>
               </a:rPr>
-              <a:t>14</a:t>
+              <a:t>15</a:t>
             </a:r>
             <a:endParaRPr lang="en-US" sz="1600" dirty="0"/>
           </a:p>
@@ -10928,7 +12218,7 @@
         <p:spPr>
           <a:xfrm>
             <a:off x="4754880" y="1280160"/>
-            <a:ext cx="979714" cy="365760"/>
+            <a:ext cx="762000" cy="365760"/>
           </a:xfrm>
           <a:prstGeom prst="rect">
             <a:avLst/>
@@ -10989,8 +12279,8 @@
         </p:nvSpPr>
         <p:spPr>
           <a:xfrm>
-            <a:off x="5734594" y="1280160"/>
-            <a:ext cx="979714" cy="365760"/>
+            <a:off x="5516880" y="1280160"/>
+            <a:ext cx="762000" cy="365760"/>
           </a:xfrm>
           <a:prstGeom prst="rect">
             <a:avLst/>
@@ -11028,7 +12318,7 @@
         </p:nvSpPr>
         <p:spPr>
           <a:xfrm>
-            <a:off x="5734594" y="1691640"/>
+            <a:off x="5516880" y="1691640"/>
             <a:ext cx="0" cy="3840480"/>
           </a:xfrm>
           <a:prstGeom prst="line">
@@ -11051,8 +12341,8 @@
         </p:nvSpPr>
         <p:spPr>
           <a:xfrm>
-            <a:off x="6714309" y="1280160"/>
-            <a:ext cx="979714" cy="365760"/>
+            <a:off x="6278880" y="1280160"/>
+            <a:ext cx="762000" cy="365760"/>
           </a:xfrm>
           <a:prstGeom prst="rect">
             <a:avLst/>
@@ -11090,7 +12380,7 @@
         </p:nvSpPr>
         <p:spPr>
           <a:xfrm>
-            <a:off x="6714309" y="1691640"/>
+            <a:off x="6278880" y="1691640"/>
             <a:ext cx="0" cy="3840480"/>
           </a:xfrm>
           <a:prstGeom prst="line">
@@ -11113,8 +12403,8 @@
         </p:nvSpPr>
         <p:spPr>
           <a:xfrm>
-            <a:off x="7694023" y="1280160"/>
-            <a:ext cx="979714" cy="365760"/>
+            <a:off x="7040880" y="1280160"/>
+            <a:ext cx="762000" cy="365760"/>
           </a:xfrm>
           <a:prstGeom prst="rect">
             <a:avLst/>
@@ -11152,7 +12442,7 @@
         </p:nvSpPr>
         <p:spPr>
           <a:xfrm>
-            <a:off x="7694023" y="1691640"/>
+            <a:off x="7040880" y="1691640"/>
             <a:ext cx="0" cy="3840480"/>
           </a:xfrm>
           <a:prstGeom prst="line">
@@ -11175,8 +12465,8 @@
         </p:nvSpPr>
         <p:spPr>
           <a:xfrm>
-            <a:off x="8673737" y="1280160"/>
-            <a:ext cx="979714" cy="365760"/>
+            <a:off x="7802880" y="1280160"/>
+            <a:ext cx="762000" cy="365760"/>
           </a:xfrm>
           <a:prstGeom prst="rect">
             <a:avLst/>
@@ -11214,7 +12504,7 @@
         </p:nvSpPr>
         <p:spPr>
           <a:xfrm>
-            <a:off x="8673737" y="1691640"/>
+            <a:off x="7802880" y="1691640"/>
             <a:ext cx="0" cy="3840480"/>
           </a:xfrm>
           <a:prstGeom prst="line">
@@ -11237,8 +12527,8 @@
         </p:nvSpPr>
         <p:spPr>
           <a:xfrm>
-            <a:off x="9653451" y="1280160"/>
-            <a:ext cx="979714" cy="365760"/>
+            <a:off x="8564880" y="1280160"/>
+            <a:ext cx="762000" cy="365760"/>
           </a:xfrm>
           <a:prstGeom prst="rect">
             <a:avLst/>
@@ -11276,7 +12566,7 @@
         </p:nvSpPr>
         <p:spPr>
           <a:xfrm>
-            <a:off x="9653451" y="1691640"/>
+            <a:off x="8564880" y="1691640"/>
             <a:ext cx="0" cy="3840480"/>
           </a:xfrm>
           <a:prstGeom prst="line">
@@ -11299,8 +12589,8 @@
         </p:nvSpPr>
         <p:spPr>
           <a:xfrm>
-            <a:off x="10633166" y="1280160"/>
-            <a:ext cx="979714" cy="365760"/>
+            <a:off x="9326880" y="1280160"/>
+            <a:ext cx="762000" cy="365760"/>
           </a:xfrm>
           <a:prstGeom prst="rect">
             <a:avLst/>
@@ -11338,7 +12628,7 @@
         </p:nvSpPr>
         <p:spPr>
           <a:xfrm>
-            <a:off x="10633166" y="1691640"/>
+            <a:off x="9326880" y="1691640"/>
             <a:ext cx="0" cy="3840480"/>
           </a:xfrm>
           <a:prstGeom prst="line">
@@ -11356,6 +12646,130 @@
       <p:sp>
         <p:nvSpPr>
           <p:cNvPr id="19" name="Text 17"/>
+          <p:cNvSpPr txBox="1"/>
+          <p:nvPr/>
+        </p:nvSpPr>
+        <p:spPr>
+          <a:xfrm>
+            <a:off x="10088880" y="1280160"/>
+            <a:ext cx="762000" cy="365760"/>
+          </a:xfrm>
+          <a:prstGeom prst="rect">
+            <a:avLst/>
+          </a:prstGeom>
+          <a:noFill/>
+          <a:ln/>
+        </p:spPr>
+        <p:txBody>
+          <a:bodyPr wrap="square" lIns="0" tIns="0" rIns="0" bIns="0" rtlCol="0" anchor="ctr"/>
+          <a:lstStyle/>
+          <a:p>
+            <a:pPr algn="ctr" indent="0" marL="0">
+              <a:buNone/>
+            </a:pPr>
+            <a:r>
+              <a:rPr lang="en-US" sz="1100" dirty="0">
+                <a:solidFill>
+                  <a:srgbClr val="6B7280"/>
+                </a:solidFill>
+                <a:latin typeface="Calibri" pitchFamily="34" charset="0"/>
+                <a:ea typeface="Calibri" pitchFamily="34" charset="-122"/>
+                <a:cs typeface="Calibri" pitchFamily="34" charset="-120"/>
+              </a:rPr>
+              <a:t>Нед. 8</a:t>
+            </a:r>
+            <a:endParaRPr lang="en-US" sz="1100" dirty="0"/>
+          </a:p>
+        </p:txBody>
+      </p:sp>
+      <p:sp>
+        <p:nvSpPr>
+          <p:cNvPr id="20" name="Shape 18"/>
+          <p:cNvSpPr/>
+          <p:nvPr/>
+        </p:nvSpPr>
+        <p:spPr>
+          <a:xfrm>
+            <a:off x="10088880" y="1691640"/>
+            <a:ext cx="0" cy="3840480"/>
+          </a:xfrm>
+          <a:prstGeom prst="line">
+            <a:avLst/>
+          </a:prstGeom>
+          <a:noFill/>
+          <a:ln w="12700">
+            <a:solidFill>
+              <a:srgbClr val="E5E7EB"/>
+            </a:solidFill>
+            <a:prstDash val="solid"/>
+          </a:ln>
+        </p:spPr>
+      </p:sp>
+      <p:sp>
+        <p:nvSpPr>
+          <p:cNvPr id="21" name="Text 19"/>
+          <p:cNvSpPr txBox="1"/>
+          <p:nvPr/>
+        </p:nvSpPr>
+        <p:spPr>
+          <a:xfrm>
+            <a:off x="10850880" y="1280160"/>
+            <a:ext cx="762000" cy="365760"/>
+          </a:xfrm>
+          <a:prstGeom prst="rect">
+            <a:avLst/>
+          </a:prstGeom>
+          <a:noFill/>
+          <a:ln/>
+        </p:spPr>
+        <p:txBody>
+          <a:bodyPr wrap="square" lIns="0" tIns="0" rIns="0" bIns="0" rtlCol="0" anchor="ctr"/>
+          <a:lstStyle/>
+          <a:p>
+            <a:pPr algn="ctr" indent="0" marL="0">
+              <a:buNone/>
+            </a:pPr>
+            <a:r>
+              <a:rPr lang="en-US" sz="1100" dirty="0">
+                <a:solidFill>
+                  <a:srgbClr val="6B7280"/>
+                </a:solidFill>
+                <a:latin typeface="Calibri" pitchFamily="34" charset="0"/>
+                <a:ea typeface="Calibri" pitchFamily="34" charset="-122"/>
+                <a:cs typeface="Calibri" pitchFamily="34" charset="-120"/>
+              </a:rPr>
+              <a:t>Нед. 9</a:t>
+            </a:r>
+            <a:endParaRPr lang="en-US" sz="1100" dirty="0"/>
+          </a:p>
+        </p:txBody>
+      </p:sp>
+      <p:sp>
+        <p:nvSpPr>
+          <p:cNvPr id="22" name="Shape 20"/>
+          <p:cNvSpPr/>
+          <p:nvPr/>
+        </p:nvSpPr>
+        <p:spPr>
+          <a:xfrm>
+            <a:off x="10850880" y="1691640"/>
+            <a:ext cx="0" cy="3840480"/>
+          </a:xfrm>
+          <a:prstGeom prst="line">
+            <a:avLst/>
+          </a:prstGeom>
+          <a:noFill/>
+          <a:ln w="12700">
+            <a:solidFill>
+              <a:srgbClr val="E5E7EB"/>
+            </a:solidFill>
+            <a:prstDash val="solid"/>
+          </a:ln>
+        </p:spPr>
+      </p:sp>
+      <p:sp>
+        <p:nvSpPr>
+          <p:cNvPr id="23" name="Text 21"/>
           <p:cNvSpPr txBox="1"/>
           <p:nvPr/>
         </p:nvSpPr>
@@ -11394,14 +12808,14 @@
       </p:sp>
       <p:sp>
         <p:nvSpPr>
-          <p:cNvPr id="20" name="Shape 18"/>
+          <p:cNvPr id="24" name="Shape 22"/>
           <p:cNvSpPr/>
           <p:nvPr/>
         </p:nvSpPr>
         <p:spPr>
           <a:xfrm>
             <a:off x="4754880" y="1856232"/>
-            <a:ext cx="3918857" cy="329184"/>
+            <a:ext cx="3048000" cy="329184"/>
           </a:xfrm>
           <a:prstGeom prst="roundRect">
             <a:avLst>
@@ -11416,7 +12830,7 @@
       </p:sp>
       <p:sp>
         <p:nvSpPr>
-          <p:cNvPr id="21" name="Text 19"/>
+          <p:cNvPr id="25" name="Text 23"/>
           <p:cNvSpPr txBox="1"/>
           <p:nvPr/>
         </p:nvSpPr>
@@ -11455,14 +12869,14 @@
       </p:sp>
       <p:sp>
         <p:nvSpPr>
-          <p:cNvPr id="22" name="Shape 20"/>
+          <p:cNvPr id="26" name="Shape 24"/>
           <p:cNvSpPr/>
           <p:nvPr/>
         </p:nvSpPr>
         <p:spPr>
           <a:xfrm>
-            <a:off x="8673737" y="2441448"/>
-            <a:ext cx="783771" cy="329184"/>
+            <a:off x="7802880" y="2441448"/>
+            <a:ext cx="1219200" cy="329184"/>
           </a:xfrm>
           <a:prstGeom prst="roundRect">
             <a:avLst>
@@ -11477,7 +12891,7 @@
       </p:sp>
       <p:sp>
         <p:nvSpPr>
-          <p:cNvPr id="23" name="Text 21"/>
+          <p:cNvPr id="27" name="Text 25"/>
           <p:cNvSpPr txBox="1"/>
           <p:nvPr/>
         </p:nvSpPr>
@@ -11516,14 +12930,14 @@
       </p:sp>
       <p:sp>
         <p:nvSpPr>
-          <p:cNvPr id="24" name="Shape 22"/>
+          <p:cNvPr id="28" name="Shape 26"/>
           <p:cNvSpPr/>
           <p:nvPr/>
         </p:nvSpPr>
         <p:spPr>
           <a:xfrm>
-            <a:off x="9457509" y="3026664"/>
-            <a:ext cx="979714" cy="329184"/>
+            <a:off x="8869680" y="3026664"/>
+            <a:ext cx="1371600" cy="329184"/>
           </a:xfrm>
           <a:prstGeom prst="roundRect">
             <a:avLst>
@@ -11538,7 +12952,7 @@
       </p:sp>
       <p:sp>
         <p:nvSpPr>
-          <p:cNvPr id="25" name="Text 23"/>
+          <p:cNvPr id="29" name="Text 27"/>
           <p:cNvSpPr txBox="1"/>
           <p:nvPr/>
         </p:nvSpPr>
@@ -11577,14 +12991,14 @@
       </p:sp>
       <p:sp>
         <p:nvSpPr>
-          <p:cNvPr id="26" name="Shape 24"/>
+          <p:cNvPr id="30" name="Shape 28"/>
           <p:cNvSpPr/>
           <p:nvPr/>
         </p:nvSpPr>
         <p:spPr>
           <a:xfrm>
-            <a:off x="10437223" y="3611880"/>
-            <a:ext cx="391886" cy="329184"/>
+            <a:off x="10241280" y="3611880"/>
+            <a:ext cx="609600" cy="329184"/>
           </a:xfrm>
           <a:prstGeom prst="roundRect">
             <a:avLst>
@@ -11599,7 +13013,7 @@
       </p:sp>
       <p:sp>
         <p:nvSpPr>
-          <p:cNvPr id="27" name="Text 25"/>
+          <p:cNvPr id="31" name="Text 29"/>
           <p:cNvSpPr txBox="1"/>
           <p:nvPr/>
         </p:nvSpPr>
@@ -11630,7 +13044,7 @@
                 <a:ea typeface="Calibri" pitchFamily="34" charset="-122"/>
                 <a:cs typeface="Calibri" pitchFamily="34" charset="-120"/>
               </a:rPr>
-              <a:t>Освещение</a:t>
+              <a:t>Шлагбаум и освещение</a:t>
             </a:r>
             <a:endParaRPr lang="en-US" sz="1300" dirty="0"/>
           </a:p>
@@ -11638,14 +13052,14 @@
       </p:sp>
       <p:sp>
         <p:nvSpPr>
-          <p:cNvPr id="28" name="Shape 26"/>
+          <p:cNvPr id="32" name="Shape 30"/>
           <p:cNvSpPr/>
           <p:nvPr/>
         </p:nvSpPr>
         <p:spPr>
           <a:xfrm>
-            <a:off x="10241280" y="4197096"/>
-            <a:ext cx="587829" cy="329184"/>
+            <a:off x="9936480" y="4197096"/>
+            <a:ext cx="914400" cy="329184"/>
           </a:xfrm>
           <a:prstGeom prst="roundRect">
             <a:avLst>
@@ -11660,7 +13074,7 @@
       </p:sp>
       <p:sp>
         <p:nvSpPr>
-          <p:cNvPr id="29" name="Text 27"/>
+          <p:cNvPr id="33" name="Text 31"/>
           <p:cNvSpPr txBox="1"/>
           <p:nvPr/>
         </p:nvSpPr>
@@ -11699,14 +13113,14 @@
       </p:sp>
       <p:sp>
         <p:nvSpPr>
-          <p:cNvPr id="30" name="Shape 28"/>
+          <p:cNvPr id="34" name="Shape 32"/>
           <p:cNvSpPr/>
           <p:nvPr/>
         </p:nvSpPr>
         <p:spPr>
           <a:xfrm>
-            <a:off x="10829109" y="4782312"/>
-            <a:ext cx="783771" cy="329184"/>
+            <a:off x="10850880" y="4782312"/>
+            <a:ext cx="762000" cy="329184"/>
           </a:xfrm>
           <a:prstGeom prst="roundRect">
             <a:avLst>
@@ -11721,7 +13135,7 @@
       </p:sp>
       <p:sp>
         <p:nvSpPr>
-          <p:cNvPr id="31" name="Text 29"/>
+          <p:cNvPr id="35" name="Text 33"/>
           <p:cNvSpPr txBox="1"/>
           <p:nvPr/>
         </p:nvSpPr>
@@ -11752,7 +13166,7 @@
                 <a:ea typeface="Calibri" pitchFamily="34" charset="-122"/>
                 <a:cs typeface="Calibri" pitchFamily="34" charset="-120"/>
               </a:rPr>
-              <a:t>Подготовка — 4 недели; строительство — 3 недели (15 рабочих дней). Работы с 8:00 до 20:00, проезд во дворе перекрывается частично.</a:t>
+              <a:t>Подготовка — 4 недели; строительство — 5 недель (25 рабочих дней), по зонам. Работы с 8:00 до 20:00, проезд во дворе перекрывается частично.</a:t>
             </a:r>
             <a:endParaRPr lang="en-US" sz="1300" dirty="0"/>
           </a:p>
@@ -11766,9 +13180,9 @@
 </p:sld>
 </file>
 
-<file path=ppt/slides/slide15.xml><?xml version="1.0" encoding="utf-8"?>
+<file path=ppt/slides/slide16.xml><?xml version="1.0" encoding="utf-8"?>
 <p:sld xmlns:a="http://schemas.openxmlformats.org/drawingml/2006/main" xmlns:r="http://schemas.openxmlformats.org/officeDocument/2006/relationships" xmlns:p="http://schemas.openxmlformats.org/presentationml/2006/main">
-  <p:cSld name="Slide 15">
+  <p:cSld name="Slide 16">
     <p:bg>
       <p:bgPr>
         <a:solidFill>
@@ -12041,7 +13455,7 @@
                 <a:ea typeface="Calibri" pitchFamily="34" charset="-122"/>
                 <a:cs typeface="Calibri" pitchFamily="34" charset="-120"/>
               </a:rPr>
-              <a:t>Найдено место для ряда из 21 места вдоль проезда (≈ 265 м²)</a:t>
+              <a:t>Размещено 107 новых мест в 4 зонах двора (≈ 1 340 м²)</a:t>
             </a:r>
             <a:endParaRPr lang="en-US" sz="1300" dirty="0"/>
           </a:p>
@@ -12259,7 +13673,7 @@
                 <a:ea typeface="Calibri" pitchFamily="34" charset="-122"/>
                 <a:cs typeface="Calibri" pitchFamily="34" charset="-120"/>
               </a:rPr>
-              <a:t>Предусмотрены освещение, водоотвод, разметка и места для МГН</a:t>
+              <a:t>Шлагбаум на въезде, освещение, водоотвод, места для МГН</a:t>
             </a:r>
             <a:endParaRPr lang="en-US" sz="1300" dirty="0"/>
           </a:p>
@@ -12368,7 +13782,7 @@
                 <a:ea typeface="Calibri" pitchFamily="34" charset="-122"/>
                 <a:cs typeface="Calibri" pitchFamily="34" charset="-120"/>
               </a:rPr>
-              <a:t>Рассчитаны смета, ЗП, техника и график — 7 недель</a:t>
+              <a:t>Рассчитаны смета, ЗП, техника и график — 9 недель</a:t>
             </a:r>
             <a:endParaRPr lang="en-US" sz="1300" dirty="0"/>
           </a:p>
@@ -12407,7 +13821,7 @@
                 <a:ea typeface="Cambria" pitchFamily="34" charset="-122"/>
                 <a:cs typeface="Cambria" pitchFamily="34" charset="-120"/>
               </a:rPr>
-              <a:t>+21</a:t>
+              <a:t>+107</a:t>
             </a:r>
             <a:endParaRPr lang="en-US" sz="7200" dirty="0"/>
           </a:p>
@@ -12446,7 +13860,7 @@
                 <a:ea typeface="Calibri" pitchFamily="34" charset="-122"/>
                 <a:cs typeface="Calibri" pitchFamily="34" charset="-120"/>
               </a:rPr>
-              <a:t>новое парковочное место</a:t>
+              <a:t>новых парковочных мест</a:t>
             </a:r>
             <a:endParaRPr lang="en-US" sz="1800" dirty="0"/>
           </a:p>
@@ -12485,7 +13899,7 @@
                 <a:ea typeface="Calibri" pitchFamily="34" charset="-122"/>
                 <a:cs typeface="Calibri" pitchFamily="34" charset="-120"/>
               </a:rPr>
-              <a:t>2 056 362 ₽  ·  7 недель</a:t>
+              <a:t>8 335 215 ₽  ·  9 недель</a:t>
             </a:r>
             <a:endParaRPr lang="en-US" sz="1800" dirty="0"/>
           </a:p>
@@ -12524,7 +13938,7 @@
                 <a:ea typeface="Calibri" pitchFamily="34" charset="-122"/>
                 <a:cs typeface="Calibri" pitchFamily="34" charset="-120"/>
               </a:rPr>
-              <a:t>Цель достигнута: парковка во дворе упорядочена, проезд освобождён.</a:t>
+              <a:t>Цель достигнута: +107 мест, въезд под контролем шлагбаума.</a:t>
             </a:r>
             <a:endParaRPr lang="en-US" sz="1500" dirty="0"/>
           </a:p>
@@ -12707,12 +14121,12 @@
         </p:nvSpPr>
         <p:spPr>
           <a:xfrm>
-            <a:off x="548640" y="1325880"/>
-            <a:ext cx="5394960" cy="658368"/>
+            <a:off x="548640" y="1280160"/>
+            <a:ext cx="5394960" cy="603504"/>
           </a:xfrm>
           <a:prstGeom prst="roundRect">
             <a:avLst>
-              <a:gd name="adj" fmla="val 13889"/>
+              <a:gd name="adj" fmla="val 15152"/>
             </a:avLst>
           </a:prstGeom>
           <a:solidFill>
@@ -12729,7 +14143,7 @@
         </p:nvSpPr>
         <p:spPr>
           <a:xfrm>
-            <a:off x="685800" y="1417320"/>
+            <a:off x="685800" y="1371600"/>
             <a:ext cx="475488" cy="475488"/>
           </a:xfrm>
           <a:prstGeom prst="ellipse">
@@ -12749,7 +14163,7 @@
         </p:nvSpPr>
         <p:spPr>
           <a:xfrm>
-            <a:off x="685800" y="1417320"/>
+            <a:off x="685800" y="1371600"/>
             <a:ext cx="475488" cy="475488"/>
           </a:xfrm>
           <a:prstGeom prst="rect">
@@ -12788,8 +14202,8 @@
         </p:nvSpPr>
         <p:spPr>
           <a:xfrm>
-            <a:off x="1371600" y="1325880"/>
-            <a:ext cx="4480560" cy="658368"/>
+            <a:off x="1371600" y="1280160"/>
+            <a:ext cx="4480560" cy="603504"/>
           </a:xfrm>
           <a:prstGeom prst="rect">
             <a:avLst/>
@@ -12827,12 +14241,12 @@
         </p:nvSpPr>
         <p:spPr>
           <a:xfrm>
-            <a:off x="548640" y="2148840"/>
-            <a:ext cx="5394960" cy="658368"/>
+            <a:off x="548640" y="1993392"/>
+            <a:ext cx="5394960" cy="603504"/>
           </a:xfrm>
           <a:prstGeom prst="roundRect">
             <a:avLst>
-              <a:gd name="adj" fmla="val 13889"/>
+              <a:gd name="adj" fmla="val 15152"/>
             </a:avLst>
           </a:prstGeom>
           <a:solidFill>
@@ -12849,7 +14263,7 @@
         </p:nvSpPr>
         <p:spPr>
           <a:xfrm>
-            <a:off x="685800" y="2240280"/>
+            <a:off x="685800" y="2084832"/>
             <a:ext cx="475488" cy="475488"/>
           </a:xfrm>
           <a:prstGeom prst="ellipse">
@@ -12869,7 +14283,7 @@
         </p:nvSpPr>
         <p:spPr>
           <a:xfrm>
-            <a:off x="685800" y="2240280"/>
+            <a:off x="685800" y="2084832"/>
             <a:ext cx="475488" cy="475488"/>
           </a:xfrm>
           <a:prstGeom prst="rect">
@@ -12908,8 +14322,8 @@
         </p:nvSpPr>
         <p:spPr>
           <a:xfrm>
-            <a:off x="1371600" y="2148840"/>
-            <a:ext cx="4480560" cy="658368"/>
+            <a:off x="1371600" y="1993392"/>
+            <a:ext cx="4480560" cy="603504"/>
           </a:xfrm>
           <a:prstGeom prst="rect">
             <a:avLst/>
@@ -12947,12 +14361,12 @@
         </p:nvSpPr>
         <p:spPr>
           <a:xfrm>
-            <a:off x="548640" y="2971800"/>
-            <a:ext cx="5394960" cy="658368"/>
+            <a:off x="548640" y="2706624"/>
+            <a:ext cx="5394960" cy="603504"/>
           </a:xfrm>
           <a:prstGeom prst="roundRect">
             <a:avLst>
-              <a:gd name="adj" fmla="val 13889"/>
+              <a:gd name="adj" fmla="val 15152"/>
             </a:avLst>
           </a:prstGeom>
           <a:solidFill>
@@ -12969,7 +14383,7 @@
         </p:nvSpPr>
         <p:spPr>
           <a:xfrm>
-            <a:off x="685800" y="3063240"/>
+            <a:off x="685800" y="2798064"/>
             <a:ext cx="475488" cy="475488"/>
           </a:xfrm>
           <a:prstGeom prst="ellipse">
@@ -12989,7 +14403,7 @@
         </p:nvSpPr>
         <p:spPr>
           <a:xfrm>
-            <a:off x="685800" y="3063240"/>
+            <a:off x="685800" y="2798064"/>
             <a:ext cx="475488" cy="475488"/>
           </a:xfrm>
           <a:prstGeom prst="rect">
@@ -13028,8 +14442,8 @@
         </p:nvSpPr>
         <p:spPr>
           <a:xfrm>
-            <a:off x="1371600" y="2971800"/>
-            <a:ext cx="4480560" cy="658368"/>
+            <a:off x="1371600" y="2706624"/>
+            <a:ext cx="4480560" cy="603504"/>
           </a:xfrm>
           <a:prstGeom prst="rect">
             <a:avLst/>
@@ -13067,12 +14481,12 @@
         </p:nvSpPr>
         <p:spPr>
           <a:xfrm>
-            <a:off x="548640" y="3794760"/>
-            <a:ext cx="5394960" cy="658368"/>
+            <a:off x="548640" y="3419856"/>
+            <a:ext cx="5394960" cy="603504"/>
           </a:xfrm>
           <a:prstGeom prst="roundRect">
             <a:avLst>
-              <a:gd name="adj" fmla="val 13889"/>
+              <a:gd name="adj" fmla="val 15152"/>
             </a:avLst>
           </a:prstGeom>
           <a:solidFill>
@@ -13089,7 +14503,7 @@
         </p:nvSpPr>
         <p:spPr>
           <a:xfrm>
-            <a:off x="685800" y="3886200"/>
+            <a:off x="685800" y="3511296"/>
             <a:ext cx="475488" cy="475488"/>
           </a:xfrm>
           <a:prstGeom prst="ellipse">
@@ -13109,7 +14523,7 @@
         </p:nvSpPr>
         <p:spPr>
           <a:xfrm>
-            <a:off x="685800" y="3886200"/>
+            <a:off x="685800" y="3511296"/>
             <a:ext cx="475488" cy="475488"/>
           </a:xfrm>
           <a:prstGeom prst="rect">
@@ -13148,8 +14562,8 @@
         </p:nvSpPr>
         <p:spPr>
           <a:xfrm>
-            <a:off x="1371600" y="3794760"/>
-            <a:ext cx="4480560" cy="658368"/>
+            <a:off x="1371600" y="3419856"/>
+            <a:ext cx="4480560" cy="603504"/>
           </a:xfrm>
           <a:prstGeom prst="rect">
             <a:avLst/>
@@ -13187,12 +14601,12 @@
         </p:nvSpPr>
         <p:spPr>
           <a:xfrm>
-            <a:off x="548640" y="4617720"/>
-            <a:ext cx="5394960" cy="658368"/>
+            <a:off x="548640" y="4133088"/>
+            <a:ext cx="5394960" cy="603504"/>
           </a:xfrm>
           <a:prstGeom prst="roundRect">
             <a:avLst>
-              <a:gd name="adj" fmla="val 13889"/>
+              <a:gd name="adj" fmla="val 15152"/>
             </a:avLst>
           </a:prstGeom>
           <a:solidFill>
@@ -13209,7 +14623,7 @@
         </p:nvSpPr>
         <p:spPr>
           <a:xfrm>
-            <a:off x="685800" y="4709160"/>
+            <a:off x="685800" y="4224528"/>
             <a:ext cx="475488" cy="475488"/>
           </a:xfrm>
           <a:prstGeom prst="ellipse">
@@ -13229,7 +14643,7 @@
         </p:nvSpPr>
         <p:spPr>
           <a:xfrm>
-            <a:off x="685800" y="4709160"/>
+            <a:off x="685800" y="4224528"/>
             <a:ext cx="475488" cy="475488"/>
           </a:xfrm>
           <a:prstGeom prst="rect">
@@ -13268,8 +14682,8 @@
         </p:nvSpPr>
         <p:spPr>
           <a:xfrm>
-            <a:off x="1371600" y="4617720"/>
-            <a:ext cx="4480560" cy="658368"/>
+            <a:off x="1371600" y="4133088"/>
+            <a:ext cx="4480560" cy="603504"/>
           </a:xfrm>
           <a:prstGeom prst="rect">
             <a:avLst/>
@@ -13307,12 +14721,12 @@
         </p:nvSpPr>
         <p:spPr>
           <a:xfrm>
-            <a:off x="548640" y="5440680"/>
-            <a:ext cx="5394960" cy="658368"/>
+            <a:off x="548640" y="4846320"/>
+            <a:ext cx="5394960" cy="603504"/>
           </a:xfrm>
           <a:prstGeom prst="roundRect">
             <a:avLst>
-              <a:gd name="adj" fmla="val 13889"/>
+              <a:gd name="adj" fmla="val 15152"/>
             </a:avLst>
           </a:prstGeom>
           <a:solidFill>
@@ -13329,7 +14743,7 @@
         </p:nvSpPr>
         <p:spPr>
           <a:xfrm>
-            <a:off x="685800" y="5532120"/>
+            <a:off x="685800" y="4937760"/>
             <a:ext cx="475488" cy="475488"/>
           </a:xfrm>
           <a:prstGeom prst="ellipse">
@@ -13349,7 +14763,7 @@
         </p:nvSpPr>
         <p:spPr>
           <a:xfrm>
-            <a:off x="685800" y="5532120"/>
+            <a:off x="685800" y="4937760"/>
             <a:ext cx="475488" cy="475488"/>
           </a:xfrm>
           <a:prstGeom prst="rect">
@@ -13388,8 +14802,8 @@
         </p:nvSpPr>
         <p:spPr>
           <a:xfrm>
-            <a:off x="1371600" y="5440680"/>
-            <a:ext cx="4480560" cy="658368"/>
+            <a:off x="1371600" y="4846320"/>
+            <a:ext cx="4480560" cy="603504"/>
           </a:xfrm>
           <a:prstGeom prst="rect">
             <a:avLst/>
@@ -13427,12 +14841,12 @@
         </p:nvSpPr>
         <p:spPr>
           <a:xfrm>
-            <a:off x="6309360" y="1325880"/>
-            <a:ext cx="5394960" cy="658368"/>
+            <a:off x="548640" y="5559552"/>
+            <a:ext cx="5394960" cy="603504"/>
           </a:xfrm>
           <a:prstGeom prst="roundRect">
             <a:avLst>
-              <a:gd name="adj" fmla="val 13889"/>
+              <a:gd name="adj" fmla="val 15152"/>
             </a:avLst>
           </a:prstGeom>
           <a:solidFill>
@@ -13449,7 +14863,7 @@
         </p:nvSpPr>
         <p:spPr>
           <a:xfrm>
-            <a:off x="6446520" y="1417320"/>
+            <a:off x="685800" y="5650992"/>
             <a:ext cx="475488" cy="475488"/>
           </a:xfrm>
           <a:prstGeom prst="ellipse">
@@ -13469,7 +14883,7 @@
         </p:nvSpPr>
         <p:spPr>
           <a:xfrm>
-            <a:off x="6446520" y="1417320"/>
+            <a:off x="685800" y="5650992"/>
             <a:ext cx="475488" cy="475488"/>
           </a:xfrm>
           <a:prstGeom prst="rect">
@@ -13508,8 +14922,8 @@
         </p:nvSpPr>
         <p:spPr>
           <a:xfrm>
-            <a:off x="7132320" y="1325880"/>
-            <a:ext cx="4480560" cy="658368"/>
+            <a:off x="1371600" y="5559552"/>
+            <a:ext cx="4480560" cy="603504"/>
           </a:xfrm>
           <a:prstGeom prst="rect">
             <a:avLst/>
@@ -13547,12 +14961,12 @@
         </p:nvSpPr>
         <p:spPr>
           <a:xfrm>
-            <a:off x="6309360" y="2148840"/>
-            <a:ext cx="5394960" cy="658368"/>
+            <a:off x="6309360" y="1280160"/>
+            <a:ext cx="5394960" cy="603504"/>
           </a:xfrm>
           <a:prstGeom prst="roundRect">
             <a:avLst>
-              <a:gd name="adj" fmla="val 13889"/>
+              <a:gd name="adj" fmla="val 15152"/>
             </a:avLst>
           </a:prstGeom>
           <a:solidFill>
@@ -13569,7 +14983,7 @@
         </p:nvSpPr>
         <p:spPr>
           <a:xfrm>
-            <a:off x="6446520" y="2240280"/>
+            <a:off x="6446520" y="1371600"/>
             <a:ext cx="475488" cy="475488"/>
           </a:xfrm>
           <a:prstGeom prst="ellipse">
@@ -13589,7 +15003,7 @@
         </p:nvSpPr>
         <p:spPr>
           <a:xfrm>
-            <a:off x="6446520" y="2240280"/>
+            <a:off x="6446520" y="1371600"/>
             <a:ext cx="475488" cy="475488"/>
           </a:xfrm>
           <a:prstGeom prst="rect">
@@ -13628,8 +15042,128 @@
         </p:nvSpPr>
         <p:spPr>
           <a:xfrm>
-            <a:off x="7132320" y="2148840"/>
-            <a:ext cx="4480560" cy="658368"/>
+            <a:off x="7132320" y="1280160"/>
+            <a:ext cx="4480560" cy="603504"/>
+          </a:xfrm>
+          <a:prstGeom prst="rect">
+            <a:avLst/>
+          </a:prstGeom>
+          <a:noFill/>
+          <a:ln/>
+        </p:spPr>
+        <p:txBody>
+          <a:bodyPr wrap="square" lIns="0" tIns="0" rIns="0" bIns="0" rtlCol="0" anchor="ctr"/>
+          <a:lstStyle/>
+          <a:p>
+            <a:pPr indent="0" marL="0">
+              <a:buNone/>
+            </a:pPr>
+            <a:r>
+              <a:rPr lang="en-US" sz="1600" dirty="0">
+                <a:solidFill>
+                  <a:srgbClr val="1F2937"/>
+                </a:solidFill>
+                <a:latin typeface="Calibri" pitchFamily="34" charset="0"/>
+                <a:ea typeface="Calibri" pitchFamily="34" charset="-122"/>
+                <a:cs typeface="Calibri" pitchFamily="34" charset="-120"/>
+              </a:rPr>
+              <a:t>3D-модель двора</a:t>
+            </a:r>
+            <a:endParaRPr lang="en-US" sz="1600" dirty="0"/>
+          </a:p>
+        </p:txBody>
+      </p:sp>
+      <p:sp>
+        <p:nvSpPr>
+          <p:cNvPr id="37" name="Shape 35"/>
+          <p:cNvSpPr/>
+          <p:nvPr/>
+        </p:nvSpPr>
+        <p:spPr>
+          <a:xfrm>
+            <a:off x="6309360" y="1993392"/>
+            <a:ext cx="5394960" cy="603504"/>
+          </a:xfrm>
+          <a:prstGeom prst="roundRect">
+            <a:avLst>
+              <a:gd name="adj" fmla="val 15152"/>
+            </a:avLst>
+          </a:prstGeom>
+          <a:solidFill>
+            <a:srgbClr val="F3F4F6"/>
+          </a:solidFill>
+          <a:ln/>
+        </p:spPr>
+      </p:sp>
+      <p:sp>
+        <p:nvSpPr>
+          <p:cNvPr id="38" name="Shape 36"/>
+          <p:cNvSpPr/>
+          <p:nvPr/>
+        </p:nvSpPr>
+        <p:spPr>
+          <a:xfrm>
+            <a:off x="6446520" y="2084832"/>
+            <a:ext cx="475488" cy="475488"/>
+          </a:xfrm>
+          <a:prstGeom prst="ellipse">
+            <a:avLst/>
+          </a:prstGeom>
+          <a:solidFill>
+            <a:srgbClr val="26282E"/>
+          </a:solidFill>
+          <a:ln/>
+        </p:spPr>
+      </p:sp>
+      <p:sp>
+        <p:nvSpPr>
+          <p:cNvPr id="39" name="Text 37"/>
+          <p:cNvSpPr txBox="1"/>
+          <p:nvPr/>
+        </p:nvSpPr>
+        <p:spPr>
+          <a:xfrm>
+            <a:off x="6446520" y="2084832"/>
+            <a:ext cx="475488" cy="475488"/>
+          </a:xfrm>
+          <a:prstGeom prst="rect">
+            <a:avLst/>
+          </a:prstGeom>
+          <a:noFill/>
+          <a:ln/>
+        </p:spPr>
+        <p:txBody>
+          <a:bodyPr wrap="square" lIns="0" tIns="0" rIns="0" bIns="0" rtlCol="0" anchor="ctr"/>
+          <a:lstStyle/>
+          <a:p>
+            <a:pPr algn="ctr" indent="0" marL="0">
+              <a:buNone/>
+            </a:pPr>
+            <a:r>
+              <a:rPr lang="en-US" sz="1500" b="1" dirty="0">
+                <a:solidFill>
+                  <a:srgbClr val="F2C200"/>
+                </a:solidFill>
+                <a:latin typeface="Calibri" pitchFamily="34" charset="0"/>
+                <a:ea typeface="Calibri" pitchFamily="34" charset="-122"/>
+                <a:cs typeface="Calibri" pitchFamily="34" charset="-120"/>
+              </a:rPr>
+              <a:t>9</a:t>
+            </a:r>
+            <a:endParaRPr lang="en-US" sz="1500" dirty="0"/>
+          </a:p>
+        </p:txBody>
+      </p:sp>
+      <p:sp>
+        <p:nvSpPr>
+          <p:cNvPr id="40" name="Text 38"/>
+          <p:cNvSpPr txBox="1"/>
+          <p:nvPr/>
+        </p:nvSpPr>
+        <p:spPr>
+          <a:xfrm>
+            <a:off x="7132320" y="1993392"/>
+            <a:ext cx="4480560" cy="603504"/>
           </a:xfrm>
           <a:prstGeom prst="rect">
             <a:avLst/>
@@ -13661,18 +15195,18 @@
       </p:sp>
       <p:sp>
         <p:nvSpPr>
-          <p:cNvPr id="37" name="Shape 35"/>
+          <p:cNvPr id="41" name="Shape 39"/>
           <p:cNvSpPr/>
           <p:nvPr/>
         </p:nvSpPr>
         <p:spPr>
           <a:xfrm>
-            <a:off x="6309360" y="2971800"/>
-            <a:ext cx="5394960" cy="658368"/>
+            <a:off x="6309360" y="2706624"/>
+            <a:ext cx="5394960" cy="603504"/>
           </a:xfrm>
           <a:prstGeom prst="roundRect">
             <a:avLst>
-              <a:gd name="adj" fmla="val 13889"/>
+              <a:gd name="adj" fmla="val 15152"/>
             </a:avLst>
           </a:prstGeom>
           <a:solidFill>
@@ -13683,13 +15217,13 @@
       </p:sp>
       <p:sp>
         <p:nvSpPr>
-          <p:cNvPr id="38" name="Shape 36"/>
+          <p:cNvPr id="42" name="Shape 40"/>
           <p:cNvSpPr/>
           <p:nvPr/>
         </p:nvSpPr>
         <p:spPr>
           <a:xfrm>
-            <a:off x="6446520" y="3063240"/>
+            <a:off x="6446520" y="2798064"/>
             <a:ext cx="475488" cy="475488"/>
           </a:xfrm>
           <a:prstGeom prst="ellipse">
@@ -13703,13 +15237,13 @@
       </p:sp>
       <p:sp>
         <p:nvSpPr>
-          <p:cNvPr id="39" name="Text 37"/>
+          <p:cNvPr id="43" name="Text 41"/>
           <p:cNvSpPr txBox="1"/>
           <p:nvPr/>
         </p:nvSpPr>
         <p:spPr>
           <a:xfrm>
-            <a:off x="6446520" y="3063240"/>
+            <a:off x="6446520" y="2798064"/>
             <a:ext cx="475488" cy="475488"/>
           </a:xfrm>
           <a:prstGeom prst="rect">
@@ -13734,7 +15268,7 @@
                 <a:ea typeface="Calibri" pitchFamily="34" charset="-122"/>
                 <a:cs typeface="Calibri" pitchFamily="34" charset="-120"/>
               </a:rPr>
-              <a:t>9</a:t>
+              <a:t>10</a:t>
             </a:r>
             <a:endParaRPr lang="en-US" sz="1500" dirty="0"/>
           </a:p>
@@ -13742,14 +15276,14 @@
       </p:sp>
       <p:sp>
         <p:nvSpPr>
-          <p:cNvPr id="40" name="Text 38"/>
+          <p:cNvPr id="44" name="Text 42"/>
           <p:cNvSpPr txBox="1"/>
           <p:nvPr/>
         </p:nvSpPr>
         <p:spPr>
           <a:xfrm>
-            <a:off x="7132320" y="2971800"/>
-            <a:ext cx="4480560" cy="658368"/>
+            <a:off x="7132320" y="2706624"/>
+            <a:ext cx="4480560" cy="603504"/>
           </a:xfrm>
           <a:prstGeom prst="rect">
             <a:avLst/>
@@ -13781,18 +15315,18 @@
       </p:sp>
       <p:sp>
         <p:nvSpPr>
-          <p:cNvPr id="41" name="Shape 39"/>
+          <p:cNvPr id="45" name="Shape 43"/>
           <p:cNvSpPr/>
           <p:nvPr/>
         </p:nvSpPr>
         <p:spPr>
           <a:xfrm>
-            <a:off x="6309360" y="3794760"/>
-            <a:ext cx="5394960" cy="658368"/>
+            <a:off x="6309360" y="3419856"/>
+            <a:ext cx="5394960" cy="603504"/>
           </a:xfrm>
           <a:prstGeom prst="roundRect">
             <a:avLst>
-              <a:gd name="adj" fmla="val 13889"/>
+              <a:gd name="adj" fmla="val 15152"/>
             </a:avLst>
           </a:prstGeom>
           <a:solidFill>
@@ -13803,13 +15337,13 @@
       </p:sp>
       <p:sp>
         <p:nvSpPr>
-          <p:cNvPr id="42" name="Shape 40"/>
+          <p:cNvPr id="46" name="Shape 44"/>
           <p:cNvSpPr/>
           <p:nvPr/>
         </p:nvSpPr>
         <p:spPr>
           <a:xfrm>
-            <a:off x="6446520" y="3886200"/>
+            <a:off x="6446520" y="3511296"/>
             <a:ext cx="475488" cy="475488"/>
           </a:xfrm>
           <a:prstGeom prst="ellipse">
@@ -13823,13 +15357,13 @@
       </p:sp>
       <p:sp>
         <p:nvSpPr>
-          <p:cNvPr id="43" name="Text 41"/>
+          <p:cNvPr id="47" name="Text 45"/>
           <p:cNvSpPr txBox="1"/>
           <p:nvPr/>
         </p:nvSpPr>
         <p:spPr>
           <a:xfrm>
-            <a:off x="6446520" y="3886200"/>
+            <a:off x="6446520" y="3511296"/>
             <a:ext cx="475488" cy="475488"/>
           </a:xfrm>
           <a:prstGeom prst="rect">
@@ -13854,7 +15388,7 @@
                 <a:ea typeface="Calibri" pitchFamily="34" charset="-122"/>
                 <a:cs typeface="Calibri" pitchFamily="34" charset="-120"/>
               </a:rPr>
-              <a:t>10</a:t>
+              <a:t>11</a:t>
             </a:r>
             <a:endParaRPr lang="en-US" sz="1500" dirty="0"/>
           </a:p>
@@ -13862,14 +15396,14 @@
       </p:sp>
       <p:sp>
         <p:nvSpPr>
-          <p:cNvPr id="44" name="Text 42"/>
+          <p:cNvPr id="48" name="Text 46"/>
           <p:cNvSpPr txBox="1"/>
           <p:nvPr/>
         </p:nvSpPr>
         <p:spPr>
           <a:xfrm>
-            <a:off x="7132320" y="3794760"/>
-            <a:ext cx="4480560" cy="658368"/>
+            <a:off x="7132320" y="3419856"/>
+            <a:ext cx="4480560" cy="603504"/>
           </a:xfrm>
           <a:prstGeom prst="rect">
             <a:avLst/>
@@ -13901,18 +15435,18 @@
       </p:sp>
       <p:sp>
         <p:nvSpPr>
-          <p:cNvPr id="45" name="Shape 43"/>
+          <p:cNvPr id="49" name="Shape 47"/>
           <p:cNvSpPr/>
           <p:nvPr/>
         </p:nvSpPr>
         <p:spPr>
           <a:xfrm>
-            <a:off x="6309360" y="4617720"/>
-            <a:ext cx="5394960" cy="658368"/>
+            <a:off x="6309360" y="4133088"/>
+            <a:ext cx="5394960" cy="603504"/>
           </a:xfrm>
           <a:prstGeom prst="roundRect">
             <a:avLst>
-              <a:gd name="adj" fmla="val 13889"/>
+              <a:gd name="adj" fmla="val 15152"/>
             </a:avLst>
           </a:prstGeom>
           <a:solidFill>
@@ -13923,13 +15457,13 @@
       </p:sp>
       <p:sp>
         <p:nvSpPr>
-          <p:cNvPr id="46" name="Shape 44"/>
+          <p:cNvPr id="50" name="Shape 48"/>
           <p:cNvSpPr/>
           <p:nvPr/>
         </p:nvSpPr>
         <p:spPr>
           <a:xfrm>
-            <a:off x="6446520" y="4709160"/>
+            <a:off x="6446520" y="4224528"/>
             <a:ext cx="475488" cy="475488"/>
           </a:xfrm>
           <a:prstGeom prst="ellipse">
@@ -13943,13 +15477,13 @@
       </p:sp>
       <p:sp>
         <p:nvSpPr>
-          <p:cNvPr id="47" name="Text 45"/>
+          <p:cNvPr id="51" name="Text 49"/>
           <p:cNvSpPr txBox="1"/>
           <p:nvPr/>
         </p:nvSpPr>
         <p:spPr>
           <a:xfrm>
-            <a:off x="6446520" y="4709160"/>
+            <a:off x="6446520" y="4224528"/>
             <a:ext cx="475488" cy="475488"/>
           </a:xfrm>
           <a:prstGeom prst="rect">
@@ -13974,7 +15508,7 @@
                 <a:ea typeface="Calibri" pitchFamily="34" charset="-122"/>
                 <a:cs typeface="Calibri" pitchFamily="34" charset="-120"/>
               </a:rPr>
-              <a:t>11</a:t>
+              <a:t>12</a:t>
             </a:r>
             <a:endParaRPr lang="en-US" sz="1500" dirty="0"/>
           </a:p>
@@ -13982,14 +15516,14 @@
       </p:sp>
       <p:sp>
         <p:nvSpPr>
-          <p:cNvPr id="48" name="Text 46"/>
+          <p:cNvPr id="52" name="Text 50"/>
           <p:cNvSpPr txBox="1"/>
           <p:nvPr/>
         </p:nvSpPr>
         <p:spPr>
           <a:xfrm>
-            <a:off x="7132320" y="4617720"/>
-            <a:ext cx="4480560" cy="658368"/>
+            <a:off x="7132320" y="4133088"/>
+            <a:ext cx="4480560" cy="603504"/>
           </a:xfrm>
           <a:prstGeom prst="rect">
             <a:avLst/>
@@ -14021,18 +15555,18 @@
       </p:sp>
       <p:sp>
         <p:nvSpPr>
-          <p:cNvPr id="49" name="Shape 47"/>
+          <p:cNvPr id="53" name="Shape 51"/>
           <p:cNvSpPr/>
           <p:nvPr/>
         </p:nvSpPr>
         <p:spPr>
           <a:xfrm>
-            <a:off x="6309360" y="5440680"/>
-            <a:ext cx="5394960" cy="658368"/>
+            <a:off x="6309360" y="4846320"/>
+            <a:ext cx="5394960" cy="603504"/>
           </a:xfrm>
           <a:prstGeom prst="roundRect">
             <a:avLst>
-              <a:gd name="adj" fmla="val 13889"/>
+              <a:gd name="adj" fmla="val 15152"/>
             </a:avLst>
           </a:prstGeom>
           <a:solidFill>
@@ -14043,13 +15577,13 @@
       </p:sp>
       <p:sp>
         <p:nvSpPr>
-          <p:cNvPr id="50" name="Shape 48"/>
+          <p:cNvPr id="54" name="Shape 52"/>
           <p:cNvSpPr/>
           <p:nvPr/>
         </p:nvSpPr>
         <p:spPr>
           <a:xfrm>
-            <a:off x="6446520" y="5532120"/>
+            <a:off x="6446520" y="4937760"/>
             <a:ext cx="475488" cy="475488"/>
           </a:xfrm>
           <a:prstGeom prst="ellipse">
@@ -14063,13 +15597,13 @@
       </p:sp>
       <p:sp>
         <p:nvSpPr>
-          <p:cNvPr id="51" name="Text 49"/>
+          <p:cNvPr id="55" name="Text 53"/>
           <p:cNvSpPr txBox="1"/>
           <p:nvPr/>
         </p:nvSpPr>
         <p:spPr>
           <a:xfrm>
-            <a:off x="6446520" y="5532120"/>
+            <a:off x="6446520" y="4937760"/>
             <a:ext cx="475488" cy="475488"/>
           </a:xfrm>
           <a:prstGeom prst="rect">
@@ -14094,7 +15628,7 @@
                 <a:ea typeface="Calibri" pitchFamily="34" charset="-122"/>
                 <a:cs typeface="Calibri" pitchFamily="34" charset="-120"/>
               </a:rPr>
-              <a:t>12</a:t>
+              <a:t>13</a:t>
             </a:r>
             <a:endParaRPr lang="en-US" sz="1500" dirty="0"/>
           </a:p>
@@ -14102,14 +15636,14 @@
       </p:sp>
       <p:sp>
         <p:nvSpPr>
-          <p:cNvPr id="52" name="Text 50"/>
+          <p:cNvPr id="56" name="Text 54"/>
           <p:cNvSpPr txBox="1"/>
           <p:nvPr/>
         </p:nvSpPr>
         <p:spPr>
           <a:xfrm>
-            <a:off x="7132320" y="5440680"/>
-            <a:ext cx="4480560" cy="658368"/>
+            <a:off x="7132320" y="4846320"/>
+            <a:ext cx="4480560" cy="603504"/>
           </a:xfrm>
           <a:prstGeom prst="rect">
             <a:avLst/>
@@ -17004,7 +18538,7 @@
                 <a:ea typeface="Cambria" pitchFamily="34" charset="-122"/>
                 <a:cs typeface="Cambria" pitchFamily="34" charset="-120"/>
               </a:rPr>
-              <a:t>+21</a:t>
+              <a:t>+107</a:t>
             </a:r>
             <a:endParaRPr lang="en-US" sz="4400" dirty="0"/>
           </a:p>
@@ -17414,7 +18948,7 @@
                 <a:ea typeface="Calibri" pitchFamily="34" charset="-122"/>
                 <a:cs typeface="Calibri" pitchFamily="34" charset="-120"/>
               </a:rPr>
-              <a:t>добавить 21 организованное парковочное место во дворе МКД ул. Нахимова, 20 и упорядочить парковку вдоль проезда.</a:t>
+              <a:t>обустроить 107 новых парковочных мест во дворе МКД ул. Нахимова, 20 и поставить шлагбаум на восточном въезде.</a:t>
             </a:r>
             <a:endParaRPr lang="en-US" sz="2000" dirty="0"/>
           </a:p>
@@ -17732,7 +19266,7 @@
                 <a:ea typeface="Calibri" pitchFamily="34" charset="-122"/>
                 <a:cs typeface="Calibri" pitchFamily="34" charset="-120"/>
               </a:rPr>
-              <a:t>Демонтировать полосу газона ≈ 265 м² вдоль проезда</a:t>
+              <a:t>Демонтировать газон ≈ 1 340 м² в зонах новых мест</a:t>
             </a:r>
             <a:endParaRPr lang="en-US" sz="1400" dirty="0"/>
           </a:p>
@@ -17891,7 +19425,7 @@
                 <a:ea typeface="Calibri" pitchFamily="34" charset="-122"/>
                 <a:cs typeface="Calibri" pitchFamily="34" charset="-120"/>
               </a:rPr>
-              <a:t>Устроить основание и асфальт на 21 место</a:t>
+              <a:t>Устроить основание и асфальт на 107 мест</a:t>
             </a:r>
             <a:endParaRPr lang="en-US" sz="1400" dirty="0"/>
           </a:p>
@@ -18050,7 +19584,7 @@
                 <a:ea typeface="Calibri" pitchFamily="34" charset="-122"/>
                 <a:cs typeface="Calibri" pitchFamily="34" charset="-120"/>
               </a:rPr>
-              <a:t>Сделать освещение, водоотвод и разметку</a:t>
+              <a:t>Поставить шлагбаум, освещение, водоотвод, разметку</a:t>
             </a:r>
             <a:endParaRPr lang="en-US" sz="1400" dirty="0"/>
           </a:p>
@@ -18347,7 +19881,7 @@
       </p:sp>
       <p:pic>
         <p:nvPicPr>
-          <p:cNvPr id="5" name="Image 0" descr="/home/user/mirigrushek/parking/img/plan_sat.jpg">    </p:cNvPr>
+          <p:cNvPr id="5" name="Image 0" descr="/home/user/mirigrushek/parking/img/plan_map.jpg">    </p:cNvPr>
           <p:cNvPicPr>
             <a:picLocks noChangeAspect="1"/>
           </p:cNvPicPr>
@@ -18378,7 +19912,7 @@
         <p:spPr>
           <a:xfrm>
             <a:off x="8229600" y="1234440"/>
-            <a:ext cx="3383280" cy="365760"/>
+            <a:ext cx="3383280" cy="411480"/>
           </a:xfrm>
           <a:prstGeom prst="rect">
             <a:avLst/>
@@ -18394,7 +19928,7 @@
               <a:buNone/>
             </a:pPr>
             <a:r>
-              <a:rPr lang="en-US" sz="1600" b="1" dirty="0">
+              <a:rPr lang="en-US" sz="1800" b="1" dirty="0">
                 <a:solidFill>
                   <a:srgbClr val="1F2937"/>
                 </a:solidFill>
@@ -18402,9 +19936,9 @@
                 <a:ea typeface="Calibri" pitchFamily="34" charset="-122"/>
                 <a:cs typeface="Calibri" pitchFamily="34" charset="-120"/>
               </a:rPr>
-              <a:t>Легенда</a:t>
-            </a:r>
-            <a:endParaRPr lang="en-US" sz="1600" dirty="0"/>
+              <a:t>Новые места: 107</a:t>
+            </a:r>
+            <a:endParaRPr lang="en-US" sz="1800" dirty="0"/>
           </a:p>
         </p:txBody>
       </p:sp>
@@ -18416,8 +19950,8 @@
         </p:nvSpPr>
         <p:spPr>
           <a:xfrm>
-            <a:off x="8229600" y="1783080"/>
-            <a:ext cx="365760" cy="274320"/>
+            <a:off x="8229600" y="1847088"/>
+            <a:ext cx="329184" cy="256032"/>
           </a:xfrm>
           <a:prstGeom prst="rect">
             <a:avLst/>
@@ -18425,12 +19959,7 @@
           <a:solidFill>
             <a:srgbClr val="F2C200"/>
           </a:solidFill>
-          <a:ln w="6350">
-            <a:solidFill>
-              <a:srgbClr val="9CA3AF"/>
-            </a:solidFill>
-            <a:prstDash val="solid"/>
-          </a:ln>
+          <a:ln/>
         </p:spPr>
       </p:sp>
       <p:sp>
@@ -18441,8 +19970,8 @@
         </p:nvSpPr>
         <p:spPr>
           <a:xfrm>
-            <a:off x="8732520" y="1737360"/>
-            <a:ext cx="2926080" cy="365760"/>
+            <a:off x="8686800" y="1783080"/>
+            <a:ext cx="3017520" cy="384048"/>
           </a:xfrm>
           <a:prstGeom prst="rect">
             <a:avLst/>
@@ -18456,241 +19985,6 @@
           <a:p>
             <a:pPr indent="0" marL="0">
               <a:buNone/>
-            </a:pPr>
-            <a:r>
-              <a:rPr lang="en-US" sz="1300" dirty="0">
-                <a:solidFill>
-                  <a:srgbClr val="1F2937"/>
-                </a:solidFill>
-                <a:latin typeface="Calibri" pitchFamily="34" charset="0"/>
-                <a:ea typeface="Calibri" pitchFamily="34" charset="-122"/>
-                <a:cs typeface="Calibri" pitchFamily="34" charset="-120"/>
-              </a:rPr>
-              <a:t>Новые места 2,5 × 5 м (19)</a:t>
-            </a:r>
-            <a:endParaRPr lang="en-US" sz="1300" dirty="0"/>
-          </a:p>
-        </p:txBody>
-      </p:sp>
-      <p:sp>
-        <p:nvSpPr>
-          <p:cNvPr id="9" name="Shape 6"/>
-          <p:cNvSpPr/>
-          <p:nvPr/>
-        </p:nvSpPr>
-        <p:spPr>
-          <a:xfrm>
-            <a:off x="8229600" y="2286000"/>
-            <a:ext cx="365760" cy="274320"/>
-          </a:xfrm>
-          <a:prstGeom prst="rect">
-            <a:avLst/>
-          </a:prstGeom>
-          <a:solidFill>
-            <a:srgbClr val="2563EB"/>
-          </a:solidFill>
-          <a:ln w="6350">
-            <a:solidFill>
-              <a:srgbClr val="9CA3AF"/>
-            </a:solidFill>
-            <a:prstDash val="solid"/>
-          </a:ln>
-        </p:spPr>
-      </p:sp>
-      <p:sp>
-        <p:nvSpPr>
-          <p:cNvPr id="10" name="Text 7"/>
-          <p:cNvSpPr txBox="1"/>
-          <p:nvPr/>
-        </p:nvSpPr>
-        <p:spPr>
-          <a:xfrm>
-            <a:off x="8732520" y="2240280"/>
-            <a:ext cx="2926080" cy="365760"/>
-          </a:xfrm>
-          <a:prstGeom prst="rect">
-            <a:avLst/>
-          </a:prstGeom>
-          <a:noFill/>
-          <a:ln/>
-        </p:spPr>
-        <p:txBody>
-          <a:bodyPr wrap="square" lIns="0" tIns="0" rIns="0" bIns="0" rtlCol="0" anchor="ctr"/>
-          <a:lstStyle/>
-          <a:p>
-            <a:pPr indent="0" marL="0">
-              <a:buNone/>
-            </a:pPr>
-            <a:r>
-              <a:rPr lang="en-US" sz="1300" dirty="0">
-                <a:solidFill>
-                  <a:srgbClr val="1F2937"/>
-                </a:solidFill>
-                <a:latin typeface="Calibri" pitchFamily="34" charset="0"/>
-                <a:ea typeface="Calibri" pitchFamily="34" charset="-122"/>
-                <a:cs typeface="Calibri" pitchFamily="34" charset="-120"/>
-              </a:rPr>
-              <a:t>Места для МГН 3,6 × 6 м (2)</a:t>
-            </a:r>
-            <a:endParaRPr lang="en-US" sz="1300" dirty="0"/>
-          </a:p>
-        </p:txBody>
-      </p:sp>
-      <p:sp>
-        <p:nvSpPr>
-          <p:cNvPr id="11" name="Shape 8"/>
-          <p:cNvSpPr/>
-          <p:nvPr/>
-        </p:nvSpPr>
-        <p:spPr>
-          <a:xfrm>
-            <a:off x="8229600" y="2788920"/>
-            <a:ext cx="365760" cy="274320"/>
-          </a:xfrm>
-          <a:prstGeom prst="rect">
-            <a:avLst/>
-          </a:prstGeom>
-          <a:solidFill>
-            <a:srgbClr val="3B82F6"/>
-          </a:solidFill>
-          <a:ln w="6350">
-            <a:solidFill>
-              <a:srgbClr val="9CA3AF"/>
-            </a:solidFill>
-            <a:prstDash val="solid"/>
-          </a:ln>
-        </p:spPr>
-      </p:sp>
-      <p:sp>
-        <p:nvSpPr>
-          <p:cNvPr id="12" name="Text 9"/>
-          <p:cNvSpPr txBox="1"/>
-          <p:nvPr/>
-        </p:nvSpPr>
-        <p:spPr>
-          <a:xfrm>
-            <a:off x="8732520" y="2743200"/>
-            <a:ext cx="2926080" cy="365760"/>
-          </a:xfrm>
-          <a:prstGeom prst="rect">
-            <a:avLst/>
-          </a:prstGeom>
-          <a:noFill/>
-          <a:ln/>
-        </p:spPr>
-        <p:txBody>
-          <a:bodyPr wrap="square" lIns="0" tIns="0" rIns="0" bIns="0" rtlCol="0" anchor="ctr"/>
-          <a:lstStyle/>
-          <a:p>
-            <a:pPr indent="0" marL="0">
-              <a:buNone/>
-            </a:pPr>
-            <a:r>
-              <a:rPr lang="en-US" sz="1300" dirty="0">
-                <a:solidFill>
-                  <a:srgbClr val="1F2937"/>
-                </a:solidFill>
-                <a:latin typeface="Calibri" pitchFamily="34" charset="0"/>
-                <a:ea typeface="Calibri" pitchFamily="34" charset="-122"/>
-                <a:cs typeface="Calibri" pitchFamily="34" charset="-120"/>
-              </a:rPr>
-              <a:t>Существующая парковка у 20к2</a:t>
-            </a:r>
-            <a:endParaRPr lang="en-US" sz="1300" dirty="0"/>
-          </a:p>
-        </p:txBody>
-      </p:sp>
-      <p:sp>
-        <p:nvSpPr>
-          <p:cNvPr id="13" name="Shape 10"/>
-          <p:cNvSpPr/>
-          <p:nvPr/>
-        </p:nvSpPr>
-        <p:spPr>
-          <a:xfrm>
-            <a:off x="8229600" y="3291840"/>
-            <a:ext cx="365760" cy="274320"/>
-          </a:xfrm>
-          <a:prstGeom prst="rect">
-            <a:avLst/>
-          </a:prstGeom>
-          <a:solidFill>
-            <a:srgbClr val="E5E7EB"/>
-          </a:solidFill>
-          <a:ln w="6350">
-            <a:solidFill>
-              <a:srgbClr val="9CA3AF"/>
-            </a:solidFill>
-            <a:prstDash val="solid"/>
-          </a:ln>
-        </p:spPr>
-      </p:sp>
-      <p:sp>
-        <p:nvSpPr>
-          <p:cNvPr id="14" name="Text 11"/>
-          <p:cNvSpPr txBox="1"/>
-          <p:nvPr/>
-        </p:nvSpPr>
-        <p:spPr>
-          <a:xfrm>
-            <a:off x="8732520" y="3246120"/>
-            <a:ext cx="2926080" cy="365760"/>
-          </a:xfrm>
-          <a:prstGeom prst="rect">
-            <a:avLst/>
-          </a:prstGeom>
-          <a:noFill/>
-          <a:ln/>
-        </p:spPr>
-        <p:txBody>
-          <a:bodyPr wrap="square" lIns="0" tIns="0" rIns="0" bIns="0" rtlCol="0" anchor="ctr"/>
-          <a:lstStyle/>
-          <a:p>
-            <a:pPr indent="0" marL="0">
-              <a:buNone/>
-            </a:pPr>
-            <a:r>
-              <a:rPr lang="en-US" sz="1300" dirty="0">
-                <a:solidFill>
-                  <a:srgbClr val="1F2937"/>
-                </a:solidFill>
-                <a:latin typeface="Calibri" pitchFamily="34" charset="0"/>
-                <a:ea typeface="Calibri" pitchFamily="34" charset="-122"/>
-                <a:cs typeface="Calibri" pitchFamily="34" charset="-120"/>
-              </a:rPr>
-              <a:t>Внутридворовый проезд 6 м</a:t>
-            </a:r>
-            <a:endParaRPr lang="en-US" sz="1300" dirty="0"/>
-          </a:p>
-        </p:txBody>
-      </p:sp>
-      <p:sp>
-        <p:nvSpPr>
-          <p:cNvPr id="15" name="Text 12"/>
-          <p:cNvSpPr txBox="1"/>
-          <p:nvPr/>
-        </p:nvSpPr>
-        <p:spPr>
-          <a:xfrm>
-            <a:off x="8229600" y="3886200"/>
-            <a:ext cx="3383280" cy="2377440"/>
-          </a:xfrm>
-          <a:prstGeom prst="rect">
-            <a:avLst/>
-          </a:prstGeom>
-          <a:noFill/>
-          <a:ln/>
-        </p:spPr>
-        <p:txBody>
-          <a:bodyPr wrap="square" lIns="0" tIns="0" rIns="0" bIns="0" rtlCol="0" anchor="t"/>
-          <a:lstStyle/>
-          <a:p>
-            <a:pPr marL="342900" indent="-342900">
-              <a:spcAft>
-                <a:spcPts val="600"/>
-              </a:spcAft>
-              <a:buSzPct val="100000"/>
-              <a:buChar char="•"/>
             </a:pPr>
             <a:r>
               <a:rPr lang="en-US" sz="1200" dirty="0">
@@ -18701,17 +19995,55 @@
                 <a:ea typeface="Calibri" pitchFamily="34" charset="-122"/>
                 <a:cs typeface="Calibri" pitchFamily="34" charset="-120"/>
               </a:rPr>
-              <a:t>Ряд перпендикулярных мест вдоль южной стороны проезда, длина ≈ 54 м</a:t>
+              <a:t>Вдоль фасада — 38</a:t>
             </a:r>
             <a:endParaRPr lang="en-US" sz="1200" dirty="0"/>
           </a:p>
-          <a:p>
-            <a:pPr marL="342900" indent="-342900">
-              <a:spcAft>
-                <a:spcPts val="600"/>
-              </a:spcAft>
-              <a:buSzPct val="100000"/>
-              <a:buChar char="•"/>
+        </p:txBody>
+      </p:sp>
+      <p:sp>
+        <p:nvSpPr>
+          <p:cNvPr id="9" name="Shape 6"/>
+          <p:cNvSpPr/>
+          <p:nvPr/>
+        </p:nvSpPr>
+        <p:spPr>
+          <a:xfrm>
+            <a:off x="8229600" y="2304288"/>
+            <a:ext cx="329184" cy="256032"/>
+          </a:xfrm>
+          <a:prstGeom prst="rect">
+            <a:avLst/>
+          </a:prstGeom>
+          <a:solidFill>
+            <a:srgbClr val="EA580C"/>
+          </a:solidFill>
+          <a:ln/>
+        </p:spPr>
+      </p:sp>
+      <p:sp>
+        <p:nvSpPr>
+          <p:cNvPr id="10" name="Text 7"/>
+          <p:cNvSpPr txBox="1"/>
+          <p:nvPr/>
+        </p:nvSpPr>
+        <p:spPr>
+          <a:xfrm>
+            <a:off x="8686800" y="2240280"/>
+            <a:ext cx="3017520" cy="384048"/>
+          </a:xfrm>
+          <a:prstGeom prst="rect">
+            <a:avLst/>
+          </a:prstGeom>
+          <a:noFill/>
+          <a:ln/>
+        </p:spPr>
+        <p:txBody>
+          <a:bodyPr wrap="square" lIns="0" tIns="0" rIns="0" bIns="0" rtlCol="0" anchor="ctr"/>
+          <a:lstStyle/>
+          <a:p>
+            <a:pPr indent="0" marL="0">
+              <a:buNone/>
             </a:pPr>
             <a:r>
               <a:rPr lang="en-US" sz="1200" dirty="0">
@@ -18722,17 +20054,55 @@
                 <a:ea typeface="Calibri" pitchFamily="34" charset="-122"/>
                 <a:cs typeface="Calibri" pitchFamily="34" charset="-120"/>
               </a:rPr>
-              <a:t>Площадь нового покрытия ≈ 265 м²</a:t>
+              <a:t>Площадка у 20к2 — 18</a:t>
             </a:r>
             <a:endParaRPr lang="en-US" sz="1200" dirty="0"/>
           </a:p>
-          <a:p>
-            <a:pPr marL="342900" indent="-342900">
-              <a:spcAft>
-                <a:spcPts val="600"/>
-              </a:spcAft>
-              <a:buSzPct val="100000"/>
-              <a:buChar char="•"/>
+        </p:txBody>
+      </p:sp>
+      <p:sp>
+        <p:nvSpPr>
+          <p:cNvPr id="11" name="Shape 8"/>
+          <p:cNvSpPr/>
+          <p:nvPr/>
+        </p:nvSpPr>
+        <p:spPr>
+          <a:xfrm>
+            <a:off x="8229600" y="2761488"/>
+            <a:ext cx="329184" cy="256032"/>
+          </a:xfrm>
+          <a:prstGeom prst="rect">
+            <a:avLst/>
+          </a:prstGeom>
+          <a:solidFill>
+            <a:srgbClr val="16A34A"/>
+          </a:solidFill>
+          <a:ln/>
+        </p:spPr>
+      </p:sp>
+      <p:sp>
+        <p:nvSpPr>
+          <p:cNvPr id="12" name="Text 9"/>
+          <p:cNvSpPr txBox="1"/>
+          <p:nvPr/>
+        </p:nvSpPr>
+        <p:spPr>
+          <a:xfrm>
+            <a:off x="8686800" y="2697480"/>
+            <a:ext cx="3017520" cy="384048"/>
+          </a:xfrm>
+          <a:prstGeom prst="rect">
+            <a:avLst/>
+          </a:prstGeom>
+          <a:noFill/>
+          <a:ln/>
+        </p:spPr>
+        <p:txBody>
+          <a:bodyPr wrap="square" lIns="0" tIns="0" rIns="0" bIns="0" rtlCol="0" anchor="ctr"/>
+          <a:lstStyle/>
+          <a:p>
+            <a:pPr indent="0" marL="0">
+              <a:buNone/>
             </a:pPr>
             <a:r>
               <a:rPr lang="en-US" sz="1200" dirty="0">
@@ -18743,17 +20113,55 @@
                 <a:ea typeface="Calibri" pitchFamily="34" charset="-122"/>
                 <a:cs typeface="Calibri" pitchFamily="34" charset="-120"/>
               </a:rPr>
-              <a:t>Проезд 6 м сохраняется — машины больше не стоят на нём</a:t>
+              <a:t>У газона д. 22 — 42</a:t>
             </a:r>
             <a:endParaRPr lang="en-US" sz="1200" dirty="0"/>
           </a:p>
-          <a:p>
-            <a:pPr marL="342900" indent="-342900">
-              <a:spcAft>
-                <a:spcPts val="600"/>
-              </a:spcAft>
-              <a:buSzPct val="100000"/>
-              <a:buChar char="•"/>
+        </p:txBody>
+      </p:sp>
+      <p:sp>
+        <p:nvSpPr>
+          <p:cNvPr id="13" name="Shape 10"/>
+          <p:cNvSpPr/>
+          <p:nvPr/>
+        </p:nvSpPr>
+        <p:spPr>
+          <a:xfrm>
+            <a:off x="8229600" y="3218688"/>
+            <a:ext cx="329184" cy="256032"/>
+          </a:xfrm>
+          <a:prstGeom prst="rect">
+            <a:avLst/>
+          </a:prstGeom>
+          <a:solidFill>
+            <a:srgbClr val="9333EA"/>
+          </a:solidFill>
+          <a:ln/>
+        </p:spPr>
+      </p:sp>
+      <p:sp>
+        <p:nvSpPr>
+          <p:cNvPr id="14" name="Text 11"/>
+          <p:cNvSpPr txBox="1"/>
+          <p:nvPr/>
+        </p:nvSpPr>
+        <p:spPr>
+          <a:xfrm>
+            <a:off x="8686800" y="3154680"/>
+            <a:ext cx="3017520" cy="384048"/>
+          </a:xfrm>
+          <a:prstGeom prst="rect">
+            <a:avLst/>
+          </a:prstGeom>
+          <a:noFill/>
+          <a:ln/>
+        </p:spPr>
+        <p:txBody>
+          <a:bodyPr wrap="square" lIns="0" tIns="0" rIns="0" bIns="0" rtlCol="0" anchor="ctr"/>
+          <a:lstStyle/>
+          <a:p>
+            <a:pPr indent="0" marL="0">
+              <a:buNone/>
             </a:pPr>
             <a:r>
               <a:rPr lang="en-US" sz="1200" dirty="0">
@@ -18764,7 +20172,7 @@
                 <a:ea typeface="Calibri" pitchFamily="34" charset="-122"/>
                 <a:cs typeface="Calibri" pitchFamily="34" charset="-120"/>
               </a:rPr>
-              <a:t>Масштаб по снимку Яндекс Карт: 1 px ≈ 0,3 м</a:t>
+              <a:t>У западного въезда — 9</a:t>
             </a:r>
             <a:endParaRPr lang="en-US" sz="1200" dirty="0"/>
           </a:p>
@@ -18772,7 +20180,231 @@
       </p:sp>
       <p:sp>
         <p:nvSpPr>
+          <p:cNvPr id="15" name="Shape 12"/>
+          <p:cNvSpPr/>
+          <p:nvPr/>
+        </p:nvSpPr>
+        <p:spPr>
+          <a:xfrm>
+            <a:off x="8229600" y="3675888"/>
+            <a:ext cx="329184" cy="256032"/>
+          </a:xfrm>
+          <a:prstGeom prst="rect">
+            <a:avLst/>
+          </a:prstGeom>
+          <a:solidFill>
+            <a:srgbClr val="2563EB"/>
+          </a:solidFill>
+          <a:ln/>
+        </p:spPr>
+      </p:sp>
+      <p:sp>
+        <p:nvSpPr>
           <p:cNvPr id="16" name="Text 13"/>
+          <p:cNvSpPr txBox="1"/>
+          <p:nvPr/>
+        </p:nvSpPr>
+        <p:spPr>
+          <a:xfrm>
+            <a:off x="8686800" y="3611880"/>
+            <a:ext cx="3017520" cy="384048"/>
+          </a:xfrm>
+          <a:prstGeom prst="rect">
+            <a:avLst/>
+          </a:prstGeom>
+          <a:noFill/>
+          <a:ln/>
+        </p:spPr>
+        <p:txBody>
+          <a:bodyPr wrap="square" lIns="0" tIns="0" rIns="0" bIns="0" rtlCol="0" anchor="ctr"/>
+          <a:lstStyle/>
+          <a:p>
+            <a:pPr indent="0" marL="0">
+              <a:buNone/>
+            </a:pPr>
+            <a:r>
+              <a:rPr lang="en-US" sz="1200" dirty="0">
+                <a:solidFill>
+                  <a:srgbClr val="1F2937"/>
+                </a:solidFill>
+                <a:latin typeface="Calibri" pitchFamily="34" charset="0"/>
+                <a:ea typeface="Calibri" pitchFamily="34" charset="-122"/>
+                <a:cs typeface="Calibri" pitchFamily="34" charset="-120"/>
+              </a:rPr>
+              <a:t>Для МГН (в ряду у фасада)</a:t>
+            </a:r>
+            <a:endParaRPr lang="en-US" sz="1200" dirty="0"/>
+          </a:p>
+        </p:txBody>
+      </p:sp>
+      <p:sp>
+        <p:nvSpPr>
+          <p:cNvPr id="17" name="Shape 14"/>
+          <p:cNvSpPr/>
+          <p:nvPr/>
+        </p:nvSpPr>
+        <p:spPr>
+          <a:xfrm>
+            <a:off x="8229600" y="4133088"/>
+            <a:ext cx="329184" cy="256032"/>
+          </a:xfrm>
+          <a:prstGeom prst="rect">
+            <a:avLst/>
+          </a:prstGeom>
+          <a:solidFill>
+            <a:srgbClr val="DC2626"/>
+          </a:solidFill>
+          <a:ln/>
+        </p:spPr>
+      </p:sp>
+      <p:sp>
+        <p:nvSpPr>
+          <p:cNvPr id="18" name="Text 15"/>
+          <p:cNvSpPr txBox="1"/>
+          <p:nvPr/>
+        </p:nvSpPr>
+        <p:spPr>
+          <a:xfrm>
+            <a:off x="8686800" y="4069080"/>
+            <a:ext cx="3017520" cy="384048"/>
+          </a:xfrm>
+          <a:prstGeom prst="rect">
+            <a:avLst/>
+          </a:prstGeom>
+          <a:noFill/>
+          <a:ln/>
+        </p:spPr>
+        <p:txBody>
+          <a:bodyPr wrap="square" lIns="0" tIns="0" rIns="0" bIns="0" rtlCol="0" anchor="ctr"/>
+          <a:lstStyle/>
+          <a:p>
+            <a:pPr indent="0" marL="0">
+              <a:buNone/>
+            </a:pPr>
+            <a:r>
+              <a:rPr lang="en-US" sz="1200" dirty="0">
+                <a:solidFill>
+                  <a:srgbClr val="1F2937"/>
+                </a:solidFill>
+                <a:latin typeface="Calibri" pitchFamily="34" charset="0"/>
+                <a:ea typeface="Calibri" pitchFamily="34" charset="-122"/>
+                <a:cs typeface="Calibri" pitchFamily="34" charset="-120"/>
+              </a:rPr>
+              <a:t>Новый шлагбаум (восточный въезд)</a:t>
+            </a:r>
+            <a:endParaRPr lang="en-US" sz="1200" dirty="0"/>
+          </a:p>
+        </p:txBody>
+      </p:sp>
+      <p:sp>
+        <p:nvSpPr>
+          <p:cNvPr id="19" name="Text 16"/>
+          <p:cNvSpPr txBox="1"/>
+          <p:nvPr/>
+        </p:nvSpPr>
+        <p:spPr>
+          <a:xfrm>
+            <a:off x="8229600" y="4617720"/>
+            <a:ext cx="3383280" cy="1645920"/>
+          </a:xfrm>
+          <a:prstGeom prst="rect">
+            <a:avLst/>
+          </a:prstGeom>
+          <a:noFill/>
+          <a:ln/>
+        </p:spPr>
+        <p:txBody>
+          <a:bodyPr wrap="square" lIns="0" tIns="0" rIns="0" bIns="0" rtlCol="0" anchor="t"/>
+          <a:lstStyle/>
+          <a:p>
+            <a:pPr marL="342900" indent="-342900">
+              <a:spcAft>
+                <a:spcPts val="400"/>
+              </a:spcAft>
+              <a:buSzPct val="100000"/>
+              <a:buChar char="•"/>
+            </a:pPr>
+            <a:r>
+              <a:rPr lang="en-US" sz="1200" dirty="0">
+                <a:solidFill>
+                  <a:srgbClr val="1F2937"/>
+                </a:solidFill>
+                <a:latin typeface="Calibri" pitchFamily="34" charset="0"/>
+                <a:ea typeface="Calibri" pitchFamily="34" charset="-122"/>
+                <a:cs typeface="Calibri" pitchFamily="34" charset="-120"/>
+              </a:rPr>
+              <a:t>Места 2,5 × 5 м, перпендикулярно проезду</a:t>
+            </a:r>
+            <a:endParaRPr lang="en-US" sz="1200" dirty="0"/>
+          </a:p>
+          <a:p>
+            <a:pPr marL="342900" indent="-342900">
+              <a:spcAft>
+                <a:spcPts val="400"/>
+              </a:spcAft>
+              <a:buSzPct val="100000"/>
+              <a:buChar char="•"/>
+            </a:pPr>
+            <a:r>
+              <a:rPr lang="en-US" sz="1200" dirty="0">
+                <a:solidFill>
+                  <a:srgbClr val="1F2937"/>
+                </a:solidFill>
+                <a:latin typeface="Calibri" pitchFamily="34" charset="0"/>
+                <a:ea typeface="Calibri" pitchFamily="34" charset="-122"/>
+                <a:cs typeface="Calibri" pitchFamily="34" charset="-120"/>
+              </a:rPr>
+              <a:t>Проезды 6 м сохраняются</a:t>
+            </a:r>
+            <a:endParaRPr lang="en-US" sz="1200" dirty="0"/>
+          </a:p>
+          <a:p>
+            <a:pPr marL="342900" indent="-342900">
+              <a:spcAft>
+                <a:spcPts val="400"/>
+              </a:spcAft>
+              <a:buSzPct val="100000"/>
+              <a:buChar char="•"/>
+            </a:pPr>
+            <a:r>
+              <a:rPr lang="en-US" sz="1200" dirty="0">
+                <a:solidFill>
+                  <a:srgbClr val="1F2937"/>
+                </a:solidFill>
+                <a:latin typeface="Calibri" pitchFamily="34" charset="0"/>
+                <a:ea typeface="Calibri" pitchFamily="34" charset="-122"/>
+                <a:cs typeface="Calibri" pitchFamily="34" charset="-120"/>
+              </a:rPr>
+              <a:t>Площадь нового покрытия ≈ 1 340 м²</a:t>
+            </a:r>
+            <a:endParaRPr lang="en-US" sz="1200" dirty="0"/>
+          </a:p>
+          <a:p>
+            <a:pPr marL="342900" indent="-342900">
+              <a:spcAft>
+                <a:spcPts val="400"/>
+              </a:spcAft>
+              <a:buSzPct val="100000"/>
+              <a:buChar char="•"/>
+            </a:pPr>
+            <a:r>
+              <a:rPr lang="en-US" sz="1200" dirty="0">
+                <a:solidFill>
+                  <a:srgbClr val="1F2937"/>
+                </a:solidFill>
+                <a:latin typeface="Calibri" pitchFamily="34" charset="0"/>
+                <a:ea typeface="Calibri" pitchFamily="34" charset="-122"/>
+                <a:cs typeface="Calibri" pitchFamily="34" charset="-120"/>
+              </a:rPr>
+              <a:t>Размещение — по схеме заказчика</a:t>
+            </a:r>
+            <a:endParaRPr lang="en-US" sz="1200" dirty="0"/>
+          </a:p>
+        </p:txBody>
+      </p:sp>
+      <p:sp>
+        <p:nvSpPr>
+          <p:cNvPr id="20" name="Text 17"/>
           <p:cNvSpPr txBox="1"/>
           <p:nvPr/>
         </p:nvSpPr>
@@ -18803,7 +20435,7 @@
                 <a:ea typeface="Calibri" pitchFamily="34" charset="-122"/>
                 <a:cs typeface="Calibri" pitchFamily="34" charset="-120"/>
               </a:rPr>
-              <a:t>Подложка: спутниковый снимок Яндекс Карт. Схема — проектное предложение, требует геодезической съёмки и согласования с ОСС.</a:t>
+              <a:t>Подложка: Яндекс Карты. Масштаб 1 px ≈ 0,3 м. Схема — проектное предложение, требует геодезической съёмки и решения ОСС.</a:t>
             </a:r>
             <a:endParaRPr lang="en-US" sz="1000" dirty="0"/>
           </a:p>
